--- a/docs/plots/carbo/jx_carbo_linsubhr_ratio_hosp4.pptx
+++ b/docs/plots/carbo/jx_carbo_linsubhr_ratio_hosp4.pptx
@@ -3003,497 +3003,521 @@
           <p:spPr>
             <a:xfrm>
               <a:off x="817517" y="1896563"/>
-              <a:ext cx="7370972" cy="3649937"/>
+              <a:ext cx="7370972" cy="3623637"/>
             </a:xfrm>
             <a:custGeom>
               <a:avLst/>
               <a:pathLst>
-                <a:path w="7370972" h="3649937">
+                <a:path w="7370972" h="3623637">
                   <a:moveTo>
-                    <a:pt x="2395832" y="0"/>
+                    <a:pt x="1704559" y="0"/>
                   </a:moveTo>
                   <a:lnTo>
-                    <a:pt x="2402393" y="36379"/>
-                  </a:lnTo>
-                  <a:lnTo>
-                    <a:pt x="2480027" y="421031"/>
-                  </a:lnTo>
-                  <a:lnTo>
-                    <a:pt x="2557661" y="764769"/>
-                  </a:lnTo>
-                  <a:lnTo>
-                    <a:pt x="2635295" y="1071945"/>
-                  </a:lnTo>
-                  <a:lnTo>
-                    <a:pt x="2712930" y="1346447"/>
-                  </a:lnTo>
-                  <a:lnTo>
-                    <a:pt x="2790564" y="1591751"/>
-                  </a:lnTo>
-                  <a:lnTo>
-                    <a:pt x="2868198" y="1810963"/>
-                  </a:lnTo>
-                  <a:lnTo>
-                    <a:pt x="2945832" y="2006857"/>
-                  </a:lnTo>
-                  <a:lnTo>
-                    <a:pt x="3023466" y="2181915"/>
-                  </a:lnTo>
-                  <a:lnTo>
-                    <a:pt x="3101100" y="2338353"/>
-                  </a:lnTo>
-                  <a:lnTo>
-                    <a:pt x="3178734" y="2478150"/>
-                  </a:lnTo>
-                  <a:lnTo>
-                    <a:pt x="3256368" y="2603078"/>
-                  </a:lnTo>
-                  <a:lnTo>
-                    <a:pt x="3334002" y="2714718"/>
-                  </a:lnTo>
-                  <a:lnTo>
-                    <a:pt x="3411636" y="2789293"/>
-                  </a:lnTo>
-                  <a:lnTo>
-                    <a:pt x="3489270" y="2808287"/>
-                  </a:lnTo>
-                  <a:lnTo>
-                    <a:pt x="3566904" y="2826863"/>
-                  </a:lnTo>
-                  <a:lnTo>
-                    <a:pt x="3644538" y="2845031"/>
-                  </a:lnTo>
-                  <a:lnTo>
-                    <a:pt x="3722172" y="2862799"/>
-                  </a:lnTo>
-                  <a:lnTo>
-                    <a:pt x="3799806" y="2880176"/>
-                  </a:lnTo>
-                  <a:lnTo>
-                    <a:pt x="3877440" y="2897170"/>
-                  </a:lnTo>
-                  <a:lnTo>
-                    <a:pt x="3955074" y="2913791"/>
-                  </a:lnTo>
-                  <a:lnTo>
-                    <a:pt x="4032708" y="2930046"/>
-                  </a:lnTo>
-                  <a:lnTo>
-                    <a:pt x="4110342" y="2945944"/>
-                  </a:lnTo>
-                  <a:lnTo>
-                    <a:pt x="4187976" y="2961491"/>
-                  </a:lnTo>
-                  <a:lnTo>
-                    <a:pt x="4265610" y="2976697"/>
-                  </a:lnTo>
-                  <a:lnTo>
-                    <a:pt x="4343244" y="2991568"/>
-                  </a:lnTo>
-                  <a:lnTo>
-                    <a:pt x="4420879" y="3006112"/>
-                  </a:lnTo>
-                  <a:lnTo>
-                    <a:pt x="4498513" y="3020336"/>
-                  </a:lnTo>
-                  <a:lnTo>
-                    <a:pt x="4576147" y="3034247"/>
-                  </a:lnTo>
-                  <a:lnTo>
-                    <a:pt x="4653781" y="3047852"/>
-                  </a:lnTo>
-                  <a:lnTo>
-                    <a:pt x="4731415" y="3061158"/>
-                  </a:lnTo>
-                  <a:lnTo>
-                    <a:pt x="4809049" y="3074171"/>
-                  </a:lnTo>
-                  <a:lnTo>
-                    <a:pt x="4886683" y="3086897"/>
-                  </a:lnTo>
-                  <a:lnTo>
-                    <a:pt x="4964317" y="3099344"/>
-                  </a:lnTo>
-                  <a:lnTo>
-                    <a:pt x="5041951" y="3111517"/>
-                  </a:lnTo>
-                  <a:lnTo>
-                    <a:pt x="5119585" y="3123422"/>
-                  </a:lnTo>
-                  <a:lnTo>
-                    <a:pt x="5197219" y="3135065"/>
-                  </a:lnTo>
-                  <a:lnTo>
-                    <a:pt x="5274853" y="3146452"/>
-                  </a:lnTo>
-                  <a:lnTo>
-                    <a:pt x="5352487" y="3157588"/>
-                  </a:lnTo>
-                  <a:lnTo>
-                    <a:pt x="5430121" y="3168480"/>
-                  </a:lnTo>
-                  <a:lnTo>
-                    <a:pt x="5507755" y="3179132"/>
-                  </a:lnTo>
-                  <a:lnTo>
-                    <a:pt x="5585389" y="3189549"/>
-                  </a:lnTo>
-                  <a:lnTo>
-                    <a:pt x="5663023" y="3199737"/>
-                  </a:lnTo>
-                  <a:lnTo>
-                    <a:pt x="5740657" y="3209701"/>
-                  </a:lnTo>
-                  <a:lnTo>
-                    <a:pt x="5818291" y="3219446"/>
-                  </a:lnTo>
-                  <a:lnTo>
-                    <a:pt x="5895925" y="3228977"/>
-                  </a:lnTo>
-                  <a:lnTo>
-                    <a:pt x="5973559" y="3238298"/>
-                  </a:lnTo>
-                  <a:lnTo>
-                    <a:pt x="6051193" y="3247414"/>
-                  </a:lnTo>
-                  <a:lnTo>
-                    <a:pt x="6128827" y="3256329"/>
-                  </a:lnTo>
-                  <a:lnTo>
-                    <a:pt x="6206462" y="3265048"/>
-                  </a:lnTo>
-                  <a:lnTo>
-                    <a:pt x="6284096" y="3273575"/>
-                  </a:lnTo>
-                  <a:lnTo>
-                    <a:pt x="6361730" y="3281915"/>
-                  </a:lnTo>
-                  <a:lnTo>
-                    <a:pt x="6439364" y="3290071"/>
-                  </a:lnTo>
-                  <a:lnTo>
-                    <a:pt x="6516998" y="3298048"/>
-                  </a:lnTo>
-                  <a:lnTo>
-                    <a:pt x="6594632" y="3305849"/>
-                  </a:lnTo>
-                  <a:lnTo>
-                    <a:pt x="6672266" y="3313479"/>
-                  </a:lnTo>
-                  <a:lnTo>
-                    <a:pt x="6749900" y="3320940"/>
-                  </a:lnTo>
-                  <a:lnTo>
-                    <a:pt x="6827534" y="3328238"/>
-                  </a:lnTo>
-                  <a:lnTo>
-                    <a:pt x="6905168" y="3335375"/>
-                  </a:lnTo>
-                  <a:lnTo>
-                    <a:pt x="6982802" y="3342355"/>
-                  </a:lnTo>
-                  <a:lnTo>
-                    <a:pt x="7060436" y="3349182"/>
-                  </a:lnTo>
-                  <a:lnTo>
-                    <a:pt x="7138070" y="3355858"/>
-                  </a:lnTo>
-                  <a:lnTo>
-                    <a:pt x="7215704" y="3362387"/>
-                  </a:lnTo>
-                  <a:lnTo>
-                    <a:pt x="7293338" y="3368773"/>
-                  </a:lnTo>
-                  <a:lnTo>
-                    <a:pt x="7370972" y="3375018"/>
-                  </a:lnTo>
-                  <a:lnTo>
-                    <a:pt x="7370972" y="3649937"/>
-                  </a:lnTo>
-                  <a:lnTo>
-                    <a:pt x="7293338" y="3649614"/>
-                  </a:lnTo>
-                  <a:lnTo>
-                    <a:pt x="7215704" y="3649254"/>
-                  </a:lnTo>
-                  <a:lnTo>
-                    <a:pt x="7138070" y="3648850"/>
-                  </a:lnTo>
-                  <a:lnTo>
-                    <a:pt x="7060436" y="3648399"/>
-                  </a:lnTo>
-                  <a:lnTo>
-                    <a:pt x="6982802" y="3647894"/>
-                  </a:lnTo>
-                  <a:lnTo>
-                    <a:pt x="6905168" y="3647329"/>
-                  </a:lnTo>
-                  <a:lnTo>
-                    <a:pt x="6827534" y="3646696"/>
-                  </a:lnTo>
-                  <a:lnTo>
-                    <a:pt x="6749900" y="3645988"/>
-                  </a:lnTo>
-                  <a:lnTo>
-                    <a:pt x="6672266" y="3645196"/>
-                  </a:lnTo>
-                  <a:lnTo>
-                    <a:pt x="6594632" y="3644309"/>
-                  </a:lnTo>
-                  <a:lnTo>
-                    <a:pt x="6516998" y="3643317"/>
-                  </a:lnTo>
-                  <a:lnTo>
-                    <a:pt x="6439364" y="3642207"/>
-                  </a:lnTo>
-                  <a:lnTo>
-                    <a:pt x="6361730" y="3640965"/>
-                  </a:lnTo>
-                  <a:lnTo>
-                    <a:pt x="6284096" y="3639575"/>
-                  </a:lnTo>
-                  <a:lnTo>
-                    <a:pt x="6206462" y="3638020"/>
-                  </a:lnTo>
-                  <a:lnTo>
-                    <a:pt x="6128827" y="3636279"/>
-                  </a:lnTo>
-                  <a:lnTo>
-                    <a:pt x="6051193" y="3634331"/>
-                  </a:lnTo>
-                  <a:lnTo>
-                    <a:pt x="5973559" y="3632152"/>
-                  </a:lnTo>
-                  <a:lnTo>
-                    <a:pt x="5895925" y="3629713"/>
-                  </a:lnTo>
-                  <a:lnTo>
-                    <a:pt x="5818291" y="3626983"/>
-                  </a:lnTo>
-                  <a:lnTo>
-                    <a:pt x="5740657" y="3623929"/>
-                  </a:lnTo>
-                  <a:lnTo>
-                    <a:pt x="5663023" y="3620511"/>
-                  </a:lnTo>
-                  <a:lnTo>
-                    <a:pt x="5585389" y="3616687"/>
-                  </a:lnTo>
-                  <a:lnTo>
-                    <a:pt x="5507755" y="3612407"/>
-                  </a:lnTo>
-                  <a:lnTo>
-                    <a:pt x="5430121" y="3607617"/>
-                  </a:lnTo>
-                  <a:lnTo>
-                    <a:pt x="5352487" y="3602258"/>
-                  </a:lnTo>
-                  <a:lnTo>
-                    <a:pt x="5274853" y="3596261"/>
-                  </a:lnTo>
-                  <a:lnTo>
-                    <a:pt x="5197219" y="3589550"/>
-                  </a:lnTo>
-                  <a:lnTo>
-                    <a:pt x="5119585" y="3582040"/>
-                  </a:lnTo>
-                  <a:lnTo>
-                    <a:pt x="5041951" y="3573636"/>
-                  </a:lnTo>
-                  <a:lnTo>
-                    <a:pt x="4964317" y="3564232"/>
-                  </a:lnTo>
-                  <a:lnTo>
-                    <a:pt x="4886683" y="3553709"/>
-                  </a:lnTo>
-                  <a:lnTo>
-                    <a:pt x="4809049" y="3541933"/>
-                  </a:lnTo>
-                  <a:lnTo>
-                    <a:pt x="4731415" y="3528755"/>
-                  </a:lnTo>
-                  <a:lnTo>
-                    <a:pt x="4653781" y="3514009"/>
-                  </a:lnTo>
-                  <a:lnTo>
-                    <a:pt x="4576147" y="3497507"/>
-                  </a:lnTo>
-                  <a:lnTo>
-                    <a:pt x="4498513" y="3479042"/>
-                  </a:lnTo>
-                  <a:lnTo>
-                    <a:pt x="4420879" y="3458378"/>
-                  </a:lnTo>
-                  <a:lnTo>
-                    <a:pt x="4343244" y="3435255"/>
-                  </a:lnTo>
-                  <a:lnTo>
-                    <a:pt x="4265610" y="3409380"/>
-                  </a:lnTo>
-                  <a:lnTo>
-                    <a:pt x="4187976" y="3380425"/>
-                  </a:lnTo>
-                  <a:lnTo>
-                    <a:pt x="4110342" y="3348023"/>
-                  </a:lnTo>
-                  <a:lnTo>
-                    <a:pt x="4032708" y="3311765"/>
-                  </a:lnTo>
-                  <a:lnTo>
-                    <a:pt x="3955074" y="3271191"/>
-                  </a:lnTo>
-                  <a:lnTo>
-                    <a:pt x="3877440" y="3225787"/>
-                  </a:lnTo>
-                  <a:lnTo>
-                    <a:pt x="3799806" y="3174979"/>
-                  </a:lnTo>
-                  <a:lnTo>
-                    <a:pt x="3722172" y="3118124"/>
-                  </a:lnTo>
-                  <a:lnTo>
-                    <a:pt x="3644538" y="3054501"/>
-                  </a:lnTo>
-                  <a:lnTo>
-                    <a:pt x="3566904" y="2983305"/>
-                  </a:lnTo>
-                  <a:lnTo>
-                    <a:pt x="3489270" y="2903635"/>
-                  </a:lnTo>
-                  <a:lnTo>
-                    <a:pt x="3411636" y="2814482"/>
-                  </a:lnTo>
-                  <a:lnTo>
-                    <a:pt x="3334002" y="2769872"/>
-                  </a:lnTo>
-                  <a:lnTo>
-                    <a:pt x="3256368" y="2750014"/>
-                  </a:lnTo>
-                  <a:lnTo>
-                    <a:pt x="3178734" y="2729709"/>
-                  </a:lnTo>
-                  <a:lnTo>
-                    <a:pt x="3101100" y="2708947"/>
-                  </a:lnTo>
-                  <a:lnTo>
-                    <a:pt x="3023466" y="2687718"/>
-                  </a:lnTo>
-                  <a:lnTo>
-                    <a:pt x="2945832" y="2666012"/>
-                  </a:lnTo>
-                  <a:lnTo>
-                    <a:pt x="2868198" y="2643817"/>
-                  </a:lnTo>
-                  <a:lnTo>
-                    <a:pt x="2790564" y="2621123"/>
-                  </a:lnTo>
-                  <a:lnTo>
-                    <a:pt x="2712930" y="2597919"/>
-                  </a:lnTo>
-                  <a:lnTo>
-                    <a:pt x="2635295" y="2574192"/>
-                  </a:lnTo>
-                  <a:lnTo>
-                    <a:pt x="2557661" y="2549932"/>
-                  </a:lnTo>
-                  <a:lnTo>
-                    <a:pt x="2480027" y="2525126"/>
-                  </a:lnTo>
-                  <a:lnTo>
-                    <a:pt x="2402393" y="2499762"/>
-                  </a:lnTo>
-                  <a:lnTo>
-                    <a:pt x="2324759" y="2473828"/>
-                  </a:lnTo>
-                  <a:lnTo>
-                    <a:pt x="2247125" y="2447310"/>
-                  </a:lnTo>
-                  <a:lnTo>
-                    <a:pt x="2169491" y="2420196"/>
-                  </a:lnTo>
-                  <a:lnTo>
-                    <a:pt x="2091857" y="2392471"/>
-                  </a:lnTo>
-                  <a:lnTo>
-                    <a:pt x="2014223" y="2364123"/>
-                  </a:lnTo>
-                  <a:lnTo>
-                    <a:pt x="1936589" y="2335138"/>
-                  </a:lnTo>
-                  <a:lnTo>
-                    <a:pt x="1858955" y="2305500"/>
-                  </a:lnTo>
-                  <a:lnTo>
-                    <a:pt x="1781321" y="2275195"/>
-                  </a:lnTo>
-                  <a:lnTo>
-                    <a:pt x="1703687" y="2244209"/>
-                  </a:lnTo>
-                  <a:lnTo>
-                    <a:pt x="1626053" y="2212526"/>
-                  </a:lnTo>
-                  <a:lnTo>
-                    <a:pt x="1548419" y="2180130"/>
-                  </a:lnTo>
-                  <a:lnTo>
-                    <a:pt x="1470785" y="2147005"/>
-                  </a:lnTo>
-                  <a:lnTo>
-                    <a:pt x="1393151" y="2113136"/>
-                  </a:lnTo>
-                  <a:lnTo>
-                    <a:pt x="1315517" y="2078504"/>
-                  </a:lnTo>
-                  <a:lnTo>
-                    <a:pt x="1237883" y="2043093"/>
-                  </a:lnTo>
-                  <a:lnTo>
-                    <a:pt x="1160249" y="2006886"/>
-                  </a:lnTo>
-                  <a:lnTo>
-                    <a:pt x="1082615" y="1969864"/>
-                  </a:lnTo>
-                  <a:lnTo>
-                    <a:pt x="1004981" y="1932009"/>
-                  </a:lnTo>
-                  <a:lnTo>
-                    <a:pt x="927346" y="1893303"/>
-                  </a:lnTo>
-                  <a:lnTo>
-                    <a:pt x="849712" y="1853726"/>
-                  </a:lnTo>
-                  <a:lnTo>
-                    <a:pt x="772078" y="1813258"/>
-                  </a:lnTo>
-                  <a:lnTo>
-                    <a:pt x="694444" y="1771881"/>
-                  </a:lnTo>
-                  <a:lnTo>
-                    <a:pt x="616810" y="1729572"/>
-                  </a:lnTo>
-                  <a:lnTo>
-                    <a:pt x="539176" y="1686312"/>
-                  </a:lnTo>
-                  <a:lnTo>
-                    <a:pt x="461542" y="1642079"/>
-                  </a:lnTo>
-                  <a:lnTo>
-                    <a:pt x="383908" y="1596850"/>
-                  </a:lnTo>
-                  <a:lnTo>
-                    <a:pt x="306274" y="1550605"/>
-                  </a:lnTo>
-                  <a:lnTo>
-                    <a:pt x="228640" y="1503319"/>
-                  </a:lnTo>
-                  <a:lnTo>
-                    <a:pt x="151006" y="1454969"/>
-                  </a:lnTo>
-                  <a:lnTo>
-                    <a:pt x="73372" y="1405531"/>
-                  </a:lnTo>
-                  <a:lnTo>
-                    <a:pt x="0" y="1357757"/>
+                    <a:pt x="1781321" y="231690"/>
+                  </a:lnTo>
+                  <a:lnTo>
+                    <a:pt x="1858955" y="450991"/>
+                  </a:lnTo>
+                  <a:lnTo>
+                    <a:pt x="1936589" y="656234"/>
+                  </a:lnTo>
+                  <a:lnTo>
+                    <a:pt x="2014223" y="848319"/>
+                  </a:lnTo>
+                  <a:lnTo>
+                    <a:pt x="2091857" y="1028091"/>
+                  </a:lnTo>
+                  <a:lnTo>
+                    <a:pt x="2169491" y="1196339"/>
+                  </a:lnTo>
+                  <a:lnTo>
+                    <a:pt x="2247125" y="1353801"/>
+                  </a:lnTo>
+                  <a:lnTo>
+                    <a:pt x="2324759" y="1501169"/>
+                  </a:lnTo>
+                  <a:lnTo>
+                    <a:pt x="2402393" y="1639090"/>
+                  </a:lnTo>
+                  <a:lnTo>
+                    <a:pt x="2480027" y="1768169"/>
+                  </a:lnTo>
+                  <a:lnTo>
+                    <a:pt x="2557661" y="1888974"/>
+                  </a:lnTo>
+                  <a:lnTo>
+                    <a:pt x="2635295" y="2002035"/>
+                  </a:lnTo>
+                  <a:lnTo>
+                    <a:pt x="2712930" y="2107847"/>
+                  </a:lnTo>
+                  <a:lnTo>
+                    <a:pt x="2790564" y="2206877"/>
+                  </a:lnTo>
+                  <a:lnTo>
+                    <a:pt x="2868198" y="2299558"/>
+                  </a:lnTo>
+                  <a:lnTo>
+                    <a:pt x="2945832" y="2386298"/>
+                  </a:lnTo>
+                  <a:lnTo>
+                    <a:pt x="3023466" y="2467477"/>
+                  </a:lnTo>
+                  <a:lnTo>
+                    <a:pt x="3101100" y="2543453"/>
+                  </a:lnTo>
+                  <a:lnTo>
+                    <a:pt x="3178734" y="2614558"/>
+                  </a:lnTo>
+                  <a:lnTo>
+                    <a:pt x="3256368" y="2681105"/>
+                  </a:lnTo>
+                  <a:lnTo>
+                    <a:pt x="3334002" y="2743385"/>
+                  </a:lnTo>
+                  <a:lnTo>
+                    <a:pt x="3411636" y="2783680"/>
+                  </a:lnTo>
+                  <a:lnTo>
+                    <a:pt x="3489270" y="2785853"/>
+                  </a:lnTo>
+                  <a:lnTo>
+                    <a:pt x="3566904" y="2788019"/>
+                  </a:lnTo>
+                  <a:lnTo>
+                    <a:pt x="3644538" y="2790181"/>
+                  </a:lnTo>
+                  <a:lnTo>
+                    <a:pt x="3722172" y="2792337"/>
+                  </a:lnTo>
+                  <a:lnTo>
+                    <a:pt x="3799806" y="2794487"/>
+                  </a:lnTo>
+                  <a:lnTo>
+                    <a:pt x="3877440" y="2796632"/>
+                  </a:lnTo>
+                  <a:lnTo>
+                    <a:pt x="3955074" y="2798772"/>
+                  </a:lnTo>
+                  <a:lnTo>
+                    <a:pt x="4032708" y="2800906"/>
+                  </a:lnTo>
+                  <a:lnTo>
+                    <a:pt x="4110342" y="2803036"/>
+                  </a:lnTo>
+                  <a:lnTo>
+                    <a:pt x="4187976" y="2805159"/>
+                  </a:lnTo>
+                  <a:lnTo>
+                    <a:pt x="4265610" y="2807278"/>
+                  </a:lnTo>
+                  <a:lnTo>
+                    <a:pt x="4343244" y="2809391"/>
+                  </a:lnTo>
+                  <a:lnTo>
+                    <a:pt x="4420879" y="2811499"/>
+                  </a:lnTo>
+                  <a:lnTo>
+                    <a:pt x="4498513" y="2813602"/>
+                  </a:lnTo>
+                  <a:lnTo>
+                    <a:pt x="4576147" y="2815699"/>
+                  </a:lnTo>
+                  <a:lnTo>
+                    <a:pt x="4653781" y="2817791"/>
+                  </a:lnTo>
+                  <a:lnTo>
+                    <a:pt x="4731415" y="2819878"/>
+                  </a:lnTo>
+                  <a:lnTo>
+                    <a:pt x="4809049" y="2821960"/>
+                  </a:lnTo>
+                  <a:lnTo>
+                    <a:pt x="4886683" y="2824036"/>
+                  </a:lnTo>
+                  <a:lnTo>
+                    <a:pt x="4964317" y="2826108"/>
+                  </a:lnTo>
+                  <a:lnTo>
+                    <a:pt x="5041951" y="2828174"/>
+                  </a:lnTo>
+                  <a:lnTo>
+                    <a:pt x="5119585" y="2830235"/>
+                  </a:lnTo>
+                  <a:lnTo>
+                    <a:pt x="5197219" y="2832290"/>
+                  </a:lnTo>
+                  <a:lnTo>
+                    <a:pt x="5274853" y="2834341"/>
+                  </a:lnTo>
+                  <a:lnTo>
+                    <a:pt x="5352487" y="2836387"/>
+                  </a:lnTo>
+                  <a:lnTo>
+                    <a:pt x="5430121" y="2838427"/>
+                  </a:lnTo>
+                  <a:lnTo>
+                    <a:pt x="5507755" y="2840462"/>
+                  </a:lnTo>
+                  <a:lnTo>
+                    <a:pt x="5585389" y="2842493"/>
+                  </a:lnTo>
+                  <a:lnTo>
+                    <a:pt x="5663023" y="2844518"/>
+                  </a:lnTo>
+                  <a:lnTo>
+                    <a:pt x="5740657" y="2846538"/>
+                  </a:lnTo>
+                  <a:lnTo>
+                    <a:pt x="5818291" y="2848553"/>
+                  </a:lnTo>
+                  <a:lnTo>
+                    <a:pt x="5895925" y="2850563"/>
+                  </a:lnTo>
+                  <a:lnTo>
+                    <a:pt x="5973559" y="2852568"/>
+                  </a:lnTo>
+                  <a:lnTo>
+                    <a:pt x="6051193" y="2854568"/>
+                  </a:lnTo>
+                  <a:lnTo>
+                    <a:pt x="6128827" y="2856563"/>
+                  </a:lnTo>
+                  <a:lnTo>
+                    <a:pt x="6206462" y="2858553"/>
+                  </a:lnTo>
+                  <a:lnTo>
+                    <a:pt x="6284096" y="2860538"/>
+                  </a:lnTo>
+                  <a:lnTo>
+                    <a:pt x="6361730" y="2862518"/>
+                  </a:lnTo>
+                  <a:lnTo>
+                    <a:pt x="6439364" y="2864493"/>
+                  </a:lnTo>
+                  <a:lnTo>
+                    <a:pt x="6516998" y="2866463"/>
+                  </a:lnTo>
+                  <a:lnTo>
+                    <a:pt x="6594632" y="2868428"/>
+                  </a:lnTo>
+                  <a:lnTo>
+                    <a:pt x="6672266" y="2870389"/>
+                  </a:lnTo>
+                  <a:lnTo>
+                    <a:pt x="6749900" y="2872344"/>
+                  </a:lnTo>
+                  <a:lnTo>
+                    <a:pt x="6827534" y="2874295"/>
+                  </a:lnTo>
+                  <a:lnTo>
+                    <a:pt x="6905168" y="2876240"/>
+                  </a:lnTo>
+                  <a:lnTo>
+                    <a:pt x="6982802" y="2878181"/>
+                  </a:lnTo>
+                  <a:lnTo>
+                    <a:pt x="7060436" y="2880117"/>
+                  </a:lnTo>
+                  <a:lnTo>
+                    <a:pt x="7138070" y="2882048"/>
+                  </a:lnTo>
+                  <a:lnTo>
+                    <a:pt x="7215704" y="2883975"/>
+                  </a:lnTo>
+                  <a:lnTo>
+                    <a:pt x="7293338" y="2885896"/>
+                  </a:lnTo>
+                  <a:lnTo>
+                    <a:pt x="7370972" y="2887813"/>
+                  </a:lnTo>
+                  <a:lnTo>
+                    <a:pt x="7370972" y="3623637"/>
+                  </a:lnTo>
+                  <a:lnTo>
+                    <a:pt x="7293338" y="3621650"/>
+                  </a:lnTo>
+                  <a:lnTo>
+                    <a:pt x="7215704" y="3619527"/>
+                  </a:lnTo>
+                  <a:lnTo>
+                    <a:pt x="7138070" y="3617259"/>
+                  </a:lnTo>
+                  <a:lnTo>
+                    <a:pt x="7060436" y="3614835"/>
+                  </a:lnTo>
+                  <a:lnTo>
+                    <a:pt x="6982802" y="3612246"/>
+                  </a:lnTo>
+                  <a:lnTo>
+                    <a:pt x="6905168" y="3609479"/>
+                  </a:lnTo>
+                  <a:lnTo>
+                    <a:pt x="6827534" y="3606522"/>
+                  </a:lnTo>
+                  <a:lnTo>
+                    <a:pt x="6749900" y="3603363"/>
+                  </a:lnTo>
+                  <a:lnTo>
+                    <a:pt x="6672266" y="3599987"/>
+                  </a:lnTo>
+                  <a:lnTo>
+                    <a:pt x="6594632" y="3596381"/>
+                  </a:lnTo>
+                  <a:lnTo>
+                    <a:pt x="6516998" y="3592527"/>
+                  </a:lnTo>
+                  <a:lnTo>
+                    <a:pt x="6439364" y="3588409"/>
+                  </a:lnTo>
+                  <a:lnTo>
+                    <a:pt x="6361730" y="3584009"/>
+                  </a:lnTo>
+                  <a:lnTo>
+                    <a:pt x="6284096" y="3579308"/>
+                  </a:lnTo>
+                  <a:lnTo>
+                    <a:pt x="6206462" y="3574285"/>
+                  </a:lnTo>
+                  <a:lnTo>
+                    <a:pt x="6128827" y="3568918"/>
+                  </a:lnTo>
+                  <a:lnTo>
+                    <a:pt x="6051193" y="3563183"/>
+                  </a:lnTo>
+                  <a:lnTo>
+                    <a:pt x="5973559" y="3557055"/>
+                  </a:lnTo>
+                  <a:lnTo>
+                    <a:pt x="5895925" y="3550507"/>
+                  </a:lnTo>
+                  <a:lnTo>
+                    <a:pt x="5818291" y="3543512"/>
+                  </a:lnTo>
+                  <a:lnTo>
+                    <a:pt x="5740657" y="3536036"/>
+                  </a:lnTo>
+                  <a:lnTo>
+                    <a:pt x="5663023" y="3528049"/>
+                  </a:lnTo>
+                  <a:lnTo>
+                    <a:pt x="5585389" y="3519515"/>
+                  </a:lnTo>
+                  <a:lnTo>
+                    <a:pt x="5507755" y="3510396"/>
+                  </a:lnTo>
+                  <a:lnTo>
+                    <a:pt x="5430121" y="3500653"/>
+                  </a:lnTo>
+                  <a:lnTo>
+                    <a:pt x="5352487" y="3490242"/>
+                  </a:lnTo>
+                  <a:lnTo>
+                    <a:pt x="5274853" y="3479118"/>
+                  </a:lnTo>
+                  <a:lnTo>
+                    <a:pt x="5197219" y="3467232"/>
+                  </a:lnTo>
+                  <a:lnTo>
+                    <a:pt x="5119585" y="3454533"/>
+                  </a:lnTo>
+                  <a:lnTo>
+                    <a:pt x="5041951" y="3440963"/>
+                  </a:lnTo>
+                  <a:lnTo>
+                    <a:pt x="4964317" y="3426463"/>
+                  </a:lnTo>
+                  <a:lnTo>
+                    <a:pt x="4886683" y="3410971"/>
+                  </a:lnTo>
+                  <a:lnTo>
+                    <a:pt x="4809049" y="3394417"/>
+                  </a:lnTo>
+                  <a:lnTo>
+                    <a:pt x="4731415" y="3376730"/>
+                  </a:lnTo>
+                  <a:lnTo>
+                    <a:pt x="4653781" y="3357831"/>
+                  </a:lnTo>
+                  <a:lnTo>
+                    <a:pt x="4576147" y="3337637"/>
+                  </a:lnTo>
+                  <a:lnTo>
+                    <a:pt x="4498513" y="3316060"/>
+                  </a:lnTo>
+                  <a:lnTo>
+                    <a:pt x="4420879" y="3293006"/>
+                  </a:lnTo>
+                  <a:lnTo>
+                    <a:pt x="4343244" y="3268372"/>
+                  </a:lnTo>
+                  <a:lnTo>
+                    <a:pt x="4265610" y="3242051"/>
+                  </a:lnTo>
+                  <a:lnTo>
+                    <a:pt x="4187976" y="3213927"/>
+                  </a:lnTo>
+                  <a:lnTo>
+                    <a:pt x="4110342" y="3183876"/>
+                  </a:lnTo>
+                  <a:lnTo>
+                    <a:pt x="4032708" y="3151767"/>
+                  </a:lnTo>
+                  <a:lnTo>
+                    <a:pt x="3955074" y="3117459"/>
+                  </a:lnTo>
+                  <a:lnTo>
+                    <a:pt x="3877440" y="3080801"/>
+                  </a:lnTo>
+                  <a:lnTo>
+                    <a:pt x="3799806" y="3041632"/>
+                  </a:lnTo>
+                  <a:lnTo>
+                    <a:pt x="3722172" y="2999780"/>
+                  </a:lnTo>
+                  <a:lnTo>
+                    <a:pt x="3644538" y="2955062"/>
+                  </a:lnTo>
+                  <a:lnTo>
+                    <a:pt x="3566904" y="2907280"/>
+                  </a:lnTo>
+                  <a:lnTo>
+                    <a:pt x="3489270" y="2856225"/>
+                  </a:lnTo>
+                  <a:lnTo>
+                    <a:pt x="3411636" y="2801674"/>
+                  </a:lnTo>
+                  <a:lnTo>
+                    <a:pt x="3334002" y="2781503"/>
+                  </a:lnTo>
+                  <a:lnTo>
+                    <a:pt x="3256368" y="2779320"/>
+                  </a:lnTo>
+                  <a:lnTo>
+                    <a:pt x="3178734" y="2777131"/>
+                  </a:lnTo>
+                  <a:lnTo>
+                    <a:pt x="3101100" y="2774937"/>
+                  </a:lnTo>
+                  <a:lnTo>
+                    <a:pt x="3023466" y="2772738"/>
+                  </a:lnTo>
+                  <a:lnTo>
+                    <a:pt x="2945832" y="2770532"/>
+                  </a:lnTo>
+                  <a:lnTo>
+                    <a:pt x="2868198" y="2768322"/>
+                  </a:lnTo>
+                  <a:lnTo>
+                    <a:pt x="2790564" y="2766106"/>
+                  </a:lnTo>
+                  <a:lnTo>
+                    <a:pt x="2712930" y="2763884"/>
+                  </a:lnTo>
+                  <a:lnTo>
+                    <a:pt x="2635295" y="2761657"/>
+                  </a:lnTo>
+                  <a:lnTo>
+                    <a:pt x="2557661" y="2759424"/>
+                  </a:lnTo>
+                  <a:lnTo>
+                    <a:pt x="2480027" y="2757186"/>
+                  </a:lnTo>
+                  <a:lnTo>
+                    <a:pt x="2402393" y="2754942"/>
+                  </a:lnTo>
+                  <a:lnTo>
+                    <a:pt x="2324759" y="2752692"/>
+                  </a:lnTo>
+                  <a:lnTo>
+                    <a:pt x="2247125" y="2750437"/>
+                  </a:lnTo>
+                  <a:lnTo>
+                    <a:pt x="2169491" y="2748176"/>
+                  </a:lnTo>
+                  <a:lnTo>
+                    <a:pt x="2091857" y="2745909"/>
+                  </a:lnTo>
+                  <a:lnTo>
+                    <a:pt x="2014223" y="2743637"/>
+                  </a:lnTo>
+                  <a:lnTo>
+                    <a:pt x="1936589" y="2741359"/>
+                  </a:lnTo>
+                  <a:lnTo>
+                    <a:pt x="1858955" y="2739075"/>
+                  </a:lnTo>
+                  <a:lnTo>
+                    <a:pt x="1781321" y="2736786"/>
+                  </a:lnTo>
+                  <a:lnTo>
+                    <a:pt x="1703687" y="2734491"/>
+                  </a:lnTo>
+                  <a:lnTo>
+                    <a:pt x="1626053" y="2732190"/>
+                  </a:lnTo>
+                  <a:lnTo>
+                    <a:pt x="1548419" y="2729883"/>
+                  </a:lnTo>
+                  <a:lnTo>
+                    <a:pt x="1470785" y="2727571"/>
+                  </a:lnTo>
+                  <a:lnTo>
+                    <a:pt x="1393151" y="2725253"/>
+                  </a:lnTo>
+                  <a:lnTo>
+                    <a:pt x="1315517" y="2722928"/>
+                  </a:lnTo>
+                  <a:lnTo>
+                    <a:pt x="1237883" y="2720599"/>
+                  </a:lnTo>
+                  <a:lnTo>
+                    <a:pt x="1160249" y="2718263"/>
+                  </a:lnTo>
+                  <a:lnTo>
+                    <a:pt x="1082615" y="2715921"/>
+                  </a:lnTo>
+                  <a:lnTo>
+                    <a:pt x="1004981" y="2713574"/>
+                  </a:lnTo>
+                  <a:lnTo>
+                    <a:pt x="927346" y="2711221"/>
+                  </a:lnTo>
+                  <a:lnTo>
+                    <a:pt x="849712" y="2708861"/>
+                  </a:lnTo>
+                  <a:lnTo>
+                    <a:pt x="772078" y="2706496"/>
+                  </a:lnTo>
+                  <a:lnTo>
+                    <a:pt x="694444" y="2704125"/>
+                  </a:lnTo>
+                  <a:lnTo>
+                    <a:pt x="616810" y="2701748"/>
+                  </a:lnTo>
+                  <a:lnTo>
+                    <a:pt x="539176" y="2699365"/>
+                  </a:lnTo>
+                  <a:lnTo>
+                    <a:pt x="461542" y="2696976"/>
+                  </a:lnTo>
+                  <a:lnTo>
+                    <a:pt x="383908" y="2694582"/>
+                  </a:lnTo>
+                  <a:lnTo>
+                    <a:pt x="306274" y="2692181"/>
+                  </a:lnTo>
+                  <a:lnTo>
+                    <a:pt x="228640" y="2689774"/>
+                  </a:lnTo>
+                  <a:lnTo>
+                    <a:pt x="151006" y="2687361"/>
+                  </a:lnTo>
+                  <a:lnTo>
+                    <a:pt x="73372" y="2684942"/>
+                  </a:lnTo>
+                  <a:lnTo>
+                    <a:pt x="0" y="2682650"/>
                   </a:lnTo>
                   <a:close/>
                 </a:path>
@@ -3519,210 +3543,234 @@
           </p:nvSpPr>
           <p:spPr>
             <a:xfrm>
-              <a:off x="3213350" y="1896563"/>
-              <a:ext cx="4975140" cy="3375018"/>
+              <a:off x="2522077" y="1896563"/>
+              <a:ext cx="5666413" cy="2887813"/>
             </a:xfrm>
             <a:custGeom>
               <a:avLst/>
               <a:pathLst>
-                <a:path w="4975140" h="3375018">
+                <a:path w="5666413" h="2887813">
                   <a:moveTo>
                     <a:pt x="0" y="0"/>
                   </a:moveTo>
                   <a:lnTo>
-                    <a:pt x="6561" y="36379"/>
-                  </a:lnTo>
-                  <a:lnTo>
-                    <a:pt x="84195" y="421031"/>
-                  </a:lnTo>
-                  <a:lnTo>
-                    <a:pt x="161829" y="764769"/>
-                  </a:lnTo>
-                  <a:lnTo>
-                    <a:pt x="239463" y="1071945"/>
-                  </a:lnTo>
-                  <a:lnTo>
-                    <a:pt x="317097" y="1346447"/>
-                  </a:lnTo>
-                  <a:lnTo>
-                    <a:pt x="394731" y="1591751"/>
-                  </a:lnTo>
-                  <a:lnTo>
-                    <a:pt x="472365" y="1810963"/>
-                  </a:lnTo>
-                  <a:lnTo>
-                    <a:pt x="549999" y="2006857"/>
-                  </a:lnTo>
-                  <a:lnTo>
-                    <a:pt x="627633" y="2181915"/>
-                  </a:lnTo>
-                  <a:lnTo>
-                    <a:pt x="705267" y="2338353"/>
-                  </a:lnTo>
-                  <a:lnTo>
-                    <a:pt x="782901" y="2478150"/>
-                  </a:lnTo>
-                  <a:lnTo>
-                    <a:pt x="860535" y="2603078"/>
-                  </a:lnTo>
-                  <a:lnTo>
-                    <a:pt x="938169" y="2714718"/>
-                  </a:lnTo>
-                  <a:lnTo>
-                    <a:pt x="1015803" y="2789293"/>
-                  </a:lnTo>
-                  <a:lnTo>
-                    <a:pt x="1093437" y="2808287"/>
-                  </a:lnTo>
-                  <a:lnTo>
-                    <a:pt x="1171072" y="2826863"/>
-                  </a:lnTo>
-                  <a:lnTo>
-                    <a:pt x="1248706" y="2845031"/>
-                  </a:lnTo>
-                  <a:lnTo>
-                    <a:pt x="1326340" y="2862799"/>
-                  </a:lnTo>
-                  <a:lnTo>
-                    <a:pt x="1403974" y="2880176"/>
-                  </a:lnTo>
-                  <a:lnTo>
-                    <a:pt x="1481608" y="2897170"/>
-                  </a:lnTo>
-                  <a:lnTo>
-                    <a:pt x="1559242" y="2913791"/>
-                  </a:lnTo>
-                  <a:lnTo>
-                    <a:pt x="1636876" y="2930046"/>
-                  </a:lnTo>
-                  <a:lnTo>
-                    <a:pt x="1714510" y="2945944"/>
-                  </a:lnTo>
-                  <a:lnTo>
-                    <a:pt x="1792144" y="2961491"/>
-                  </a:lnTo>
-                  <a:lnTo>
-                    <a:pt x="1869778" y="2976697"/>
-                  </a:lnTo>
-                  <a:lnTo>
-                    <a:pt x="1947412" y="2991568"/>
-                  </a:lnTo>
-                  <a:lnTo>
-                    <a:pt x="2025046" y="3006112"/>
-                  </a:lnTo>
-                  <a:lnTo>
-                    <a:pt x="2102680" y="3020336"/>
-                  </a:lnTo>
-                  <a:lnTo>
-                    <a:pt x="2180314" y="3034247"/>
-                  </a:lnTo>
-                  <a:lnTo>
-                    <a:pt x="2257948" y="3047852"/>
-                  </a:lnTo>
-                  <a:lnTo>
-                    <a:pt x="2335582" y="3061158"/>
-                  </a:lnTo>
-                  <a:lnTo>
-                    <a:pt x="2413216" y="3074171"/>
-                  </a:lnTo>
-                  <a:lnTo>
-                    <a:pt x="2490850" y="3086897"/>
-                  </a:lnTo>
-                  <a:lnTo>
-                    <a:pt x="2568484" y="3099344"/>
-                  </a:lnTo>
-                  <a:lnTo>
-                    <a:pt x="2646118" y="3111517"/>
-                  </a:lnTo>
-                  <a:lnTo>
-                    <a:pt x="2723752" y="3123422"/>
-                  </a:lnTo>
-                  <a:lnTo>
-                    <a:pt x="2801386" y="3135065"/>
-                  </a:lnTo>
-                  <a:lnTo>
-                    <a:pt x="2879021" y="3146452"/>
-                  </a:lnTo>
-                  <a:lnTo>
-                    <a:pt x="2956655" y="3157588"/>
-                  </a:lnTo>
-                  <a:lnTo>
-                    <a:pt x="3034289" y="3168480"/>
-                  </a:lnTo>
-                  <a:lnTo>
-                    <a:pt x="3111923" y="3179132"/>
-                  </a:lnTo>
-                  <a:lnTo>
-                    <a:pt x="3189557" y="3189549"/>
-                  </a:lnTo>
-                  <a:lnTo>
-                    <a:pt x="3267191" y="3199737"/>
-                  </a:lnTo>
-                  <a:lnTo>
-                    <a:pt x="3344825" y="3209701"/>
-                  </a:lnTo>
-                  <a:lnTo>
-                    <a:pt x="3422459" y="3219446"/>
-                  </a:lnTo>
-                  <a:lnTo>
-                    <a:pt x="3500093" y="3228977"/>
-                  </a:lnTo>
-                  <a:lnTo>
-                    <a:pt x="3577727" y="3238298"/>
-                  </a:lnTo>
-                  <a:lnTo>
-                    <a:pt x="3655361" y="3247414"/>
-                  </a:lnTo>
-                  <a:lnTo>
-                    <a:pt x="3732995" y="3256329"/>
-                  </a:lnTo>
-                  <a:lnTo>
-                    <a:pt x="3810629" y="3265048"/>
-                  </a:lnTo>
-                  <a:lnTo>
-                    <a:pt x="3888263" y="3273575"/>
-                  </a:lnTo>
-                  <a:lnTo>
-                    <a:pt x="3965897" y="3281915"/>
-                  </a:lnTo>
-                  <a:lnTo>
-                    <a:pt x="4043531" y="3290071"/>
-                  </a:lnTo>
-                  <a:lnTo>
-                    <a:pt x="4121165" y="3298048"/>
-                  </a:lnTo>
-                  <a:lnTo>
-                    <a:pt x="4198799" y="3305849"/>
-                  </a:lnTo>
-                  <a:lnTo>
-                    <a:pt x="4276433" y="3313479"/>
-                  </a:lnTo>
-                  <a:lnTo>
-                    <a:pt x="4354067" y="3320940"/>
-                  </a:lnTo>
-                  <a:lnTo>
-                    <a:pt x="4431701" y="3328238"/>
-                  </a:lnTo>
-                  <a:lnTo>
-                    <a:pt x="4509335" y="3335375"/>
-                  </a:lnTo>
-                  <a:lnTo>
-                    <a:pt x="4586970" y="3342355"/>
-                  </a:lnTo>
-                  <a:lnTo>
-                    <a:pt x="4664604" y="3349182"/>
-                  </a:lnTo>
-                  <a:lnTo>
-                    <a:pt x="4742238" y="3355858"/>
-                  </a:lnTo>
-                  <a:lnTo>
-                    <a:pt x="4819872" y="3362387"/>
-                  </a:lnTo>
-                  <a:lnTo>
-                    <a:pt x="4897506" y="3368773"/>
-                  </a:lnTo>
-                  <a:lnTo>
-                    <a:pt x="4975140" y="3375018"/>
+                    <a:pt x="76761" y="231690"/>
+                  </a:lnTo>
+                  <a:lnTo>
+                    <a:pt x="154396" y="450991"/>
+                  </a:lnTo>
+                  <a:lnTo>
+                    <a:pt x="232030" y="656234"/>
+                  </a:lnTo>
+                  <a:lnTo>
+                    <a:pt x="309664" y="848319"/>
+                  </a:lnTo>
+                  <a:lnTo>
+                    <a:pt x="387298" y="1028091"/>
+                  </a:lnTo>
+                  <a:lnTo>
+                    <a:pt x="464932" y="1196339"/>
+                  </a:lnTo>
+                  <a:lnTo>
+                    <a:pt x="542566" y="1353801"/>
+                  </a:lnTo>
+                  <a:lnTo>
+                    <a:pt x="620200" y="1501169"/>
+                  </a:lnTo>
+                  <a:lnTo>
+                    <a:pt x="697834" y="1639090"/>
+                  </a:lnTo>
+                  <a:lnTo>
+                    <a:pt x="775468" y="1768169"/>
+                  </a:lnTo>
+                  <a:lnTo>
+                    <a:pt x="853102" y="1888974"/>
+                  </a:lnTo>
+                  <a:lnTo>
+                    <a:pt x="930736" y="2002035"/>
+                  </a:lnTo>
+                  <a:lnTo>
+                    <a:pt x="1008370" y="2107847"/>
+                  </a:lnTo>
+                  <a:lnTo>
+                    <a:pt x="1086004" y="2206877"/>
+                  </a:lnTo>
+                  <a:lnTo>
+                    <a:pt x="1163638" y="2299558"/>
+                  </a:lnTo>
+                  <a:lnTo>
+                    <a:pt x="1241272" y="2386298"/>
+                  </a:lnTo>
+                  <a:lnTo>
+                    <a:pt x="1318906" y="2467477"/>
+                  </a:lnTo>
+                  <a:lnTo>
+                    <a:pt x="1396540" y="2543453"/>
+                  </a:lnTo>
+                  <a:lnTo>
+                    <a:pt x="1474174" y="2614558"/>
+                  </a:lnTo>
+                  <a:lnTo>
+                    <a:pt x="1551808" y="2681105"/>
+                  </a:lnTo>
+                  <a:lnTo>
+                    <a:pt x="1629442" y="2743385"/>
+                  </a:lnTo>
+                  <a:lnTo>
+                    <a:pt x="1707076" y="2783680"/>
+                  </a:lnTo>
+                  <a:lnTo>
+                    <a:pt x="1784710" y="2785853"/>
+                  </a:lnTo>
+                  <a:lnTo>
+                    <a:pt x="1862345" y="2788019"/>
+                  </a:lnTo>
+                  <a:lnTo>
+                    <a:pt x="1939979" y="2790181"/>
+                  </a:lnTo>
+                  <a:lnTo>
+                    <a:pt x="2017613" y="2792337"/>
+                  </a:lnTo>
+                  <a:lnTo>
+                    <a:pt x="2095247" y="2794487"/>
+                  </a:lnTo>
+                  <a:lnTo>
+                    <a:pt x="2172881" y="2796632"/>
+                  </a:lnTo>
+                  <a:lnTo>
+                    <a:pt x="2250515" y="2798772"/>
+                  </a:lnTo>
+                  <a:lnTo>
+                    <a:pt x="2328149" y="2800906"/>
+                  </a:lnTo>
+                  <a:lnTo>
+                    <a:pt x="2405783" y="2803036"/>
+                  </a:lnTo>
+                  <a:lnTo>
+                    <a:pt x="2483417" y="2805159"/>
+                  </a:lnTo>
+                  <a:lnTo>
+                    <a:pt x="2561051" y="2807278"/>
+                  </a:lnTo>
+                  <a:lnTo>
+                    <a:pt x="2638685" y="2809391"/>
+                  </a:lnTo>
+                  <a:lnTo>
+                    <a:pt x="2716319" y="2811499"/>
+                  </a:lnTo>
+                  <a:lnTo>
+                    <a:pt x="2793953" y="2813602"/>
+                  </a:lnTo>
+                  <a:lnTo>
+                    <a:pt x="2871587" y="2815699"/>
+                  </a:lnTo>
+                  <a:lnTo>
+                    <a:pt x="2949221" y="2817791"/>
+                  </a:lnTo>
+                  <a:lnTo>
+                    <a:pt x="3026855" y="2819878"/>
+                  </a:lnTo>
+                  <a:lnTo>
+                    <a:pt x="3104489" y="2821960"/>
+                  </a:lnTo>
+                  <a:lnTo>
+                    <a:pt x="3182123" y="2824036"/>
+                  </a:lnTo>
+                  <a:lnTo>
+                    <a:pt x="3259757" y="2826108"/>
+                  </a:lnTo>
+                  <a:lnTo>
+                    <a:pt x="3337391" y="2828174"/>
+                  </a:lnTo>
+                  <a:lnTo>
+                    <a:pt x="3415025" y="2830235"/>
+                  </a:lnTo>
+                  <a:lnTo>
+                    <a:pt x="3492659" y="2832290"/>
+                  </a:lnTo>
+                  <a:lnTo>
+                    <a:pt x="3570294" y="2834341"/>
+                  </a:lnTo>
+                  <a:lnTo>
+                    <a:pt x="3647928" y="2836387"/>
+                  </a:lnTo>
+                  <a:lnTo>
+                    <a:pt x="3725562" y="2838427"/>
+                  </a:lnTo>
+                  <a:lnTo>
+                    <a:pt x="3803196" y="2840462"/>
+                  </a:lnTo>
+                  <a:lnTo>
+                    <a:pt x="3880830" y="2842493"/>
+                  </a:lnTo>
+                  <a:lnTo>
+                    <a:pt x="3958464" y="2844518"/>
+                  </a:lnTo>
+                  <a:lnTo>
+                    <a:pt x="4036098" y="2846538"/>
+                  </a:lnTo>
+                  <a:lnTo>
+                    <a:pt x="4113732" y="2848553"/>
+                  </a:lnTo>
+                  <a:lnTo>
+                    <a:pt x="4191366" y="2850563"/>
+                  </a:lnTo>
+                  <a:lnTo>
+                    <a:pt x="4269000" y="2852568"/>
+                  </a:lnTo>
+                  <a:lnTo>
+                    <a:pt x="4346634" y="2854568"/>
+                  </a:lnTo>
+                  <a:lnTo>
+                    <a:pt x="4424268" y="2856563"/>
+                  </a:lnTo>
+                  <a:lnTo>
+                    <a:pt x="4501902" y="2858553"/>
+                  </a:lnTo>
+                  <a:lnTo>
+                    <a:pt x="4579536" y="2860538"/>
+                  </a:lnTo>
+                  <a:lnTo>
+                    <a:pt x="4657170" y="2862518"/>
+                  </a:lnTo>
+                  <a:lnTo>
+                    <a:pt x="4734804" y="2864493"/>
+                  </a:lnTo>
+                  <a:lnTo>
+                    <a:pt x="4812438" y="2866463"/>
+                  </a:lnTo>
+                  <a:lnTo>
+                    <a:pt x="4890072" y="2868428"/>
+                  </a:lnTo>
+                  <a:lnTo>
+                    <a:pt x="4967706" y="2870389"/>
+                  </a:lnTo>
+                  <a:lnTo>
+                    <a:pt x="5045340" y="2872344"/>
+                  </a:lnTo>
+                  <a:lnTo>
+                    <a:pt x="5122974" y="2874295"/>
+                  </a:lnTo>
+                  <a:lnTo>
+                    <a:pt x="5200608" y="2876240"/>
+                  </a:lnTo>
+                  <a:lnTo>
+                    <a:pt x="5278243" y="2878181"/>
+                  </a:lnTo>
+                  <a:lnTo>
+                    <a:pt x="5355877" y="2880117"/>
+                  </a:lnTo>
+                  <a:lnTo>
+                    <a:pt x="5433511" y="2882048"/>
+                  </a:lnTo>
+                  <a:lnTo>
+                    <a:pt x="5511145" y="2883975"/>
+                  </a:lnTo>
+                  <a:lnTo>
+                    <a:pt x="5588779" y="2885896"/>
+                  </a:lnTo>
+                  <a:lnTo>
+                    <a:pt x="5666413" y="2887813"/>
                   </a:lnTo>
                 </a:path>
               </a:pathLst>
@@ -3742,297 +3790,297 @@
           </p:nvSpPr>
           <p:spPr>
             <a:xfrm>
-              <a:off x="817517" y="3254320"/>
-              <a:ext cx="7370972" cy="2292180"/>
+              <a:off x="817517" y="4579213"/>
+              <a:ext cx="7370972" cy="940987"/>
             </a:xfrm>
             <a:custGeom>
               <a:avLst/>
               <a:pathLst>
-                <a:path w="7370972" h="2292180">
+                <a:path w="7370972" h="940987">
                   <a:moveTo>
-                    <a:pt x="7370972" y="2292180"/>
+                    <a:pt x="7370972" y="940987"/>
                   </a:moveTo>
                   <a:lnTo>
-                    <a:pt x="7293338" y="2291857"/>
-                  </a:lnTo>
-                  <a:lnTo>
-                    <a:pt x="7215704" y="2291497"/>
-                  </a:lnTo>
-                  <a:lnTo>
-                    <a:pt x="7138070" y="2291093"/>
-                  </a:lnTo>
-                  <a:lnTo>
-                    <a:pt x="7060436" y="2290642"/>
-                  </a:lnTo>
-                  <a:lnTo>
-                    <a:pt x="6982802" y="2290137"/>
-                  </a:lnTo>
-                  <a:lnTo>
-                    <a:pt x="6905168" y="2289572"/>
-                  </a:lnTo>
-                  <a:lnTo>
-                    <a:pt x="6827534" y="2288939"/>
-                  </a:lnTo>
-                  <a:lnTo>
-                    <a:pt x="6749900" y="2288231"/>
-                  </a:lnTo>
-                  <a:lnTo>
-                    <a:pt x="6672266" y="2287439"/>
-                  </a:lnTo>
-                  <a:lnTo>
-                    <a:pt x="6594632" y="2286552"/>
-                  </a:lnTo>
-                  <a:lnTo>
-                    <a:pt x="6516998" y="2285560"/>
-                  </a:lnTo>
-                  <a:lnTo>
-                    <a:pt x="6439364" y="2284450"/>
-                  </a:lnTo>
-                  <a:lnTo>
-                    <a:pt x="6361730" y="2283208"/>
-                  </a:lnTo>
-                  <a:lnTo>
-                    <a:pt x="6284096" y="2281818"/>
-                  </a:lnTo>
-                  <a:lnTo>
-                    <a:pt x="6206462" y="2280263"/>
-                  </a:lnTo>
-                  <a:lnTo>
-                    <a:pt x="6128827" y="2278522"/>
-                  </a:lnTo>
-                  <a:lnTo>
-                    <a:pt x="6051193" y="2276574"/>
-                  </a:lnTo>
-                  <a:lnTo>
-                    <a:pt x="5973559" y="2274395"/>
-                  </a:lnTo>
-                  <a:lnTo>
-                    <a:pt x="5895925" y="2271956"/>
-                  </a:lnTo>
-                  <a:lnTo>
-                    <a:pt x="5818291" y="2269226"/>
-                  </a:lnTo>
-                  <a:lnTo>
-                    <a:pt x="5740657" y="2266172"/>
-                  </a:lnTo>
-                  <a:lnTo>
-                    <a:pt x="5663023" y="2262754"/>
-                  </a:lnTo>
-                  <a:lnTo>
-                    <a:pt x="5585389" y="2258930"/>
-                  </a:lnTo>
-                  <a:lnTo>
-                    <a:pt x="5507755" y="2254650"/>
-                  </a:lnTo>
-                  <a:lnTo>
-                    <a:pt x="5430121" y="2249860"/>
-                  </a:lnTo>
-                  <a:lnTo>
-                    <a:pt x="5352487" y="2244501"/>
-                  </a:lnTo>
-                  <a:lnTo>
-                    <a:pt x="5274853" y="2238504"/>
-                  </a:lnTo>
-                  <a:lnTo>
-                    <a:pt x="5197219" y="2231793"/>
-                  </a:lnTo>
-                  <a:lnTo>
-                    <a:pt x="5119585" y="2224283"/>
-                  </a:lnTo>
-                  <a:lnTo>
-                    <a:pt x="5041951" y="2215879"/>
-                  </a:lnTo>
-                  <a:lnTo>
-                    <a:pt x="4964317" y="2206475"/>
-                  </a:lnTo>
-                  <a:lnTo>
-                    <a:pt x="4886683" y="2195952"/>
-                  </a:lnTo>
-                  <a:lnTo>
-                    <a:pt x="4809049" y="2184176"/>
-                  </a:lnTo>
-                  <a:lnTo>
-                    <a:pt x="4731415" y="2170998"/>
-                  </a:lnTo>
-                  <a:lnTo>
-                    <a:pt x="4653781" y="2156252"/>
-                  </a:lnTo>
-                  <a:lnTo>
-                    <a:pt x="4576147" y="2139750"/>
-                  </a:lnTo>
-                  <a:lnTo>
-                    <a:pt x="4498513" y="2121285"/>
-                  </a:lnTo>
-                  <a:lnTo>
-                    <a:pt x="4420879" y="2100621"/>
-                  </a:lnTo>
-                  <a:lnTo>
-                    <a:pt x="4343244" y="2077498"/>
-                  </a:lnTo>
-                  <a:lnTo>
-                    <a:pt x="4265610" y="2051623"/>
-                  </a:lnTo>
-                  <a:lnTo>
-                    <a:pt x="4187976" y="2022668"/>
-                  </a:lnTo>
-                  <a:lnTo>
-                    <a:pt x="4110342" y="1990266"/>
-                  </a:lnTo>
-                  <a:lnTo>
-                    <a:pt x="4032708" y="1954008"/>
-                  </a:lnTo>
-                  <a:lnTo>
-                    <a:pt x="3955074" y="1913434"/>
-                  </a:lnTo>
-                  <a:lnTo>
-                    <a:pt x="3877440" y="1868030"/>
-                  </a:lnTo>
-                  <a:lnTo>
-                    <a:pt x="3799806" y="1817222"/>
-                  </a:lnTo>
-                  <a:lnTo>
-                    <a:pt x="3722172" y="1760367"/>
-                  </a:lnTo>
-                  <a:lnTo>
-                    <a:pt x="3644538" y="1696744"/>
-                  </a:lnTo>
-                  <a:lnTo>
-                    <a:pt x="3566904" y="1625548"/>
-                  </a:lnTo>
-                  <a:lnTo>
-                    <a:pt x="3489270" y="1545878"/>
-                  </a:lnTo>
-                  <a:lnTo>
-                    <a:pt x="3411636" y="1456725"/>
-                  </a:lnTo>
-                  <a:lnTo>
-                    <a:pt x="3334002" y="1412115"/>
-                  </a:lnTo>
-                  <a:lnTo>
-                    <a:pt x="3256368" y="1392256"/>
-                  </a:lnTo>
-                  <a:lnTo>
-                    <a:pt x="3178734" y="1371952"/>
-                  </a:lnTo>
-                  <a:lnTo>
-                    <a:pt x="3101100" y="1351190"/>
-                  </a:lnTo>
-                  <a:lnTo>
-                    <a:pt x="3023466" y="1329961"/>
-                  </a:lnTo>
-                  <a:lnTo>
-                    <a:pt x="2945832" y="1308255"/>
-                  </a:lnTo>
-                  <a:lnTo>
-                    <a:pt x="2868198" y="1286060"/>
-                  </a:lnTo>
-                  <a:lnTo>
-                    <a:pt x="2790564" y="1263366"/>
-                  </a:lnTo>
-                  <a:lnTo>
-                    <a:pt x="2712930" y="1240162"/>
-                  </a:lnTo>
-                  <a:lnTo>
-                    <a:pt x="2635295" y="1216435"/>
-                  </a:lnTo>
-                  <a:lnTo>
-                    <a:pt x="2557661" y="1192175"/>
-                  </a:lnTo>
-                  <a:lnTo>
-                    <a:pt x="2480027" y="1167369"/>
-                  </a:lnTo>
-                  <a:lnTo>
-                    <a:pt x="2402393" y="1142005"/>
-                  </a:lnTo>
-                  <a:lnTo>
-                    <a:pt x="2324759" y="1116071"/>
-                  </a:lnTo>
-                  <a:lnTo>
-                    <a:pt x="2247125" y="1089553"/>
-                  </a:lnTo>
-                  <a:lnTo>
-                    <a:pt x="2169491" y="1062439"/>
-                  </a:lnTo>
-                  <a:lnTo>
-                    <a:pt x="2091857" y="1034714"/>
-                  </a:lnTo>
-                  <a:lnTo>
-                    <a:pt x="2014223" y="1006366"/>
-                  </a:lnTo>
-                  <a:lnTo>
-                    <a:pt x="1936589" y="977381"/>
-                  </a:lnTo>
-                  <a:lnTo>
-                    <a:pt x="1858955" y="947743"/>
-                  </a:lnTo>
-                  <a:lnTo>
-                    <a:pt x="1781321" y="917438"/>
-                  </a:lnTo>
-                  <a:lnTo>
-                    <a:pt x="1703687" y="886452"/>
-                  </a:lnTo>
-                  <a:lnTo>
-                    <a:pt x="1626053" y="854769"/>
-                  </a:lnTo>
-                  <a:lnTo>
-                    <a:pt x="1548419" y="822373"/>
-                  </a:lnTo>
-                  <a:lnTo>
-                    <a:pt x="1470785" y="789248"/>
-                  </a:lnTo>
-                  <a:lnTo>
-                    <a:pt x="1393151" y="755378"/>
-                  </a:lnTo>
-                  <a:lnTo>
-                    <a:pt x="1315517" y="720747"/>
-                  </a:lnTo>
-                  <a:lnTo>
-                    <a:pt x="1237883" y="685336"/>
-                  </a:lnTo>
-                  <a:lnTo>
-                    <a:pt x="1160249" y="649128"/>
-                  </a:lnTo>
-                  <a:lnTo>
-                    <a:pt x="1082615" y="612107"/>
-                  </a:lnTo>
-                  <a:lnTo>
-                    <a:pt x="1004981" y="574252"/>
-                  </a:lnTo>
-                  <a:lnTo>
-                    <a:pt x="927346" y="535546"/>
-                  </a:lnTo>
-                  <a:lnTo>
-                    <a:pt x="849712" y="495969"/>
-                  </a:lnTo>
-                  <a:lnTo>
-                    <a:pt x="772078" y="455501"/>
-                  </a:lnTo>
-                  <a:lnTo>
-                    <a:pt x="694444" y="414124"/>
-                  </a:lnTo>
-                  <a:lnTo>
-                    <a:pt x="616810" y="371815"/>
-                  </a:lnTo>
-                  <a:lnTo>
-                    <a:pt x="539176" y="328555"/>
-                  </a:lnTo>
-                  <a:lnTo>
-                    <a:pt x="461542" y="284322"/>
-                  </a:lnTo>
-                  <a:lnTo>
-                    <a:pt x="383908" y="239093"/>
-                  </a:lnTo>
-                  <a:lnTo>
-                    <a:pt x="306274" y="192848"/>
-                  </a:lnTo>
-                  <a:lnTo>
-                    <a:pt x="228640" y="145562"/>
-                  </a:lnTo>
-                  <a:lnTo>
-                    <a:pt x="151006" y="97212"/>
-                  </a:lnTo>
-                  <a:lnTo>
-                    <a:pt x="73372" y="47774"/>
+                    <a:pt x="7293338" y="939000"/>
+                  </a:lnTo>
+                  <a:lnTo>
+                    <a:pt x="7215704" y="936877"/>
+                  </a:lnTo>
+                  <a:lnTo>
+                    <a:pt x="7138070" y="934609"/>
+                  </a:lnTo>
+                  <a:lnTo>
+                    <a:pt x="7060436" y="932185"/>
+                  </a:lnTo>
+                  <a:lnTo>
+                    <a:pt x="6982802" y="929595"/>
+                  </a:lnTo>
+                  <a:lnTo>
+                    <a:pt x="6905168" y="926828"/>
+                  </a:lnTo>
+                  <a:lnTo>
+                    <a:pt x="6827534" y="923872"/>
+                  </a:lnTo>
+                  <a:lnTo>
+                    <a:pt x="6749900" y="920713"/>
+                  </a:lnTo>
+                  <a:lnTo>
+                    <a:pt x="6672266" y="917337"/>
+                  </a:lnTo>
+                  <a:lnTo>
+                    <a:pt x="6594632" y="913730"/>
+                  </a:lnTo>
+                  <a:lnTo>
+                    <a:pt x="6516998" y="909876"/>
+                  </a:lnTo>
+                  <a:lnTo>
+                    <a:pt x="6439364" y="905759"/>
+                  </a:lnTo>
+                  <a:lnTo>
+                    <a:pt x="6361730" y="901359"/>
+                  </a:lnTo>
+                  <a:lnTo>
+                    <a:pt x="6284096" y="896658"/>
+                  </a:lnTo>
+                  <a:lnTo>
+                    <a:pt x="6206462" y="891635"/>
+                  </a:lnTo>
+                  <a:lnTo>
+                    <a:pt x="6128827" y="886267"/>
+                  </a:lnTo>
+                  <a:lnTo>
+                    <a:pt x="6051193" y="880532"/>
+                  </a:lnTo>
+                  <a:lnTo>
+                    <a:pt x="5973559" y="874405"/>
+                  </a:lnTo>
+                  <a:lnTo>
+                    <a:pt x="5895925" y="867857"/>
+                  </a:lnTo>
+                  <a:lnTo>
+                    <a:pt x="5818291" y="860861"/>
+                  </a:lnTo>
+                  <a:lnTo>
+                    <a:pt x="5740657" y="853386"/>
+                  </a:lnTo>
+                  <a:lnTo>
+                    <a:pt x="5663023" y="845399"/>
+                  </a:lnTo>
+                  <a:lnTo>
+                    <a:pt x="5585389" y="836865"/>
+                  </a:lnTo>
+                  <a:lnTo>
+                    <a:pt x="5507755" y="827746"/>
+                  </a:lnTo>
+                  <a:lnTo>
+                    <a:pt x="5430121" y="818003"/>
+                  </a:lnTo>
+                  <a:lnTo>
+                    <a:pt x="5352487" y="807592"/>
+                  </a:lnTo>
+                  <a:lnTo>
+                    <a:pt x="5274853" y="796468"/>
+                  </a:lnTo>
+                  <a:lnTo>
+                    <a:pt x="5197219" y="784582"/>
+                  </a:lnTo>
+                  <a:lnTo>
+                    <a:pt x="5119585" y="771882"/>
+                  </a:lnTo>
+                  <a:lnTo>
+                    <a:pt x="5041951" y="758312"/>
+                  </a:lnTo>
+                  <a:lnTo>
+                    <a:pt x="4964317" y="743813"/>
+                  </a:lnTo>
+                  <a:lnTo>
+                    <a:pt x="4886683" y="728321"/>
+                  </a:lnTo>
+                  <a:lnTo>
+                    <a:pt x="4809049" y="711767"/>
+                  </a:lnTo>
+                  <a:lnTo>
+                    <a:pt x="4731415" y="694079"/>
+                  </a:lnTo>
+                  <a:lnTo>
+                    <a:pt x="4653781" y="675180"/>
+                  </a:lnTo>
+                  <a:lnTo>
+                    <a:pt x="4576147" y="654987"/>
+                  </a:lnTo>
+                  <a:lnTo>
+                    <a:pt x="4498513" y="633410"/>
+                  </a:lnTo>
+                  <a:lnTo>
+                    <a:pt x="4420879" y="610355"/>
+                  </a:lnTo>
+                  <a:lnTo>
+                    <a:pt x="4343244" y="585722"/>
+                  </a:lnTo>
+                  <a:lnTo>
+                    <a:pt x="4265610" y="559400"/>
+                  </a:lnTo>
+                  <a:lnTo>
+                    <a:pt x="4187976" y="531276"/>
+                  </a:lnTo>
+                  <a:lnTo>
+                    <a:pt x="4110342" y="501226"/>
+                  </a:lnTo>
+                  <a:lnTo>
+                    <a:pt x="4032708" y="469117"/>
+                  </a:lnTo>
+                  <a:lnTo>
+                    <a:pt x="3955074" y="434809"/>
+                  </a:lnTo>
+                  <a:lnTo>
+                    <a:pt x="3877440" y="398151"/>
+                  </a:lnTo>
+                  <a:lnTo>
+                    <a:pt x="3799806" y="358982"/>
+                  </a:lnTo>
+                  <a:lnTo>
+                    <a:pt x="3722172" y="317130"/>
+                  </a:lnTo>
+                  <a:lnTo>
+                    <a:pt x="3644538" y="272411"/>
+                  </a:lnTo>
+                  <a:lnTo>
+                    <a:pt x="3566904" y="224629"/>
+                  </a:lnTo>
+                  <a:lnTo>
+                    <a:pt x="3489270" y="173575"/>
+                  </a:lnTo>
+                  <a:lnTo>
+                    <a:pt x="3411636" y="119023"/>
+                  </a:lnTo>
+                  <a:lnTo>
+                    <a:pt x="3334002" y="98852"/>
+                  </a:lnTo>
+                  <a:lnTo>
+                    <a:pt x="3256368" y="96669"/>
+                  </a:lnTo>
+                  <a:lnTo>
+                    <a:pt x="3178734" y="94481"/>
+                  </a:lnTo>
+                  <a:lnTo>
+                    <a:pt x="3101100" y="92287"/>
+                  </a:lnTo>
+                  <a:lnTo>
+                    <a:pt x="3023466" y="90087"/>
+                  </a:lnTo>
+                  <a:lnTo>
+                    <a:pt x="2945832" y="87882"/>
+                  </a:lnTo>
+                  <a:lnTo>
+                    <a:pt x="2868198" y="85672"/>
+                  </a:lnTo>
+                  <a:lnTo>
+                    <a:pt x="2790564" y="83456"/>
+                  </a:lnTo>
+                  <a:lnTo>
+                    <a:pt x="2712930" y="81234"/>
+                  </a:lnTo>
+                  <a:lnTo>
+                    <a:pt x="2635295" y="79007"/>
+                  </a:lnTo>
+                  <a:lnTo>
+                    <a:pt x="2557661" y="76774"/>
+                  </a:lnTo>
+                  <a:lnTo>
+                    <a:pt x="2480027" y="74535"/>
+                  </a:lnTo>
+                  <a:lnTo>
+                    <a:pt x="2402393" y="72291"/>
+                  </a:lnTo>
+                  <a:lnTo>
+                    <a:pt x="2324759" y="70042"/>
+                  </a:lnTo>
+                  <a:lnTo>
+                    <a:pt x="2247125" y="67786"/>
+                  </a:lnTo>
+                  <a:lnTo>
+                    <a:pt x="2169491" y="65526"/>
+                  </a:lnTo>
+                  <a:lnTo>
+                    <a:pt x="2091857" y="63259"/>
+                  </a:lnTo>
+                  <a:lnTo>
+                    <a:pt x="2014223" y="60987"/>
+                  </a:lnTo>
+                  <a:lnTo>
+                    <a:pt x="1936589" y="58709"/>
+                  </a:lnTo>
+                  <a:lnTo>
+                    <a:pt x="1858955" y="56425"/>
+                  </a:lnTo>
+                  <a:lnTo>
+                    <a:pt x="1781321" y="54136"/>
+                  </a:lnTo>
+                  <a:lnTo>
+                    <a:pt x="1703687" y="51840"/>
+                  </a:lnTo>
+                  <a:lnTo>
+                    <a:pt x="1626053" y="49540"/>
+                  </a:lnTo>
+                  <a:lnTo>
+                    <a:pt x="1548419" y="47233"/>
+                  </a:lnTo>
+                  <a:lnTo>
+                    <a:pt x="1470785" y="44920"/>
+                  </a:lnTo>
+                  <a:lnTo>
+                    <a:pt x="1393151" y="42602"/>
+                  </a:lnTo>
+                  <a:lnTo>
+                    <a:pt x="1315517" y="40278"/>
+                  </a:lnTo>
+                  <a:lnTo>
+                    <a:pt x="1237883" y="37948"/>
+                  </a:lnTo>
+                  <a:lnTo>
+                    <a:pt x="1160249" y="35613"/>
+                  </a:lnTo>
+                  <a:lnTo>
+                    <a:pt x="1082615" y="33271"/>
+                  </a:lnTo>
+                  <a:lnTo>
+                    <a:pt x="1004981" y="30924"/>
+                  </a:lnTo>
+                  <a:lnTo>
+                    <a:pt x="927346" y="28570"/>
+                  </a:lnTo>
+                  <a:lnTo>
+                    <a:pt x="849712" y="26211"/>
+                  </a:lnTo>
+                  <a:lnTo>
+                    <a:pt x="772078" y="23846"/>
+                  </a:lnTo>
+                  <a:lnTo>
+                    <a:pt x="694444" y="21475"/>
+                  </a:lnTo>
+                  <a:lnTo>
+                    <a:pt x="616810" y="19098"/>
+                  </a:lnTo>
+                  <a:lnTo>
+                    <a:pt x="539176" y="16715"/>
+                  </a:lnTo>
+                  <a:lnTo>
+                    <a:pt x="461542" y="14326"/>
+                  </a:lnTo>
+                  <a:lnTo>
+                    <a:pt x="383908" y="11931"/>
+                  </a:lnTo>
+                  <a:lnTo>
+                    <a:pt x="306274" y="9530"/>
+                  </a:lnTo>
+                  <a:lnTo>
+                    <a:pt x="228640" y="7123"/>
+                  </a:lnTo>
+                  <a:lnTo>
+                    <a:pt x="151006" y="4710"/>
+                  </a:lnTo>
+                  <a:lnTo>
+                    <a:pt x="73372" y="2291"/>
                   </a:lnTo>
                   <a:lnTo>
                     <a:pt x="0" y="0"/>
@@ -4055,234 +4103,297 @@
           </p:nvSpPr>
           <p:spPr>
             <a:xfrm>
-              <a:off x="2550146" y="1896563"/>
-              <a:ext cx="5638344" cy="3625231"/>
+              <a:off x="962946" y="1896563"/>
+              <a:ext cx="7225544" cy="3503698"/>
             </a:xfrm>
             <a:custGeom>
               <a:avLst/>
               <a:pathLst>
-                <a:path w="5638344" h="3625231">
+                <a:path w="7225544" h="3503698">
                   <a:moveTo>
                     <a:pt x="0" y="0"/>
                   </a:moveTo>
                   <a:lnTo>
-                    <a:pt x="48693" y="152937"/>
-                  </a:lnTo>
-                  <a:lnTo>
-                    <a:pt x="126327" y="380891"/>
-                  </a:lnTo>
-                  <a:lnTo>
-                    <a:pt x="203961" y="593997"/>
-                  </a:lnTo>
-                  <a:lnTo>
-                    <a:pt x="281595" y="793222"/>
-                  </a:lnTo>
-                  <a:lnTo>
-                    <a:pt x="359229" y="979471"/>
-                  </a:lnTo>
-                  <a:lnTo>
-                    <a:pt x="436863" y="1153588"/>
-                  </a:lnTo>
-                  <a:lnTo>
-                    <a:pt x="514497" y="1316365"/>
-                  </a:lnTo>
-                  <a:lnTo>
-                    <a:pt x="592131" y="1468538"/>
-                  </a:lnTo>
-                  <a:lnTo>
-                    <a:pt x="669765" y="1610800"/>
-                  </a:lnTo>
-                  <a:lnTo>
-                    <a:pt x="747399" y="1743796"/>
-                  </a:lnTo>
-                  <a:lnTo>
-                    <a:pt x="825033" y="1868129"/>
-                  </a:lnTo>
-                  <a:lnTo>
-                    <a:pt x="902667" y="1984364"/>
-                  </a:lnTo>
-                  <a:lnTo>
-                    <a:pt x="980301" y="2093027"/>
-                  </a:lnTo>
-                  <a:lnTo>
-                    <a:pt x="1057935" y="2194613"/>
-                  </a:lnTo>
-                  <a:lnTo>
-                    <a:pt x="1135569" y="2289582"/>
-                  </a:lnTo>
-                  <a:lnTo>
-                    <a:pt x="1213203" y="2378365"/>
-                  </a:lnTo>
-                  <a:lnTo>
-                    <a:pt x="1290837" y="2461366"/>
-                  </a:lnTo>
-                  <a:lnTo>
-                    <a:pt x="1368471" y="2538960"/>
-                  </a:lnTo>
-                  <a:lnTo>
-                    <a:pt x="1446105" y="2611500"/>
-                  </a:lnTo>
-                  <a:lnTo>
-                    <a:pt x="1523739" y="2679315"/>
-                  </a:lnTo>
-                  <a:lnTo>
-                    <a:pt x="1601373" y="2742713"/>
-                  </a:lnTo>
-                  <a:lnTo>
-                    <a:pt x="1679008" y="2801981"/>
-                  </a:lnTo>
-                  <a:lnTo>
-                    <a:pt x="1756642" y="2857389"/>
-                  </a:lnTo>
-                  <a:lnTo>
-                    <a:pt x="1834276" y="2909188"/>
-                  </a:lnTo>
-                  <a:lnTo>
-                    <a:pt x="1911910" y="2957613"/>
-                  </a:lnTo>
-                  <a:lnTo>
-                    <a:pt x="1989544" y="3002884"/>
-                  </a:lnTo>
-                  <a:lnTo>
-                    <a:pt x="2067178" y="3045206"/>
-                  </a:lnTo>
-                  <a:lnTo>
-                    <a:pt x="2144812" y="3084772"/>
-                  </a:lnTo>
-                  <a:lnTo>
-                    <a:pt x="2222446" y="3121760"/>
-                  </a:lnTo>
-                  <a:lnTo>
-                    <a:pt x="2300080" y="3156339"/>
-                  </a:lnTo>
-                  <a:lnTo>
-                    <a:pt x="2377714" y="3188666"/>
-                  </a:lnTo>
-                  <a:lnTo>
-                    <a:pt x="2455348" y="3218887"/>
-                  </a:lnTo>
-                  <a:lnTo>
-                    <a:pt x="2532982" y="3247140"/>
-                  </a:lnTo>
-                  <a:lnTo>
-                    <a:pt x="2610616" y="3273553"/>
-                  </a:lnTo>
-                  <a:lnTo>
-                    <a:pt x="2688250" y="3298245"/>
-                  </a:lnTo>
-                  <a:lnTo>
-                    <a:pt x="2765884" y="3321328"/>
-                  </a:lnTo>
-                  <a:lnTo>
-                    <a:pt x="2843518" y="3342909"/>
-                  </a:lnTo>
-                  <a:lnTo>
-                    <a:pt x="2921152" y="3363083"/>
-                  </a:lnTo>
-                  <a:lnTo>
-                    <a:pt x="2998786" y="3381944"/>
-                  </a:lnTo>
-                  <a:lnTo>
-                    <a:pt x="3076420" y="3399576"/>
-                  </a:lnTo>
-                  <a:lnTo>
-                    <a:pt x="3154054" y="3416059"/>
-                  </a:lnTo>
-                  <a:lnTo>
-                    <a:pt x="3231688" y="3431469"/>
-                  </a:lnTo>
-                  <a:lnTo>
-                    <a:pt x="3309322" y="3445876"/>
-                  </a:lnTo>
-                  <a:lnTo>
-                    <a:pt x="3386956" y="3459343"/>
-                  </a:lnTo>
-                  <a:lnTo>
-                    <a:pt x="3464591" y="3471934"/>
-                  </a:lnTo>
-                  <a:lnTo>
-                    <a:pt x="3542225" y="3483705"/>
-                  </a:lnTo>
-                  <a:lnTo>
-                    <a:pt x="3619859" y="3494708"/>
-                  </a:lnTo>
-                  <a:lnTo>
-                    <a:pt x="3697493" y="3504996"/>
-                  </a:lnTo>
-                  <a:lnTo>
-                    <a:pt x="3775127" y="3514613"/>
-                  </a:lnTo>
-                  <a:lnTo>
-                    <a:pt x="3852761" y="3523603"/>
-                  </a:lnTo>
-                  <a:lnTo>
-                    <a:pt x="3930395" y="3532008"/>
-                  </a:lnTo>
-                  <a:lnTo>
-                    <a:pt x="4008029" y="3539866"/>
-                  </a:lnTo>
-                  <a:lnTo>
-                    <a:pt x="4085663" y="3547212"/>
-                  </a:lnTo>
-                  <a:lnTo>
-                    <a:pt x="4163297" y="3554079"/>
-                  </a:lnTo>
-                  <a:lnTo>
-                    <a:pt x="4240931" y="3560499"/>
-                  </a:lnTo>
-                  <a:lnTo>
-                    <a:pt x="4318565" y="3566501"/>
-                  </a:lnTo>
-                  <a:lnTo>
-                    <a:pt x="4396199" y="3572112"/>
-                  </a:lnTo>
-                  <a:lnTo>
-                    <a:pt x="4473833" y="3577357"/>
-                  </a:lnTo>
-                  <a:lnTo>
-                    <a:pt x="4551467" y="3582261"/>
-                  </a:lnTo>
-                  <a:lnTo>
-                    <a:pt x="4629101" y="3586845"/>
-                  </a:lnTo>
-                  <a:lnTo>
-                    <a:pt x="4706735" y="3591131"/>
-                  </a:lnTo>
-                  <a:lnTo>
-                    <a:pt x="4784369" y="3595138"/>
-                  </a:lnTo>
-                  <a:lnTo>
-                    <a:pt x="4862003" y="3598883"/>
-                  </a:lnTo>
-                  <a:lnTo>
-                    <a:pt x="4939637" y="3602385"/>
-                  </a:lnTo>
-                  <a:lnTo>
-                    <a:pt x="5017271" y="3605659"/>
-                  </a:lnTo>
-                  <a:lnTo>
-                    <a:pt x="5094905" y="3608719"/>
-                  </a:lnTo>
-                  <a:lnTo>
-                    <a:pt x="5172540" y="3611580"/>
-                  </a:lnTo>
-                  <a:lnTo>
-                    <a:pt x="5250174" y="3614255"/>
-                  </a:lnTo>
-                  <a:lnTo>
-                    <a:pt x="5327808" y="3616755"/>
-                  </a:lnTo>
-                  <a:lnTo>
-                    <a:pt x="5405442" y="3619093"/>
-                  </a:lnTo>
-                  <a:lnTo>
-                    <a:pt x="5483076" y="3621278"/>
-                  </a:lnTo>
-                  <a:lnTo>
-                    <a:pt x="5560710" y="3623321"/>
-                  </a:lnTo>
-                  <a:lnTo>
-                    <a:pt x="5638344" y="3625231"/>
+                    <a:pt x="5577" y="9155"/>
+                  </a:lnTo>
+                  <a:lnTo>
+                    <a:pt x="83212" y="132281"/>
+                  </a:lnTo>
+                  <a:lnTo>
+                    <a:pt x="160846" y="251246"/>
+                  </a:lnTo>
+                  <a:lnTo>
+                    <a:pt x="238480" y="366191"/>
+                  </a:lnTo>
+                  <a:lnTo>
+                    <a:pt x="316114" y="477251"/>
+                  </a:lnTo>
+                  <a:lnTo>
+                    <a:pt x="393748" y="584558"/>
+                  </a:lnTo>
+                  <a:lnTo>
+                    <a:pt x="471382" y="688239"/>
+                  </a:lnTo>
+                  <a:lnTo>
+                    <a:pt x="549016" y="788417"/>
+                  </a:lnTo>
+                  <a:lnTo>
+                    <a:pt x="626650" y="885209"/>
+                  </a:lnTo>
+                  <a:lnTo>
+                    <a:pt x="704284" y="978729"/>
+                  </a:lnTo>
+                  <a:lnTo>
+                    <a:pt x="781918" y="1069090"/>
+                  </a:lnTo>
+                  <a:lnTo>
+                    <a:pt x="859552" y="1156397"/>
+                  </a:lnTo>
+                  <a:lnTo>
+                    <a:pt x="937186" y="1240754"/>
+                  </a:lnTo>
+                  <a:lnTo>
+                    <a:pt x="1014820" y="1322260"/>
+                  </a:lnTo>
+                  <a:lnTo>
+                    <a:pt x="1092454" y="1401011"/>
+                  </a:lnTo>
+                  <a:lnTo>
+                    <a:pt x="1170088" y="1477101"/>
+                  </a:lnTo>
+                  <a:lnTo>
+                    <a:pt x="1247722" y="1550620"/>
+                  </a:lnTo>
+                  <a:lnTo>
+                    <a:pt x="1325356" y="1621655"/>
+                  </a:lnTo>
+                  <a:lnTo>
+                    <a:pt x="1402990" y="1690289"/>
+                  </a:lnTo>
+                  <a:lnTo>
+                    <a:pt x="1480624" y="1756603"/>
+                  </a:lnTo>
+                  <a:lnTo>
+                    <a:pt x="1558258" y="1820677"/>
+                  </a:lnTo>
+                  <a:lnTo>
+                    <a:pt x="1635892" y="1882585"/>
+                  </a:lnTo>
+                  <a:lnTo>
+                    <a:pt x="1713526" y="1942401"/>
+                  </a:lnTo>
+                  <a:lnTo>
+                    <a:pt x="1791161" y="2000196"/>
+                  </a:lnTo>
+                  <a:lnTo>
+                    <a:pt x="1868795" y="2056038"/>
+                  </a:lnTo>
+                  <a:lnTo>
+                    <a:pt x="1946429" y="2109993"/>
+                  </a:lnTo>
+                  <a:lnTo>
+                    <a:pt x="2024063" y="2162124"/>
+                  </a:lnTo>
+                  <a:lnTo>
+                    <a:pt x="2101697" y="2212494"/>
+                  </a:lnTo>
+                  <a:lnTo>
+                    <a:pt x="2179331" y="2261161"/>
+                  </a:lnTo>
+                  <a:lnTo>
+                    <a:pt x="2256965" y="2308184"/>
+                  </a:lnTo>
+                  <a:lnTo>
+                    <a:pt x="2334599" y="2353618"/>
+                  </a:lnTo>
+                  <a:lnTo>
+                    <a:pt x="2412233" y="2397517"/>
+                  </a:lnTo>
+                  <a:lnTo>
+                    <a:pt x="2489867" y="2439931"/>
+                  </a:lnTo>
+                  <a:lnTo>
+                    <a:pt x="2567501" y="2480913"/>
+                  </a:lnTo>
+                  <a:lnTo>
+                    <a:pt x="2645135" y="2520510"/>
+                  </a:lnTo>
+                  <a:lnTo>
+                    <a:pt x="2722769" y="2558768"/>
+                  </a:lnTo>
+                  <a:lnTo>
+                    <a:pt x="2800403" y="2595734"/>
+                  </a:lnTo>
+                  <a:lnTo>
+                    <a:pt x="2878037" y="2631451"/>
+                  </a:lnTo>
+                  <a:lnTo>
+                    <a:pt x="2955671" y="2665960"/>
+                  </a:lnTo>
+                  <a:lnTo>
+                    <a:pt x="3033305" y="2699304"/>
+                  </a:lnTo>
+                  <a:lnTo>
+                    <a:pt x="3110939" y="2731520"/>
+                  </a:lnTo>
+                  <a:lnTo>
+                    <a:pt x="3188573" y="2762648"/>
+                  </a:lnTo>
+                  <a:lnTo>
+                    <a:pt x="3266207" y="2792724"/>
+                  </a:lnTo>
+                  <a:lnTo>
+                    <a:pt x="3343841" y="2821784"/>
+                  </a:lnTo>
+                  <a:lnTo>
+                    <a:pt x="3421475" y="2849861"/>
+                  </a:lnTo>
+                  <a:lnTo>
+                    <a:pt x="3499109" y="2876990"/>
+                  </a:lnTo>
+                  <a:lnTo>
+                    <a:pt x="3576744" y="2903202"/>
+                  </a:lnTo>
+                  <a:lnTo>
+                    <a:pt x="3654378" y="2928528"/>
+                  </a:lnTo>
+                  <a:lnTo>
+                    <a:pt x="3732012" y="2952998"/>
+                  </a:lnTo>
+                  <a:lnTo>
+                    <a:pt x="3809646" y="2976642"/>
+                  </a:lnTo>
+                  <a:lnTo>
+                    <a:pt x="3887280" y="2999486"/>
+                  </a:lnTo>
+                  <a:lnTo>
+                    <a:pt x="3964914" y="3021558"/>
+                  </a:lnTo>
+                  <a:lnTo>
+                    <a:pt x="4042548" y="3042885"/>
+                  </a:lnTo>
+                  <a:lnTo>
+                    <a:pt x="4120182" y="3063491"/>
+                  </a:lnTo>
+                  <a:lnTo>
+                    <a:pt x="4197816" y="3083400"/>
+                  </a:lnTo>
+                  <a:lnTo>
+                    <a:pt x="4275450" y="3102637"/>
+                  </a:lnTo>
+                  <a:lnTo>
+                    <a:pt x="4353084" y="3121223"/>
+                  </a:lnTo>
+                  <a:lnTo>
+                    <a:pt x="4430718" y="3139182"/>
+                  </a:lnTo>
+                  <a:lnTo>
+                    <a:pt x="4508352" y="3156533"/>
+                  </a:lnTo>
+                  <a:lnTo>
+                    <a:pt x="4585986" y="3173299"/>
+                  </a:lnTo>
+                  <a:lnTo>
+                    <a:pt x="4663620" y="3189497"/>
+                  </a:lnTo>
+                  <a:lnTo>
+                    <a:pt x="4741254" y="3205149"/>
+                  </a:lnTo>
+                  <a:lnTo>
+                    <a:pt x="4818888" y="3220271"/>
+                  </a:lnTo>
+                  <a:lnTo>
+                    <a:pt x="4896522" y="3234882"/>
+                  </a:lnTo>
+                  <a:lnTo>
+                    <a:pt x="4974156" y="3249000"/>
+                  </a:lnTo>
+                  <a:lnTo>
+                    <a:pt x="5051790" y="3262640"/>
+                  </a:lnTo>
+                  <a:lnTo>
+                    <a:pt x="5129424" y="3275820"/>
+                  </a:lnTo>
+                  <a:lnTo>
+                    <a:pt x="5207058" y="3288554"/>
+                  </a:lnTo>
+                  <a:lnTo>
+                    <a:pt x="5284693" y="3300858"/>
+                  </a:lnTo>
+                  <a:lnTo>
+                    <a:pt x="5362327" y="3312746"/>
+                  </a:lnTo>
+                  <a:lnTo>
+                    <a:pt x="5439961" y="3324232"/>
+                  </a:lnTo>
+                  <a:lnTo>
+                    <a:pt x="5517595" y="3335330"/>
+                  </a:lnTo>
+                  <a:lnTo>
+                    <a:pt x="5595229" y="3346053"/>
+                  </a:lnTo>
+                  <a:lnTo>
+                    <a:pt x="5672863" y="3356414"/>
+                  </a:lnTo>
+                  <a:lnTo>
+                    <a:pt x="5750497" y="3366425"/>
+                  </a:lnTo>
+                  <a:lnTo>
+                    <a:pt x="5828131" y="3376097"/>
+                  </a:lnTo>
+                  <a:lnTo>
+                    <a:pt x="5905765" y="3385442"/>
+                  </a:lnTo>
+                  <a:lnTo>
+                    <a:pt x="5983399" y="3394472"/>
+                  </a:lnTo>
+                  <a:lnTo>
+                    <a:pt x="6061033" y="3403196"/>
+                  </a:lnTo>
+                  <a:lnTo>
+                    <a:pt x="6138667" y="3411626"/>
+                  </a:lnTo>
+                  <a:lnTo>
+                    <a:pt x="6216301" y="3419771"/>
+                  </a:lnTo>
+                  <a:lnTo>
+                    <a:pt x="6293935" y="3427640"/>
+                  </a:lnTo>
+                  <a:lnTo>
+                    <a:pt x="6371569" y="3435244"/>
+                  </a:lnTo>
+                  <a:lnTo>
+                    <a:pt x="6449203" y="3442591"/>
+                  </a:lnTo>
+                  <a:lnTo>
+                    <a:pt x="6526837" y="3449689"/>
+                  </a:lnTo>
+                  <a:lnTo>
+                    <a:pt x="6604471" y="3456548"/>
+                  </a:lnTo>
+                  <a:lnTo>
+                    <a:pt x="6682105" y="3463174"/>
+                  </a:lnTo>
+                  <a:lnTo>
+                    <a:pt x="6759739" y="3469577"/>
+                  </a:lnTo>
+                  <a:lnTo>
+                    <a:pt x="6837373" y="3475764"/>
+                  </a:lnTo>
+                  <a:lnTo>
+                    <a:pt x="6915007" y="3481741"/>
+                  </a:lnTo>
+                  <a:lnTo>
+                    <a:pt x="6992642" y="3487516"/>
+                  </a:lnTo>
+                  <a:lnTo>
+                    <a:pt x="7070276" y="3493096"/>
+                  </a:lnTo>
+                  <a:lnTo>
+                    <a:pt x="7147910" y="3498488"/>
+                  </a:lnTo>
+                  <a:lnTo>
+                    <a:pt x="7225544" y="3503698"/>
                   </a:lnTo>
                 </a:path>
               </a:pathLst>

--- a/docs/plots/carbo/jx_carbo_linsubhr_ratio_hosp4.pptx
+++ b/docs/plots/carbo/jx_carbo_linsubhr_ratio_hosp4.pptx
@@ -3003,521 +3003,500 @@
           <p:spPr>
             <a:xfrm>
               <a:off x="817517" y="1896563"/>
-              <a:ext cx="7370972" cy="3623637"/>
+              <a:ext cx="7370972" cy="3648550"/>
             </a:xfrm>
             <a:custGeom>
               <a:avLst/>
               <a:pathLst>
-                <a:path w="7370972" h="3623637">
+                <a:path w="7370972" h="3648550">
                   <a:moveTo>
-                    <a:pt x="1704559" y="0"/>
+                    <a:pt x="2319301" y="0"/>
                   </a:moveTo>
                   <a:lnTo>
-                    <a:pt x="1781321" y="231690"/>
-                  </a:lnTo>
-                  <a:lnTo>
-                    <a:pt x="1858955" y="450991"/>
-                  </a:lnTo>
-                  <a:lnTo>
-                    <a:pt x="1936589" y="656234"/>
-                  </a:lnTo>
-                  <a:lnTo>
-                    <a:pt x="2014223" y="848319"/>
-                  </a:lnTo>
-                  <a:lnTo>
-                    <a:pt x="2091857" y="1028091"/>
-                  </a:lnTo>
-                  <a:lnTo>
-                    <a:pt x="2169491" y="1196339"/>
-                  </a:lnTo>
-                  <a:lnTo>
-                    <a:pt x="2247125" y="1353801"/>
-                  </a:lnTo>
-                  <a:lnTo>
-                    <a:pt x="2324759" y="1501169"/>
-                  </a:lnTo>
-                  <a:lnTo>
-                    <a:pt x="2402393" y="1639090"/>
-                  </a:lnTo>
-                  <a:lnTo>
-                    <a:pt x="2480027" y="1768169"/>
-                  </a:lnTo>
-                  <a:lnTo>
-                    <a:pt x="2557661" y="1888974"/>
-                  </a:lnTo>
-                  <a:lnTo>
-                    <a:pt x="2635295" y="2002035"/>
-                  </a:lnTo>
-                  <a:lnTo>
-                    <a:pt x="2712930" y="2107847"/>
-                  </a:lnTo>
-                  <a:lnTo>
-                    <a:pt x="2790564" y="2206877"/>
-                  </a:lnTo>
-                  <a:lnTo>
-                    <a:pt x="2868198" y="2299558"/>
-                  </a:lnTo>
-                  <a:lnTo>
-                    <a:pt x="2945832" y="2386298"/>
-                  </a:lnTo>
-                  <a:lnTo>
-                    <a:pt x="3023466" y="2467477"/>
-                  </a:lnTo>
-                  <a:lnTo>
-                    <a:pt x="3101100" y="2543453"/>
-                  </a:lnTo>
-                  <a:lnTo>
-                    <a:pt x="3178734" y="2614558"/>
-                  </a:lnTo>
-                  <a:lnTo>
-                    <a:pt x="3256368" y="2681105"/>
-                  </a:lnTo>
-                  <a:lnTo>
-                    <a:pt x="3334002" y="2743385"/>
-                  </a:lnTo>
-                  <a:lnTo>
-                    <a:pt x="3411636" y="2783680"/>
-                  </a:lnTo>
-                  <a:lnTo>
-                    <a:pt x="3489270" y="2785853"/>
-                  </a:lnTo>
-                  <a:lnTo>
-                    <a:pt x="3566904" y="2788019"/>
-                  </a:lnTo>
-                  <a:lnTo>
-                    <a:pt x="3644538" y="2790181"/>
-                  </a:lnTo>
-                  <a:lnTo>
-                    <a:pt x="3722172" y="2792337"/>
-                  </a:lnTo>
-                  <a:lnTo>
-                    <a:pt x="3799806" y="2794487"/>
-                  </a:lnTo>
-                  <a:lnTo>
-                    <a:pt x="3877440" y="2796632"/>
-                  </a:lnTo>
-                  <a:lnTo>
-                    <a:pt x="3955074" y="2798772"/>
-                  </a:lnTo>
-                  <a:lnTo>
-                    <a:pt x="4032708" y="2800906"/>
-                  </a:lnTo>
-                  <a:lnTo>
-                    <a:pt x="4110342" y="2803036"/>
-                  </a:lnTo>
-                  <a:lnTo>
-                    <a:pt x="4187976" y="2805159"/>
-                  </a:lnTo>
-                  <a:lnTo>
-                    <a:pt x="4265610" y="2807278"/>
-                  </a:lnTo>
-                  <a:lnTo>
-                    <a:pt x="4343244" y="2809391"/>
-                  </a:lnTo>
-                  <a:lnTo>
-                    <a:pt x="4420879" y="2811499"/>
-                  </a:lnTo>
-                  <a:lnTo>
-                    <a:pt x="4498513" y="2813602"/>
-                  </a:lnTo>
-                  <a:lnTo>
-                    <a:pt x="4576147" y="2815699"/>
-                  </a:lnTo>
-                  <a:lnTo>
-                    <a:pt x="4653781" y="2817791"/>
-                  </a:lnTo>
-                  <a:lnTo>
-                    <a:pt x="4731415" y="2819878"/>
-                  </a:lnTo>
-                  <a:lnTo>
-                    <a:pt x="4809049" y="2821960"/>
-                  </a:lnTo>
-                  <a:lnTo>
-                    <a:pt x="4886683" y="2824036"/>
-                  </a:lnTo>
-                  <a:lnTo>
-                    <a:pt x="4964317" y="2826108"/>
-                  </a:lnTo>
-                  <a:lnTo>
-                    <a:pt x="5041951" y="2828174"/>
-                  </a:lnTo>
-                  <a:lnTo>
-                    <a:pt x="5119585" y="2830235"/>
-                  </a:lnTo>
-                  <a:lnTo>
-                    <a:pt x="5197219" y="2832290"/>
-                  </a:lnTo>
-                  <a:lnTo>
-                    <a:pt x="5274853" y="2834341"/>
-                  </a:lnTo>
-                  <a:lnTo>
-                    <a:pt x="5352487" y="2836387"/>
-                  </a:lnTo>
-                  <a:lnTo>
-                    <a:pt x="5430121" y="2838427"/>
-                  </a:lnTo>
-                  <a:lnTo>
-                    <a:pt x="5507755" y="2840462"/>
-                  </a:lnTo>
-                  <a:lnTo>
-                    <a:pt x="5585389" y="2842493"/>
-                  </a:lnTo>
-                  <a:lnTo>
-                    <a:pt x="5663023" y="2844518"/>
-                  </a:lnTo>
-                  <a:lnTo>
-                    <a:pt x="5740657" y="2846538"/>
-                  </a:lnTo>
-                  <a:lnTo>
-                    <a:pt x="5818291" y="2848553"/>
-                  </a:lnTo>
-                  <a:lnTo>
-                    <a:pt x="5895925" y="2850563"/>
-                  </a:lnTo>
-                  <a:lnTo>
-                    <a:pt x="5973559" y="2852568"/>
-                  </a:lnTo>
-                  <a:lnTo>
-                    <a:pt x="6051193" y="2854568"/>
-                  </a:lnTo>
-                  <a:lnTo>
-                    <a:pt x="6128827" y="2856563"/>
-                  </a:lnTo>
-                  <a:lnTo>
-                    <a:pt x="6206462" y="2858553"/>
-                  </a:lnTo>
-                  <a:lnTo>
-                    <a:pt x="6284096" y="2860538"/>
-                  </a:lnTo>
-                  <a:lnTo>
-                    <a:pt x="6361730" y="2862518"/>
-                  </a:lnTo>
-                  <a:lnTo>
-                    <a:pt x="6439364" y="2864493"/>
-                  </a:lnTo>
-                  <a:lnTo>
-                    <a:pt x="6516998" y="2866463"/>
-                  </a:lnTo>
-                  <a:lnTo>
-                    <a:pt x="6594632" y="2868428"/>
-                  </a:lnTo>
-                  <a:lnTo>
-                    <a:pt x="6672266" y="2870389"/>
-                  </a:lnTo>
-                  <a:lnTo>
-                    <a:pt x="6749900" y="2872344"/>
-                  </a:lnTo>
-                  <a:lnTo>
-                    <a:pt x="6827534" y="2874295"/>
-                  </a:lnTo>
-                  <a:lnTo>
-                    <a:pt x="6905168" y="2876240"/>
-                  </a:lnTo>
-                  <a:lnTo>
-                    <a:pt x="6982802" y="2878181"/>
-                  </a:lnTo>
-                  <a:lnTo>
-                    <a:pt x="7060436" y="2880117"/>
-                  </a:lnTo>
-                  <a:lnTo>
-                    <a:pt x="7138070" y="2882048"/>
-                  </a:lnTo>
-                  <a:lnTo>
-                    <a:pt x="7215704" y="2883975"/>
-                  </a:lnTo>
-                  <a:lnTo>
-                    <a:pt x="7293338" y="2885896"/>
-                  </a:lnTo>
-                  <a:lnTo>
-                    <a:pt x="7370972" y="2887813"/>
-                  </a:lnTo>
-                  <a:lnTo>
-                    <a:pt x="7370972" y="3623637"/>
-                  </a:lnTo>
-                  <a:lnTo>
-                    <a:pt x="7293338" y="3621650"/>
-                  </a:lnTo>
-                  <a:lnTo>
-                    <a:pt x="7215704" y="3619527"/>
-                  </a:lnTo>
-                  <a:lnTo>
-                    <a:pt x="7138070" y="3617259"/>
-                  </a:lnTo>
-                  <a:lnTo>
-                    <a:pt x="7060436" y="3614835"/>
-                  </a:lnTo>
-                  <a:lnTo>
-                    <a:pt x="6982802" y="3612246"/>
-                  </a:lnTo>
-                  <a:lnTo>
-                    <a:pt x="6905168" y="3609479"/>
-                  </a:lnTo>
-                  <a:lnTo>
-                    <a:pt x="6827534" y="3606522"/>
-                  </a:lnTo>
-                  <a:lnTo>
-                    <a:pt x="6749900" y="3603363"/>
-                  </a:lnTo>
-                  <a:lnTo>
-                    <a:pt x="6672266" y="3599987"/>
-                  </a:lnTo>
-                  <a:lnTo>
-                    <a:pt x="6594632" y="3596381"/>
-                  </a:lnTo>
-                  <a:lnTo>
-                    <a:pt x="6516998" y="3592527"/>
-                  </a:lnTo>
-                  <a:lnTo>
-                    <a:pt x="6439364" y="3588409"/>
-                  </a:lnTo>
-                  <a:lnTo>
-                    <a:pt x="6361730" y="3584009"/>
-                  </a:lnTo>
-                  <a:lnTo>
-                    <a:pt x="6284096" y="3579308"/>
-                  </a:lnTo>
-                  <a:lnTo>
-                    <a:pt x="6206462" y="3574285"/>
-                  </a:lnTo>
-                  <a:lnTo>
-                    <a:pt x="6128827" y="3568918"/>
-                  </a:lnTo>
-                  <a:lnTo>
-                    <a:pt x="6051193" y="3563183"/>
-                  </a:lnTo>
-                  <a:lnTo>
-                    <a:pt x="5973559" y="3557055"/>
-                  </a:lnTo>
-                  <a:lnTo>
-                    <a:pt x="5895925" y="3550507"/>
-                  </a:lnTo>
-                  <a:lnTo>
-                    <a:pt x="5818291" y="3543512"/>
-                  </a:lnTo>
-                  <a:lnTo>
-                    <a:pt x="5740657" y="3536036"/>
-                  </a:lnTo>
-                  <a:lnTo>
-                    <a:pt x="5663023" y="3528049"/>
-                  </a:lnTo>
-                  <a:lnTo>
-                    <a:pt x="5585389" y="3519515"/>
-                  </a:lnTo>
-                  <a:lnTo>
-                    <a:pt x="5507755" y="3510396"/>
-                  </a:lnTo>
-                  <a:lnTo>
-                    <a:pt x="5430121" y="3500653"/>
-                  </a:lnTo>
-                  <a:lnTo>
-                    <a:pt x="5352487" y="3490242"/>
-                  </a:lnTo>
-                  <a:lnTo>
-                    <a:pt x="5274853" y="3479118"/>
-                  </a:lnTo>
-                  <a:lnTo>
-                    <a:pt x="5197219" y="3467232"/>
-                  </a:lnTo>
-                  <a:lnTo>
-                    <a:pt x="5119585" y="3454533"/>
-                  </a:lnTo>
-                  <a:lnTo>
-                    <a:pt x="5041951" y="3440963"/>
-                  </a:lnTo>
-                  <a:lnTo>
-                    <a:pt x="4964317" y="3426463"/>
-                  </a:lnTo>
-                  <a:lnTo>
-                    <a:pt x="4886683" y="3410971"/>
-                  </a:lnTo>
-                  <a:lnTo>
-                    <a:pt x="4809049" y="3394417"/>
-                  </a:lnTo>
-                  <a:lnTo>
-                    <a:pt x="4731415" y="3376730"/>
-                  </a:lnTo>
-                  <a:lnTo>
-                    <a:pt x="4653781" y="3357831"/>
-                  </a:lnTo>
-                  <a:lnTo>
-                    <a:pt x="4576147" y="3337637"/>
-                  </a:lnTo>
-                  <a:lnTo>
-                    <a:pt x="4498513" y="3316060"/>
-                  </a:lnTo>
-                  <a:lnTo>
-                    <a:pt x="4420879" y="3293006"/>
-                  </a:lnTo>
-                  <a:lnTo>
-                    <a:pt x="4343244" y="3268372"/>
-                  </a:lnTo>
-                  <a:lnTo>
-                    <a:pt x="4265610" y="3242051"/>
-                  </a:lnTo>
-                  <a:lnTo>
-                    <a:pt x="4187976" y="3213927"/>
-                  </a:lnTo>
-                  <a:lnTo>
-                    <a:pt x="4110342" y="3183876"/>
-                  </a:lnTo>
-                  <a:lnTo>
-                    <a:pt x="4032708" y="3151767"/>
-                  </a:lnTo>
-                  <a:lnTo>
-                    <a:pt x="3955074" y="3117459"/>
-                  </a:lnTo>
-                  <a:lnTo>
-                    <a:pt x="3877440" y="3080801"/>
-                  </a:lnTo>
-                  <a:lnTo>
-                    <a:pt x="3799806" y="3041632"/>
-                  </a:lnTo>
-                  <a:lnTo>
-                    <a:pt x="3722172" y="2999780"/>
-                  </a:lnTo>
-                  <a:lnTo>
-                    <a:pt x="3644538" y="2955062"/>
-                  </a:lnTo>
-                  <a:lnTo>
-                    <a:pt x="3566904" y="2907280"/>
-                  </a:lnTo>
-                  <a:lnTo>
-                    <a:pt x="3489270" y="2856225"/>
-                  </a:lnTo>
-                  <a:lnTo>
-                    <a:pt x="3411636" y="2801674"/>
-                  </a:lnTo>
-                  <a:lnTo>
-                    <a:pt x="3334002" y="2781503"/>
-                  </a:lnTo>
-                  <a:lnTo>
-                    <a:pt x="3256368" y="2779320"/>
-                  </a:lnTo>
-                  <a:lnTo>
-                    <a:pt x="3178734" y="2777131"/>
-                  </a:lnTo>
-                  <a:lnTo>
-                    <a:pt x="3101100" y="2774937"/>
-                  </a:lnTo>
-                  <a:lnTo>
-                    <a:pt x="3023466" y="2772738"/>
-                  </a:lnTo>
-                  <a:lnTo>
-                    <a:pt x="2945832" y="2770532"/>
-                  </a:lnTo>
-                  <a:lnTo>
-                    <a:pt x="2868198" y="2768322"/>
-                  </a:lnTo>
-                  <a:lnTo>
-                    <a:pt x="2790564" y="2766106"/>
-                  </a:lnTo>
-                  <a:lnTo>
-                    <a:pt x="2712930" y="2763884"/>
-                  </a:lnTo>
-                  <a:lnTo>
-                    <a:pt x="2635295" y="2761657"/>
-                  </a:lnTo>
-                  <a:lnTo>
-                    <a:pt x="2557661" y="2759424"/>
-                  </a:lnTo>
-                  <a:lnTo>
-                    <a:pt x="2480027" y="2757186"/>
-                  </a:lnTo>
-                  <a:lnTo>
-                    <a:pt x="2402393" y="2754942"/>
-                  </a:lnTo>
-                  <a:lnTo>
-                    <a:pt x="2324759" y="2752692"/>
-                  </a:lnTo>
-                  <a:lnTo>
-                    <a:pt x="2247125" y="2750437"/>
-                  </a:lnTo>
-                  <a:lnTo>
-                    <a:pt x="2169491" y="2748176"/>
-                  </a:lnTo>
-                  <a:lnTo>
-                    <a:pt x="2091857" y="2745909"/>
-                  </a:lnTo>
-                  <a:lnTo>
-                    <a:pt x="2014223" y="2743637"/>
-                  </a:lnTo>
-                  <a:lnTo>
-                    <a:pt x="1936589" y="2741359"/>
-                  </a:lnTo>
-                  <a:lnTo>
-                    <a:pt x="1858955" y="2739075"/>
-                  </a:lnTo>
-                  <a:lnTo>
-                    <a:pt x="1781321" y="2736786"/>
-                  </a:lnTo>
-                  <a:lnTo>
-                    <a:pt x="1703687" y="2734491"/>
-                  </a:lnTo>
-                  <a:lnTo>
-                    <a:pt x="1626053" y="2732190"/>
-                  </a:lnTo>
-                  <a:lnTo>
-                    <a:pt x="1548419" y="2729883"/>
-                  </a:lnTo>
-                  <a:lnTo>
-                    <a:pt x="1470785" y="2727571"/>
-                  </a:lnTo>
-                  <a:lnTo>
-                    <a:pt x="1393151" y="2725253"/>
-                  </a:lnTo>
-                  <a:lnTo>
-                    <a:pt x="1315517" y="2722928"/>
-                  </a:lnTo>
-                  <a:lnTo>
-                    <a:pt x="1237883" y="2720599"/>
-                  </a:lnTo>
-                  <a:lnTo>
-                    <a:pt x="1160249" y="2718263"/>
-                  </a:lnTo>
-                  <a:lnTo>
-                    <a:pt x="1082615" y="2715921"/>
-                  </a:lnTo>
-                  <a:lnTo>
-                    <a:pt x="1004981" y="2713574"/>
-                  </a:lnTo>
-                  <a:lnTo>
-                    <a:pt x="927346" y="2711221"/>
-                  </a:lnTo>
-                  <a:lnTo>
-                    <a:pt x="849712" y="2708861"/>
-                  </a:lnTo>
-                  <a:lnTo>
-                    <a:pt x="772078" y="2706496"/>
-                  </a:lnTo>
-                  <a:lnTo>
-                    <a:pt x="694444" y="2704125"/>
-                  </a:lnTo>
-                  <a:lnTo>
-                    <a:pt x="616810" y="2701748"/>
-                  </a:lnTo>
-                  <a:lnTo>
-                    <a:pt x="539176" y="2699365"/>
-                  </a:lnTo>
-                  <a:lnTo>
-                    <a:pt x="461542" y="2696976"/>
-                  </a:lnTo>
-                  <a:lnTo>
-                    <a:pt x="383908" y="2694582"/>
-                  </a:lnTo>
-                  <a:lnTo>
-                    <a:pt x="306274" y="2692181"/>
-                  </a:lnTo>
-                  <a:lnTo>
-                    <a:pt x="228640" y="2689774"/>
-                  </a:lnTo>
-                  <a:lnTo>
-                    <a:pt x="151006" y="2687361"/>
-                  </a:lnTo>
-                  <a:lnTo>
-                    <a:pt x="73372" y="2684942"/>
-                  </a:lnTo>
-                  <a:lnTo>
-                    <a:pt x="0" y="2682650"/>
+                    <a:pt x="2324759" y="28042"/>
+                  </a:lnTo>
+                  <a:lnTo>
+                    <a:pt x="2402393" y="387378"/>
+                  </a:lnTo>
+                  <a:lnTo>
+                    <a:pt x="2480027" y="711090"/>
+                  </a:lnTo>
+                  <a:lnTo>
+                    <a:pt x="2557661" y="1002710"/>
+                  </a:lnTo>
+                  <a:lnTo>
+                    <a:pt x="2635295" y="1265419"/>
+                  </a:lnTo>
+                  <a:lnTo>
+                    <a:pt x="2712930" y="1502083"/>
+                  </a:lnTo>
+                  <a:lnTo>
+                    <a:pt x="2790564" y="1715286"/>
+                  </a:lnTo>
+                  <a:lnTo>
+                    <a:pt x="2868198" y="1907351"/>
+                  </a:lnTo>
+                  <a:lnTo>
+                    <a:pt x="2945832" y="2080376"/>
+                  </a:lnTo>
+                  <a:lnTo>
+                    <a:pt x="3023466" y="2236248"/>
+                  </a:lnTo>
+                  <a:lnTo>
+                    <a:pt x="3101100" y="2376666"/>
+                  </a:lnTo>
+                  <a:lnTo>
+                    <a:pt x="3178734" y="2503164"/>
+                  </a:lnTo>
+                  <a:lnTo>
+                    <a:pt x="3256368" y="2617121"/>
+                  </a:lnTo>
+                  <a:lnTo>
+                    <a:pt x="3334002" y="2719781"/>
+                  </a:lnTo>
+                  <a:lnTo>
+                    <a:pt x="3411636" y="2788638"/>
+                  </a:lnTo>
+                  <a:lnTo>
+                    <a:pt x="3489270" y="2805691"/>
+                  </a:lnTo>
+                  <a:lnTo>
+                    <a:pt x="3566904" y="2822407"/>
+                  </a:lnTo>
+                  <a:lnTo>
+                    <a:pt x="3644538" y="2838794"/>
+                  </a:lnTo>
+                  <a:lnTo>
+                    <a:pt x="3722172" y="2854857"/>
+                  </a:lnTo>
+                  <a:lnTo>
+                    <a:pt x="3799806" y="2870603"/>
+                  </a:lnTo>
+                  <a:lnTo>
+                    <a:pt x="3877440" y="2886038"/>
+                  </a:lnTo>
+                  <a:lnTo>
+                    <a:pt x="3955074" y="2901169"/>
+                  </a:lnTo>
+                  <a:lnTo>
+                    <a:pt x="4032708" y="2916001"/>
+                  </a:lnTo>
+                  <a:lnTo>
+                    <a:pt x="4110342" y="2930540"/>
+                  </a:lnTo>
+                  <a:lnTo>
+                    <a:pt x="4187976" y="2944792"/>
+                  </a:lnTo>
+                  <a:lnTo>
+                    <a:pt x="4265610" y="2958763"/>
+                  </a:lnTo>
+                  <a:lnTo>
+                    <a:pt x="4343244" y="2972459"/>
+                  </a:lnTo>
+                  <a:lnTo>
+                    <a:pt x="4420879" y="2985884"/>
+                  </a:lnTo>
+                  <a:lnTo>
+                    <a:pt x="4498513" y="2999043"/>
+                  </a:lnTo>
+                  <a:lnTo>
+                    <a:pt x="4576147" y="3011944"/>
+                  </a:lnTo>
+                  <a:lnTo>
+                    <a:pt x="4653781" y="3024589"/>
+                  </a:lnTo>
+                  <a:lnTo>
+                    <a:pt x="4731415" y="3036985"/>
+                  </a:lnTo>
+                  <a:lnTo>
+                    <a:pt x="4809049" y="3049137"/>
+                  </a:lnTo>
+                  <a:lnTo>
+                    <a:pt x="4886683" y="3061048"/>
+                  </a:lnTo>
+                  <a:lnTo>
+                    <a:pt x="4964317" y="3072725"/>
+                  </a:lnTo>
+                  <a:lnTo>
+                    <a:pt x="5041951" y="3084171"/>
+                  </a:lnTo>
+                  <a:lnTo>
+                    <a:pt x="5119585" y="3095391"/>
+                  </a:lnTo>
+                  <a:lnTo>
+                    <a:pt x="5197219" y="3106389"/>
+                  </a:lnTo>
+                  <a:lnTo>
+                    <a:pt x="5274853" y="3117171"/>
+                  </a:lnTo>
+                  <a:lnTo>
+                    <a:pt x="5352487" y="3127739"/>
+                  </a:lnTo>
+                  <a:lnTo>
+                    <a:pt x="5430121" y="3138100"/>
+                  </a:lnTo>
+                  <a:lnTo>
+                    <a:pt x="5507755" y="3148255"/>
+                  </a:lnTo>
+                  <a:lnTo>
+                    <a:pt x="5585389" y="3158210"/>
+                  </a:lnTo>
+                  <a:lnTo>
+                    <a:pt x="5663023" y="3167969"/>
+                  </a:lnTo>
+                  <a:lnTo>
+                    <a:pt x="5740657" y="3177535"/>
+                  </a:lnTo>
+                  <a:lnTo>
+                    <a:pt x="5818291" y="3186912"/>
+                  </a:lnTo>
+                  <a:lnTo>
+                    <a:pt x="5895925" y="3196105"/>
+                  </a:lnTo>
+                  <a:lnTo>
+                    <a:pt x="5973559" y="3205115"/>
+                  </a:lnTo>
+                  <a:lnTo>
+                    <a:pt x="6051193" y="3213948"/>
+                  </a:lnTo>
+                  <a:lnTo>
+                    <a:pt x="6128827" y="3222607"/>
+                  </a:lnTo>
+                  <a:lnTo>
+                    <a:pt x="6206462" y="3231095"/>
+                  </a:lnTo>
+                  <a:lnTo>
+                    <a:pt x="6284096" y="3239415"/>
+                  </a:lnTo>
+                  <a:lnTo>
+                    <a:pt x="6361730" y="3247571"/>
+                  </a:lnTo>
+                  <a:lnTo>
+                    <a:pt x="6439364" y="3255566"/>
+                  </a:lnTo>
+                  <a:lnTo>
+                    <a:pt x="6516998" y="3263403"/>
+                  </a:lnTo>
+                  <a:lnTo>
+                    <a:pt x="6594632" y="3271085"/>
+                  </a:lnTo>
+                  <a:lnTo>
+                    <a:pt x="6672266" y="3278616"/>
+                  </a:lnTo>
+                  <a:lnTo>
+                    <a:pt x="6749900" y="3285999"/>
+                  </a:lnTo>
+                  <a:lnTo>
+                    <a:pt x="6827534" y="3293235"/>
+                  </a:lnTo>
+                  <a:lnTo>
+                    <a:pt x="6905168" y="3300329"/>
+                  </a:lnTo>
+                  <a:lnTo>
+                    <a:pt x="6982802" y="3307283"/>
+                  </a:lnTo>
+                  <a:lnTo>
+                    <a:pt x="7060436" y="3314099"/>
+                  </a:lnTo>
+                  <a:lnTo>
+                    <a:pt x="7138070" y="3320781"/>
+                  </a:lnTo>
+                  <a:lnTo>
+                    <a:pt x="7215704" y="3327331"/>
+                  </a:lnTo>
+                  <a:lnTo>
+                    <a:pt x="7293338" y="3333752"/>
+                  </a:lnTo>
+                  <a:lnTo>
+                    <a:pt x="7370972" y="3340046"/>
+                  </a:lnTo>
+                  <a:lnTo>
+                    <a:pt x="7370972" y="3648550"/>
+                  </a:lnTo>
+                  <a:lnTo>
+                    <a:pt x="7293338" y="3648100"/>
+                  </a:lnTo>
+                  <a:lnTo>
+                    <a:pt x="7215704" y="3647600"/>
+                  </a:lnTo>
+                  <a:lnTo>
+                    <a:pt x="7138070" y="3647045"/>
+                  </a:lnTo>
+                  <a:lnTo>
+                    <a:pt x="7060436" y="3646429"/>
+                  </a:lnTo>
+                  <a:lnTo>
+                    <a:pt x="6982802" y="3645745"/>
+                  </a:lnTo>
+                  <a:lnTo>
+                    <a:pt x="6905168" y="3644986"/>
+                  </a:lnTo>
+                  <a:lnTo>
+                    <a:pt x="6827534" y="3644143"/>
+                  </a:lnTo>
+                  <a:lnTo>
+                    <a:pt x="6749900" y="3643207"/>
+                  </a:lnTo>
+                  <a:lnTo>
+                    <a:pt x="6672266" y="3642169"/>
+                  </a:lnTo>
+                  <a:lnTo>
+                    <a:pt x="6594632" y="3641016"/>
+                  </a:lnTo>
+                  <a:lnTo>
+                    <a:pt x="6516998" y="3639737"/>
+                  </a:lnTo>
+                  <a:lnTo>
+                    <a:pt x="6439364" y="3638317"/>
+                  </a:lnTo>
+                  <a:lnTo>
+                    <a:pt x="6361730" y="3636740"/>
+                  </a:lnTo>
+                  <a:lnTo>
+                    <a:pt x="6284096" y="3634990"/>
+                  </a:lnTo>
+                  <a:lnTo>
+                    <a:pt x="6206462" y="3633047"/>
+                  </a:lnTo>
+                  <a:lnTo>
+                    <a:pt x="6128827" y="3630890"/>
+                  </a:lnTo>
+                  <a:lnTo>
+                    <a:pt x="6051193" y="3628497"/>
+                  </a:lnTo>
+                  <a:lnTo>
+                    <a:pt x="5973559" y="3625839"/>
+                  </a:lnTo>
+                  <a:lnTo>
+                    <a:pt x="5895925" y="3622890"/>
+                  </a:lnTo>
+                  <a:lnTo>
+                    <a:pt x="5818291" y="3619615"/>
+                  </a:lnTo>
+                  <a:lnTo>
+                    <a:pt x="5740657" y="3615981"/>
+                  </a:lnTo>
+                  <a:lnTo>
+                    <a:pt x="5663023" y="3611946"/>
+                  </a:lnTo>
+                  <a:lnTo>
+                    <a:pt x="5585389" y="3607467"/>
+                  </a:lnTo>
+                  <a:lnTo>
+                    <a:pt x="5507755" y="3602496"/>
+                  </a:lnTo>
+                  <a:lnTo>
+                    <a:pt x="5430121" y="3596977"/>
+                  </a:lnTo>
+                  <a:lnTo>
+                    <a:pt x="5352487" y="3590851"/>
+                  </a:lnTo>
+                  <a:lnTo>
+                    <a:pt x="5274853" y="3584051"/>
+                  </a:lnTo>
+                  <a:lnTo>
+                    <a:pt x="5197219" y="3576503"/>
+                  </a:lnTo>
+                  <a:lnTo>
+                    <a:pt x="5119585" y="3568124"/>
+                  </a:lnTo>
+                  <a:lnTo>
+                    <a:pt x="5041951" y="3558822"/>
+                  </a:lnTo>
+                  <a:lnTo>
+                    <a:pt x="4964317" y="3548498"/>
+                  </a:lnTo>
+                  <a:lnTo>
+                    <a:pt x="4886683" y="3537037"/>
+                  </a:lnTo>
+                  <a:lnTo>
+                    <a:pt x="4809049" y="3524314"/>
+                  </a:lnTo>
+                  <a:lnTo>
+                    <a:pt x="4731415" y="3510192"/>
+                  </a:lnTo>
+                  <a:lnTo>
+                    <a:pt x="4653781" y="3494516"/>
+                  </a:lnTo>
+                  <a:lnTo>
+                    <a:pt x="4576147" y="3477114"/>
+                  </a:lnTo>
+                  <a:lnTo>
+                    <a:pt x="4498513" y="3457797"/>
+                  </a:lnTo>
+                  <a:lnTo>
+                    <a:pt x="4420879" y="3436355"/>
+                  </a:lnTo>
+                  <a:lnTo>
+                    <a:pt x="4343244" y="3412553"/>
+                  </a:lnTo>
+                  <a:lnTo>
+                    <a:pt x="4265610" y="3386131"/>
+                  </a:lnTo>
+                  <a:lnTo>
+                    <a:pt x="4187976" y="3356802"/>
+                  </a:lnTo>
+                  <a:lnTo>
+                    <a:pt x="4110342" y="3324245"/>
+                  </a:lnTo>
+                  <a:lnTo>
+                    <a:pt x="4032708" y="3288106"/>
+                  </a:lnTo>
+                  <a:lnTo>
+                    <a:pt x="3955074" y="3247989"/>
+                  </a:lnTo>
+                  <a:lnTo>
+                    <a:pt x="3877440" y="3203458"/>
+                  </a:lnTo>
+                  <a:lnTo>
+                    <a:pt x="3799806" y="3154026"/>
+                  </a:lnTo>
+                  <a:lnTo>
+                    <a:pt x="3722172" y="3099154"/>
+                  </a:lnTo>
+                  <a:lnTo>
+                    <a:pt x="3644538" y="3038244"/>
+                  </a:lnTo>
+                  <a:lnTo>
+                    <a:pt x="3566904" y="2970631"/>
+                  </a:lnTo>
+                  <a:lnTo>
+                    <a:pt x="3489270" y="2895577"/>
+                  </a:lnTo>
+                  <a:lnTo>
+                    <a:pt x="3411636" y="2812263"/>
+                  </a:lnTo>
+                  <a:lnTo>
+                    <a:pt x="3334002" y="2771241"/>
+                  </a:lnTo>
+                  <a:lnTo>
+                    <a:pt x="3256368" y="2753495"/>
+                  </a:lnTo>
+                  <a:lnTo>
+                    <a:pt x="3178734" y="2735391"/>
+                  </a:lnTo>
+                  <a:lnTo>
+                    <a:pt x="3101100" y="2716922"/>
+                  </a:lnTo>
+                  <a:lnTo>
+                    <a:pt x="3023466" y="2698082"/>
+                  </a:lnTo>
+                  <a:lnTo>
+                    <a:pt x="2945832" y="2678862"/>
+                  </a:lnTo>
+                  <a:lnTo>
+                    <a:pt x="2868198" y="2659256"/>
+                  </a:lnTo>
+                  <a:lnTo>
+                    <a:pt x="2790564" y="2639254"/>
+                  </a:lnTo>
+                  <a:lnTo>
+                    <a:pt x="2712930" y="2618850"/>
+                  </a:lnTo>
+                  <a:lnTo>
+                    <a:pt x="2635295" y="2598035"/>
+                  </a:lnTo>
+                  <a:lnTo>
+                    <a:pt x="2557661" y="2576801"/>
+                  </a:lnTo>
+                  <a:lnTo>
+                    <a:pt x="2480027" y="2555139"/>
+                  </a:lnTo>
+                  <a:lnTo>
+                    <a:pt x="2402393" y="2533042"/>
+                  </a:lnTo>
+                  <a:lnTo>
+                    <a:pt x="2324759" y="2510499"/>
+                  </a:lnTo>
+                  <a:lnTo>
+                    <a:pt x="2247125" y="2487502"/>
+                  </a:lnTo>
+                  <a:lnTo>
+                    <a:pt x="2169491" y="2464043"/>
+                  </a:lnTo>
+                  <a:lnTo>
+                    <a:pt x="2091857" y="2440111"/>
+                  </a:lnTo>
+                  <a:lnTo>
+                    <a:pt x="2014223" y="2415697"/>
+                  </a:lnTo>
+                  <a:lnTo>
+                    <a:pt x="1936589" y="2390792"/>
+                  </a:lnTo>
+                  <a:lnTo>
+                    <a:pt x="1858955" y="2365385"/>
+                  </a:lnTo>
+                  <a:lnTo>
+                    <a:pt x="1781321" y="2339466"/>
+                  </a:lnTo>
+                  <a:lnTo>
+                    <a:pt x="1703687" y="2313026"/>
+                  </a:lnTo>
+                  <a:lnTo>
+                    <a:pt x="1626053" y="2286053"/>
+                  </a:lnTo>
+                  <a:lnTo>
+                    <a:pt x="1548419" y="2258538"/>
+                  </a:lnTo>
+                  <a:lnTo>
+                    <a:pt x="1470785" y="2230468"/>
+                  </a:lnTo>
+                  <a:lnTo>
+                    <a:pt x="1393151" y="2201833"/>
+                  </a:lnTo>
+                  <a:lnTo>
+                    <a:pt x="1315517" y="2172622"/>
+                  </a:lnTo>
+                  <a:lnTo>
+                    <a:pt x="1237883" y="2142822"/>
+                  </a:lnTo>
+                  <a:lnTo>
+                    <a:pt x="1160249" y="2112422"/>
+                  </a:lnTo>
+                  <a:lnTo>
+                    <a:pt x="1082615" y="2081411"/>
+                  </a:lnTo>
+                  <a:lnTo>
+                    <a:pt x="1004981" y="2049775"/>
+                  </a:lnTo>
+                  <a:lnTo>
+                    <a:pt x="927346" y="2017502"/>
+                  </a:lnTo>
+                  <a:lnTo>
+                    <a:pt x="849712" y="1984579"/>
+                  </a:lnTo>
+                  <a:lnTo>
+                    <a:pt x="772078" y="1950993"/>
+                  </a:lnTo>
+                  <a:lnTo>
+                    <a:pt x="694444" y="1916731"/>
+                  </a:lnTo>
+                  <a:lnTo>
+                    <a:pt x="616810" y="1881779"/>
+                  </a:lnTo>
+                  <a:lnTo>
+                    <a:pt x="539176" y="1846123"/>
+                  </a:lnTo>
+                  <a:lnTo>
+                    <a:pt x="461542" y="1809750"/>
+                  </a:lnTo>
+                  <a:lnTo>
+                    <a:pt x="383908" y="1772644"/>
+                  </a:lnTo>
+                  <a:lnTo>
+                    <a:pt x="306274" y="1734791"/>
+                  </a:lnTo>
+                  <a:lnTo>
+                    <a:pt x="228640" y="1696176"/>
+                  </a:lnTo>
+                  <a:lnTo>
+                    <a:pt x="151006" y="1656783"/>
+                  </a:lnTo>
+                  <a:lnTo>
+                    <a:pt x="73372" y="1616598"/>
+                  </a:lnTo>
+                  <a:lnTo>
+                    <a:pt x="0" y="1577853"/>
                   </a:lnTo>
                   <a:close/>
                 </a:path>
@@ -3543,234 +3522,213 @@
           </p:nvSpPr>
           <p:spPr>
             <a:xfrm>
-              <a:off x="2522077" y="1896563"/>
-              <a:ext cx="5666413" cy="2887813"/>
+              <a:off x="3136819" y="1896563"/>
+              <a:ext cx="5051670" cy="3340046"/>
             </a:xfrm>
             <a:custGeom>
               <a:avLst/>
               <a:pathLst>
-                <a:path w="5666413" h="2887813">
+                <a:path w="5051670" h="3340046">
                   <a:moveTo>
                     <a:pt x="0" y="0"/>
                   </a:moveTo>
                   <a:lnTo>
-                    <a:pt x="76761" y="231690"/>
-                  </a:lnTo>
-                  <a:lnTo>
-                    <a:pt x="154396" y="450991"/>
-                  </a:lnTo>
-                  <a:lnTo>
-                    <a:pt x="232030" y="656234"/>
-                  </a:lnTo>
-                  <a:lnTo>
-                    <a:pt x="309664" y="848319"/>
-                  </a:lnTo>
-                  <a:lnTo>
-                    <a:pt x="387298" y="1028091"/>
-                  </a:lnTo>
-                  <a:lnTo>
-                    <a:pt x="464932" y="1196339"/>
-                  </a:lnTo>
-                  <a:lnTo>
-                    <a:pt x="542566" y="1353801"/>
-                  </a:lnTo>
-                  <a:lnTo>
-                    <a:pt x="620200" y="1501169"/>
-                  </a:lnTo>
-                  <a:lnTo>
-                    <a:pt x="697834" y="1639090"/>
-                  </a:lnTo>
-                  <a:lnTo>
-                    <a:pt x="775468" y="1768169"/>
-                  </a:lnTo>
-                  <a:lnTo>
-                    <a:pt x="853102" y="1888974"/>
-                  </a:lnTo>
-                  <a:lnTo>
-                    <a:pt x="930736" y="2002035"/>
-                  </a:lnTo>
-                  <a:lnTo>
-                    <a:pt x="1008370" y="2107847"/>
-                  </a:lnTo>
-                  <a:lnTo>
-                    <a:pt x="1086004" y="2206877"/>
-                  </a:lnTo>
-                  <a:lnTo>
-                    <a:pt x="1163638" y="2299558"/>
-                  </a:lnTo>
-                  <a:lnTo>
-                    <a:pt x="1241272" y="2386298"/>
-                  </a:lnTo>
-                  <a:lnTo>
-                    <a:pt x="1318906" y="2467477"/>
-                  </a:lnTo>
-                  <a:lnTo>
-                    <a:pt x="1396540" y="2543453"/>
-                  </a:lnTo>
-                  <a:lnTo>
-                    <a:pt x="1474174" y="2614558"/>
-                  </a:lnTo>
-                  <a:lnTo>
-                    <a:pt x="1551808" y="2681105"/>
-                  </a:lnTo>
-                  <a:lnTo>
-                    <a:pt x="1629442" y="2743385"/>
-                  </a:lnTo>
-                  <a:lnTo>
-                    <a:pt x="1707076" y="2783680"/>
-                  </a:lnTo>
-                  <a:lnTo>
-                    <a:pt x="1784710" y="2785853"/>
-                  </a:lnTo>
-                  <a:lnTo>
-                    <a:pt x="1862345" y="2788019"/>
-                  </a:lnTo>
-                  <a:lnTo>
-                    <a:pt x="1939979" y="2790181"/>
-                  </a:lnTo>
-                  <a:lnTo>
-                    <a:pt x="2017613" y="2792337"/>
-                  </a:lnTo>
-                  <a:lnTo>
-                    <a:pt x="2095247" y="2794487"/>
-                  </a:lnTo>
-                  <a:lnTo>
-                    <a:pt x="2172881" y="2796632"/>
-                  </a:lnTo>
-                  <a:lnTo>
-                    <a:pt x="2250515" y="2798772"/>
-                  </a:lnTo>
-                  <a:lnTo>
-                    <a:pt x="2328149" y="2800906"/>
-                  </a:lnTo>
-                  <a:lnTo>
-                    <a:pt x="2405783" y="2803036"/>
-                  </a:lnTo>
-                  <a:lnTo>
-                    <a:pt x="2483417" y="2805159"/>
-                  </a:lnTo>
-                  <a:lnTo>
-                    <a:pt x="2561051" y="2807278"/>
-                  </a:lnTo>
-                  <a:lnTo>
-                    <a:pt x="2638685" y="2809391"/>
-                  </a:lnTo>
-                  <a:lnTo>
-                    <a:pt x="2716319" y="2811499"/>
-                  </a:lnTo>
-                  <a:lnTo>
-                    <a:pt x="2793953" y="2813602"/>
-                  </a:lnTo>
-                  <a:lnTo>
-                    <a:pt x="2871587" y="2815699"/>
-                  </a:lnTo>
-                  <a:lnTo>
-                    <a:pt x="2949221" y="2817791"/>
-                  </a:lnTo>
-                  <a:lnTo>
-                    <a:pt x="3026855" y="2819878"/>
-                  </a:lnTo>
-                  <a:lnTo>
-                    <a:pt x="3104489" y="2821960"/>
-                  </a:lnTo>
-                  <a:lnTo>
-                    <a:pt x="3182123" y="2824036"/>
-                  </a:lnTo>
-                  <a:lnTo>
-                    <a:pt x="3259757" y="2826108"/>
-                  </a:lnTo>
-                  <a:lnTo>
-                    <a:pt x="3337391" y="2828174"/>
-                  </a:lnTo>
-                  <a:lnTo>
-                    <a:pt x="3415025" y="2830235"/>
-                  </a:lnTo>
-                  <a:lnTo>
-                    <a:pt x="3492659" y="2832290"/>
-                  </a:lnTo>
-                  <a:lnTo>
-                    <a:pt x="3570294" y="2834341"/>
-                  </a:lnTo>
-                  <a:lnTo>
-                    <a:pt x="3647928" y="2836387"/>
-                  </a:lnTo>
-                  <a:lnTo>
-                    <a:pt x="3725562" y="2838427"/>
-                  </a:lnTo>
-                  <a:lnTo>
-                    <a:pt x="3803196" y="2840462"/>
-                  </a:lnTo>
-                  <a:lnTo>
-                    <a:pt x="3880830" y="2842493"/>
-                  </a:lnTo>
-                  <a:lnTo>
-                    <a:pt x="3958464" y="2844518"/>
-                  </a:lnTo>
-                  <a:lnTo>
-                    <a:pt x="4036098" y="2846538"/>
-                  </a:lnTo>
-                  <a:lnTo>
-                    <a:pt x="4113732" y="2848553"/>
-                  </a:lnTo>
-                  <a:lnTo>
-                    <a:pt x="4191366" y="2850563"/>
-                  </a:lnTo>
-                  <a:lnTo>
-                    <a:pt x="4269000" y="2852568"/>
-                  </a:lnTo>
-                  <a:lnTo>
-                    <a:pt x="4346634" y="2854568"/>
-                  </a:lnTo>
-                  <a:lnTo>
-                    <a:pt x="4424268" y="2856563"/>
-                  </a:lnTo>
-                  <a:lnTo>
-                    <a:pt x="4501902" y="2858553"/>
-                  </a:lnTo>
-                  <a:lnTo>
-                    <a:pt x="4579536" y="2860538"/>
-                  </a:lnTo>
-                  <a:lnTo>
-                    <a:pt x="4657170" y="2862518"/>
-                  </a:lnTo>
-                  <a:lnTo>
-                    <a:pt x="4734804" y="2864493"/>
-                  </a:lnTo>
-                  <a:lnTo>
-                    <a:pt x="4812438" y="2866463"/>
-                  </a:lnTo>
-                  <a:lnTo>
-                    <a:pt x="4890072" y="2868428"/>
-                  </a:lnTo>
-                  <a:lnTo>
-                    <a:pt x="4967706" y="2870389"/>
-                  </a:lnTo>
-                  <a:lnTo>
-                    <a:pt x="5045340" y="2872344"/>
-                  </a:lnTo>
-                  <a:lnTo>
-                    <a:pt x="5122974" y="2874295"/>
-                  </a:lnTo>
-                  <a:lnTo>
-                    <a:pt x="5200608" y="2876240"/>
-                  </a:lnTo>
-                  <a:lnTo>
-                    <a:pt x="5278243" y="2878181"/>
-                  </a:lnTo>
-                  <a:lnTo>
-                    <a:pt x="5355877" y="2880117"/>
-                  </a:lnTo>
-                  <a:lnTo>
-                    <a:pt x="5433511" y="2882048"/>
-                  </a:lnTo>
-                  <a:lnTo>
-                    <a:pt x="5511145" y="2883975"/>
-                  </a:lnTo>
-                  <a:lnTo>
-                    <a:pt x="5588779" y="2885896"/>
-                  </a:lnTo>
-                  <a:lnTo>
-                    <a:pt x="5666413" y="2887813"/>
+                    <a:pt x="5457" y="28042"/>
+                  </a:lnTo>
+                  <a:lnTo>
+                    <a:pt x="83092" y="387378"/>
+                  </a:lnTo>
+                  <a:lnTo>
+                    <a:pt x="160726" y="711090"/>
+                  </a:lnTo>
+                  <a:lnTo>
+                    <a:pt x="238360" y="1002710"/>
+                  </a:lnTo>
+                  <a:lnTo>
+                    <a:pt x="315994" y="1265419"/>
+                  </a:lnTo>
+                  <a:lnTo>
+                    <a:pt x="393628" y="1502083"/>
+                  </a:lnTo>
+                  <a:lnTo>
+                    <a:pt x="471262" y="1715286"/>
+                  </a:lnTo>
+                  <a:lnTo>
+                    <a:pt x="548896" y="1907351"/>
+                  </a:lnTo>
+                  <a:lnTo>
+                    <a:pt x="626530" y="2080376"/>
+                  </a:lnTo>
+                  <a:lnTo>
+                    <a:pt x="704164" y="2236248"/>
+                  </a:lnTo>
+                  <a:lnTo>
+                    <a:pt x="781798" y="2376666"/>
+                  </a:lnTo>
+                  <a:lnTo>
+                    <a:pt x="859432" y="2503164"/>
+                  </a:lnTo>
+                  <a:lnTo>
+                    <a:pt x="937066" y="2617121"/>
+                  </a:lnTo>
+                  <a:lnTo>
+                    <a:pt x="1014700" y="2719781"/>
+                  </a:lnTo>
+                  <a:lnTo>
+                    <a:pt x="1092334" y="2788638"/>
+                  </a:lnTo>
+                  <a:lnTo>
+                    <a:pt x="1169968" y="2805691"/>
+                  </a:lnTo>
+                  <a:lnTo>
+                    <a:pt x="1247602" y="2822407"/>
+                  </a:lnTo>
+                  <a:lnTo>
+                    <a:pt x="1325236" y="2838794"/>
+                  </a:lnTo>
+                  <a:lnTo>
+                    <a:pt x="1402870" y="2854857"/>
+                  </a:lnTo>
+                  <a:lnTo>
+                    <a:pt x="1480504" y="2870603"/>
+                  </a:lnTo>
+                  <a:lnTo>
+                    <a:pt x="1558138" y="2886038"/>
+                  </a:lnTo>
+                  <a:lnTo>
+                    <a:pt x="1635772" y="2901169"/>
+                  </a:lnTo>
+                  <a:lnTo>
+                    <a:pt x="1713406" y="2916001"/>
+                  </a:lnTo>
+                  <a:lnTo>
+                    <a:pt x="1791041" y="2930540"/>
+                  </a:lnTo>
+                  <a:lnTo>
+                    <a:pt x="1868675" y="2944792"/>
+                  </a:lnTo>
+                  <a:lnTo>
+                    <a:pt x="1946309" y="2958763"/>
+                  </a:lnTo>
+                  <a:lnTo>
+                    <a:pt x="2023943" y="2972459"/>
+                  </a:lnTo>
+                  <a:lnTo>
+                    <a:pt x="2101577" y="2985884"/>
+                  </a:lnTo>
+                  <a:lnTo>
+                    <a:pt x="2179211" y="2999043"/>
+                  </a:lnTo>
+                  <a:lnTo>
+                    <a:pt x="2256845" y="3011944"/>
+                  </a:lnTo>
+                  <a:lnTo>
+                    <a:pt x="2334479" y="3024589"/>
+                  </a:lnTo>
+                  <a:lnTo>
+                    <a:pt x="2412113" y="3036985"/>
+                  </a:lnTo>
+                  <a:lnTo>
+                    <a:pt x="2489747" y="3049137"/>
+                  </a:lnTo>
+                  <a:lnTo>
+                    <a:pt x="2567381" y="3061048"/>
+                  </a:lnTo>
+                  <a:lnTo>
+                    <a:pt x="2645015" y="3072725"/>
+                  </a:lnTo>
+                  <a:lnTo>
+                    <a:pt x="2722649" y="3084171"/>
+                  </a:lnTo>
+                  <a:lnTo>
+                    <a:pt x="2800283" y="3095391"/>
+                  </a:lnTo>
+                  <a:lnTo>
+                    <a:pt x="2877917" y="3106389"/>
+                  </a:lnTo>
+                  <a:lnTo>
+                    <a:pt x="2955551" y="3117171"/>
+                  </a:lnTo>
+                  <a:lnTo>
+                    <a:pt x="3033185" y="3127739"/>
+                  </a:lnTo>
+                  <a:lnTo>
+                    <a:pt x="3110819" y="3138100"/>
+                  </a:lnTo>
+                  <a:lnTo>
+                    <a:pt x="3188453" y="3148255"/>
+                  </a:lnTo>
+                  <a:lnTo>
+                    <a:pt x="3266087" y="3158210"/>
+                  </a:lnTo>
+                  <a:lnTo>
+                    <a:pt x="3343721" y="3167969"/>
+                  </a:lnTo>
+                  <a:lnTo>
+                    <a:pt x="3421355" y="3177535"/>
+                  </a:lnTo>
+                  <a:lnTo>
+                    <a:pt x="3498990" y="3186912"/>
+                  </a:lnTo>
+                  <a:lnTo>
+                    <a:pt x="3576624" y="3196105"/>
+                  </a:lnTo>
+                  <a:lnTo>
+                    <a:pt x="3654258" y="3205115"/>
+                  </a:lnTo>
+                  <a:lnTo>
+                    <a:pt x="3731892" y="3213948"/>
+                  </a:lnTo>
+                  <a:lnTo>
+                    <a:pt x="3809526" y="3222607"/>
+                  </a:lnTo>
+                  <a:lnTo>
+                    <a:pt x="3887160" y="3231095"/>
+                  </a:lnTo>
+                  <a:lnTo>
+                    <a:pt x="3964794" y="3239415"/>
+                  </a:lnTo>
+                  <a:lnTo>
+                    <a:pt x="4042428" y="3247571"/>
+                  </a:lnTo>
+                  <a:lnTo>
+                    <a:pt x="4120062" y="3255566"/>
+                  </a:lnTo>
+                  <a:lnTo>
+                    <a:pt x="4197696" y="3263403"/>
+                  </a:lnTo>
+                  <a:lnTo>
+                    <a:pt x="4275330" y="3271085"/>
+                  </a:lnTo>
+                  <a:lnTo>
+                    <a:pt x="4352964" y="3278616"/>
+                  </a:lnTo>
+                  <a:lnTo>
+                    <a:pt x="4430598" y="3285999"/>
+                  </a:lnTo>
+                  <a:lnTo>
+                    <a:pt x="4508232" y="3293235"/>
+                  </a:lnTo>
+                  <a:lnTo>
+                    <a:pt x="4585866" y="3300329"/>
+                  </a:lnTo>
+                  <a:lnTo>
+                    <a:pt x="4663500" y="3307283"/>
+                  </a:lnTo>
+                  <a:lnTo>
+                    <a:pt x="4741134" y="3314099"/>
+                  </a:lnTo>
+                  <a:lnTo>
+                    <a:pt x="4818768" y="3320781"/>
+                  </a:lnTo>
+                  <a:lnTo>
+                    <a:pt x="4896402" y="3327331"/>
+                  </a:lnTo>
+                  <a:lnTo>
+                    <a:pt x="4974036" y="3333752"/>
+                  </a:lnTo>
+                  <a:lnTo>
+                    <a:pt x="5051670" y="3340046"/>
                   </a:lnTo>
                 </a:path>
               </a:pathLst>
@@ -3790,297 +3748,297 @@
           </p:nvSpPr>
           <p:spPr>
             <a:xfrm>
-              <a:off x="817517" y="4579213"/>
-              <a:ext cx="7370972" cy="940987"/>
+              <a:off x="817517" y="3474416"/>
+              <a:ext cx="7370972" cy="2070697"/>
             </a:xfrm>
             <a:custGeom>
               <a:avLst/>
               <a:pathLst>
-                <a:path w="7370972" h="940987">
+                <a:path w="7370972" h="2070697">
                   <a:moveTo>
-                    <a:pt x="7370972" y="940987"/>
+                    <a:pt x="7370972" y="2070697"/>
                   </a:moveTo>
                   <a:lnTo>
-                    <a:pt x="7293338" y="939000"/>
-                  </a:lnTo>
-                  <a:lnTo>
-                    <a:pt x="7215704" y="936877"/>
-                  </a:lnTo>
-                  <a:lnTo>
-                    <a:pt x="7138070" y="934609"/>
-                  </a:lnTo>
-                  <a:lnTo>
-                    <a:pt x="7060436" y="932185"/>
-                  </a:lnTo>
-                  <a:lnTo>
-                    <a:pt x="6982802" y="929595"/>
-                  </a:lnTo>
-                  <a:lnTo>
-                    <a:pt x="6905168" y="926828"/>
-                  </a:lnTo>
-                  <a:lnTo>
-                    <a:pt x="6827534" y="923872"/>
-                  </a:lnTo>
-                  <a:lnTo>
-                    <a:pt x="6749900" y="920713"/>
-                  </a:lnTo>
-                  <a:lnTo>
-                    <a:pt x="6672266" y="917337"/>
-                  </a:lnTo>
-                  <a:lnTo>
-                    <a:pt x="6594632" y="913730"/>
-                  </a:lnTo>
-                  <a:lnTo>
-                    <a:pt x="6516998" y="909876"/>
-                  </a:lnTo>
-                  <a:lnTo>
-                    <a:pt x="6439364" y="905759"/>
-                  </a:lnTo>
-                  <a:lnTo>
-                    <a:pt x="6361730" y="901359"/>
-                  </a:lnTo>
-                  <a:lnTo>
-                    <a:pt x="6284096" y="896658"/>
-                  </a:lnTo>
-                  <a:lnTo>
-                    <a:pt x="6206462" y="891635"/>
-                  </a:lnTo>
-                  <a:lnTo>
-                    <a:pt x="6128827" y="886267"/>
-                  </a:lnTo>
-                  <a:lnTo>
-                    <a:pt x="6051193" y="880532"/>
-                  </a:lnTo>
-                  <a:lnTo>
-                    <a:pt x="5973559" y="874405"/>
-                  </a:lnTo>
-                  <a:lnTo>
-                    <a:pt x="5895925" y="867857"/>
-                  </a:lnTo>
-                  <a:lnTo>
-                    <a:pt x="5818291" y="860861"/>
-                  </a:lnTo>
-                  <a:lnTo>
-                    <a:pt x="5740657" y="853386"/>
-                  </a:lnTo>
-                  <a:lnTo>
-                    <a:pt x="5663023" y="845399"/>
-                  </a:lnTo>
-                  <a:lnTo>
-                    <a:pt x="5585389" y="836865"/>
-                  </a:lnTo>
-                  <a:lnTo>
-                    <a:pt x="5507755" y="827746"/>
-                  </a:lnTo>
-                  <a:lnTo>
-                    <a:pt x="5430121" y="818003"/>
-                  </a:lnTo>
-                  <a:lnTo>
-                    <a:pt x="5352487" y="807592"/>
-                  </a:lnTo>
-                  <a:lnTo>
-                    <a:pt x="5274853" y="796468"/>
-                  </a:lnTo>
-                  <a:lnTo>
-                    <a:pt x="5197219" y="784582"/>
-                  </a:lnTo>
-                  <a:lnTo>
-                    <a:pt x="5119585" y="771882"/>
-                  </a:lnTo>
-                  <a:lnTo>
-                    <a:pt x="5041951" y="758312"/>
-                  </a:lnTo>
-                  <a:lnTo>
-                    <a:pt x="4964317" y="743813"/>
-                  </a:lnTo>
-                  <a:lnTo>
-                    <a:pt x="4886683" y="728321"/>
-                  </a:lnTo>
-                  <a:lnTo>
-                    <a:pt x="4809049" y="711767"/>
-                  </a:lnTo>
-                  <a:lnTo>
-                    <a:pt x="4731415" y="694079"/>
-                  </a:lnTo>
-                  <a:lnTo>
-                    <a:pt x="4653781" y="675180"/>
-                  </a:lnTo>
-                  <a:lnTo>
-                    <a:pt x="4576147" y="654987"/>
-                  </a:lnTo>
-                  <a:lnTo>
-                    <a:pt x="4498513" y="633410"/>
-                  </a:lnTo>
-                  <a:lnTo>
-                    <a:pt x="4420879" y="610355"/>
-                  </a:lnTo>
-                  <a:lnTo>
-                    <a:pt x="4343244" y="585722"/>
-                  </a:lnTo>
-                  <a:lnTo>
-                    <a:pt x="4265610" y="559400"/>
-                  </a:lnTo>
-                  <a:lnTo>
-                    <a:pt x="4187976" y="531276"/>
-                  </a:lnTo>
-                  <a:lnTo>
-                    <a:pt x="4110342" y="501226"/>
-                  </a:lnTo>
-                  <a:lnTo>
-                    <a:pt x="4032708" y="469117"/>
-                  </a:lnTo>
-                  <a:lnTo>
-                    <a:pt x="3955074" y="434809"/>
-                  </a:lnTo>
-                  <a:lnTo>
-                    <a:pt x="3877440" y="398151"/>
-                  </a:lnTo>
-                  <a:lnTo>
-                    <a:pt x="3799806" y="358982"/>
-                  </a:lnTo>
-                  <a:lnTo>
-                    <a:pt x="3722172" y="317130"/>
-                  </a:lnTo>
-                  <a:lnTo>
-                    <a:pt x="3644538" y="272411"/>
-                  </a:lnTo>
-                  <a:lnTo>
-                    <a:pt x="3566904" y="224629"/>
-                  </a:lnTo>
-                  <a:lnTo>
-                    <a:pt x="3489270" y="173575"/>
-                  </a:lnTo>
-                  <a:lnTo>
-                    <a:pt x="3411636" y="119023"/>
-                  </a:lnTo>
-                  <a:lnTo>
-                    <a:pt x="3334002" y="98852"/>
-                  </a:lnTo>
-                  <a:lnTo>
-                    <a:pt x="3256368" y="96669"/>
-                  </a:lnTo>
-                  <a:lnTo>
-                    <a:pt x="3178734" y="94481"/>
-                  </a:lnTo>
-                  <a:lnTo>
-                    <a:pt x="3101100" y="92287"/>
-                  </a:lnTo>
-                  <a:lnTo>
-                    <a:pt x="3023466" y="90087"/>
-                  </a:lnTo>
-                  <a:lnTo>
-                    <a:pt x="2945832" y="87882"/>
-                  </a:lnTo>
-                  <a:lnTo>
-                    <a:pt x="2868198" y="85672"/>
-                  </a:lnTo>
-                  <a:lnTo>
-                    <a:pt x="2790564" y="83456"/>
-                  </a:lnTo>
-                  <a:lnTo>
-                    <a:pt x="2712930" y="81234"/>
-                  </a:lnTo>
-                  <a:lnTo>
-                    <a:pt x="2635295" y="79007"/>
-                  </a:lnTo>
-                  <a:lnTo>
-                    <a:pt x="2557661" y="76774"/>
-                  </a:lnTo>
-                  <a:lnTo>
-                    <a:pt x="2480027" y="74535"/>
-                  </a:lnTo>
-                  <a:lnTo>
-                    <a:pt x="2402393" y="72291"/>
-                  </a:lnTo>
-                  <a:lnTo>
-                    <a:pt x="2324759" y="70042"/>
-                  </a:lnTo>
-                  <a:lnTo>
-                    <a:pt x="2247125" y="67786"/>
-                  </a:lnTo>
-                  <a:lnTo>
-                    <a:pt x="2169491" y="65526"/>
-                  </a:lnTo>
-                  <a:lnTo>
-                    <a:pt x="2091857" y="63259"/>
-                  </a:lnTo>
-                  <a:lnTo>
-                    <a:pt x="2014223" y="60987"/>
-                  </a:lnTo>
-                  <a:lnTo>
-                    <a:pt x="1936589" y="58709"/>
-                  </a:lnTo>
-                  <a:lnTo>
-                    <a:pt x="1858955" y="56425"/>
-                  </a:lnTo>
-                  <a:lnTo>
-                    <a:pt x="1781321" y="54136"/>
-                  </a:lnTo>
-                  <a:lnTo>
-                    <a:pt x="1703687" y="51840"/>
-                  </a:lnTo>
-                  <a:lnTo>
-                    <a:pt x="1626053" y="49540"/>
-                  </a:lnTo>
-                  <a:lnTo>
-                    <a:pt x="1548419" y="47233"/>
-                  </a:lnTo>
-                  <a:lnTo>
-                    <a:pt x="1470785" y="44920"/>
-                  </a:lnTo>
-                  <a:lnTo>
-                    <a:pt x="1393151" y="42602"/>
-                  </a:lnTo>
-                  <a:lnTo>
-                    <a:pt x="1315517" y="40278"/>
-                  </a:lnTo>
-                  <a:lnTo>
-                    <a:pt x="1237883" y="37948"/>
-                  </a:lnTo>
-                  <a:lnTo>
-                    <a:pt x="1160249" y="35613"/>
-                  </a:lnTo>
-                  <a:lnTo>
-                    <a:pt x="1082615" y="33271"/>
-                  </a:lnTo>
-                  <a:lnTo>
-                    <a:pt x="1004981" y="30924"/>
-                  </a:lnTo>
-                  <a:lnTo>
-                    <a:pt x="927346" y="28570"/>
-                  </a:lnTo>
-                  <a:lnTo>
-                    <a:pt x="849712" y="26211"/>
-                  </a:lnTo>
-                  <a:lnTo>
-                    <a:pt x="772078" y="23846"/>
-                  </a:lnTo>
-                  <a:lnTo>
-                    <a:pt x="694444" y="21475"/>
-                  </a:lnTo>
-                  <a:lnTo>
-                    <a:pt x="616810" y="19098"/>
-                  </a:lnTo>
-                  <a:lnTo>
-                    <a:pt x="539176" y="16715"/>
-                  </a:lnTo>
-                  <a:lnTo>
-                    <a:pt x="461542" y="14326"/>
-                  </a:lnTo>
-                  <a:lnTo>
-                    <a:pt x="383908" y="11931"/>
-                  </a:lnTo>
-                  <a:lnTo>
-                    <a:pt x="306274" y="9530"/>
-                  </a:lnTo>
-                  <a:lnTo>
-                    <a:pt x="228640" y="7123"/>
-                  </a:lnTo>
-                  <a:lnTo>
-                    <a:pt x="151006" y="4710"/>
-                  </a:lnTo>
-                  <a:lnTo>
-                    <a:pt x="73372" y="2291"/>
+                    <a:pt x="7293338" y="2070246"/>
+                  </a:lnTo>
+                  <a:lnTo>
+                    <a:pt x="7215704" y="2069746"/>
+                  </a:lnTo>
+                  <a:lnTo>
+                    <a:pt x="7138070" y="2069191"/>
+                  </a:lnTo>
+                  <a:lnTo>
+                    <a:pt x="7060436" y="2068575"/>
+                  </a:lnTo>
+                  <a:lnTo>
+                    <a:pt x="6982802" y="2067891"/>
+                  </a:lnTo>
+                  <a:lnTo>
+                    <a:pt x="6905168" y="2067132"/>
+                  </a:lnTo>
+                  <a:lnTo>
+                    <a:pt x="6827534" y="2066289"/>
+                  </a:lnTo>
+                  <a:lnTo>
+                    <a:pt x="6749900" y="2065354"/>
+                  </a:lnTo>
+                  <a:lnTo>
+                    <a:pt x="6672266" y="2064316"/>
+                  </a:lnTo>
+                  <a:lnTo>
+                    <a:pt x="6594632" y="2063163"/>
+                  </a:lnTo>
+                  <a:lnTo>
+                    <a:pt x="6516998" y="2061883"/>
+                  </a:lnTo>
+                  <a:lnTo>
+                    <a:pt x="6439364" y="2060463"/>
+                  </a:lnTo>
+                  <a:lnTo>
+                    <a:pt x="6361730" y="2058886"/>
+                  </a:lnTo>
+                  <a:lnTo>
+                    <a:pt x="6284096" y="2057136"/>
+                  </a:lnTo>
+                  <a:lnTo>
+                    <a:pt x="6206462" y="2055194"/>
+                  </a:lnTo>
+                  <a:lnTo>
+                    <a:pt x="6128827" y="2053037"/>
+                  </a:lnTo>
+                  <a:lnTo>
+                    <a:pt x="6051193" y="2050643"/>
+                  </a:lnTo>
+                  <a:lnTo>
+                    <a:pt x="5973559" y="2047986"/>
+                  </a:lnTo>
+                  <a:lnTo>
+                    <a:pt x="5895925" y="2045036"/>
+                  </a:lnTo>
+                  <a:lnTo>
+                    <a:pt x="5818291" y="2041762"/>
+                  </a:lnTo>
+                  <a:lnTo>
+                    <a:pt x="5740657" y="2038127"/>
+                  </a:lnTo>
+                  <a:lnTo>
+                    <a:pt x="5663023" y="2034093"/>
+                  </a:lnTo>
+                  <a:lnTo>
+                    <a:pt x="5585389" y="2029614"/>
+                  </a:lnTo>
+                  <a:lnTo>
+                    <a:pt x="5507755" y="2024642"/>
+                  </a:lnTo>
+                  <a:lnTo>
+                    <a:pt x="5430121" y="2019124"/>
+                  </a:lnTo>
+                  <a:lnTo>
+                    <a:pt x="5352487" y="2012998"/>
+                  </a:lnTo>
+                  <a:lnTo>
+                    <a:pt x="5274853" y="2006198"/>
+                  </a:lnTo>
+                  <a:lnTo>
+                    <a:pt x="5197219" y="1998649"/>
+                  </a:lnTo>
+                  <a:lnTo>
+                    <a:pt x="5119585" y="1990270"/>
+                  </a:lnTo>
+                  <a:lnTo>
+                    <a:pt x="5041951" y="1980969"/>
+                  </a:lnTo>
+                  <a:lnTo>
+                    <a:pt x="4964317" y="1970644"/>
+                  </a:lnTo>
+                  <a:lnTo>
+                    <a:pt x="4886683" y="1959183"/>
+                  </a:lnTo>
+                  <a:lnTo>
+                    <a:pt x="4809049" y="1946461"/>
+                  </a:lnTo>
+                  <a:lnTo>
+                    <a:pt x="4731415" y="1932339"/>
+                  </a:lnTo>
+                  <a:lnTo>
+                    <a:pt x="4653781" y="1916662"/>
+                  </a:lnTo>
+                  <a:lnTo>
+                    <a:pt x="4576147" y="1899260"/>
+                  </a:lnTo>
+                  <a:lnTo>
+                    <a:pt x="4498513" y="1879944"/>
+                  </a:lnTo>
+                  <a:lnTo>
+                    <a:pt x="4420879" y="1858501"/>
+                  </a:lnTo>
+                  <a:lnTo>
+                    <a:pt x="4343244" y="1834699"/>
+                  </a:lnTo>
+                  <a:lnTo>
+                    <a:pt x="4265610" y="1808278"/>
+                  </a:lnTo>
+                  <a:lnTo>
+                    <a:pt x="4187976" y="1778949"/>
+                  </a:lnTo>
+                  <a:lnTo>
+                    <a:pt x="4110342" y="1746392"/>
+                  </a:lnTo>
+                  <a:lnTo>
+                    <a:pt x="4032708" y="1710252"/>
+                  </a:lnTo>
+                  <a:lnTo>
+                    <a:pt x="3955074" y="1670136"/>
+                  </a:lnTo>
+                  <a:lnTo>
+                    <a:pt x="3877440" y="1625605"/>
+                  </a:lnTo>
+                  <a:lnTo>
+                    <a:pt x="3799806" y="1576173"/>
+                  </a:lnTo>
+                  <a:lnTo>
+                    <a:pt x="3722172" y="1521301"/>
+                  </a:lnTo>
+                  <a:lnTo>
+                    <a:pt x="3644538" y="1460391"/>
+                  </a:lnTo>
+                  <a:lnTo>
+                    <a:pt x="3566904" y="1392777"/>
+                  </a:lnTo>
+                  <a:lnTo>
+                    <a:pt x="3489270" y="1317723"/>
+                  </a:lnTo>
+                  <a:lnTo>
+                    <a:pt x="3411636" y="1234409"/>
+                  </a:lnTo>
+                  <a:lnTo>
+                    <a:pt x="3334002" y="1193388"/>
+                  </a:lnTo>
+                  <a:lnTo>
+                    <a:pt x="3256368" y="1175641"/>
+                  </a:lnTo>
+                  <a:lnTo>
+                    <a:pt x="3178734" y="1157537"/>
+                  </a:lnTo>
+                  <a:lnTo>
+                    <a:pt x="3101100" y="1139069"/>
+                  </a:lnTo>
+                  <a:lnTo>
+                    <a:pt x="3023466" y="1120229"/>
+                  </a:lnTo>
+                  <a:lnTo>
+                    <a:pt x="2945832" y="1101009"/>
+                  </a:lnTo>
+                  <a:lnTo>
+                    <a:pt x="2868198" y="1081402"/>
+                  </a:lnTo>
+                  <a:lnTo>
+                    <a:pt x="2790564" y="1061401"/>
+                  </a:lnTo>
+                  <a:lnTo>
+                    <a:pt x="2712930" y="1040997"/>
+                  </a:lnTo>
+                  <a:lnTo>
+                    <a:pt x="2635295" y="1020182"/>
+                  </a:lnTo>
+                  <a:lnTo>
+                    <a:pt x="2557661" y="998948"/>
+                  </a:lnTo>
+                  <a:lnTo>
+                    <a:pt x="2480027" y="977286"/>
+                  </a:lnTo>
+                  <a:lnTo>
+                    <a:pt x="2402393" y="955188"/>
+                  </a:lnTo>
+                  <a:lnTo>
+                    <a:pt x="2324759" y="932645"/>
+                  </a:lnTo>
+                  <a:lnTo>
+                    <a:pt x="2247125" y="909649"/>
+                  </a:lnTo>
+                  <a:lnTo>
+                    <a:pt x="2169491" y="886189"/>
+                  </a:lnTo>
+                  <a:lnTo>
+                    <a:pt x="2091857" y="862257"/>
+                  </a:lnTo>
+                  <a:lnTo>
+                    <a:pt x="2014223" y="837843"/>
+                  </a:lnTo>
+                  <a:lnTo>
+                    <a:pt x="1936589" y="812938"/>
+                  </a:lnTo>
+                  <a:lnTo>
+                    <a:pt x="1858955" y="787531"/>
+                  </a:lnTo>
+                  <a:lnTo>
+                    <a:pt x="1781321" y="761613"/>
+                  </a:lnTo>
+                  <a:lnTo>
+                    <a:pt x="1703687" y="735173"/>
+                  </a:lnTo>
+                  <a:lnTo>
+                    <a:pt x="1626053" y="708200"/>
+                  </a:lnTo>
+                  <a:lnTo>
+                    <a:pt x="1548419" y="680684"/>
+                  </a:lnTo>
+                  <a:lnTo>
+                    <a:pt x="1470785" y="652615"/>
+                  </a:lnTo>
+                  <a:lnTo>
+                    <a:pt x="1393151" y="623980"/>
+                  </a:lnTo>
+                  <a:lnTo>
+                    <a:pt x="1315517" y="594768"/>
+                  </a:lnTo>
+                  <a:lnTo>
+                    <a:pt x="1237883" y="564969"/>
+                  </a:lnTo>
+                  <a:lnTo>
+                    <a:pt x="1160249" y="534569"/>
+                  </a:lnTo>
+                  <a:lnTo>
+                    <a:pt x="1082615" y="503557"/>
+                  </a:lnTo>
+                  <a:lnTo>
+                    <a:pt x="1004981" y="471921"/>
+                  </a:lnTo>
+                  <a:lnTo>
+                    <a:pt x="927346" y="439648"/>
+                  </a:lnTo>
+                  <a:lnTo>
+                    <a:pt x="849712" y="406725"/>
+                  </a:lnTo>
+                  <a:lnTo>
+                    <a:pt x="772078" y="373139"/>
+                  </a:lnTo>
+                  <a:lnTo>
+                    <a:pt x="694444" y="338877"/>
+                  </a:lnTo>
+                  <a:lnTo>
+                    <a:pt x="616810" y="303926"/>
+                  </a:lnTo>
+                  <a:lnTo>
+                    <a:pt x="539176" y="268270"/>
+                  </a:lnTo>
+                  <a:lnTo>
+                    <a:pt x="461542" y="231897"/>
+                  </a:lnTo>
+                  <a:lnTo>
+                    <a:pt x="383908" y="194791"/>
+                  </a:lnTo>
+                  <a:lnTo>
+                    <a:pt x="306274" y="156938"/>
+                  </a:lnTo>
+                  <a:lnTo>
+                    <a:pt x="228640" y="118323"/>
+                  </a:lnTo>
+                  <a:lnTo>
+                    <a:pt x="151006" y="78930"/>
+                  </a:lnTo>
+                  <a:lnTo>
+                    <a:pt x="73372" y="38744"/>
                   </a:lnTo>
                   <a:lnTo>
                     <a:pt x="0" y="0"/>
@@ -4103,297 +4061,240 @@
           </p:nvSpPr>
           <p:spPr>
             <a:xfrm>
-              <a:off x="962946" y="1896563"/>
-              <a:ext cx="7225544" cy="3503698"/>
+              <a:off x="2412179" y="1896563"/>
+              <a:ext cx="5776311" cy="3616873"/>
             </a:xfrm>
             <a:custGeom>
               <a:avLst/>
               <a:pathLst>
-                <a:path w="7225544" h="3503698">
+                <a:path w="5776311" h="3616873">
                   <a:moveTo>
                     <a:pt x="0" y="0"/>
                   </a:moveTo>
                   <a:lnTo>
-                    <a:pt x="5577" y="9155"/>
-                  </a:lnTo>
-                  <a:lnTo>
-                    <a:pt x="83212" y="132281"/>
-                  </a:lnTo>
-                  <a:lnTo>
-                    <a:pt x="160846" y="251246"/>
-                  </a:lnTo>
-                  <a:lnTo>
-                    <a:pt x="238480" y="366191"/>
-                  </a:lnTo>
-                  <a:lnTo>
-                    <a:pt x="316114" y="477251"/>
-                  </a:lnTo>
-                  <a:lnTo>
-                    <a:pt x="393748" y="584558"/>
-                  </a:lnTo>
-                  <a:lnTo>
-                    <a:pt x="471382" y="688239"/>
-                  </a:lnTo>
-                  <a:lnTo>
-                    <a:pt x="549016" y="788417"/>
-                  </a:lnTo>
-                  <a:lnTo>
-                    <a:pt x="626650" y="885209"/>
-                  </a:lnTo>
-                  <a:lnTo>
-                    <a:pt x="704284" y="978729"/>
-                  </a:lnTo>
-                  <a:lnTo>
-                    <a:pt x="781918" y="1069090"/>
-                  </a:lnTo>
-                  <a:lnTo>
-                    <a:pt x="859552" y="1156397"/>
-                  </a:lnTo>
-                  <a:lnTo>
-                    <a:pt x="937186" y="1240754"/>
-                  </a:lnTo>
-                  <a:lnTo>
-                    <a:pt x="1014820" y="1322260"/>
-                  </a:lnTo>
-                  <a:lnTo>
-                    <a:pt x="1092454" y="1401011"/>
-                  </a:lnTo>
-                  <a:lnTo>
-                    <a:pt x="1170088" y="1477101"/>
-                  </a:lnTo>
-                  <a:lnTo>
-                    <a:pt x="1247722" y="1550620"/>
-                  </a:lnTo>
-                  <a:lnTo>
-                    <a:pt x="1325356" y="1621655"/>
-                  </a:lnTo>
-                  <a:lnTo>
-                    <a:pt x="1402990" y="1690289"/>
-                  </a:lnTo>
-                  <a:lnTo>
-                    <a:pt x="1480624" y="1756603"/>
-                  </a:lnTo>
-                  <a:lnTo>
-                    <a:pt x="1558258" y="1820677"/>
-                  </a:lnTo>
-                  <a:lnTo>
-                    <a:pt x="1635892" y="1882585"/>
-                  </a:lnTo>
-                  <a:lnTo>
-                    <a:pt x="1713526" y="1942401"/>
-                  </a:lnTo>
-                  <a:lnTo>
-                    <a:pt x="1791161" y="2000196"/>
-                  </a:lnTo>
-                  <a:lnTo>
-                    <a:pt x="1868795" y="2056038"/>
-                  </a:lnTo>
-                  <a:lnTo>
-                    <a:pt x="1946429" y="2109993"/>
-                  </a:lnTo>
-                  <a:lnTo>
-                    <a:pt x="2024063" y="2162124"/>
-                  </a:lnTo>
-                  <a:lnTo>
-                    <a:pt x="2101697" y="2212494"/>
-                  </a:lnTo>
-                  <a:lnTo>
-                    <a:pt x="2179331" y="2261161"/>
-                  </a:lnTo>
-                  <a:lnTo>
-                    <a:pt x="2256965" y="2308184"/>
-                  </a:lnTo>
-                  <a:lnTo>
-                    <a:pt x="2334599" y="2353618"/>
-                  </a:lnTo>
-                  <a:lnTo>
-                    <a:pt x="2412233" y="2397517"/>
-                  </a:lnTo>
-                  <a:lnTo>
-                    <a:pt x="2489867" y="2439931"/>
-                  </a:lnTo>
-                  <a:lnTo>
-                    <a:pt x="2567501" y="2480913"/>
-                  </a:lnTo>
-                  <a:lnTo>
-                    <a:pt x="2645135" y="2520510"/>
-                  </a:lnTo>
-                  <a:lnTo>
-                    <a:pt x="2722769" y="2558768"/>
-                  </a:lnTo>
-                  <a:lnTo>
-                    <a:pt x="2800403" y="2595734"/>
-                  </a:lnTo>
-                  <a:lnTo>
-                    <a:pt x="2878037" y="2631451"/>
-                  </a:lnTo>
-                  <a:lnTo>
-                    <a:pt x="2955671" y="2665960"/>
-                  </a:lnTo>
-                  <a:lnTo>
-                    <a:pt x="3033305" y="2699304"/>
-                  </a:lnTo>
-                  <a:lnTo>
-                    <a:pt x="3110939" y="2731520"/>
-                  </a:lnTo>
-                  <a:lnTo>
-                    <a:pt x="3188573" y="2762648"/>
-                  </a:lnTo>
-                  <a:lnTo>
-                    <a:pt x="3266207" y="2792724"/>
-                  </a:lnTo>
-                  <a:lnTo>
-                    <a:pt x="3343841" y="2821784"/>
-                  </a:lnTo>
-                  <a:lnTo>
-                    <a:pt x="3421475" y="2849861"/>
-                  </a:lnTo>
-                  <a:lnTo>
-                    <a:pt x="3499109" y="2876990"/>
-                  </a:lnTo>
-                  <a:lnTo>
-                    <a:pt x="3576744" y="2903202"/>
-                  </a:lnTo>
-                  <a:lnTo>
-                    <a:pt x="3654378" y="2928528"/>
-                  </a:lnTo>
-                  <a:lnTo>
-                    <a:pt x="3732012" y="2952998"/>
-                  </a:lnTo>
-                  <a:lnTo>
-                    <a:pt x="3809646" y="2976642"/>
-                  </a:lnTo>
-                  <a:lnTo>
-                    <a:pt x="3887280" y="2999486"/>
-                  </a:lnTo>
-                  <a:lnTo>
-                    <a:pt x="3964914" y="3021558"/>
-                  </a:lnTo>
-                  <a:lnTo>
-                    <a:pt x="4042548" y="3042885"/>
-                  </a:lnTo>
-                  <a:lnTo>
-                    <a:pt x="4120182" y="3063491"/>
-                  </a:lnTo>
-                  <a:lnTo>
-                    <a:pt x="4197816" y="3083400"/>
-                  </a:lnTo>
-                  <a:lnTo>
-                    <a:pt x="4275450" y="3102637"/>
-                  </a:lnTo>
-                  <a:lnTo>
-                    <a:pt x="4353084" y="3121223"/>
-                  </a:lnTo>
-                  <a:lnTo>
-                    <a:pt x="4430718" y="3139182"/>
-                  </a:lnTo>
-                  <a:lnTo>
-                    <a:pt x="4508352" y="3156533"/>
-                  </a:lnTo>
-                  <a:lnTo>
-                    <a:pt x="4585986" y="3173299"/>
-                  </a:lnTo>
-                  <a:lnTo>
-                    <a:pt x="4663620" y="3189497"/>
-                  </a:lnTo>
-                  <a:lnTo>
-                    <a:pt x="4741254" y="3205149"/>
-                  </a:lnTo>
-                  <a:lnTo>
-                    <a:pt x="4818888" y="3220271"/>
-                  </a:lnTo>
-                  <a:lnTo>
-                    <a:pt x="4896522" y="3234882"/>
-                  </a:lnTo>
-                  <a:lnTo>
-                    <a:pt x="4974156" y="3249000"/>
-                  </a:lnTo>
-                  <a:lnTo>
-                    <a:pt x="5051790" y="3262640"/>
-                  </a:lnTo>
-                  <a:lnTo>
-                    <a:pt x="5129424" y="3275820"/>
-                  </a:lnTo>
-                  <a:lnTo>
-                    <a:pt x="5207058" y="3288554"/>
-                  </a:lnTo>
-                  <a:lnTo>
-                    <a:pt x="5284693" y="3300858"/>
-                  </a:lnTo>
-                  <a:lnTo>
-                    <a:pt x="5362327" y="3312746"/>
-                  </a:lnTo>
-                  <a:lnTo>
-                    <a:pt x="5439961" y="3324232"/>
-                  </a:lnTo>
-                  <a:lnTo>
-                    <a:pt x="5517595" y="3335330"/>
-                  </a:lnTo>
-                  <a:lnTo>
-                    <a:pt x="5595229" y="3346053"/>
-                  </a:lnTo>
-                  <a:lnTo>
-                    <a:pt x="5672863" y="3356414"/>
-                  </a:lnTo>
-                  <a:lnTo>
-                    <a:pt x="5750497" y="3366425"/>
-                  </a:lnTo>
-                  <a:lnTo>
-                    <a:pt x="5828131" y="3376097"/>
-                  </a:lnTo>
-                  <a:lnTo>
-                    <a:pt x="5905765" y="3385442"/>
-                  </a:lnTo>
-                  <a:lnTo>
-                    <a:pt x="5983399" y="3394472"/>
-                  </a:lnTo>
-                  <a:lnTo>
-                    <a:pt x="6061033" y="3403196"/>
-                  </a:lnTo>
-                  <a:lnTo>
-                    <a:pt x="6138667" y="3411626"/>
-                  </a:lnTo>
-                  <a:lnTo>
-                    <a:pt x="6216301" y="3419771"/>
-                  </a:lnTo>
-                  <a:lnTo>
-                    <a:pt x="6293935" y="3427640"/>
-                  </a:lnTo>
-                  <a:lnTo>
-                    <a:pt x="6371569" y="3435244"/>
-                  </a:lnTo>
-                  <a:lnTo>
-                    <a:pt x="6449203" y="3442591"/>
-                  </a:lnTo>
-                  <a:lnTo>
-                    <a:pt x="6526837" y="3449689"/>
-                  </a:lnTo>
-                  <a:lnTo>
-                    <a:pt x="6604471" y="3456548"/>
-                  </a:lnTo>
-                  <a:lnTo>
-                    <a:pt x="6682105" y="3463174"/>
-                  </a:lnTo>
-                  <a:lnTo>
-                    <a:pt x="6759739" y="3469577"/>
-                  </a:lnTo>
-                  <a:lnTo>
-                    <a:pt x="6837373" y="3475764"/>
-                  </a:lnTo>
-                  <a:lnTo>
-                    <a:pt x="6915007" y="3481741"/>
-                  </a:lnTo>
-                  <a:lnTo>
-                    <a:pt x="6992642" y="3487516"/>
-                  </a:lnTo>
-                  <a:lnTo>
-                    <a:pt x="7070276" y="3493096"/>
-                  </a:lnTo>
-                  <a:lnTo>
-                    <a:pt x="7147910" y="3498488"/>
-                  </a:lnTo>
-                  <a:lnTo>
-                    <a:pt x="7225544" y="3503698"/>
+                    <a:pt x="31391" y="92340"/>
+                  </a:lnTo>
+                  <a:lnTo>
+                    <a:pt x="109025" y="306940"/>
+                  </a:lnTo>
+                  <a:lnTo>
+                    <a:pt x="186659" y="508605"/>
+                  </a:lnTo>
+                  <a:lnTo>
+                    <a:pt x="264293" y="698115"/>
+                  </a:lnTo>
+                  <a:lnTo>
+                    <a:pt x="341927" y="876201"/>
+                  </a:lnTo>
+                  <a:lnTo>
+                    <a:pt x="419561" y="1043554"/>
+                  </a:lnTo>
+                  <a:lnTo>
+                    <a:pt x="497195" y="1200819"/>
+                  </a:lnTo>
+                  <a:lnTo>
+                    <a:pt x="574830" y="1348604"/>
+                  </a:lnTo>
+                  <a:lnTo>
+                    <a:pt x="652464" y="1487482"/>
+                  </a:lnTo>
+                  <a:lnTo>
+                    <a:pt x="730098" y="1617989"/>
+                  </a:lnTo>
+                  <a:lnTo>
+                    <a:pt x="807732" y="1740630"/>
+                  </a:lnTo>
+                  <a:lnTo>
+                    <a:pt x="885366" y="1855878"/>
+                  </a:lnTo>
+                  <a:lnTo>
+                    <a:pt x="963000" y="1964179"/>
+                  </a:lnTo>
+                  <a:lnTo>
+                    <a:pt x="1040634" y="2065953"/>
+                  </a:lnTo>
+                  <a:lnTo>
+                    <a:pt x="1118268" y="2161592"/>
+                  </a:lnTo>
+                  <a:lnTo>
+                    <a:pt x="1195902" y="2251466"/>
+                  </a:lnTo>
+                  <a:lnTo>
+                    <a:pt x="1273536" y="2335923"/>
+                  </a:lnTo>
+                  <a:lnTo>
+                    <a:pt x="1351170" y="2415290"/>
+                  </a:lnTo>
+                  <a:lnTo>
+                    <a:pt x="1428804" y="2489872"/>
+                  </a:lnTo>
+                  <a:lnTo>
+                    <a:pt x="1506438" y="2559959"/>
+                  </a:lnTo>
+                  <a:lnTo>
+                    <a:pt x="1584072" y="2625822"/>
+                  </a:lnTo>
+                  <a:lnTo>
+                    <a:pt x="1661706" y="2687714"/>
+                  </a:lnTo>
+                  <a:lnTo>
+                    <a:pt x="1739340" y="2745876"/>
+                  </a:lnTo>
+                  <a:lnTo>
+                    <a:pt x="1816974" y="2800532"/>
+                  </a:lnTo>
+                  <a:lnTo>
+                    <a:pt x="1894608" y="2851894"/>
+                  </a:lnTo>
+                  <a:lnTo>
+                    <a:pt x="1972242" y="2900160"/>
+                  </a:lnTo>
+                  <a:lnTo>
+                    <a:pt x="2049876" y="2945516"/>
+                  </a:lnTo>
+                  <a:lnTo>
+                    <a:pt x="2127510" y="2988139"/>
+                  </a:lnTo>
+                  <a:lnTo>
+                    <a:pt x="2205144" y="3028193"/>
+                  </a:lnTo>
+                  <a:lnTo>
+                    <a:pt x="2282778" y="3065832"/>
+                  </a:lnTo>
+                  <a:lnTo>
+                    <a:pt x="2360413" y="3101202"/>
+                  </a:lnTo>
+                  <a:lnTo>
+                    <a:pt x="2438047" y="3134441"/>
+                  </a:lnTo>
+                  <a:lnTo>
+                    <a:pt x="2515681" y="3165676"/>
+                  </a:lnTo>
+                  <a:lnTo>
+                    <a:pt x="2593315" y="3195028"/>
+                  </a:lnTo>
+                  <a:lnTo>
+                    <a:pt x="2670949" y="3222611"/>
+                  </a:lnTo>
+                  <a:lnTo>
+                    <a:pt x="2748583" y="3248532"/>
+                  </a:lnTo>
+                  <a:lnTo>
+                    <a:pt x="2826217" y="3272890"/>
+                  </a:lnTo>
+                  <a:lnTo>
+                    <a:pt x="2903851" y="3295780"/>
+                  </a:lnTo>
+                  <a:lnTo>
+                    <a:pt x="2981485" y="3317290"/>
+                  </a:lnTo>
+                  <a:lnTo>
+                    <a:pt x="3059119" y="3337504"/>
+                  </a:lnTo>
+                  <a:lnTo>
+                    <a:pt x="3136753" y="3356499"/>
+                  </a:lnTo>
+                  <a:lnTo>
+                    <a:pt x="3214387" y="3374350"/>
+                  </a:lnTo>
+                  <a:lnTo>
+                    <a:pt x="3292021" y="3391124"/>
+                  </a:lnTo>
+                  <a:lnTo>
+                    <a:pt x="3369655" y="3406887"/>
+                  </a:lnTo>
+                  <a:lnTo>
+                    <a:pt x="3447289" y="3421700"/>
+                  </a:lnTo>
+                  <a:lnTo>
+                    <a:pt x="3524923" y="3435621"/>
+                  </a:lnTo>
+                  <a:lnTo>
+                    <a:pt x="3602557" y="3448702"/>
+                  </a:lnTo>
+                  <a:lnTo>
+                    <a:pt x="3680191" y="3460995"/>
+                  </a:lnTo>
+                  <a:lnTo>
+                    <a:pt x="3757825" y="3472546"/>
+                  </a:lnTo>
+                  <a:lnTo>
+                    <a:pt x="3835459" y="3483402"/>
+                  </a:lnTo>
+                  <a:lnTo>
+                    <a:pt x="3913093" y="3493603"/>
+                  </a:lnTo>
+                  <a:lnTo>
+                    <a:pt x="3990727" y="3503189"/>
+                  </a:lnTo>
+                  <a:lnTo>
+                    <a:pt x="4068362" y="3512198"/>
+                  </a:lnTo>
+                  <a:lnTo>
+                    <a:pt x="4145996" y="3520663"/>
+                  </a:lnTo>
+                  <a:lnTo>
+                    <a:pt x="4223630" y="3528618"/>
+                  </a:lnTo>
+                  <a:lnTo>
+                    <a:pt x="4301264" y="3536094"/>
+                  </a:lnTo>
+                  <a:lnTo>
+                    <a:pt x="4378898" y="3543119"/>
+                  </a:lnTo>
+                  <a:lnTo>
+                    <a:pt x="4456532" y="3549721"/>
+                  </a:lnTo>
+                  <a:lnTo>
+                    <a:pt x="4534166" y="3555925"/>
+                  </a:lnTo>
+                  <a:lnTo>
+                    <a:pt x="4611800" y="3561754"/>
+                  </a:lnTo>
+                  <a:lnTo>
+                    <a:pt x="4689434" y="3567233"/>
+                  </a:lnTo>
+                  <a:lnTo>
+                    <a:pt x="4767068" y="3572381"/>
+                  </a:lnTo>
+                  <a:lnTo>
+                    <a:pt x="4844702" y="3577219"/>
+                  </a:lnTo>
+                  <a:lnTo>
+                    <a:pt x="4922336" y="3581765"/>
+                  </a:lnTo>
+                  <a:lnTo>
+                    <a:pt x="4999970" y="3586037"/>
+                  </a:lnTo>
+                  <a:lnTo>
+                    <a:pt x="5077604" y="3590052"/>
+                  </a:lnTo>
+                  <a:lnTo>
+                    <a:pt x="5155238" y="3593825"/>
+                  </a:lnTo>
+                  <a:lnTo>
+                    <a:pt x="5232872" y="3597370"/>
+                  </a:lnTo>
+                  <a:lnTo>
+                    <a:pt x="5310506" y="3600702"/>
+                  </a:lnTo>
+                  <a:lnTo>
+                    <a:pt x="5388140" y="3603833"/>
+                  </a:lnTo>
+                  <a:lnTo>
+                    <a:pt x="5465774" y="3606775"/>
+                  </a:lnTo>
+                  <a:lnTo>
+                    <a:pt x="5543408" y="3609540"/>
+                  </a:lnTo>
+                  <a:lnTo>
+                    <a:pt x="5621042" y="3612138"/>
+                  </a:lnTo>
+                  <a:lnTo>
+                    <a:pt x="5698676" y="3614579"/>
+                  </a:lnTo>
+                  <a:lnTo>
+                    <a:pt x="5776311" y="3616873"/>
                   </a:lnTo>
                 </a:path>
               </a:pathLst>

--- a/docs/plots/carbo/jx_carbo_linsubhr_ratio_hosp4.pptx
+++ b/docs/plots/carbo/jx_carbo_linsubhr_ratio_hosp4.pptx
@@ -3003,500 +3003,521 @@
           <p:spPr>
             <a:xfrm>
               <a:off x="817517" y="1896563"/>
-              <a:ext cx="7370972" cy="3648550"/>
+              <a:ext cx="7370972" cy="3623637"/>
             </a:xfrm>
             <a:custGeom>
               <a:avLst/>
               <a:pathLst>
-                <a:path w="7370972" h="3648550">
+                <a:path w="7370972" h="3623637">
                   <a:moveTo>
-                    <a:pt x="2319301" y="0"/>
+                    <a:pt x="1704559" y="0"/>
                   </a:moveTo>
                   <a:lnTo>
-                    <a:pt x="2324759" y="28042"/>
-                  </a:lnTo>
-                  <a:lnTo>
-                    <a:pt x="2402393" y="387378"/>
-                  </a:lnTo>
-                  <a:lnTo>
-                    <a:pt x="2480027" y="711090"/>
-                  </a:lnTo>
-                  <a:lnTo>
-                    <a:pt x="2557661" y="1002710"/>
-                  </a:lnTo>
-                  <a:lnTo>
-                    <a:pt x="2635295" y="1265419"/>
-                  </a:lnTo>
-                  <a:lnTo>
-                    <a:pt x="2712930" y="1502083"/>
-                  </a:lnTo>
-                  <a:lnTo>
-                    <a:pt x="2790564" y="1715286"/>
-                  </a:lnTo>
-                  <a:lnTo>
-                    <a:pt x="2868198" y="1907351"/>
-                  </a:lnTo>
-                  <a:lnTo>
-                    <a:pt x="2945832" y="2080376"/>
-                  </a:lnTo>
-                  <a:lnTo>
-                    <a:pt x="3023466" y="2236248"/>
-                  </a:lnTo>
-                  <a:lnTo>
-                    <a:pt x="3101100" y="2376666"/>
-                  </a:lnTo>
-                  <a:lnTo>
-                    <a:pt x="3178734" y="2503164"/>
-                  </a:lnTo>
-                  <a:lnTo>
-                    <a:pt x="3256368" y="2617121"/>
-                  </a:lnTo>
-                  <a:lnTo>
-                    <a:pt x="3334002" y="2719781"/>
-                  </a:lnTo>
-                  <a:lnTo>
-                    <a:pt x="3411636" y="2788638"/>
-                  </a:lnTo>
-                  <a:lnTo>
-                    <a:pt x="3489270" y="2805691"/>
-                  </a:lnTo>
-                  <a:lnTo>
-                    <a:pt x="3566904" y="2822407"/>
-                  </a:lnTo>
-                  <a:lnTo>
-                    <a:pt x="3644538" y="2838794"/>
-                  </a:lnTo>
-                  <a:lnTo>
-                    <a:pt x="3722172" y="2854857"/>
-                  </a:lnTo>
-                  <a:lnTo>
-                    <a:pt x="3799806" y="2870603"/>
-                  </a:lnTo>
-                  <a:lnTo>
-                    <a:pt x="3877440" y="2886038"/>
-                  </a:lnTo>
-                  <a:lnTo>
-                    <a:pt x="3955074" y="2901169"/>
-                  </a:lnTo>
-                  <a:lnTo>
-                    <a:pt x="4032708" y="2916001"/>
-                  </a:lnTo>
-                  <a:lnTo>
-                    <a:pt x="4110342" y="2930540"/>
-                  </a:lnTo>
-                  <a:lnTo>
-                    <a:pt x="4187976" y="2944792"/>
-                  </a:lnTo>
-                  <a:lnTo>
-                    <a:pt x="4265610" y="2958763"/>
-                  </a:lnTo>
-                  <a:lnTo>
-                    <a:pt x="4343244" y="2972459"/>
-                  </a:lnTo>
-                  <a:lnTo>
-                    <a:pt x="4420879" y="2985884"/>
-                  </a:lnTo>
-                  <a:lnTo>
-                    <a:pt x="4498513" y="2999043"/>
-                  </a:lnTo>
-                  <a:lnTo>
-                    <a:pt x="4576147" y="3011944"/>
-                  </a:lnTo>
-                  <a:lnTo>
-                    <a:pt x="4653781" y="3024589"/>
-                  </a:lnTo>
-                  <a:lnTo>
-                    <a:pt x="4731415" y="3036985"/>
-                  </a:lnTo>
-                  <a:lnTo>
-                    <a:pt x="4809049" y="3049137"/>
-                  </a:lnTo>
-                  <a:lnTo>
-                    <a:pt x="4886683" y="3061048"/>
-                  </a:lnTo>
-                  <a:lnTo>
-                    <a:pt x="4964317" y="3072725"/>
-                  </a:lnTo>
-                  <a:lnTo>
-                    <a:pt x="5041951" y="3084171"/>
-                  </a:lnTo>
-                  <a:lnTo>
-                    <a:pt x="5119585" y="3095391"/>
-                  </a:lnTo>
-                  <a:lnTo>
-                    <a:pt x="5197219" y="3106389"/>
-                  </a:lnTo>
-                  <a:lnTo>
-                    <a:pt x="5274853" y="3117171"/>
-                  </a:lnTo>
-                  <a:lnTo>
-                    <a:pt x="5352487" y="3127739"/>
-                  </a:lnTo>
-                  <a:lnTo>
-                    <a:pt x="5430121" y="3138100"/>
-                  </a:lnTo>
-                  <a:lnTo>
-                    <a:pt x="5507755" y="3148255"/>
-                  </a:lnTo>
-                  <a:lnTo>
-                    <a:pt x="5585389" y="3158210"/>
-                  </a:lnTo>
-                  <a:lnTo>
-                    <a:pt x="5663023" y="3167969"/>
-                  </a:lnTo>
-                  <a:lnTo>
-                    <a:pt x="5740657" y="3177535"/>
-                  </a:lnTo>
-                  <a:lnTo>
-                    <a:pt x="5818291" y="3186912"/>
-                  </a:lnTo>
-                  <a:lnTo>
-                    <a:pt x="5895925" y="3196105"/>
-                  </a:lnTo>
-                  <a:lnTo>
-                    <a:pt x="5973559" y="3205115"/>
-                  </a:lnTo>
-                  <a:lnTo>
-                    <a:pt x="6051193" y="3213948"/>
-                  </a:lnTo>
-                  <a:lnTo>
-                    <a:pt x="6128827" y="3222607"/>
-                  </a:lnTo>
-                  <a:lnTo>
-                    <a:pt x="6206462" y="3231095"/>
-                  </a:lnTo>
-                  <a:lnTo>
-                    <a:pt x="6284096" y="3239415"/>
-                  </a:lnTo>
-                  <a:lnTo>
-                    <a:pt x="6361730" y="3247571"/>
-                  </a:lnTo>
-                  <a:lnTo>
-                    <a:pt x="6439364" y="3255566"/>
-                  </a:lnTo>
-                  <a:lnTo>
-                    <a:pt x="6516998" y="3263403"/>
-                  </a:lnTo>
-                  <a:lnTo>
-                    <a:pt x="6594632" y="3271085"/>
-                  </a:lnTo>
-                  <a:lnTo>
-                    <a:pt x="6672266" y="3278616"/>
-                  </a:lnTo>
-                  <a:lnTo>
-                    <a:pt x="6749900" y="3285999"/>
-                  </a:lnTo>
-                  <a:lnTo>
-                    <a:pt x="6827534" y="3293235"/>
-                  </a:lnTo>
-                  <a:lnTo>
-                    <a:pt x="6905168" y="3300329"/>
-                  </a:lnTo>
-                  <a:lnTo>
-                    <a:pt x="6982802" y="3307283"/>
-                  </a:lnTo>
-                  <a:lnTo>
-                    <a:pt x="7060436" y="3314099"/>
-                  </a:lnTo>
-                  <a:lnTo>
-                    <a:pt x="7138070" y="3320781"/>
-                  </a:lnTo>
-                  <a:lnTo>
-                    <a:pt x="7215704" y="3327331"/>
-                  </a:lnTo>
-                  <a:lnTo>
-                    <a:pt x="7293338" y="3333752"/>
-                  </a:lnTo>
-                  <a:lnTo>
-                    <a:pt x="7370972" y="3340046"/>
-                  </a:lnTo>
-                  <a:lnTo>
-                    <a:pt x="7370972" y="3648550"/>
-                  </a:lnTo>
-                  <a:lnTo>
-                    <a:pt x="7293338" y="3648100"/>
-                  </a:lnTo>
-                  <a:lnTo>
-                    <a:pt x="7215704" y="3647600"/>
-                  </a:lnTo>
-                  <a:lnTo>
-                    <a:pt x="7138070" y="3647045"/>
-                  </a:lnTo>
-                  <a:lnTo>
-                    <a:pt x="7060436" y="3646429"/>
-                  </a:lnTo>
-                  <a:lnTo>
-                    <a:pt x="6982802" y="3645745"/>
-                  </a:lnTo>
-                  <a:lnTo>
-                    <a:pt x="6905168" y="3644986"/>
-                  </a:lnTo>
-                  <a:lnTo>
-                    <a:pt x="6827534" y="3644143"/>
-                  </a:lnTo>
-                  <a:lnTo>
-                    <a:pt x="6749900" y="3643207"/>
-                  </a:lnTo>
-                  <a:lnTo>
-                    <a:pt x="6672266" y="3642169"/>
-                  </a:lnTo>
-                  <a:lnTo>
-                    <a:pt x="6594632" y="3641016"/>
-                  </a:lnTo>
-                  <a:lnTo>
-                    <a:pt x="6516998" y="3639737"/>
-                  </a:lnTo>
-                  <a:lnTo>
-                    <a:pt x="6439364" y="3638317"/>
-                  </a:lnTo>
-                  <a:lnTo>
-                    <a:pt x="6361730" y="3636740"/>
-                  </a:lnTo>
-                  <a:lnTo>
-                    <a:pt x="6284096" y="3634990"/>
-                  </a:lnTo>
-                  <a:lnTo>
-                    <a:pt x="6206462" y="3633047"/>
-                  </a:lnTo>
-                  <a:lnTo>
-                    <a:pt x="6128827" y="3630890"/>
-                  </a:lnTo>
-                  <a:lnTo>
-                    <a:pt x="6051193" y="3628497"/>
-                  </a:lnTo>
-                  <a:lnTo>
-                    <a:pt x="5973559" y="3625839"/>
-                  </a:lnTo>
-                  <a:lnTo>
-                    <a:pt x="5895925" y="3622890"/>
-                  </a:lnTo>
-                  <a:lnTo>
-                    <a:pt x="5818291" y="3619615"/>
-                  </a:lnTo>
-                  <a:lnTo>
-                    <a:pt x="5740657" y="3615981"/>
-                  </a:lnTo>
-                  <a:lnTo>
-                    <a:pt x="5663023" y="3611946"/>
-                  </a:lnTo>
-                  <a:lnTo>
-                    <a:pt x="5585389" y="3607467"/>
-                  </a:lnTo>
-                  <a:lnTo>
-                    <a:pt x="5507755" y="3602496"/>
-                  </a:lnTo>
-                  <a:lnTo>
-                    <a:pt x="5430121" y="3596977"/>
-                  </a:lnTo>
-                  <a:lnTo>
-                    <a:pt x="5352487" y="3590851"/>
-                  </a:lnTo>
-                  <a:lnTo>
-                    <a:pt x="5274853" y="3584051"/>
-                  </a:lnTo>
-                  <a:lnTo>
-                    <a:pt x="5197219" y="3576503"/>
-                  </a:lnTo>
-                  <a:lnTo>
-                    <a:pt x="5119585" y="3568124"/>
-                  </a:lnTo>
-                  <a:lnTo>
-                    <a:pt x="5041951" y="3558822"/>
-                  </a:lnTo>
-                  <a:lnTo>
-                    <a:pt x="4964317" y="3548498"/>
-                  </a:lnTo>
-                  <a:lnTo>
-                    <a:pt x="4886683" y="3537037"/>
-                  </a:lnTo>
-                  <a:lnTo>
-                    <a:pt x="4809049" y="3524314"/>
-                  </a:lnTo>
-                  <a:lnTo>
-                    <a:pt x="4731415" y="3510192"/>
-                  </a:lnTo>
-                  <a:lnTo>
-                    <a:pt x="4653781" y="3494516"/>
-                  </a:lnTo>
-                  <a:lnTo>
-                    <a:pt x="4576147" y="3477114"/>
-                  </a:lnTo>
-                  <a:lnTo>
-                    <a:pt x="4498513" y="3457797"/>
-                  </a:lnTo>
-                  <a:lnTo>
-                    <a:pt x="4420879" y="3436355"/>
-                  </a:lnTo>
-                  <a:lnTo>
-                    <a:pt x="4343244" y="3412553"/>
-                  </a:lnTo>
-                  <a:lnTo>
-                    <a:pt x="4265610" y="3386131"/>
-                  </a:lnTo>
-                  <a:lnTo>
-                    <a:pt x="4187976" y="3356802"/>
-                  </a:lnTo>
-                  <a:lnTo>
-                    <a:pt x="4110342" y="3324245"/>
-                  </a:lnTo>
-                  <a:lnTo>
-                    <a:pt x="4032708" y="3288106"/>
-                  </a:lnTo>
-                  <a:lnTo>
-                    <a:pt x="3955074" y="3247989"/>
-                  </a:lnTo>
-                  <a:lnTo>
-                    <a:pt x="3877440" y="3203458"/>
-                  </a:lnTo>
-                  <a:lnTo>
-                    <a:pt x="3799806" y="3154026"/>
-                  </a:lnTo>
-                  <a:lnTo>
-                    <a:pt x="3722172" y="3099154"/>
-                  </a:lnTo>
-                  <a:lnTo>
-                    <a:pt x="3644538" y="3038244"/>
-                  </a:lnTo>
-                  <a:lnTo>
-                    <a:pt x="3566904" y="2970631"/>
-                  </a:lnTo>
-                  <a:lnTo>
-                    <a:pt x="3489270" y="2895577"/>
-                  </a:lnTo>
-                  <a:lnTo>
-                    <a:pt x="3411636" y="2812263"/>
-                  </a:lnTo>
-                  <a:lnTo>
-                    <a:pt x="3334002" y="2771241"/>
-                  </a:lnTo>
-                  <a:lnTo>
-                    <a:pt x="3256368" y="2753495"/>
-                  </a:lnTo>
-                  <a:lnTo>
-                    <a:pt x="3178734" y="2735391"/>
-                  </a:lnTo>
-                  <a:lnTo>
-                    <a:pt x="3101100" y="2716922"/>
-                  </a:lnTo>
-                  <a:lnTo>
-                    <a:pt x="3023466" y="2698082"/>
-                  </a:lnTo>
-                  <a:lnTo>
-                    <a:pt x="2945832" y="2678862"/>
-                  </a:lnTo>
-                  <a:lnTo>
-                    <a:pt x="2868198" y="2659256"/>
-                  </a:lnTo>
-                  <a:lnTo>
-                    <a:pt x="2790564" y="2639254"/>
-                  </a:lnTo>
-                  <a:lnTo>
-                    <a:pt x="2712930" y="2618850"/>
-                  </a:lnTo>
-                  <a:lnTo>
-                    <a:pt x="2635295" y="2598035"/>
-                  </a:lnTo>
-                  <a:lnTo>
-                    <a:pt x="2557661" y="2576801"/>
-                  </a:lnTo>
-                  <a:lnTo>
-                    <a:pt x="2480027" y="2555139"/>
-                  </a:lnTo>
-                  <a:lnTo>
-                    <a:pt x="2402393" y="2533042"/>
-                  </a:lnTo>
-                  <a:lnTo>
-                    <a:pt x="2324759" y="2510499"/>
-                  </a:lnTo>
-                  <a:lnTo>
-                    <a:pt x="2247125" y="2487502"/>
-                  </a:lnTo>
-                  <a:lnTo>
-                    <a:pt x="2169491" y="2464043"/>
-                  </a:lnTo>
-                  <a:lnTo>
-                    <a:pt x="2091857" y="2440111"/>
-                  </a:lnTo>
-                  <a:lnTo>
-                    <a:pt x="2014223" y="2415697"/>
-                  </a:lnTo>
-                  <a:lnTo>
-                    <a:pt x="1936589" y="2390792"/>
-                  </a:lnTo>
-                  <a:lnTo>
-                    <a:pt x="1858955" y="2365385"/>
-                  </a:lnTo>
-                  <a:lnTo>
-                    <a:pt x="1781321" y="2339466"/>
-                  </a:lnTo>
-                  <a:lnTo>
-                    <a:pt x="1703687" y="2313026"/>
-                  </a:lnTo>
-                  <a:lnTo>
-                    <a:pt x="1626053" y="2286053"/>
-                  </a:lnTo>
-                  <a:lnTo>
-                    <a:pt x="1548419" y="2258538"/>
-                  </a:lnTo>
-                  <a:lnTo>
-                    <a:pt x="1470785" y="2230468"/>
-                  </a:lnTo>
-                  <a:lnTo>
-                    <a:pt x="1393151" y="2201833"/>
-                  </a:lnTo>
-                  <a:lnTo>
-                    <a:pt x="1315517" y="2172622"/>
-                  </a:lnTo>
-                  <a:lnTo>
-                    <a:pt x="1237883" y="2142822"/>
-                  </a:lnTo>
-                  <a:lnTo>
-                    <a:pt x="1160249" y="2112422"/>
-                  </a:lnTo>
-                  <a:lnTo>
-                    <a:pt x="1082615" y="2081411"/>
-                  </a:lnTo>
-                  <a:lnTo>
-                    <a:pt x="1004981" y="2049775"/>
-                  </a:lnTo>
-                  <a:lnTo>
-                    <a:pt x="927346" y="2017502"/>
-                  </a:lnTo>
-                  <a:lnTo>
-                    <a:pt x="849712" y="1984579"/>
-                  </a:lnTo>
-                  <a:lnTo>
-                    <a:pt x="772078" y="1950993"/>
-                  </a:lnTo>
-                  <a:lnTo>
-                    <a:pt x="694444" y="1916731"/>
-                  </a:lnTo>
-                  <a:lnTo>
-                    <a:pt x="616810" y="1881779"/>
-                  </a:lnTo>
-                  <a:lnTo>
-                    <a:pt x="539176" y="1846123"/>
-                  </a:lnTo>
-                  <a:lnTo>
-                    <a:pt x="461542" y="1809750"/>
-                  </a:lnTo>
-                  <a:lnTo>
-                    <a:pt x="383908" y="1772644"/>
-                  </a:lnTo>
-                  <a:lnTo>
-                    <a:pt x="306274" y="1734791"/>
-                  </a:lnTo>
-                  <a:lnTo>
-                    <a:pt x="228640" y="1696176"/>
-                  </a:lnTo>
-                  <a:lnTo>
-                    <a:pt x="151006" y="1656783"/>
-                  </a:lnTo>
-                  <a:lnTo>
-                    <a:pt x="73372" y="1616598"/>
-                  </a:lnTo>
-                  <a:lnTo>
-                    <a:pt x="0" y="1577853"/>
+                    <a:pt x="1781321" y="231690"/>
+                  </a:lnTo>
+                  <a:lnTo>
+                    <a:pt x="1858955" y="450991"/>
+                  </a:lnTo>
+                  <a:lnTo>
+                    <a:pt x="1936589" y="656234"/>
+                  </a:lnTo>
+                  <a:lnTo>
+                    <a:pt x="2014223" y="848319"/>
+                  </a:lnTo>
+                  <a:lnTo>
+                    <a:pt x="2091857" y="1028091"/>
+                  </a:lnTo>
+                  <a:lnTo>
+                    <a:pt x="2169491" y="1196339"/>
+                  </a:lnTo>
+                  <a:lnTo>
+                    <a:pt x="2247125" y="1353801"/>
+                  </a:lnTo>
+                  <a:lnTo>
+                    <a:pt x="2324759" y="1501169"/>
+                  </a:lnTo>
+                  <a:lnTo>
+                    <a:pt x="2402393" y="1639090"/>
+                  </a:lnTo>
+                  <a:lnTo>
+                    <a:pt x="2480027" y="1768169"/>
+                  </a:lnTo>
+                  <a:lnTo>
+                    <a:pt x="2557661" y="1888974"/>
+                  </a:lnTo>
+                  <a:lnTo>
+                    <a:pt x="2635295" y="2002035"/>
+                  </a:lnTo>
+                  <a:lnTo>
+                    <a:pt x="2712930" y="2107847"/>
+                  </a:lnTo>
+                  <a:lnTo>
+                    <a:pt x="2790564" y="2206877"/>
+                  </a:lnTo>
+                  <a:lnTo>
+                    <a:pt x="2868198" y="2299558"/>
+                  </a:lnTo>
+                  <a:lnTo>
+                    <a:pt x="2945832" y="2386298"/>
+                  </a:lnTo>
+                  <a:lnTo>
+                    <a:pt x="3023466" y="2467477"/>
+                  </a:lnTo>
+                  <a:lnTo>
+                    <a:pt x="3101100" y="2543453"/>
+                  </a:lnTo>
+                  <a:lnTo>
+                    <a:pt x="3178734" y="2614558"/>
+                  </a:lnTo>
+                  <a:lnTo>
+                    <a:pt x="3256368" y="2681105"/>
+                  </a:lnTo>
+                  <a:lnTo>
+                    <a:pt x="3334002" y="2743385"/>
+                  </a:lnTo>
+                  <a:lnTo>
+                    <a:pt x="3411636" y="2783680"/>
+                  </a:lnTo>
+                  <a:lnTo>
+                    <a:pt x="3489270" y="2785853"/>
+                  </a:lnTo>
+                  <a:lnTo>
+                    <a:pt x="3566904" y="2788019"/>
+                  </a:lnTo>
+                  <a:lnTo>
+                    <a:pt x="3644538" y="2790181"/>
+                  </a:lnTo>
+                  <a:lnTo>
+                    <a:pt x="3722172" y="2792337"/>
+                  </a:lnTo>
+                  <a:lnTo>
+                    <a:pt x="3799806" y="2794487"/>
+                  </a:lnTo>
+                  <a:lnTo>
+                    <a:pt x="3877440" y="2796632"/>
+                  </a:lnTo>
+                  <a:lnTo>
+                    <a:pt x="3955074" y="2798772"/>
+                  </a:lnTo>
+                  <a:lnTo>
+                    <a:pt x="4032708" y="2800906"/>
+                  </a:lnTo>
+                  <a:lnTo>
+                    <a:pt x="4110342" y="2803036"/>
+                  </a:lnTo>
+                  <a:lnTo>
+                    <a:pt x="4187976" y="2805159"/>
+                  </a:lnTo>
+                  <a:lnTo>
+                    <a:pt x="4265610" y="2807278"/>
+                  </a:lnTo>
+                  <a:lnTo>
+                    <a:pt x="4343244" y="2809391"/>
+                  </a:lnTo>
+                  <a:lnTo>
+                    <a:pt x="4420879" y="2811499"/>
+                  </a:lnTo>
+                  <a:lnTo>
+                    <a:pt x="4498513" y="2813602"/>
+                  </a:lnTo>
+                  <a:lnTo>
+                    <a:pt x="4576147" y="2815699"/>
+                  </a:lnTo>
+                  <a:lnTo>
+                    <a:pt x="4653781" y="2817791"/>
+                  </a:lnTo>
+                  <a:lnTo>
+                    <a:pt x="4731415" y="2819878"/>
+                  </a:lnTo>
+                  <a:lnTo>
+                    <a:pt x="4809049" y="2821960"/>
+                  </a:lnTo>
+                  <a:lnTo>
+                    <a:pt x="4886683" y="2824036"/>
+                  </a:lnTo>
+                  <a:lnTo>
+                    <a:pt x="4964317" y="2826108"/>
+                  </a:lnTo>
+                  <a:lnTo>
+                    <a:pt x="5041951" y="2828174"/>
+                  </a:lnTo>
+                  <a:lnTo>
+                    <a:pt x="5119585" y="2830235"/>
+                  </a:lnTo>
+                  <a:lnTo>
+                    <a:pt x="5197219" y="2832290"/>
+                  </a:lnTo>
+                  <a:lnTo>
+                    <a:pt x="5274853" y="2834341"/>
+                  </a:lnTo>
+                  <a:lnTo>
+                    <a:pt x="5352487" y="2836387"/>
+                  </a:lnTo>
+                  <a:lnTo>
+                    <a:pt x="5430121" y="2838427"/>
+                  </a:lnTo>
+                  <a:lnTo>
+                    <a:pt x="5507755" y="2840462"/>
+                  </a:lnTo>
+                  <a:lnTo>
+                    <a:pt x="5585389" y="2842493"/>
+                  </a:lnTo>
+                  <a:lnTo>
+                    <a:pt x="5663023" y="2844518"/>
+                  </a:lnTo>
+                  <a:lnTo>
+                    <a:pt x="5740657" y="2846538"/>
+                  </a:lnTo>
+                  <a:lnTo>
+                    <a:pt x="5818291" y="2848553"/>
+                  </a:lnTo>
+                  <a:lnTo>
+                    <a:pt x="5895925" y="2850563"/>
+                  </a:lnTo>
+                  <a:lnTo>
+                    <a:pt x="5973559" y="2852568"/>
+                  </a:lnTo>
+                  <a:lnTo>
+                    <a:pt x="6051193" y="2854568"/>
+                  </a:lnTo>
+                  <a:lnTo>
+                    <a:pt x="6128827" y="2856563"/>
+                  </a:lnTo>
+                  <a:lnTo>
+                    <a:pt x="6206462" y="2858553"/>
+                  </a:lnTo>
+                  <a:lnTo>
+                    <a:pt x="6284096" y="2860538"/>
+                  </a:lnTo>
+                  <a:lnTo>
+                    <a:pt x="6361730" y="2862518"/>
+                  </a:lnTo>
+                  <a:lnTo>
+                    <a:pt x="6439364" y="2864493"/>
+                  </a:lnTo>
+                  <a:lnTo>
+                    <a:pt x="6516998" y="2866463"/>
+                  </a:lnTo>
+                  <a:lnTo>
+                    <a:pt x="6594632" y="2868428"/>
+                  </a:lnTo>
+                  <a:lnTo>
+                    <a:pt x="6672266" y="2870389"/>
+                  </a:lnTo>
+                  <a:lnTo>
+                    <a:pt x="6749900" y="2872344"/>
+                  </a:lnTo>
+                  <a:lnTo>
+                    <a:pt x="6827534" y="2874295"/>
+                  </a:lnTo>
+                  <a:lnTo>
+                    <a:pt x="6905168" y="2876240"/>
+                  </a:lnTo>
+                  <a:lnTo>
+                    <a:pt x="6982802" y="2878181"/>
+                  </a:lnTo>
+                  <a:lnTo>
+                    <a:pt x="7060436" y="2880117"/>
+                  </a:lnTo>
+                  <a:lnTo>
+                    <a:pt x="7138070" y="2882048"/>
+                  </a:lnTo>
+                  <a:lnTo>
+                    <a:pt x="7215704" y="2883975"/>
+                  </a:lnTo>
+                  <a:lnTo>
+                    <a:pt x="7293338" y="2885896"/>
+                  </a:lnTo>
+                  <a:lnTo>
+                    <a:pt x="7370972" y="2887813"/>
+                  </a:lnTo>
+                  <a:lnTo>
+                    <a:pt x="7370972" y="3623637"/>
+                  </a:lnTo>
+                  <a:lnTo>
+                    <a:pt x="7293338" y="3621650"/>
+                  </a:lnTo>
+                  <a:lnTo>
+                    <a:pt x="7215704" y="3619527"/>
+                  </a:lnTo>
+                  <a:lnTo>
+                    <a:pt x="7138070" y="3617259"/>
+                  </a:lnTo>
+                  <a:lnTo>
+                    <a:pt x="7060436" y="3614835"/>
+                  </a:lnTo>
+                  <a:lnTo>
+                    <a:pt x="6982802" y="3612246"/>
+                  </a:lnTo>
+                  <a:lnTo>
+                    <a:pt x="6905168" y="3609479"/>
+                  </a:lnTo>
+                  <a:lnTo>
+                    <a:pt x="6827534" y="3606522"/>
+                  </a:lnTo>
+                  <a:lnTo>
+                    <a:pt x="6749900" y="3603363"/>
+                  </a:lnTo>
+                  <a:lnTo>
+                    <a:pt x="6672266" y="3599987"/>
+                  </a:lnTo>
+                  <a:lnTo>
+                    <a:pt x="6594632" y="3596381"/>
+                  </a:lnTo>
+                  <a:lnTo>
+                    <a:pt x="6516998" y="3592527"/>
+                  </a:lnTo>
+                  <a:lnTo>
+                    <a:pt x="6439364" y="3588409"/>
+                  </a:lnTo>
+                  <a:lnTo>
+                    <a:pt x="6361730" y="3584009"/>
+                  </a:lnTo>
+                  <a:lnTo>
+                    <a:pt x="6284096" y="3579308"/>
+                  </a:lnTo>
+                  <a:lnTo>
+                    <a:pt x="6206462" y="3574285"/>
+                  </a:lnTo>
+                  <a:lnTo>
+                    <a:pt x="6128827" y="3568918"/>
+                  </a:lnTo>
+                  <a:lnTo>
+                    <a:pt x="6051193" y="3563183"/>
+                  </a:lnTo>
+                  <a:lnTo>
+                    <a:pt x="5973559" y="3557055"/>
+                  </a:lnTo>
+                  <a:lnTo>
+                    <a:pt x="5895925" y="3550507"/>
+                  </a:lnTo>
+                  <a:lnTo>
+                    <a:pt x="5818291" y="3543512"/>
+                  </a:lnTo>
+                  <a:lnTo>
+                    <a:pt x="5740657" y="3536036"/>
+                  </a:lnTo>
+                  <a:lnTo>
+                    <a:pt x="5663023" y="3528049"/>
+                  </a:lnTo>
+                  <a:lnTo>
+                    <a:pt x="5585389" y="3519515"/>
+                  </a:lnTo>
+                  <a:lnTo>
+                    <a:pt x="5507755" y="3510396"/>
+                  </a:lnTo>
+                  <a:lnTo>
+                    <a:pt x="5430121" y="3500653"/>
+                  </a:lnTo>
+                  <a:lnTo>
+                    <a:pt x="5352487" y="3490242"/>
+                  </a:lnTo>
+                  <a:lnTo>
+                    <a:pt x="5274853" y="3479118"/>
+                  </a:lnTo>
+                  <a:lnTo>
+                    <a:pt x="5197219" y="3467232"/>
+                  </a:lnTo>
+                  <a:lnTo>
+                    <a:pt x="5119585" y="3454533"/>
+                  </a:lnTo>
+                  <a:lnTo>
+                    <a:pt x="5041951" y="3440963"/>
+                  </a:lnTo>
+                  <a:lnTo>
+                    <a:pt x="4964317" y="3426463"/>
+                  </a:lnTo>
+                  <a:lnTo>
+                    <a:pt x="4886683" y="3410971"/>
+                  </a:lnTo>
+                  <a:lnTo>
+                    <a:pt x="4809049" y="3394417"/>
+                  </a:lnTo>
+                  <a:lnTo>
+                    <a:pt x="4731415" y="3376730"/>
+                  </a:lnTo>
+                  <a:lnTo>
+                    <a:pt x="4653781" y="3357831"/>
+                  </a:lnTo>
+                  <a:lnTo>
+                    <a:pt x="4576147" y="3337637"/>
+                  </a:lnTo>
+                  <a:lnTo>
+                    <a:pt x="4498513" y="3316060"/>
+                  </a:lnTo>
+                  <a:lnTo>
+                    <a:pt x="4420879" y="3293006"/>
+                  </a:lnTo>
+                  <a:lnTo>
+                    <a:pt x="4343244" y="3268372"/>
+                  </a:lnTo>
+                  <a:lnTo>
+                    <a:pt x="4265610" y="3242051"/>
+                  </a:lnTo>
+                  <a:lnTo>
+                    <a:pt x="4187976" y="3213927"/>
+                  </a:lnTo>
+                  <a:lnTo>
+                    <a:pt x="4110342" y="3183876"/>
+                  </a:lnTo>
+                  <a:lnTo>
+                    <a:pt x="4032708" y="3151767"/>
+                  </a:lnTo>
+                  <a:lnTo>
+                    <a:pt x="3955074" y="3117459"/>
+                  </a:lnTo>
+                  <a:lnTo>
+                    <a:pt x="3877440" y="3080801"/>
+                  </a:lnTo>
+                  <a:lnTo>
+                    <a:pt x="3799806" y="3041632"/>
+                  </a:lnTo>
+                  <a:lnTo>
+                    <a:pt x="3722172" y="2999780"/>
+                  </a:lnTo>
+                  <a:lnTo>
+                    <a:pt x="3644538" y="2955062"/>
+                  </a:lnTo>
+                  <a:lnTo>
+                    <a:pt x="3566904" y="2907280"/>
+                  </a:lnTo>
+                  <a:lnTo>
+                    <a:pt x="3489270" y="2856225"/>
+                  </a:lnTo>
+                  <a:lnTo>
+                    <a:pt x="3411636" y="2801674"/>
+                  </a:lnTo>
+                  <a:lnTo>
+                    <a:pt x="3334002" y="2781503"/>
+                  </a:lnTo>
+                  <a:lnTo>
+                    <a:pt x="3256368" y="2779320"/>
+                  </a:lnTo>
+                  <a:lnTo>
+                    <a:pt x="3178734" y="2777131"/>
+                  </a:lnTo>
+                  <a:lnTo>
+                    <a:pt x="3101100" y="2774937"/>
+                  </a:lnTo>
+                  <a:lnTo>
+                    <a:pt x="3023466" y="2772738"/>
+                  </a:lnTo>
+                  <a:lnTo>
+                    <a:pt x="2945832" y="2770532"/>
+                  </a:lnTo>
+                  <a:lnTo>
+                    <a:pt x="2868198" y="2768322"/>
+                  </a:lnTo>
+                  <a:lnTo>
+                    <a:pt x="2790564" y="2766106"/>
+                  </a:lnTo>
+                  <a:lnTo>
+                    <a:pt x="2712930" y="2763884"/>
+                  </a:lnTo>
+                  <a:lnTo>
+                    <a:pt x="2635295" y="2761657"/>
+                  </a:lnTo>
+                  <a:lnTo>
+                    <a:pt x="2557661" y="2759424"/>
+                  </a:lnTo>
+                  <a:lnTo>
+                    <a:pt x="2480027" y="2757186"/>
+                  </a:lnTo>
+                  <a:lnTo>
+                    <a:pt x="2402393" y="2754942"/>
+                  </a:lnTo>
+                  <a:lnTo>
+                    <a:pt x="2324759" y="2752692"/>
+                  </a:lnTo>
+                  <a:lnTo>
+                    <a:pt x="2247125" y="2750437"/>
+                  </a:lnTo>
+                  <a:lnTo>
+                    <a:pt x="2169491" y="2748176"/>
+                  </a:lnTo>
+                  <a:lnTo>
+                    <a:pt x="2091857" y="2745909"/>
+                  </a:lnTo>
+                  <a:lnTo>
+                    <a:pt x="2014223" y="2743637"/>
+                  </a:lnTo>
+                  <a:lnTo>
+                    <a:pt x="1936589" y="2741359"/>
+                  </a:lnTo>
+                  <a:lnTo>
+                    <a:pt x="1858955" y="2739075"/>
+                  </a:lnTo>
+                  <a:lnTo>
+                    <a:pt x="1781321" y="2736786"/>
+                  </a:lnTo>
+                  <a:lnTo>
+                    <a:pt x="1703687" y="2734491"/>
+                  </a:lnTo>
+                  <a:lnTo>
+                    <a:pt x="1626053" y="2732190"/>
+                  </a:lnTo>
+                  <a:lnTo>
+                    <a:pt x="1548419" y="2729883"/>
+                  </a:lnTo>
+                  <a:lnTo>
+                    <a:pt x="1470785" y="2727571"/>
+                  </a:lnTo>
+                  <a:lnTo>
+                    <a:pt x="1393151" y="2725253"/>
+                  </a:lnTo>
+                  <a:lnTo>
+                    <a:pt x="1315517" y="2722928"/>
+                  </a:lnTo>
+                  <a:lnTo>
+                    <a:pt x="1237883" y="2720599"/>
+                  </a:lnTo>
+                  <a:lnTo>
+                    <a:pt x="1160249" y="2718263"/>
+                  </a:lnTo>
+                  <a:lnTo>
+                    <a:pt x="1082615" y="2715921"/>
+                  </a:lnTo>
+                  <a:lnTo>
+                    <a:pt x="1004981" y="2713574"/>
+                  </a:lnTo>
+                  <a:lnTo>
+                    <a:pt x="927346" y="2711221"/>
+                  </a:lnTo>
+                  <a:lnTo>
+                    <a:pt x="849712" y="2708861"/>
+                  </a:lnTo>
+                  <a:lnTo>
+                    <a:pt x="772078" y="2706496"/>
+                  </a:lnTo>
+                  <a:lnTo>
+                    <a:pt x="694444" y="2704125"/>
+                  </a:lnTo>
+                  <a:lnTo>
+                    <a:pt x="616810" y="2701748"/>
+                  </a:lnTo>
+                  <a:lnTo>
+                    <a:pt x="539176" y="2699365"/>
+                  </a:lnTo>
+                  <a:lnTo>
+                    <a:pt x="461542" y="2696976"/>
+                  </a:lnTo>
+                  <a:lnTo>
+                    <a:pt x="383908" y="2694582"/>
+                  </a:lnTo>
+                  <a:lnTo>
+                    <a:pt x="306274" y="2692181"/>
+                  </a:lnTo>
+                  <a:lnTo>
+                    <a:pt x="228640" y="2689774"/>
+                  </a:lnTo>
+                  <a:lnTo>
+                    <a:pt x="151006" y="2687361"/>
+                  </a:lnTo>
+                  <a:lnTo>
+                    <a:pt x="73372" y="2684942"/>
+                  </a:lnTo>
+                  <a:lnTo>
+                    <a:pt x="0" y="2682650"/>
                   </a:lnTo>
                   <a:close/>
                 </a:path>
@@ -3522,213 +3543,234 @@
           </p:nvSpPr>
           <p:spPr>
             <a:xfrm>
-              <a:off x="3136819" y="1896563"/>
-              <a:ext cx="5051670" cy="3340046"/>
+              <a:off x="2522077" y="1896563"/>
+              <a:ext cx="5666413" cy="2887813"/>
             </a:xfrm>
             <a:custGeom>
               <a:avLst/>
               <a:pathLst>
-                <a:path w="5051670" h="3340046">
+                <a:path w="5666413" h="2887813">
                   <a:moveTo>
                     <a:pt x="0" y="0"/>
                   </a:moveTo>
                   <a:lnTo>
-                    <a:pt x="5457" y="28042"/>
-                  </a:lnTo>
-                  <a:lnTo>
-                    <a:pt x="83092" y="387378"/>
-                  </a:lnTo>
-                  <a:lnTo>
-                    <a:pt x="160726" y="711090"/>
-                  </a:lnTo>
-                  <a:lnTo>
-                    <a:pt x="238360" y="1002710"/>
-                  </a:lnTo>
-                  <a:lnTo>
-                    <a:pt x="315994" y="1265419"/>
-                  </a:lnTo>
-                  <a:lnTo>
-                    <a:pt x="393628" y="1502083"/>
-                  </a:lnTo>
-                  <a:lnTo>
-                    <a:pt x="471262" y="1715286"/>
-                  </a:lnTo>
-                  <a:lnTo>
-                    <a:pt x="548896" y="1907351"/>
-                  </a:lnTo>
-                  <a:lnTo>
-                    <a:pt x="626530" y="2080376"/>
-                  </a:lnTo>
-                  <a:lnTo>
-                    <a:pt x="704164" y="2236248"/>
-                  </a:lnTo>
-                  <a:lnTo>
-                    <a:pt x="781798" y="2376666"/>
-                  </a:lnTo>
-                  <a:lnTo>
-                    <a:pt x="859432" y="2503164"/>
-                  </a:lnTo>
-                  <a:lnTo>
-                    <a:pt x="937066" y="2617121"/>
-                  </a:lnTo>
-                  <a:lnTo>
-                    <a:pt x="1014700" y="2719781"/>
-                  </a:lnTo>
-                  <a:lnTo>
-                    <a:pt x="1092334" y="2788638"/>
-                  </a:lnTo>
-                  <a:lnTo>
-                    <a:pt x="1169968" y="2805691"/>
-                  </a:lnTo>
-                  <a:lnTo>
-                    <a:pt x="1247602" y="2822407"/>
-                  </a:lnTo>
-                  <a:lnTo>
-                    <a:pt x="1325236" y="2838794"/>
-                  </a:lnTo>
-                  <a:lnTo>
-                    <a:pt x="1402870" y="2854857"/>
-                  </a:lnTo>
-                  <a:lnTo>
-                    <a:pt x="1480504" y="2870603"/>
-                  </a:lnTo>
-                  <a:lnTo>
-                    <a:pt x="1558138" y="2886038"/>
-                  </a:lnTo>
-                  <a:lnTo>
-                    <a:pt x="1635772" y="2901169"/>
-                  </a:lnTo>
-                  <a:lnTo>
-                    <a:pt x="1713406" y="2916001"/>
-                  </a:lnTo>
-                  <a:lnTo>
-                    <a:pt x="1791041" y="2930540"/>
-                  </a:lnTo>
-                  <a:lnTo>
-                    <a:pt x="1868675" y="2944792"/>
-                  </a:lnTo>
-                  <a:lnTo>
-                    <a:pt x="1946309" y="2958763"/>
-                  </a:lnTo>
-                  <a:lnTo>
-                    <a:pt x="2023943" y="2972459"/>
-                  </a:lnTo>
-                  <a:lnTo>
-                    <a:pt x="2101577" y="2985884"/>
-                  </a:lnTo>
-                  <a:lnTo>
-                    <a:pt x="2179211" y="2999043"/>
-                  </a:lnTo>
-                  <a:lnTo>
-                    <a:pt x="2256845" y="3011944"/>
-                  </a:lnTo>
-                  <a:lnTo>
-                    <a:pt x="2334479" y="3024589"/>
-                  </a:lnTo>
-                  <a:lnTo>
-                    <a:pt x="2412113" y="3036985"/>
-                  </a:lnTo>
-                  <a:lnTo>
-                    <a:pt x="2489747" y="3049137"/>
-                  </a:lnTo>
-                  <a:lnTo>
-                    <a:pt x="2567381" y="3061048"/>
-                  </a:lnTo>
-                  <a:lnTo>
-                    <a:pt x="2645015" y="3072725"/>
-                  </a:lnTo>
-                  <a:lnTo>
-                    <a:pt x="2722649" y="3084171"/>
-                  </a:lnTo>
-                  <a:lnTo>
-                    <a:pt x="2800283" y="3095391"/>
-                  </a:lnTo>
-                  <a:lnTo>
-                    <a:pt x="2877917" y="3106389"/>
-                  </a:lnTo>
-                  <a:lnTo>
-                    <a:pt x="2955551" y="3117171"/>
-                  </a:lnTo>
-                  <a:lnTo>
-                    <a:pt x="3033185" y="3127739"/>
-                  </a:lnTo>
-                  <a:lnTo>
-                    <a:pt x="3110819" y="3138100"/>
-                  </a:lnTo>
-                  <a:lnTo>
-                    <a:pt x="3188453" y="3148255"/>
-                  </a:lnTo>
-                  <a:lnTo>
-                    <a:pt x="3266087" y="3158210"/>
-                  </a:lnTo>
-                  <a:lnTo>
-                    <a:pt x="3343721" y="3167969"/>
-                  </a:lnTo>
-                  <a:lnTo>
-                    <a:pt x="3421355" y="3177535"/>
-                  </a:lnTo>
-                  <a:lnTo>
-                    <a:pt x="3498990" y="3186912"/>
-                  </a:lnTo>
-                  <a:lnTo>
-                    <a:pt x="3576624" y="3196105"/>
-                  </a:lnTo>
-                  <a:lnTo>
-                    <a:pt x="3654258" y="3205115"/>
-                  </a:lnTo>
-                  <a:lnTo>
-                    <a:pt x="3731892" y="3213948"/>
-                  </a:lnTo>
-                  <a:lnTo>
-                    <a:pt x="3809526" y="3222607"/>
-                  </a:lnTo>
-                  <a:lnTo>
-                    <a:pt x="3887160" y="3231095"/>
-                  </a:lnTo>
-                  <a:lnTo>
-                    <a:pt x="3964794" y="3239415"/>
-                  </a:lnTo>
-                  <a:lnTo>
-                    <a:pt x="4042428" y="3247571"/>
-                  </a:lnTo>
-                  <a:lnTo>
-                    <a:pt x="4120062" y="3255566"/>
-                  </a:lnTo>
-                  <a:lnTo>
-                    <a:pt x="4197696" y="3263403"/>
-                  </a:lnTo>
-                  <a:lnTo>
-                    <a:pt x="4275330" y="3271085"/>
-                  </a:lnTo>
-                  <a:lnTo>
-                    <a:pt x="4352964" y="3278616"/>
-                  </a:lnTo>
-                  <a:lnTo>
-                    <a:pt x="4430598" y="3285999"/>
-                  </a:lnTo>
-                  <a:lnTo>
-                    <a:pt x="4508232" y="3293235"/>
-                  </a:lnTo>
-                  <a:lnTo>
-                    <a:pt x="4585866" y="3300329"/>
-                  </a:lnTo>
-                  <a:lnTo>
-                    <a:pt x="4663500" y="3307283"/>
-                  </a:lnTo>
-                  <a:lnTo>
-                    <a:pt x="4741134" y="3314099"/>
-                  </a:lnTo>
-                  <a:lnTo>
-                    <a:pt x="4818768" y="3320781"/>
-                  </a:lnTo>
-                  <a:lnTo>
-                    <a:pt x="4896402" y="3327331"/>
-                  </a:lnTo>
-                  <a:lnTo>
-                    <a:pt x="4974036" y="3333752"/>
-                  </a:lnTo>
-                  <a:lnTo>
-                    <a:pt x="5051670" y="3340046"/>
+                    <a:pt x="76761" y="231690"/>
+                  </a:lnTo>
+                  <a:lnTo>
+                    <a:pt x="154396" y="450991"/>
+                  </a:lnTo>
+                  <a:lnTo>
+                    <a:pt x="232030" y="656234"/>
+                  </a:lnTo>
+                  <a:lnTo>
+                    <a:pt x="309664" y="848319"/>
+                  </a:lnTo>
+                  <a:lnTo>
+                    <a:pt x="387298" y="1028091"/>
+                  </a:lnTo>
+                  <a:lnTo>
+                    <a:pt x="464932" y="1196339"/>
+                  </a:lnTo>
+                  <a:lnTo>
+                    <a:pt x="542566" y="1353801"/>
+                  </a:lnTo>
+                  <a:lnTo>
+                    <a:pt x="620200" y="1501169"/>
+                  </a:lnTo>
+                  <a:lnTo>
+                    <a:pt x="697834" y="1639090"/>
+                  </a:lnTo>
+                  <a:lnTo>
+                    <a:pt x="775468" y="1768169"/>
+                  </a:lnTo>
+                  <a:lnTo>
+                    <a:pt x="853102" y="1888974"/>
+                  </a:lnTo>
+                  <a:lnTo>
+                    <a:pt x="930736" y="2002035"/>
+                  </a:lnTo>
+                  <a:lnTo>
+                    <a:pt x="1008370" y="2107847"/>
+                  </a:lnTo>
+                  <a:lnTo>
+                    <a:pt x="1086004" y="2206877"/>
+                  </a:lnTo>
+                  <a:lnTo>
+                    <a:pt x="1163638" y="2299558"/>
+                  </a:lnTo>
+                  <a:lnTo>
+                    <a:pt x="1241272" y="2386298"/>
+                  </a:lnTo>
+                  <a:lnTo>
+                    <a:pt x="1318906" y="2467477"/>
+                  </a:lnTo>
+                  <a:lnTo>
+                    <a:pt x="1396540" y="2543453"/>
+                  </a:lnTo>
+                  <a:lnTo>
+                    <a:pt x="1474174" y="2614558"/>
+                  </a:lnTo>
+                  <a:lnTo>
+                    <a:pt x="1551808" y="2681105"/>
+                  </a:lnTo>
+                  <a:lnTo>
+                    <a:pt x="1629442" y="2743385"/>
+                  </a:lnTo>
+                  <a:lnTo>
+                    <a:pt x="1707076" y="2783680"/>
+                  </a:lnTo>
+                  <a:lnTo>
+                    <a:pt x="1784710" y="2785853"/>
+                  </a:lnTo>
+                  <a:lnTo>
+                    <a:pt x="1862345" y="2788019"/>
+                  </a:lnTo>
+                  <a:lnTo>
+                    <a:pt x="1939979" y="2790181"/>
+                  </a:lnTo>
+                  <a:lnTo>
+                    <a:pt x="2017613" y="2792337"/>
+                  </a:lnTo>
+                  <a:lnTo>
+                    <a:pt x="2095247" y="2794487"/>
+                  </a:lnTo>
+                  <a:lnTo>
+                    <a:pt x="2172881" y="2796632"/>
+                  </a:lnTo>
+                  <a:lnTo>
+                    <a:pt x="2250515" y="2798772"/>
+                  </a:lnTo>
+                  <a:lnTo>
+                    <a:pt x="2328149" y="2800906"/>
+                  </a:lnTo>
+                  <a:lnTo>
+                    <a:pt x="2405783" y="2803036"/>
+                  </a:lnTo>
+                  <a:lnTo>
+                    <a:pt x="2483417" y="2805159"/>
+                  </a:lnTo>
+                  <a:lnTo>
+                    <a:pt x="2561051" y="2807278"/>
+                  </a:lnTo>
+                  <a:lnTo>
+                    <a:pt x="2638685" y="2809391"/>
+                  </a:lnTo>
+                  <a:lnTo>
+                    <a:pt x="2716319" y="2811499"/>
+                  </a:lnTo>
+                  <a:lnTo>
+                    <a:pt x="2793953" y="2813602"/>
+                  </a:lnTo>
+                  <a:lnTo>
+                    <a:pt x="2871587" y="2815699"/>
+                  </a:lnTo>
+                  <a:lnTo>
+                    <a:pt x="2949221" y="2817791"/>
+                  </a:lnTo>
+                  <a:lnTo>
+                    <a:pt x="3026855" y="2819878"/>
+                  </a:lnTo>
+                  <a:lnTo>
+                    <a:pt x="3104489" y="2821960"/>
+                  </a:lnTo>
+                  <a:lnTo>
+                    <a:pt x="3182123" y="2824036"/>
+                  </a:lnTo>
+                  <a:lnTo>
+                    <a:pt x="3259757" y="2826108"/>
+                  </a:lnTo>
+                  <a:lnTo>
+                    <a:pt x="3337391" y="2828174"/>
+                  </a:lnTo>
+                  <a:lnTo>
+                    <a:pt x="3415025" y="2830235"/>
+                  </a:lnTo>
+                  <a:lnTo>
+                    <a:pt x="3492659" y="2832290"/>
+                  </a:lnTo>
+                  <a:lnTo>
+                    <a:pt x="3570294" y="2834341"/>
+                  </a:lnTo>
+                  <a:lnTo>
+                    <a:pt x="3647928" y="2836387"/>
+                  </a:lnTo>
+                  <a:lnTo>
+                    <a:pt x="3725562" y="2838427"/>
+                  </a:lnTo>
+                  <a:lnTo>
+                    <a:pt x="3803196" y="2840462"/>
+                  </a:lnTo>
+                  <a:lnTo>
+                    <a:pt x="3880830" y="2842493"/>
+                  </a:lnTo>
+                  <a:lnTo>
+                    <a:pt x="3958464" y="2844518"/>
+                  </a:lnTo>
+                  <a:lnTo>
+                    <a:pt x="4036098" y="2846538"/>
+                  </a:lnTo>
+                  <a:lnTo>
+                    <a:pt x="4113732" y="2848553"/>
+                  </a:lnTo>
+                  <a:lnTo>
+                    <a:pt x="4191366" y="2850563"/>
+                  </a:lnTo>
+                  <a:lnTo>
+                    <a:pt x="4269000" y="2852568"/>
+                  </a:lnTo>
+                  <a:lnTo>
+                    <a:pt x="4346634" y="2854568"/>
+                  </a:lnTo>
+                  <a:lnTo>
+                    <a:pt x="4424268" y="2856563"/>
+                  </a:lnTo>
+                  <a:lnTo>
+                    <a:pt x="4501902" y="2858553"/>
+                  </a:lnTo>
+                  <a:lnTo>
+                    <a:pt x="4579536" y="2860538"/>
+                  </a:lnTo>
+                  <a:lnTo>
+                    <a:pt x="4657170" y="2862518"/>
+                  </a:lnTo>
+                  <a:lnTo>
+                    <a:pt x="4734804" y="2864493"/>
+                  </a:lnTo>
+                  <a:lnTo>
+                    <a:pt x="4812438" y="2866463"/>
+                  </a:lnTo>
+                  <a:lnTo>
+                    <a:pt x="4890072" y="2868428"/>
+                  </a:lnTo>
+                  <a:lnTo>
+                    <a:pt x="4967706" y="2870389"/>
+                  </a:lnTo>
+                  <a:lnTo>
+                    <a:pt x="5045340" y="2872344"/>
+                  </a:lnTo>
+                  <a:lnTo>
+                    <a:pt x="5122974" y="2874295"/>
+                  </a:lnTo>
+                  <a:lnTo>
+                    <a:pt x="5200608" y="2876240"/>
+                  </a:lnTo>
+                  <a:lnTo>
+                    <a:pt x="5278243" y="2878181"/>
+                  </a:lnTo>
+                  <a:lnTo>
+                    <a:pt x="5355877" y="2880117"/>
+                  </a:lnTo>
+                  <a:lnTo>
+                    <a:pt x="5433511" y="2882048"/>
+                  </a:lnTo>
+                  <a:lnTo>
+                    <a:pt x="5511145" y="2883975"/>
+                  </a:lnTo>
+                  <a:lnTo>
+                    <a:pt x="5588779" y="2885896"/>
+                  </a:lnTo>
+                  <a:lnTo>
+                    <a:pt x="5666413" y="2887813"/>
                   </a:lnTo>
                 </a:path>
               </a:pathLst>
@@ -3748,297 +3790,297 @@
           </p:nvSpPr>
           <p:spPr>
             <a:xfrm>
-              <a:off x="817517" y="3474416"/>
-              <a:ext cx="7370972" cy="2070697"/>
+              <a:off x="817517" y="4579213"/>
+              <a:ext cx="7370972" cy="940987"/>
             </a:xfrm>
             <a:custGeom>
               <a:avLst/>
               <a:pathLst>
-                <a:path w="7370972" h="2070697">
+                <a:path w="7370972" h="940987">
                   <a:moveTo>
-                    <a:pt x="7370972" y="2070697"/>
+                    <a:pt x="7370972" y="940987"/>
                   </a:moveTo>
                   <a:lnTo>
-                    <a:pt x="7293338" y="2070246"/>
-                  </a:lnTo>
-                  <a:lnTo>
-                    <a:pt x="7215704" y="2069746"/>
-                  </a:lnTo>
-                  <a:lnTo>
-                    <a:pt x="7138070" y="2069191"/>
-                  </a:lnTo>
-                  <a:lnTo>
-                    <a:pt x="7060436" y="2068575"/>
-                  </a:lnTo>
-                  <a:lnTo>
-                    <a:pt x="6982802" y="2067891"/>
-                  </a:lnTo>
-                  <a:lnTo>
-                    <a:pt x="6905168" y="2067132"/>
-                  </a:lnTo>
-                  <a:lnTo>
-                    <a:pt x="6827534" y="2066289"/>
-                  </a:lnTo>
-                  <a:lnTo>
-                    <a:pt x="6749900" y="2065354"/>
-                  </a:lnTo>
-                  <a:lnTo>
-                    <a:pt x="6672266" y="2064316"/>
-                  </a:lnTo>
-                  <a:lnTo>
-                    <a:pt x="6594632" y="2063163"/>
-                  </a:lnTo>
-                  <a:lnTo>
-                    <a:pt x="6516998" y="2061883"/>
-                  </a:lnTo>
-                  <a:lnTo>
-                    <a:pt x="6439364" y="2060463"/>
-                  </a:lnTo>
-                  <a:lnTo>
-                    <a:pt x="6361730" y="2058886"/>
-                  </a:lnTo>
-                  <a:lnTo>
-                    <a:pt x="6284096" y="2057136"/>
-                  </a:lnTo>
-                  <a:lnTo>
-                    <a:pt x="6206462" y="2055194"/>
-                  </a:lnTo>
-                  <a:lnTo>
-                    <a:pt x="6128827" y="2053037"/>
-                  </a:lnTo>
-                  <a:lnTo>
-                    <a:pt x="6051193" y="2050643"/>
-                  </a:lnTo>
-                  <a:lnTo>
-                    <a:pt x="5973559" y="2047986"/>
-                  </a:lnTo>
-                  <a:lnTo>
-                    <a:pt x="5895925" y="2045036"/>
-                  </a:lnTo>
-                  <a:lnTo>
-                    <a:pt x="5818291" y="2041762"/>
-                  </a:lnTo>
-                  <a:lnTo>
-                    <a:pt x="5740657" y="2038127"/>
-                  </a:lnTo>
-                  <a:lnTo>
-                    <a:pt x="5663023" y="2034093"/>
-                  </a:lnTo>
-                  <a:lnTo>
-                    <a:pt x="5585389" y="2029614"/>
-                  </a:lnTo>
-                  <a:lnTo>
-                    <a:pt x="5507755" y="2024642"/>
-                  </a:lnTo>
-                  <a:lnTo>
-                    <a:pt x="5430121" y="2019124"/>
-                  </a:lnTo>
-                  <a:lnTo>
-                    <a:pt x="5352487" y="2012998"/>
-                  </a:lnTo>
-                  <a:lnTo>
-                    <a:pt x="5274853" y="2006198"/>
-                  </a:lnTo>
-                  <a:lnTo>
-                    <a:pt x="5197219" y="1998649"/>
-                  </a:lnTo>
-                  <a:lnTo>
-                    <a:pt x="5119585" y="1990270"/>
-                  </a:lnTo>
-                  <a:lnTo>
-                    <a:pt x="5041951" y="1980969"/>
-                  </a:lnTo>
-                  <a:lnTo>
-                    <a:pt x="4964317" y="1970644"/>
-                  </a:lnTo>
-                  <a:lnTo>
-                    <a:pt x="4886683" y="1959183"/>
-                  </a:lnTo>
-                  <a:lnTo>
-                    <a:pt x="4809049" y="1946461"/>
-                  </a:lnTo>
-                  <a:lnTo>
-                    <a:pt x="4731415" y="1932339"/>
-                  </a:lnTo>
-                  <a:lnTo>
-                    <a:pt x="4653781" y="1916662"/>
-                  </a:lnTo>
-                  <a:lnTo>
-                    <a:pt x="4576147" y="1899260"/>
-                  </a:lnTo>
-                  <a:lnTo>
-                    <a:pt x="4498513" y="1879944"/>
-                  </a:lnTo>
-                  <a:lnTo>
-                    <a:pt x="4420879" y="1858501"/>
-                  </a:lnTo>
-                  <a:lnTo>
-                    <a:pt x="4343244" y="1834699"/>
-                  </a:lnTo>
-                  <a:lnTo>
-                    <a:pt x="4265610" y="1808278"/>
-                  </a:lnTo>
-                  <a:lnTo>
-                    <a:pt x="4187976" y="1778949"/>
-                  </a:lnTo>
-                  <a:lnTo>
-                    <a:pt x="4110342" y="1746392"/>
-                  </a:lnTo>
-                  <a:lnTo>
-                    <a:pt x="4032708" y="1710252"/>
-                  </a:lnTo>
-                  <a:lnTo>
-                    <a:pt x="3955074" y="1670136"/>
-                  </a:lnTo>
-                  <a:lnTo>
-                    <a:pt x="3877440" y="1625605"/>
-                  </a:lnTo>
-                  <a:lnTo>
-                    <a:pt x="3799806" y="1576173"/>
-                  </a:lnTo>
-                  <a:lnTo>
-                    <a:pt x="3722172" y="1521301"/>
-                  </a:lnTo>
-                  <a:lnTo>
-                    <a:pt x="3644538" y="1460391"/>
-                  </a:lnTo>
-                  <a:lnTo>
-                    <a:pt x="3566904" y="1392777"/>
-                  </a:lnTo>
-                  <a:lnTo>
-                    <a:pt x="3489270" y="1317723"/>
-                  </a:lnTo>
-                  <a:lnTo>
-                    <a:pt x="3411636" y="1234409"/>
-                  </a:lnTo>
-                  <a:lnTo>
-                    <a:pt x="3334002" y="1193388"/>
-                  </a:lnTo>
-                  <a:lnTo>
-                    <a:pt x="3256368" y="1175641"/>
-                  </a:lnTo>
-                  <a:lnTo>
-                    <a:pt x="3178734" y="1157537"/>
-                  </a:lnTo>
-                  <a:lnTo>
-                    <a:pt x="3101100" y="1139069"/>
-                  </a:lnTo>
-                  <a:lnTo>
-                    <a:pt x="3023466" y="1120229"/>
-                  </a:lnTo>
-                  <a:lnTo>
-                    <a:pt x="2945832" y="1101009"/>
-                  </a:lnTo>
-                  <a:lnTo>
-                    <a:pt x="2868198" y="1081402"/>
-                  </a:lnTo>
-                  <a:lnTo>
-                    <a:pt x="2790564" y="1061401"/>
-                  </a:lnTo>
-                  <a:lnTo>
-                    <a:pt x="2712930" y="1040997"/>
-                  </a:lnTo>
-                  <a:lnTo>
-                    <a:pt x="2635295" y="1020182"/>
-                  </a:lnTo>
-                  <a:lnTo>
-                    <a:pt x="2557661" y="998948"/>
-                  </a:lnTo>
-                  <a:lnTo>
-                    <a:pt x="2480027" y="977286"/>
-                  </a:lnTo>
-                  <a:lnTo>
-                    <a:pt x="2402393" y="955188"/>
-                  </a:lnTo>
-                  <a:lnTo>
-                    <a:pt x="2324759" y="932645"/>
-                  </a:lnTo>
-                  <a:lnTo>
-                    <a:pt x="2247125" y="909649"/>
-                  </a:lnTo>
-                  <a:lnTo>
-                    <a:pt x="2169491" y="886189"/>
-                  </a:lnTo>
-                  <a:lnTo>
-                    <a:pt x="2091857" y="862257"/>
-                  </a:lnTo>
-                  <a:lnTo>
-                    <a:pt x="2014223" y="837843"/>
-                  </a:lnTo>
-                  <a:lnTo>
-                    <a:pt x="1936589" y="812938"/>
-                  </a:lnTo>
-                  <a:lnTo>
-                    <a:pt x="1858955" y="787531"/>
-                  </a:lnTo>
-                  <a:lnTo>
-                    <a:pt x="1781321" y="761613"/>
-                  </a:lnTo>
-                  <a:lnTo>
-                    <a:pt x="1703687" y="735173"/>
-                  </a:lnTo>
-                  <a:lnTo>
-                    <a:pt x="1626053" y="708200"/>
-                  </a:lnTo>
-                  <a:lnTo>
-                    <a:pt x="1548419" y="680684"/>
-                  </a:lnTo>
-                  <a:lnTo>
-                    <a:pt x="1470785" y="652615"/>
-                  </a:lnTo>
-                  <a:lnTo>
-                    <a:pt x="1393151" y="623980"/>
-                  </a:lnTo>
-                  <a:lnTo>
-                    <a:pt x="1315517" y="594768"/>
-                  </a:lnTo>
-                  <a:lnTo>
-                    <a:pt x="1237883" y="564969"/>
-                  </a:lnTo>
-                  <a:lnTo>
-                    <a:pt x="1160249" y="534569"/>
-                  </a:lnTo>
-                  <a:lnTo>
-                    <a:pt x="1082615" y="503557"/>
-                  </a:lnTo>
-                  <a:lnTo>
-                    <a:pt x="1004981" y="471921"/>
-                  </a:lnTo>
-                  <a:lnTo>
-                    <a:pt x="927346" y="439648"/>
-                  </a:lnTo>
-                  <a:lnTo>
-                    <a:pt x="849712" y="406725"/>
-                  </a:lnTo>
-                  <a:lnTo>
-                    <a:pt x="772078" y="373139"/>
-                  </a:lnTo>
-                  <a:lnTo>
-                    <a:pt x="694444" y="338877"/>
-                  </a:lnTo>
-                  <a:lnTo>
-                    <a:pt x="616810" y="303926"/>
-                  </a:lnTo>
-                  <a:lnTo>
-                    <a:pt x="539176" y="268270"/>
-                  </a:lnTo>
-                  <a:lnTo>
-                    <a:pt x="461542" y="231897"/>
-                  </a:lnTo>
-                  <a:lnTo>
-                    <a:pt x="383908" y="194791"/>
-                  </a:lnTo>
-                  <a:lnTo>
-                    <a:pt x="306274" y="156938"/>
-                  </a:lnTo>
-                  <a:lnTo>
-                    <a:pt x="228640" y="118323"/>
-                  </a:lnTo>
-                  <a:lnTo>
-                    <a:pt x="151006" y="78930"/>
-                  </a:lnTo>
-                  <a:lnTo>
-                    <a:pt x="73372" y="38744"/>
+                    <a:pt x="7293338" y="939000"/>
+                  </a:lnTo>
+                  <a:lnTo>
+                    <a:pt x="7215704" y="936877"/>
+                  </a:lnTo>
+                  <a:lnTo>
+                    <a:pt x="7138070" y="934609"/>
+                  </a:lnTo>
+                  <a:lnTo>
+                    <a:pt x="7060436" y="932185"/>
+                  </a:lnTo>
+                  <a:lnTo>
+                    <a:pt x="6982802" y="929595"/>
+                  </a:lnTo>
+                  <a:lnTo>
+                    <a:pt x="6905168" y="926828"/>
+                  </a:lnTo>
+                  <a:lnTo>
+                    <a:pt x="6827534" y="923872"/>
+                  </a:lnTo>
+                  <a:lnTo>
+                    <a:pt x="6749900" y="920713"/>
+                  </a:lnTo>
+                  <a:lnTo>
+                    <a:pt x="6672266" y="917337"/>
+                  </a:lnTo>
+                  <a:lnTo>
+                    <a:pt x="6594632" y="913730"/>
+                  </a:lnTo>
+                  <a:lnTo>
+                    <a:pt x="6516998" y="909876"/>
+                  </a:lnTo>
+                  <a:lnTo>
+                    <a:pt x="6439364" y="905759"/>
+                  </a:lnTo>
+                  <a:lnTo>
+                    <a:pt x="6361730" y="901359"/>
+                  </a:lnTo>
+                  <a:lnTo>
+                    <a:pt x="6284096" y="896658"/>
+                  </a:lnTo>
+                  <a:lnTo>
+                    <a:pt x="6206462" y="891635"/>
+                  </a:lnTo>
+                  <a:lnTo>
+                    <a:pt x="6128827" y="886267"/>
+                  </a:lnTo>
+                  <a:lnTo>
+                    <a:pt x="6051193" y="880532"/>
+                  </a:lnTo>
+                  <a:lnTo>
+                    <a:pt x="5973559" y="874405"/>
+                  </a:lnTo>
+                  <a:lnTo>
+                    <a:pt x="5895925" y="867857"/>
+                  </a:lnTo>
+                  <a:lnTo>
+                    <a:pt x="5818291" y="860861"/>
+                  </a:lnTo>
+                  <a:lnTo>
+                    <a:pt x="5740657" y="853386"/>
+                  </a:lnTo>
+                  <a:lnTo>
+                    <a:pt x="5663023" y="845399"/>
+                  </a:lnTo>
+                  <a:lnTo>
+                    <a:pt x="5585389" y="836865"/>
+                  </a:lnTo>
+                  <a:lnTo>
+                    <a:pt x="5507755" y="827746"/>
+                  </a:lnTo>
+                  <a:lnTo>
+                    <a:pt x="5430121" y="818003"/>
+                  </a:lnTo>
+                  <a:lnTo>
+                    <a:pt x="5352487" y="807592"/>
+                  </a:lnTo>
+                  <a:lnTo>
+                    <a:pt x="5274853" y="796468"/>
+                  </a:lnTo>
+                  <a:lnTo>
+                    <a:pt x="5197219" y="784582"/>
+                  </a:lnTo>
+                  <a:lnTo>
+                    <a:pt x="5119585" y="771882"/>
+                  </a:lnTo>
+                  <a:lnTo>
+                    <a:pt x="5041951" y="758312"/>
+                  </a:lnTo>
+                  <a:lnTo>
+                    <a:pt x="4964317" y="743813"/>
+                  </a:lnTo>
+                  <a:lnTo>
+                    <a:pt x="4886683" y="728321"/>
+                  </a:lnTo>
+                  <a:lnTo>
+                    <a:pt x="4809049" y="711767"/>
+                  </a:lnTo>
+                  <a:lnTo>
+                    <a:pt x="4731415" y="694079"/>
+                  </a:lnTo>
+                  <a:lnTo>
+                    <a:pt x="4653781" y="675180"/>
+                  </a:lnTo>
+                  <a:lnTo>
+                    <a:pt x="4576147" y="654987"/>
+                  </a:lnTo>
+                  <a:lnTo>
+                    <a:pt x="4498513" y="633410"/>
+                  </a:lnTo>
+                  <a:lnTo>
+                    <a:pt x="4420879" y="610355"/>
+                  </a:lnTo>
+                  <a:lnTo>
+                    <a:pt x="4343244" y="585722"/>
+                  </a:lnTo>
+                  <a:lnTo>
+                    <a:pt x="4265610" y="559400"/>
+                  </a:lnTo>
+                  <a:lnTo>
+                    <a:pt x="4187976" y="531276"/>
+                  </a:lnTo>
+                  <a:lnTo>
+                    <a:pt x="4110342" y="501226"/>
+                  </a:lnTo>
+                  <a:lnTo>
+                    <a:pt x="4032708" y="469117"/>
+                  </a:lnTo>
+                  <a:lnTo>
+                    <a:pt x="3955074" y="434809"/>
+                  </a:lnTo>
+                  <a:lnTo>
+                    <a:pt x="3877440" y="398151"/>
+                  </a:lnTo>
+                  <a:lnTo>
+                    <a:pt x="3799806" y="358982"/>
+                  </a:lnTo>
+                  <a:lnTo>
+                    <a:pt x="3722172" y="317130"/>
+                  </a:lnTo>
+                  <a:lnTo>
+                    <a:pt x="3644538" y="272411"/>
+                  </a:lnTo>
+                  <a:lnTo>
+                    <a:pt x="3566904" y="224629"/>
+                  </a:lnTo>
+                  <a:lnTo>
+                    <a:pt x="3489270" y="173575"/>
+                  </a:lnTo>
+                  <a:lnTo>
+                    <a:pt x="3411636" y="119023"/>
+                  </a:lnTo>
+                  <a:lnTo>
+                    <a:pt x="3334002" y="98852"/>
+                  </a:lnTo>
+                  <a:lnTo>
+                    <a:pt x="3256368" y="96669"/>
+                  </a:lnTo>
+                  <a:lnTo>
+                    <a:pt x="3178734" y="94481"/>
+                  </a:lnTo>
+                  <a:lnTo>
+                    <a:pt x="3101100" y="92287"/>
+                  </a:lnTo>
+                  <a:lnTo>
+                    <a:pt x="3023466" y="90087"/>
+                  </a:lnTo>
+                  <a:lnTo>
+                    <a:pt x="2945832" y="87882"/>
+                  </a:lnTo>
+                  <a:lnTo>
+                    <a:pt x="2868198" y="85672"/>
+                  </a:lnTo>
+                  <a:lnTo>
+                    <a:pt x="2790564" y="83456"/>
+                  </a:lnTo>
+                  <a:lnTo>
+                    <a:pt x="2712930" y="81234"/>
+                  </a:lnTo>
+                  <a:lnTo>
+                    <a:pt x="2635295" y="79007"/>
+                  </a:lnTo>
+                  <a:lnTo>
+                    <a:pt x="2557661" y="76774"/>
+                  </a:lnTo>
+                  <a:lnTo>
+                    <a:pt x="2480027" y="74535"/>
+                  </a:lnTo>
+                  <a:lnTo>
+                    <a:pt x="2402393" y="72291"/>
+                  </a:lnTo>
+                  <a:lnTo>
+                    <a:pt x="2324759" y="70042"/>
+                  </a:lnTo>
+                  <a:lnTo>
+                    <a:pt x="2247125" y="67786"/>
+                  </a:lnTo>
+                  <a:lnTo>
+                    <a:pt x="2169491" y="65526"/>
+                  </a:lnTo>
+                  <a:lnTo>
+                    <a:pt x="2091857" y="63259"/>
+                  </a:lnTo>
+                  <a:lnTo>
+                    <a:pt x="2014223" y="60987"/>
+                  </a:lnTo>
+                  <a:lnTo>
+                    <a:pt x="1936589" y="58709"/>
+                  </a:lnTo>
+                  <a:lnTo>
+                    <a:pt x="1858955" y="56425"/>
+                  </a:lnTo>
+                  <a:lnTo>
+                    <a:pt x="1781321" y="54136"/>
+                  </a:lnTo>
+                  <a:lnTo>
+                    <a:pt x="1703687" y="51840"/>
+                  </a:lnTo>
+                  <a:lnTo>
+                    <a:pt x="1626053" y="49540"/>
+                  </a:lnTo>
+                  <a:lnTo>
+                    <a:pt x="1548419" y="47233"/>
+                  </a:lnTo>
+                  <a:lnTo>
+                    <a:pt x="1470785" y="44920"/>
+                  </a:lnTo>
+                  <a:lnTo>
+                    <a:pt x="1393151" y="42602"/>
+                  </a:lnTo>
+                  <a:lnTo>
+                    <a:pt x="1315517" y="40278"/>
+                  </a:lnTo>
+                  <a:lnTo>
+                    <a:pt x="1237883" y="37948"/>
+                  </a:lnTo>
+                  <a:lnTo>
+                    <a:pt x="1160249" y="35613"/>
+                  </a:lnTo>
+                  <a:lnTo>
+                    <a:pt x="1082615" y="33271"/>
+                  </a:lnTo>
+                  <a:lnTo>
+                    <a:pt x="1004981" y="30924"/>
+                  </a:lnTo>
+                  <a:lnTo>
+                    <a:pt x="927346" y="28570"/>
+                  </a:lnTo>
+                  <a:lnTo>
+                    <a:pt x="849712" y="26211"/>
+                  </a:lnTo>
+                  <a:lnTo>
+                    <a:pt x="772078" y="23846"/>
+                  </a:lnTo>
+                  <a:lnTo>
+                    <a:pt x="694444" y="21475"/>
+                  </a:lnTo>
+                  <a:lnTo>
+                    <a:pt x="616810" y="19098"/>
+                  </a:lnTo>
+                  <a:lnTo>
+                    <a:pt x="539176" y="16715"/>
+                  </a:lnTo>
+                  <a:lnTo>
+                    <a:pt x="461542" y="14326"/>
+                  </a:lnTo>
+                  <a:lnTo>
+                    <a:pt x="383908" y="11931"/>
+                  </a:lnTo>
+                  <a:lnTo>
+                    <a:pt x="306274" y="9530"/>
+                  </a:lnTo>
+                  <a:lnTo>
+                    <a:pt x="228640" y="7123"/>
+                  </a:lnTo>
+                  <a:lnTo>
+                    <a:pt x="151006" y="4710"/>
+                  </a:lnTo>
+                  <a:lnTo>
+                    <a:pt x="73372" y="2291"/>
                   </a:lnTo>
                   <a:lnTo>
                     <a:pt x="0" y="0"/>
@@ -4061,240 +4103,297 @@
           </p:nvSpPr>
           <p:spPr>
             <a:xfrm>
-              <a:off x="2412179" y="1896563"/>
-              <a:ext cx="5776311" cy="3616873"/>
+              <a:off x="962946" y="1896563"/>
+              <a:ext cx="7225544" cy="3503698"/>
             </a:xfrm>
             <a:custGeom>
               <a:avLst/>
               <a:pathLst>
-                <a:path w="5776311" h="3616873">
+                <a:path w="7225544" h="3503698">
                   <a:moveTo>
                     <a:pt x="0" y="0"/>
                   </a:moveTo>
                   <a:lnTo>
-                    <a:pt x="31391" y="92340"/>
-                  </a:lnTo>
-                  <a:lnTo>
-                    <a:pt x="109025" y="306940"/>
-                  </a:lnTo>
-                  <a:lnTo>
-                    <a:pt x="186659" y="508605"/>
-                  </a:lnTo>
-                  <a:lnTo>
-                    <a:pt x="264293" y="698115"/>
-                  </a:lnTo>
-                  <a:lnTo>
-                    <a:pt x="341927" y="876201"/>
-                  </a:lnTo>
-                  <a:lnTo>
-                    <a:pt x="419561" y="1043554"/>
-                  </a:lnTo>
-                  <a:lnTo>
-                    <a:pt x="497195" y="1200819"/>
-                  </a:lnTo>
-                  <a:lnTo>
-                    <a:pt x="574830" y="1348604"/>
-                  </a:lnTo>
-                  <a:lnTo>
-                    <a:pt x="652464" y="1487482"/>
-                  </a:lnTo>
-                  <a:lnTo>
-                    <a:pt x="730098" y="1617989"/>
-                  </a:lnTo>
-                  <a:lnTo>
-                    <a:pt x="807732" y="1740630"/>
-                  </a:lnTo>
-                  <a:lnTo>
-                    <a:pt x="885366" y="1855878"/>
-                  </a:lnTo>
-                  <a:lnTo>
-                    <a:pt x="963000" y="1964179"/>
-                  </a:lnTo>
-                  <a:lnTo>
-                    <a:pt x="1040634" y="2065953"/>
-                  </a:lnTo>
-                  <a:lnTo>
-                    <a:pt x="1118268" y="2161592"/>
-                  </a:lnTo>
-                  <a:lnTo>
-                    <a:pt x="1195902" y="2251466"/>
-                  </a:lnTo>
-                  <a:lnTo>
-                    <a:pt x="1273536" y="2335923"/>
-                  </a:lnTo>
-                  <a:lnTo>
-                    <a:pt x="1351170" y="2415290"/>
-                  </a:lnTo>
-                  <a:lnTo>
-                    <a:pt x="1428804" y="2489872"/>
-                  </a:lnTo>
-                  <a:lnTo>
-                    <a:pt x="1506438" y="2559959"/>
-                  </a:lnTo>
-                  <a:lnTo>
-                    <a:pt x="1584072" y="2625822"/>
-                  </a:lnTo>
-                  <a:lnTo>
-                    <a:pt x="1661706" y="2687714"/>
-                  </a:lnTo>
-                  <a:lnTo>
-                    <a:pt x="1739340" y="2745876"/>
-                  </a:lnTo>
-                  <a:lnTo>
-                    <a:pt x="1816974" y="2800532"/>
-                  </a:lnTo>
-                  <a:lnTo>
-                    <a:pt x="1894608" y="2851894"/>
-                  </a:lnTo>
-                  <a:lnTo>
-                    <a:pt x="1972242" y="2900160"/>
-                  </a:lnTo>
-                  <a:lnTo>
-                    <a:pt x="2049876" y="2945516"/>
-                  </a:lnTo>
-                  <a:lnTo>
-                    <a:pt x="2127510" y="2988139"/>
-                  </a:lnTo>
-                  <a:lnTo>
-                    <a:pt x="2205144" y="3028193"/>
-                  </a:lnTo>
-                  <a:lnTo>
-                    <a:pt x="2282778" y="3065832"/>
-                  </a:lnTo>
-                  <a:lnTo>
-                    <a:pt x="2360413" y="3101202"/>
-                  </a:lnTo>
-                  <a:lnTo>
-                    <a:pt x="2438047" y="3134441"/>
-                  </a:lnTo>
-                  <a:lnTo>
-                    <a:pt x="2515681" y="3165676"/>
-                  </a:lnTo>
-                  <a:lnTo>
-                    <a:pt x="2593315" y="3195028"/>
-                  </a:lnTo>
-                  <a:lnTo>
-                    <a:pt x="2670949" y="3222611"/>
-                  </a:lnTo>
-                  <a:lnTo>
-                    <a:pt x="2748583" y="3248532"/>
-                  </a:lnTo>
-                  <a:lnTo>
-                    <a:pt x="2826217" y="3272890"/>
-                  </a:lnTo>
-                  <a:lnTo>
-                    <a:pt x="2903851" y="3295780"/>
-                  </a:lnTo>
-                  <a:lnTo>
-                    <a:pt x="2981485" y="3317290"/>
-                  </a:lnTo>
-                  <a:lnTo>
-                    <a:pt x="3059119" y="3337504"/>
-                  </a:lnTo>
-                  <a:lnTo>
-                    <a:pt x="3136753" y="3356499"/>
-                  </a:lnTo>
-                  <a:lnTo>
-                    <a:pt x="3214387" y="3374350"/>
-                  </a:lnTo>
-                  <a:lnTo>
-                    <a:pt x="3292021" y="3391124"/>
-                  </a:lnTo>
-                  <a:lnTo>
-                    <a:pt x="3369655" y="3406887"/>
-                  </a:lnTo>
-                  <a:lnTo>
-                    <a:pt x="3447289" y="3421700"/>
-                  </a:lnTo>
-                  <a:lnTo>
-                    <a:pt x="3524923" y="3435621"/>
-                  </a:lnTo>
-                  <a:lnTo>
-                    <a:pt x="3602557" y="3448702"/>
-                  </a:lnTo>
-                  <a:lnTo>
-                    <a:pt x="3680191" y="3460995"/>
-                  </a:lnTo>
-                  <a:lnTo>
-                    <a:pt x="3757825" y="3472546"/>
-                  </a:lnTo>
-                  <a:lnTo>
-                    <a:pt x="3835459" y="3483402"/>
-                  </a:lnTo>
-                  <a:lnTo>
-                    <a:pt x="3913093" y="3493603"/>
-                  </a:lnTo>
-                  <a:lnTo>
-                    <a:pt x="3990727" y="3503189"/>
-                  </a:lnTo>
-                  <a:lnTo>
-                    <a:pt x="4068362" y="3512198"/>
-                  </a:lnTo>
-                  <a:lnTo>
-                    <a:pt x="4145996" y="3520663"/>
-                  </a:lnTo>
-                  <a:lnTo>
-                    <a:pt x="4223630" y="3528618"/>
-                  </a:lnTo>
-                  <a:lnTo>
-                    <a:pt x="4301264" y="3536094"/>
-                  </a:lnTo>
-                  <a:lnTo>
-                    <a:pt x="4378898" y="3543119"/>
-                  </a:lnTo>
-                  <a:lnTo>
-                    <a:pt x="4456532" y="3549721"/>
-                  </a:lnTo>
-                  <a:lnTo>
-                    <a:pt x="4534166" y="3555925"/>
-                  </a:lnTo>
-                  <a:lnTo>
-                    <a:pt x="4611800" y="3561754"/>
-                  </a:lnTo>
-                  <a:lnTo>
-                    <a:pt x="4689434" y="3567233"/>
-                  </a:lnTo>
-                  <a:lnTo>
-                    <a:pt x="4767068" y="3572381"/>
-                  </a:lnTo>
-                  <a:lnTo>
-                    <a:pt x="4844702" y="3577219"/>
-                  </a:lnTo>
-                  <a:lnTo>
-                    <a:pt x="4922336" y="3581765"/>
-                  </a:lnTo>
-                  <a:lnTo>
-                    <a:pt x="4999970" y="3586037"/>
-                  </a:lnTo>
-                  <a:lnTo>
-                    <a:pt x="5077604" y="3590052"/>
-                  </a:lnTo>
-                  <a:lnTo>
-                    <a:pt x="5155238" y="3593825"/>
-                  </a:lnTo>
-                  <a:lnTo>
-                    <a:pt x="5232872" y="3597370"/>
-                  </a:lnTo>
-                  <a:lnTo>
-                    <a:pt x="5310506" y="3600702"/>
-                  </a:lnTo>
-                  <a:lnTo>
-                    <a:pt x="5388140" y="3603833"/>
-                  </a:lnTo>
-                  <a:lnTo>
-                    <a:pt x="5465774" y="3606775"/>
-                  </a:lnTo>
-                  <a:lnTo>
-                    <a:pt x="5543408" y="3609540"/>
-                  </a:lnTo>
-                  <a:lnTo>
-                    <a:pt x="5621042" y="3612138"/>
-                  </a:lnTo>
-                  <a:lnTo>
-                    <a:pt x="5698676" y="3614579"/>
-                  </a:lnTo>
-                  <a:lnTo>
-                    <a:pt x="5776311" y="3616873"/>
+                    <a:pt x="5577" y="9155"/>
+                  </a:lnTo>
+                  <a:lnTo>
+                    <a:pt x="83212" y="132281"/>
+                  </a:lnTo>
+                  <a:lnTo>
+                    <a:pt x="160846" y="251246"/>
+                  </a:lnTo>
+                  <a:lnTo>
+                    <a:pt x="238480" y="366191"/>
+                  </a:lnTo>
+                  <a:lnTo>
+                    <a:pt x="316114" y="477251"/>
+                  </a:lnTo>
+                  <a:lnTo>
+                    <a:pt x="393748" y="584558"/>
+                  </a:lnTo>
+                  <a:lnTo>
+                    <a:pt x="471382" y="688239"/>
+                  </a:lnTo>
+                  <a:lnTo>
+                    <a:pt x="549016" y="788417"/>
+                  </a:lnTo>
+                  <a:lnTo>
+                    <a:pt x="626650" y="885209"/>
+                  </a:lnTo>
+                  <a:lnTo>
+                    <a:pt x="704284" y="978729"/>
+                  </a:lnTo>
+                  <a:lnTo>
+                    <a:pt x="781918" y="1069090"/>
+                  </a:lnTo>
+                  <a:lnTo>
+                    <a:pt x="859552" y="1156397"/>
+                  </a:lnTo>
+                  <a:lnTo>
+                    <a:pt x="937186" y="1240754"/>
+                  </a:lnTo>
+                  <a:lnTo>
+                    <a:pt x="1014820" y="1322260"/>
+                  </a:lnTo>
+                  <a:lnTo>
+                    <a:pt x="1092454" y="1401011"/>
+                  </a:lnTo>
+                  <a:lnTo>
+                    <a:pt x="1170088" y="1477101"/>
+                  </a:lnTo>
+                  <a:lnTo>
+                    <a:pt x="1247722" y="1550620"/>
+                  </a:lnTo>
+                  <a:lnTo>
+                    <a:pt x="1325356" y="1621655"/>
+                  </a:lnTo>
+                  <a:lnTo>
+                    <a:pt x="1402990" y="1690289"/>
+                  </a:lnTo>
+                  <a:lnTo>
+                    <a:pt x="1480624" y="1756603"/>
+                  </a:lnTo>
+                  <a:lnTo>
+                    <a:pt x="1558258" y="1820677"/>
+                  </a:lnTo>
+                  <a:lnTo>
+                    <a:pt x="1635892" y="1882585"/>
+                  </a:lnTo>
+                  <a:lnTo>
+                    <a:pt x="1713526" y="1942401"/>
+                  </a:lnTo>
+                  <a:lnTo>
+                    <a:pt x="1791161" y="2000196"/>
+                  </a:lnTo>
+                  <a:lnTo>
+                    <a:pt x="1868795" y="2056038"/>
+                  </a:lnTo>
+                  <a:lnTo>
+                    <a:pt x="1946429" y="2109993"/>
+                  </a:lnTo>
+                  <a:lnTo>
+                    <a:pt x="2024063" y="2162124"/>
+                  </a:lnTo>
+                  <a:lnTo>
+                    <a:pt x="2101697" y="2212494"/>
+                  </a:lnTo>
+                  <a:lnTo>
+                    <a:pt x="2179331" y="2261161"/>
+                  </a:lnTo>
+                  <a:lnTo>
+                    <a:pt x="2256965" y="2308184"/>
+                  </a:lnTo>
+                  <a:lnTo>
+                    <a:pt x="2334599" y="2353618"/>
+                  </a:lnTo>
+                  <a:lnTo>
+                    <a:pt x="2412233" y="2397517"/>
+                  </a:lnTo>
+                  <a:lnTo>
+                    <a:pt x="2489867" y="2439931"/>
+                  </a:lnTo>
+                  <a:lnTo>
+                    <a:pt x="2567501" y="2480913"/>
+                  </a:lnTo>
+                  <a:lnTo>
+                    <a:pt x="2645135" y="2520510"/>
+                  </a:lnTo>
+                  <a:lnTo>
+                    <a:pt x="2722769" y="2558768"/>
+                  </a:lnTo>
+                  <a:lnTo>
+                    <a:pt x="2800403" y="2595734"/>
+                  </a:lnTo>
+                  <a:lnTo>
+                    <a:pt x="2878037" y="2631451"/>
+                  </a:lnTo>
+                  <a:lnTo>
+                    <a:pt x="2955671" y="2665960"/>
+                  </a:lnTo>
+                  <a:lnTo>
+                    <a:pt x="3033305" y="2699304"/>
+                  </a:lnTo>
+                  <a:lnTo>
+                    <a:pt x="3110939" y="2731520"/>
+                  </a:lnTo>
+                  <a:lnTo>
+                    <a:pt x="3188573" y="2762648"/>
+                  </a:lnTo>
+                  <a:lnTo>
+                    <a:pt x="3266207" y="2792724"/>
+                  </a:lnTo>
+                  <a:lnTo>
+                    <a:pt x="3343841" y="2821784"/>
+                  </a:lnTo>
+                  <a:lnTo>
+                    <a:pt x="3421475" y="2849861"/>
+                  </a:lnTo>
+                  <a:lnTo>
+                    <a:pt x="3499109" y="2876990"/>
+                  </a:lnTo>
+                  <a:lnTo>
+                    <a:pt x="3576744" y="2903202"/>
+                  </a:lnTo>
+                  <a:lnTo>
+                    <a:pt x="3654378" y="2928528"/>
+                  </a:lnTo>
+                  <a:lnTo>
+                    <a:pt x="3732012" y="2952998"/>
+                  </a:lnTo>
+                  <a:lnTo>
+                    <a:pt x="3809646" y="2976642"/>
+                  </a:lnTo>
+                  <a:lnTo>
+                    <a:pt x="3887280" y="2999486"/>
+                  </a:lnTo>
+                  <a:lnTo>
+                    <a:pt x="3964914" y="3021558"/>
+                  </a:lnTo>
+                  <a:lnTo>
+                    <a:pt x="4042548" y="3042885"/>
+                  </a:lnTo>
+                  <a:lnTo>
+                    <a:pt x="4120182" y="3063491"/>
+                  </a:lnTo>
+                  <a:lnTo>
+                    <a:pt x="4197816" y="3083400"/>
+                  </a:lnTo>
+                  <a:lnTo>
+                    <a:pt x="4275450" y="3102637"/>
+                  </a:lnTo>
+                  <a:lnTo>
+                    <a:pt x="4353084" y="3121223"/>
+                  </a:lnTo>
+                  <a:lnTo>
+                    <a:pt x="4430718" y="3139182"/>
+                  </a:lnTo>
+                  <a:lnTo>
+                    <a:pt x="4508352" y="3156533"/>
+                  </a:lnTo>
+                  <a:lnTo>
+                    <a:pt x="4585986" y="3173299"/>
+                  </a:lnTo>
+                  <a:lnTo>
+                    <a:pt x="4663620" y="3189497"/>
+                  </a:lnTo>
+                  <a:lnTo>
+                    <a:pt x="4741254" y="3205149"/>
+                  </a:lnTo>
+                  <a:lnTo>
+                    <a:pt x="4818888" y="3220271"/>
+                  </a:lnTo>
+                  <a:lnTo>
+                    <a:pt x="4896522" y="3234882"/>
+                  </a:lnTo>
+                  <a:lnTo>
+                    <a:pt x="4974156" y="3249000"/>
+                  </a:lnTo>
+                  <a:lnTo>
+                    <a:pt x="5051790" y="3262640"/>
+                  </a:lnTo>
+                  <a:lnTo>
+                    <a:pt x="5129424" y="3275820"/>
+                  </a:lnTo>
+                  <a:lnTo>
+                    <a:pt x="5207058" y="3288554"/>
+                  </a:lnTo>
+                  <a:lnTo>
+                    <a:pt x="5284693" y="3300858"/>
+                  </a:lnTo>
+                  <a:lnTo>
+                    <a:pt x="5362327" y="3312746"/>
+                  </a:lnTo>
+                  <a:lnTo>
+                    <a:pt x="5439961" y="3324232"/>
+                  </a:lnTo>
+                  <a:lnTo>
+                    <a:pt x="5517595" y="3335330"/>
+                  </a:lnTo>
+                  <a:lnTo>
+                    <a:pt x="5595229" y="3346053"/>
+                  </a:lnTo>
+                  <a:lnTo>
+                    <a:pt x="5672863" y="3356414"/>
+                  </a:lnTo>
+                  <a:lnTo>
+                    <a:pt x="5750497" y="3366425"/>
+                  </a:lnTo>
+                  <a:lnTo>
+                    <a:pt x="5828131" y="3376097"/>
+                  </a:lnTo>
+                  <a:lnTo>
+                    <a:pt x="5905765" y="3385442"/>
+                  </a:lnTo>
+                  <a:lnTo>
+                    <a:pt x="5983399" y="3394472"/>
+                  </a:lnTo>
+                  <a:lnTo>
+                    <a:pt x="6061033" y="3403196"/>
+                  </a:lnTo>
+                  <a:lnTo>
+                    <a:pt x="6138667" y="3411626"/>
+                  </a:lnTo>
+                  <a:lnTo>
+                    <a:pt x="6216301" y="3419771"/>
+                  </a:lnTo>
+                  <a:lnTo>
+                    <a:pt x="6293935" y="3427640"/>
+                  </a:lnTo>
+                  <a:lnTo>
+                    <a:pt x="6371569" y="3435244"/>
+                  </a:lnTo>
+                  <a:lnTo>
+                    <a:pt x="6449203" y="3442591"/>
+                  </a:lnTo>
+                  <a:lnTo>
+                    <a:pt x="6526837" y="3449689"/>
+                  </a:lnTo>
+                  <a:lnTo>
+                    <a:pt x="6604471" y="3456548"/>
+                  </a:lnTo>
+                  <a:lnTo>
+                    <a:pt x="6682105" y="3463174"/>
+                  </a:lnTo>
+                  <a:lnTo>
+                    <a:pt x="6759739" y="3469577"/>
+                  </a:lnTo>
+                  <a:lnTo>
+                    <a:pt x="6837373" y="3475764"/>
+                  </a:lnTo>
+                  <a:lnTo>
+                    <a:pt x="6915007" y="3481741"/>
+                  </a:lnTo>
+                  <a:lnTo>
+                    <a:pt x="6992642" y="3487516"/>
+                  </a:lnTo>
+                  <a:lnTo>
+                    <a:pt x="7070276" y="3493096"/>
+                  </a:lnTo>
+                  <a:lnTo>
+                    <a:pt x="7147910" y="3498488"/>
+                  </a:lnTo>
+                  <a:lnTo>
+                    <a:pt x="7225544" y="3503698"/>
                   </a:lnTo>
                 </a:path>
               </a:pathLst>

--- a/docs/plots/carbo/jx_carbo_linsubhr_ratio_hosp4.pptx
+++ b/docs/plots/carbo/jx_carbo_linsubhr_ratio_hosp4.pptx
@@ -2271,7 +2271,7 @@
           </p:nvSpPr>
           <p:spPr>
             <a:xfrm>
-              <a:off x="817517" y="5114368"/>
+              <a:off x="817517" y="5142518"/>
               <a:ext cx="7799693" cy="0"/>
             </a:xfrm>
             <a:custGeom>
@@ -2314,7 +2314,7 @@
           </p:nvSpPr>
           <p:spPr>
             <a:xfrm>
-              <a:off x="817517" y="4244691"/>
+              <a:off x="817517" y="4313054"/>
               <a:ext cx="7799693" cy="0"/>
             </a:xfrm>
             <a:custGeom>
@@ -2357,7 +2357,7 @@
           </p:nvSpPr>
           <p:spPr>
             <a:xfrm>
-              <a:off x="817517" y="3375014"/>
+              <a:off x="817517" y="3483591"/>
               <a:ext cx="7799693" cy="0"/>
             </a:xfrm>
             <a:custGeom>
@@ -2400,7 +2400,7 @@
           </p:nvSpPr>
           <p:spPr>
             <a:xfrm>
-              <a:off x="817517" y="2505337"/>
+              <a:off x="817517" y="2654127"/>
               <a:ext cx="7799693" cy="0"/>
             </a:xfrm>
             <a:custGeom>
@@ -2443,15 +2443,15 @@
           </p:nvSpPr>
           <p:spPr>
             <a:xfrm>
-              <a:off x="1615213" y="1896563"/>
-              <a:ext cx="0" cy="3826579"/>
+              <a:off x="1615213" y="2073503"/>
+              <a:ext cx="0" cy="3649639"/>
             </a:xfrm>
             <a:custGeom>
               <a:avLst/>
               <a:pathLst>
-                <a:path w="0" h="3826579">
+                <a:path w="0" h="3649639">
                   <a:moveTo>
-                    <a:pt x="0" y="3826579"/>
+                    <a:pt x="0" y="3649639"/>
                   </a:moveTo>
                   <a:lnTo>
                     <a:pt x="0" y="0"/>
@@ -2486,15 +2486,15 @@
           </p:nvSpPr>
           <p:spPr>
             <a:xfrm>
-              <a:off x="3387871" y="1896563"/>
-              <a:ext cx="0" cy="3826579"/>
+              <a:off x="3387871" y="2073503"/>
+              <a:ext cx="0" cy="3649639"/>
             </a:xfrm>
             <a:custGeom>
               <a:avLst/>
               <a:pathLst>
-                <a:path w="0" h="3826579">
+                <a:path w="0" h="3649639">
                   <a:moveTo>
-                    <a:pt x="0" y="3826579"/>
+                    <a:pt x="0" y="3649639"/>
                   </a:moveTo>
                   <a:lnTo>
                     <a:pt x="0" y="0"/>
@@ -2529,15 +2529,15 @@
           </p:nvSpPr>
           <p:spPr>
             <a:xfrm>
-              <a:off x="5160528" y="1896563"/>
-              <a:ext cx="0" cy="3826579"/>
+              <a:off x="5160528" y="2073503"/>
+              <a:ext cx="0" cy="3649639"/>
             </a:xfrm>
             <a:custGeom>
               <a:avLst/>
               <a:pathLst>
-                <a:path w="0" h="3826579">
+                <a:path w="0" h="3649639">
                   <a:moveTo>
-                    <a:pt x="0" y="3826579"/>
+                    <a:pt x="0" y="3649639"/>
                   </a:moveTo>
                   <a:lnTo>
                     <a:pt x="0" y="0"/>
@@ -2572,15 +2572,15 @@
           </p:nvSpPr>
           <p:spPr>
             <a:xfrm>
-              <a:off x="6933186" y="1896563"/>
-              <a:ext cx="0" cy="3826579"/>
+              <a:off x="6933186" y="2073503"/>
+              <a:ext cx="0" cy="3649639"/>
             </a:xfrm>
             <a:custGeom>
               <a:avLst/>
               <a:pathLst>
-                <a:path w="0" h="3826579">
+                <a:path w="0" h="3649639">
                   <a:moveTo>
-                    <a:pt x="0" y="3826579"/>
+                    <a:pt x="0" y="3649639"/>
                   </a:moveTo>
                   <a:lnTo>
                     <a:pt x="0" y="0"/>
@@ -2615,7 +2615,7 @@
           </p:nvSpPr>
           <p:spPr>
             <a:xfrm>
-              <a:off x="817517" y="5549207"/>
+              <a:off x="817517" y="5557249"/>
               <a:ext cx="7799693" cy="0"/>
             </a:xfrm>
             <a:custGeom>
@@ -2658,7 +2658,7 @@
           </p:nvSpPr>
           <p:spPr>
             <a:xfrm>
-              <a:off x="817517" y="4679530"/>
+              <a:off x="817517" y="4727786"/>
               <a:ext cx="7799693" cy="0"/>
             </a:xfrm>
             <a:custGeom>
@@ -2701,7 +2701,7 @@
           </p:nvSpPr>
           <p:spPr>
             <a:xfrm>
-              <a:off x="817517" y="3809853"/>
+              <a:off x="817517" y="3898322"/>
               <a:ext cx="7799693" cy="0"/>
             </a:xfrm>
             <a:custGeom>
@@ -2744,7 +2744,7 @@
           </p:nvSpPr>
           <p:spPr>
             <a:xfrm>
-              <a:off x="817517" y="2940175"/>
+              <a:off x="817517" y="3068859"/>
               <a:ext cx="7799693" cy="0"/>
             </a:xfrm>
             <a:custGeom>
@@ -2787,7 +2787,7 @@
           </p:nvSpPr>
           <p:spPr>
             <a:xfrm>
-              <a:off x="817517" y="2070498"/>
+              <a:off x="817517" y="2239395"/>
               <a:ext cx="7799693" cy="0"/>
             </a:xfrm>
             <a:custGeom>
@@ -2830,15 +2830,15 @@
           </p:nvSpPr>
           <p:spPr>
             <a:xfrm>
-              <a:off x="2501542" y="1896563"/>
-              <a:ext cx="0" cy="3826579"/>
+              <a:off x="2501542" y="2073503"/>
+              <a:ext cx="0" cy="3649639"/>
             </a:xfrm>
             <a:custGeom>
               <a:avLst/>
               <a:pathLst>
-                <a:path w="0" h="3826579">
+                <a:path w="0" h="3649639">
                   <a:moveTo>
-                    <a:pt x="0" y="3826579"/>
+                    <a:pt x="0" y="3649639"/>
                   </a:moveTo>
                   <a:lnTo>
                     <a:pt x="0" y="0"/>
@@ -2873,15 +2873,15 @@
           </p:nvSpPr>
           <p:spPr>
             <a:xfrm>
-              <a:off x="4274200" y="1896563"/>
-              <a:ext cx="0" cy="3826579"/>
+              <a:off x="4274200" y="2073503"/>
+              <a:ext cx="0" cy="3649639"/>
             </a:xfrm>
             <a:custGeom>
               <a:avLst/>
               <a:pathLst>
-                <a:path w="0" h="3826579">
+                <a:path w="0" h="3649639">
                   <a:moveTo>
-                    <a:pt x="0" y="3826579"/>
+                    <a:pt x="0" y="3649639"/>
                   </a:moveTo>
                   <a:lnTo>
                     <a:pt x="0" y="0"/>
@@ -2916,15 +2916,15 @@
           </p:nvSpPr>
           <p:spPr>
             <a:xfrm>
-              <a:off x="6046857" y="1896563"/>
-              <a:ext cx="0" cy="3826579"/>
+              <a:off x="6046857" y="2073503"/>
+              <a:ext cx="0" cy="3649639"/>
             </a:xfrm>
             <a:custGeom>
               <a:avLst/>
               <a:pathLst>
-                <a:path w="0" h="3826579">
+                <a:path w="0" h="3649639">
                   <a:moveTo>
-                    <a:pt x="0" y="3826579"/>
+                    <a:pt x="0" y="3649639"/>
                   </a:moveTo>
                   <a:lnTo>
                     <a:pt x="0" y="0"/>
@@ -2959,15 +2959,15 @@
           </p:nvSpPr>
           <p:spPr>
             <a:xfrm>
-              <a:off x="7819515" y="1896563"/>
-              <a:ext cx="0" cy="3826579"/>
+              <a:off x="7819515" y="2073503"/>
+              <a:ext cx="0" cy="3649639"/>
             </a:xfrm>
             <a:custGeom>
               <a:avLst/>
               <a:pathLst>
-                <a:path w="0" h="3826579">
+                <a:path w="0" h="3649639">
                   <a:moveTo>
-                    <a:pt x="0" y="3826579"/>
+                    <a:pt x="0" y="3649639"/>
                   </a:moveTo>
                   <a:lnTo>
                     <a:pt x="0" y="0"/>
@@ -3002,522 +3002,522 @@
           </p:nvSpPr>
           <p:spPr>
             <a:xfrm>
-              <a:off x="817517" y="1896563"/>
-              <a:ext cx="7370972" cy="3623637"/>
+              <a:off x="817517" y="2073503"/>
+              <a:ext cx="7370972" cy="3456081"/>
             </a:xfrm>
             <a:custGeom>
               <a:avLst/>
               <a:pathLst>
-                <a:path w="7370972" h="3623637">
+                <a:path w="7370972" h="3456081">
                   <a:moveTo>
                     <a:pt x="1704559" y="0"/>
                   </a:moveTo>
                   <a:lnTo>
-                    <a:pt x="1781321" y="231690"/>
-                  </a:lnTo>
-                  <a:lnTo>
-                    <a:pt x="1858955" y="450991"/>
-                  </a:lnTo>
-                  <a:lnTo>
-                    <a:pt x="1936589" y="656234"/>
-                  </a:lnTo>
-                  <a:lnTo>
-                    <a:pt x="2014223" y="848319"/>
-                  </a:lnTo>
-                  <a:lnTo>
-                    <a:pt x="2091857" y="1028091"/>
-                  </a:lnTo>
-                  <a:lnTo>
-                    <a:pt x="2169491" y="1196339"/>
-                  </a:lnTo>
-                  <a:lnTo>
-                    <a:pt x="2247125" y="1353801"/>
-                  </a:lnTo>
-                  <a:lnTo>
-                    <a:pt x="2324759" y="1501169"/>
-                  </a:lnTo>
-                  <a:lnTo>
-                    <a:pt x="2402393" y="1639090"/>
-                  </a:lnTo>
-                  <a:lnTo>
-                    <a:pt x="2480027" y="1768169"/>
-                  </a:lnTo>
-                  <a:lnTo>
-                    <a:pt x="2557661" y="1888974"/>
-                  </a:lnTo>
-                  <a:lnTo>
-                    <a:pt x="2635295" y="2002035"/>
-                  </a:lnTo>
-                  <a:lnTo>
-                    <a:pt x="2712930" y="2107847"/>
-                  </a:lnTo>
-                  <a:lnTo>
-                    <a:pt x="2790564" y="2206877"/>
-                  </a:lnTo>
-                  <a:lnTo>
-                    <a:pt x="2868198" y="2299558"/>
-                  </a:lnTo>
-                  <a:lnTo>
-                    <a:pt x="2945832" y="2386298"/>
-                  </a:lnTo>
-                  <a:lnTo>
-                    <a:pt x="3023466" y="2467477"/>
-                  </a:lnTo>
-                  <a:lnTo>
-                    <a:pt x="3101100" y="2543453"/>
-                  </a:lnTo>
-                  <a:lnTo>
-                    <a:pt x="3178734" y="2614558"/>
-                  </a:lnTo>
-                  <a:lnTo>
-                    <a:pt x="3256368" y="2681105"/>
-                  </a:lnTo>
-                  <a:lnTo>
-                    <a:pt x="3334002" y="2743385"/>
-                  </a:lnTo>
-                  <a:lnTo>
-                    <a:pt x="3411636" y="2783680"/>
-                  </a:lnTo>
-                  <a:lnTo>
-                    <a:pt x="3489270" y="2785853"/>
-                  </a:lnTo>
-                  <a:lnTo>
-                    <a:pt x="3566904" y="2788019"/>
-                  </a:lnTo>
-                  <a:lnTo>
-                    <a:pt x="3644538" y="2790181"/>
-                  </a:lnTo>
-                  <a:lnTo>
-                    <a:pt x="3722172" y="2792337"/>
-                  </a:lnTo>
-                  <a:lnTo>
-                    <a:pt x="3799806" y="2794487"/>
-                  </a:lnTo>
-                  <a:lnTo>
-                    <a:pt x="3877440" y="2796632"/>
-                  </a:lnTo>
-                  <a:lnTo>
-                    <a:pt x="3955074" y="2798772"/>
-                  </a:lnTo>
-                  <a:lnTo>
-                    <a:pt x="4032708" y="2800906"/>
-                  </a:lnTo>
-                  <a:lnTo>
-                    <a:pt x="4110342" y="2803036"/>
-                  </a:lnTo>
-                  <a:lnTo>
-                    <a:pt x="4187976" y="2805159"/>
-                  </a:lnTo>
-                  <a:lnTo>
-                    <a:pt x="4265610" y="2807278"/>
-                  </a:lnTo>
-                  <a:lnTo>
-                    <a:pt x="4343244" y="2809391"/>
-                  </a:lnTo>
-                  <a:lnTo>
-                    <a:pt x="4420879" y="2811499"/>
-                  </a:lnTo>
-                  <a:lnTo>
-                    <a:pt x="4498513" y="2813602"/>
-                  </a:lnTo>
-                  <a:lnTo>
-                    <a:pt x="4576147" y="2815699"/>
-                  </a:lnTo>
-                  <a:lnTo>
-                    <a:pt x="4653781" y="2817791"/>
-                  </a:lnTo>
-                  <a:lnTo>
-                    <a:pt x="4731415" y="2819878"/>
-                  </a:lnTo>
-                  <a:lnTo>
-                    <a:pt x="4809049" y="2821960"/>
-                  </a:lnTo>
-                  <a:lnTo>
-                    <a:pt x="4886683" y="2824036"/>
-                  </a:lnTo>
-                  <a:lnTo>
-                    <a:pt x="4964317" y="2826108"/>
-                  </a:lnTo>
-                  <a:lnTo>
-                    <a:pt x="5041951" y="2828174"/>
-                  </a:lnTo>
-                  <a:lnTo>
-                    <a:pt x="5119585" y="2830235"/>
-                  </a:lnTo>
-                  <a:lnTo>
-                    <a:pt x="5197219" y="2832290"/>
-                  </a:lnTo>
-                  <a:lnTo>
-                    <a:pt x="5274853" y="2834341"/>
-                  </a:lnTo>
-                  <a:lnTo>
-                    <a:pt x="5352487" y="2836387"/>
-                  </a:lnTo>
-                  <a:lnTo>
-                    <a:pt x="5430121" y="2838427"/>
-                  </a:lnTo>
-                  <a:lnTo>
-                    <a:pt x="5507755" y="2840462"/>
-                  </a:lnTo>
-                  <a:lnTo>
-                    <a:pt x="5585389" y="2842493"/>
-                  </a:lnTo>
-                  <a:lnTo>
-                    <a:pt x="5663023" y="2844518"/>
-                  </a:lnTo>
-                  <a:lnTo>
-                    <a:pt x="5740657" y="2846538"/>
-                  </a:lnTo>
-                  <a:lnTo>
-                    <a:pt x="5818291" y="2848553"/>
-                  </a:lnTo>
-                  <a:lnTo>
-                    <a:pt x="5895925" y="2850563"/>
-                  </a:lnTo>
-                  <a:lnTo>
-                    <a:pt x="5973559" y="2852568"/>
-                  </a:lnTo>
-                  <a:lnTo>
-                    <a:pt x="6051193" y="2854568"/>
-                  </a:lnTo>
-                  <a:lnTo>
-                    <a:pt x="6128827" y="2856563"/>
-                  </a:lnTo>
-                  <a:lnTo>
-                    <a:pt x="6206462" y="2858553"/>
-                  </a:lnTo>
-                  <a:lnTo>
-                    <a:pt x="6284096" y="2860538"/>
-                  </a:lnTo>
-                  <a:lnTo>
-                    <a:pt x="6361730" y="2862518"/>
-                  </a:lnTo>
-                  <a:lnTo>
-                    <a:pt x="6439364" y="2864493"/>
-                  </a:lnTo>
-                  <a:lnTo>
-                    <a:pt x="6516998" y="2866463"/>
-                  </a:lnTo>
-                  <a:lnTo>
-                    <a:pt x="6594632" y="2868428"/>
-                  </a:lnTo>
-                  <a:lnTo>
-                    <a:pt x="6672266" y="2870389"/>
-                  </a:lnTo>
-                  <a:lnTo>
-                    <a:pt x="6749900" y="2872344"/>
-                  </a:lnTo>
-                  <a:lnTo>
-                    <a:pt x="6827534" y="2874295"/>
-                  </a:lnTo>
-                  <a:lnTo>
-                    <a:pt x="6905168" y="2876240"/>
-                  </a:lnTo>
-                  <a:lnTo>
-                    <a:pt x="6982802" y="2878181"/>
-                  </a:lnTo>
-                  <a:lnTo>
-                    <a:pt x="7060436" y="2880117"/>
-                  </a:lnTo>
-                  <a:lnTo>
-                    <a:pt x="7138070" y="2882048"/>
-                  </a:lnTo>
-                  <a:lnTo>
-                    <a:pt x="7215704" y="2883975"/>
-                  </a:lnTo>
-                  <a:lnTo>
-                    <a:pt x="7293338" y="2885896"/>
-                  </a:lnTo>
-                  <a:lnTo>
-                    <a:pt x="7370972" y="2887813"/>
-                  </a:lnTo>
-                  <a:lnTo>
-                    <a:pt x="7370972" y="3623637"/>
-                  </a:lnTo>
-                  <a:lnTo>
-                    <a:pt x="7293338" y="3621650"/>
-                  </a:lnTo>
-                  <a:lnTo>
-                    <a:pt x="7215704" y="3619527"/>
-                  </a:lnTo>
-                  <a:lnTo>
-                    <a:pt x="7138070" y="3617259"/>
-                  </a:lnTo>
-                  <a:lnTo>
-                    <a:pt x="7060436" y="3614835"/>
-                  </a:lnTo>
-                  <a:lnTo>
-                    <a:pt x="6982802" y="3612246"/>
-                  </a:lnTo>
-                  <a:lnTo>
-                    <a:pt x="6905168" y="3609479"/>
-                  </a:lnTo>
-                  <a:lnTo>
-                    <a:pt x="6827534" y="3606522"/>
-                  </a:lnTo>
-                  <a:lnTo>
-                    <a:pt x="6749900" y="3603363"/>
-                  </a:lnTo>
-                  <a:lnTo>
-                    <a:pt x="6672266" y="3599987"/>
-                  </a:lnTo>
-                  <a:lnTo>
-                    <a:pt x="6594632" y="3596381"/>
-                  </a:lnTo>
-                  <a:lnTo>
-                    <a:pt x="6516998" y="3592527"/>
-                  </a:lnTo>
-                  <a:lnTo>
-                    <a:pt x="6439364" y="3588409"/>
-                  </a:lnTo>
-                  <a:lnTo>
-                    <a:pt x="6361730" y="3584009"/>
-                  </a:lnTo>
-                  <a:lnTo>
-                    <a:pt x="6284096" y="3579308"/>
-                  </a:lnTo>
-                  <a:lnTo>
-                    <a:pt x="6206462" y="3574285"/>
-                  </a:lnTo>
-                  <a:lnTo>
-                    <a:pt x="6128827" y="3568918"/>
-                  </a:lnTo>
-                  <a:lnTo>
-                    <a:pt x="6051193" y="3563183"/>
-                  </a:lnTo>
-                  <a:lnTo>
-                    <a:pt x="5973559" y="3557055"/>
-                  </a:lnTo>
-                  <a:lnTo>
-                    <a:pt x="5895925" y="3550507"/>
-                  </a:lnTo>
-                  <a:lnTo>
-                    <a:pt x="5818291" y="3543512"/>
-                  </a:lnTo>
-                  <a:lnTo>
-                    <a:pt x="5740657" y="3536036"/>
-                  </a:lnTo>
-                  <a:lnTo>
-                    <a:pt x="5663023" y="3528049"/>
-                  </a:lnTo>
-                  <a:lnTo>
-                    <a:pt x="5585389" y="3519515"/>
-                  </a:lnTo>
-                  <a:lnTo>
-                    <a:pt x="5507755" y="3510396"/>
-                  </a:lnTo>
-                  <a:lnTo>
-                    <a:pt x="5430121" y="3500653"/>
-                  </a:lnTo>
-                  <a:lnTo>
-                    <a:pt x="5352487" y="3490242"/>
-                  </a:lnTo>
-                  <a:lnTo>
-                    <a:pt x="5274853" y="3479118"/>
-                  </a:lnTo>
-                  <a:lnTo>
-                    <a:pt x="5197219" y="3467232"/>
-                  </a:lnTo>
-                  <a:lnTo>
-                    <a:pt x="5119585" y="3454533"/>
-                  </a:lnTo>
-                  <a:lnTo>
-                    <a:pt x="5041951" y="3440963"/>
-                  </a:lnTo>
-                  <a:lnTo>
-                    <a:pt x="4964317" y="3426463"/>
-                  </a:lnTo>
-                  <a:lnTo>
-                    <a:pt x="4886683" y="3410971"/>
-                  </a:lnTo>
-                  <a:lnTo>
-                    <a:pt x="4809049" y="3394417"/>
-                  </a:lnTo>
-                  <a:lnTo>
-                    <a:pt x="4731415" y="3376730"/>
-                  </a:lnTo>
-                  <a:lnTo>
-                    <a:pt x="4653781" y="3357831"/>
-                  </a:lnTo>
-                  <a:lnTo>
-                    <a:pt x="4576147" y="3337637"/>
-                  </a:lnTo>
-                  <a:lnTo>
-                    <a:pt x="4498513" y="3316060"/>
-                  </a:lnTo>
-                  <a:lnTo>
-                    <a:pt x="4420879" y="3293006"/>
-                  </a:lnTo>
-                  <a:lnTo>
-                    <a:pt x="4343244" y="3268372"/>
-                  </a:lnTo>
-                  <a:lnTo>
-                    <a:pt x="4265610" y="3242051"/>
-                  </a:lnTo>
-                  <a:lnTo>
-                    <a:pt x="4187976" y="3213927"/>
-                  </a:lnTo>
-                  <a:lnTo>
-                    <a:pt x="4110342" y="3183876"/>
-                  </a:lnTo>
-                  <a:lnTo>
-                    <a:pt x="4032708" y="3151767"/>
-                  </a:lnTo>
-                  <a:lnTo>
-                    <a:pt x="3955074" y="3117459"/>
-                  </a:lnTo>
-                  <a:lnTo>
-                    <a:pt x="3877440" y="3080801"/>
-                  </a:lnTo>
-                  <a:lnTo>
-                    <a:pt x="3799806" y="3041632"/>
-                  </a:lnTo>
-                  <a:lnTo>
-                    <a:pt x="3722172" y="2999780"/>
-                  </a:lnTo>
-                  <a:lnTo>
-                    <a:pt x="3644538" y="2955062"/>
-                  </a:lnTo>
-                  <a:lnTo>
-                    <a:pt x="3566904" y="2907280"/>
-                  </a:lnTo>
-                  <a:lnTo>
-                    <a:pt x="3489270" y="2856225"/>
-                  </a:lnTo>
-                  <a:lnTo>
-                    <a:pt x="3411636" y="2801674"/>
-                  </a:lnTo>
-                  <a:lnTo>
-                    <a:pt x="3334002" y="2781503"/>
-                  </a:lnTo>
-                  <a:lnTo>
-                    <a:pt x="3256368" y="2779320"/>
-                  </a:lnTo>
-                  <a:lnTo>
-                    <a:pt x="3178734" y="2777131"/>
-                  </a:lnTo>
-                  <a:lnTo>
-                    <a:pt x="3101100" y="2774937"/>
-                  </a:lnTo>
-                  <a:lnTo>
-                    <a:pt x="3023466" y="2772738"/>
-                  </a:lnTo>
-                  <a:lnTo>
-                    <a:pt x="2945832" y="2770532"/>
-                  </a:lnTo>
-                  <a:lnTo>
-                    <a:pt x="2868198" y="2768322"/>
-                  </a:lnTo>
-                  <a:lnTo>
-                    <a:pt x="2790564" y="2766106"/>
-                  </a:lnTo>
-                  <a:lnTo>
-                    <a:pt x="2712930" y="2763884"/>
-                  </a:lnTo>
-                  <a:lnTo>
-                    <a:pt x="2635295" y="2761657"/>
-                  </a:lnTo>
-                  <a:lnTo>
-                    <a:pt x="2557661" y="2759424"/>
-                  </a:lnTo>
-                  <a:lnTo>
-                    <a:pt x="2480027" y="2757186"/>
-                  </a:lnTo>
-                  <a:lnTo>
-                    <a:pt x="2402393" y="2754942"/>
-                  </a:lnTo>
-                  <a:lnTo>
-                    <a:pt x="2324759" y="2752692"/>
-                  </a:lnTo>
-                  <a:lnTo>
-                    <a:pt x="2247125" y="2750437"/>
-                  </a:lnTo>
-                  <a:lnTo>
-                    <a:pt x="2169491" y="2748176"/>
-                  </a:lnTo>
-                  <a:lnTo>
-                    <a:pt x="2091857" y="2745909"/>
-                  </a:lnTo>
-                  <a:lnTo>
-                    <a:pt x="2014223" y="2743637"/>
-                  </a:lnTo>
-                  <a:lnTo>
-                    <a:pt x="1936589" y="2741359"/>
-                  </a:lnTo>
-                  <a:lnTo>
-                    <a:pt x="1858955" y="2739075"/>
-                  </a:lnTo>
-                  <a:lnTo>
-                    <a:pt x="1781321" y="2736786"/>
-                  </a:lnTo>
-                  <a:lnTo>
-                    <a:pt x="1703687" y="2734491"/>
-                  </a:lnTo>
-                  <a:lnTo>
-                    <a:pt x="1626053" y="2732190"/>
-                  </a:lnTo>
-                  <a:lnTo>
-                    <a:pt x="1548419" y="2729883"/>
-                  </a:lnTo>
-                  <a:lnTo>
-                    <a:pt x="1470785" y="2727571"/>
-                  </a:lnTo>
-                  <a:lnTo>
-                    <a:pt x="1393151" y="2725253"/>
-                  </a:lnTo>
-                  <a:lnTo>
-                    <a:pt x="1315517" y="2722928"/>
-                  </a:lnTo>
-                  <a:lnTo>
-                    <a:pt x="1237883" y="2720599"/>
-                  </a:lnTo>
-                  <a:lnTo>
-                    <a:pt x="1160249" y="2718263"/>
-                  </a:lnTo>
-                  <a:lnTo>
-                    <a:pt x="1082615" y="2715921"/>
-                  </a:lnTo>
-                  <a:lnTo>
-                    <a:pt x="1004981" y="2713574"/>
-                  </a:lnTo>
-                  <a:lnTo>
-                    <a:pt x="927346" y="2711221"/>
-                  </a:lnTo>
-                  <a:lnTo>
-                    <a:pt x="849712" y="2708861"/>
-                  </a:lnTo>
-                  <a:lnTo>
-                    <a:pt x="772078" y="2706496"/>
-                  </a:lnTo>
-                  <a:lnTo>
-                    <a:pt x="694444" y="2704125"/>
-                  </a:lnTo>
-                  <a:lnTo>
-                    <a:pt x="616810" y="2701748"/>
-                  </a:lnTo>
-                  <a:lnTo>
-                    <a:pt x="539176" y="2699365"/>
-                  </a:lnTo>
-                  <a:lnTo>
-                    <a:pt x="461542" y="2696976"/>
-                  </a:lnTo>
-                  <a:lnTo>
-                    <a:pt x="383908" y="2694582"/>
-                  </a:lnTo>
-                  <a:lnTo>
-                    <a:pt x="306274" y="2692181"/>
-                  </a:lnTo>
-                  <a:lnTo>
-                    <a:pt x="228640" y="2689774"/>
-                  </a:lnTo>
-                  <a:lnTo>
-                    <a:pt x="151006" y="2687361"/>
-                  </a:lnTo>
-                  <a:lnTo>
-                    <a:pt x="73372" y="2684942"/>
-                  </a:lnTo>
-                  <a:lnTo>
-                    <a:pt x="0" y="2682650"/>
+                    <a:pt x="1781321" y="220977"/>
+                  </a:lnTo>
+                  <a:lnTo>
+                    <a:pt x="1858955" y="430137"/>
+                  </a:lnTo>
+                  <a:lnTo>
+                    <a:pt x="1936589" y="625890"/>
+                  </a:lnTo>
+                  <a:lnTo>
+                    <a:pt x="2014223" y="809093"/>
+                  </a:lnTo>
+                  <a:lnTo>
+                    <a:pt x="2091857" y="980553"/>
+                  </a:lnTo>
+                  <a:lnTo>
+                    <a:pt x="2169491" y="1141021"/>
+                  </a:lnTo>
+                  <a:lnTo>
+                    <a:pt x="2247125" y="1291202"/>
+                  </a:lnTo>
+                  <a:lnTo>
+                    <a:pt x="2324759" y="1431756"/>
+                  </a:lnTo>
+                  <a:lnTo>
+                    <a:pt x="2402393" y="1563299"/>
+                  </a:lnTo>
+                  <a:lnTo>
+                    <a:pt x="2480027" y="1686410"/>
+                  </a:lnTo>
+                  <a:lnTo>
+                    <a:pt x="2557661" y="1801629"/>
+                  </a:lnTo>
+                  <a:lnTo>
+                    <a:pt x="2635295" y="1909461"/>
+                  </a:lnTo>
+                  <a:lnTo>
+                    <a:pt x="2712930" y="2010381"/>
+                  </a:lnTo>
+                  <a:lnTo>
+                    <a:pt x="2790564" y="2104832"/>
+                  </a:lnTo>
+                  <a:lnTo>
+                    <a:pt x="2868198" y="2193227"/>
+                  </a:lnTo>
+                  <a:lnTo>
+                    <a:pt x="2945832" y="2275956"/>
+                  </a:lnTo>
+                  <a:lnTo>
+                    <a:pt x="3023466" y="2353382"/>
+                  </a:lnTo>
+                  <a:lnTo>
+                    <a:pt x="3101100" y="2425844"/>
+                  </a:lnTo>
+                  <a:lnTo>
+                    <a:pt x="3178734" y="2493662"/>
+                  </a:lnTo>
+                  <a:lnTo>
+                    <a:pt x="3256368" y="2557131"/>
+                  </a:lnTo>
+                  <a:lnTo>
+                    <a:pt x="3334002" y="2616532"/>
+                  </a:lnTo>
+                  <a:lnTo>
+                    <a:pt x="3411636" y="2654964"/>
+                  </a:lnTo>
+                  <a:lnTo>
+                    <a:pt x="3489270" y="2657036"/>
+                  </a:lnTo>
+                  <a:lnTo>
+                    <a:pt x="3566904" y="2659102"/>
+                  </a:lnTo>
+                  <a:lnTo>
+                    <a:pt x="3644538" y="2661164"/>
+                  </a:lnTo>
+                  <a:lnTo>
+                    <a:pt x="3722172" y="2663220"/>
+                  </a:lnTo>
+                  <a:lnTo>
+                    <a:pt x="3799806" y="2665271"/>
+                  </a:lnTo>
+                  <a:lnTo>
+                    <a:pt x="3877440" y="2667317"/>
+                  </a:lnTo>
+                  <a:lnTo>
+                    <a:pt x="3955074" y="2669358"/>
+                  </a:lnTo>
+                  <a:lnTo>
+                    <a:pt x="4032708" y="2671394"/>
+                  </a:lnTo>
+                  <a:lnTo>
+                    <a:pt x="4110342" y="2673424"/>
+                  </a:lnTo>
+                  <a:lnTo>
+                    <a:pt x="4187976" y="2675450"/>
+                  </a:lnTo>
+                  <a:lnTo>
+                    <a:pt x="4265610" y="2677470"/>
+                  </a:lnTo>
+                  <a:lnTo>
+                    <a:pt x="4343244" y="2679486"/>
+                  </a:lnTo>
+                  <a:lnTo>
+                    <a:pt x="4420879" y="2681496"/>
+                  </a:lnTo>
+                  <a:lnTo>
+                    <a:pt x="4498513" y="2683502"/>
+                  </a:lnTo>
+                  <a:lnTo>
+                    <a:pt x="4576147" y="2685502"/>
+                  </a:lnTo>
+                  <a:lnTo>
+                    <a:pt x="4653781" y="2687498"/>
+                  </a:lnTo>
+                  <a:lnTo>
+                    <a:pt x="4731415" y="2689488"/>
+                  </a:lnTo>
+                  <a:lnTo>
+                    <a:pt x="4809049" y="2691473"/>
+                  </a:lnTo>
+                  <a:lnTo>
+                    <a:pt x="4886683" y="2693454"/>
+                  </a:lnTo>
+                  <a:lnTo>
+                    <a:pt x="4964317" y="2695429"/>
+                  </a:lnTo>
+                  <a:lnTo>
+                    <a:pt x="5041951" y="2697400"/>
+                  </a:lnTo>
+                  <a:lnTo>
+                    <a:pt x="5119585" y="2699366"/>
+                  </a:lnTo>
+                  <a:lnTo>
+                    <a:pt x="5197219" y="2701326"/>
+                  </a:lnTo>
+                  <a:lnTo>
+                    <a:pt x="5274853" y="2703282"/>
+                  </a:lnTo>
+                  <a:lnTo>
+                    <a:pt x="5352487" y="2705233"/>
+                  </a:lnTo>
+                  <a:lnTo>
+                    <a:pt x="5430121" y="2707179"/>
+                  </a:lnTo>
+                  <a:lnTo>
+                    <a:pt x="5507755" y="2709120"/>
+                  </a:lnTo>
+                  <a:lnTo>
+                    <a:pt x="5585389" y="2711057"/>
+                  </a:lnTo>
+                  <a:lnTo>
+                    <a:pt x="5663023" y="2712988"/>
+                  </a:lnTo>
+                  <a:lnTo>
+                    <a:pt x="5740657" y="2714915"/>
+                  </a:lnTo>
+                  <a:lnTo>
+                    <a:pt x="5818291" y="2716837"/>
+                  </a:lnTo>
+                  <a:lnTo>
+                    <a:pt x="5895925" y="2718754"/>
+                  </a:lnTo>
+                  <a:lnTo>
+                    <a:pt x="5973559" y="2720666"/>
+                  </a:lnTo>
+                  <a:lnTo>
+                    <a:pt x="6051193" y="2722574"/>
+                  </a:lnTo>
+                  <a:lnTo>
+                    <a:pt x="6128827" y="2724476"/>
+                  </a:lnTo>
+                  <a:lnTo>
+                    <a:pt x="6206462" y="2726374"/>
+                  </a:lnTo>
+                  <a:lnTo>
+                    <a:pt x="6284096" y="2728268"/>
+                  </a:lnTo>
+                  <a:lnTo>
+                    <a:pt x="6361730" y="2730156"/>
+                  </a:lnTo>
+                  <a:lnTo>
+                    <a:pt x="6439364" y="2732040"/>
+                  </a:lnTo>
+                  <a:lnTo>
+                    <a:pt x="6516998" y="2733919"/>
+                  </a:lnTo>
+                  <a:lnTo>
+                    <a:pt x="6594632" y="2735793"/>
+                  </a:lnTo>
+                  <a:lnTo>
+                    <a:pt x="6672266" y="2737663"/>
+                  </a:lnTo>
+                  <a:lnTo>
+                    <a:pt x="6749900" y="2739528"/>
+                  </a:lnTo>
+                  <a:lnTo>
+                    <a:pt x="6827534" y="2741388"/>
+                  </a:lnTo>
+                  <a:lnTo>
+                    <a:pt x="6905168" y="2743244"/>
+                  </a:lnTo>
+                  <a:lnTo>
+                    <a:pt x="6982802" y="2745095"/>
+                  </a:lnTo>
+                  <a:lnTo>
+                    <a:pt x="7060436" y="2746942"/>
+                  </a:lnTo>
+                  <a:lnTo>
+                    <a:pt x="7138070" y="2748783"/>
+                  </a:lnTo>
+                  <a:lnTo>
+                    <a:pt x="7215704" y="2750621"/>
+                  </a:lnTo>
+                  <a:lnTo>
+                    <a:pt x="7293338" y="2752453"/>
+                  </a:lnTo>
+                  <a:lnTo>
+                    <a:pt x="7370972" y="2754281"/>
+                  </a:lnTo>
+                  <a:lnTo>
+                    <a:pt x="7370972" y="3456081"/>
+                  </a:lnTo>
+                  <a:lnTo>
+                    <a:pt x="7293338" y="3454186"/>
+                  </a:lnTo>
+                  <a:lnTo>
+                    <a:pt x="7215704" y="3452162"/>
+                  </a:lnTo>
+                  <a:lnTo>
+                    <a:pt x="7138070" y="3449998"/>
+                  </a:lnTo>
+                  <a:lnTo>
+                    <a:pt x="7060436" y="3447687"/>
+                  </a:lnTo>
+                  <a:lnTo>
+                    <a:pt x="6982802" y="3445217"/>
+                  </a:lnTo>
+                  <a:lnTo>
+                    <a:pt x="6905168" y="3442578"/>
+                  </a:lnTo>
+                  <a:lnTo>
+                    <a:pt x="6827534" y="3439758"/>
+                  </a:lnTo>
+                  <a:lnTo>
+                    <a:pt x="6749900" y="3436745"/>
+                  </a:lnTo>
+                  <a:lnTo>
+                    <a:pt x="6672266" y="3433525"/>
+                  </a:lnTo>
+                  <a:lnTo>
+                    <a:pt x="6594632" y="3430085"/>
+                  </a:lnTo>
+                  <a:lnTo>
+                    <a:pt x="6516998" y="3426410"/>
+                  </a:lnTo>
+                  <a:lnTo>
+                    <a:pt x="6439364" y="3422482"/>
+                  </a:lnTo>
+                  <a:lnTo>
+                    <a:pt x="6361730" y="3418286"/>
+                  </a:lnTo>
+                  <a:lnTo>
+                    <a:pt x="6284096" y="3413802"/>
+                  </a:lnTo>
+                  <a:lnTo>
+                    <a:pt x="6206462" y="3409011"/>
+                  </a:lnTo>
+                  <a:lnTo>
+                    <a:pt x="6128827" y="3403892"/>
+                  </a:lnTo>
+                  <a:lnTo>
+                    <a:pt x="6051193" y="3398422"/>
+                  </a:lnTo>
+                  <a:lnTo>
+                    <a:pt x="5973559" y="3392578"/>
+                  </a:lnTo>
+                  <a:lnTo>
+                    <a:pt x="5895925" y="3386333"/>
+                  </a:lnTo>
+                  <a:lnTo>
+                    <a:pt x="5818291" y="3379661"/>
+                  </a:lnTo>
+                  <a:lnTo>
+                    <a:pt x="5740657" y="3372531"/>
+                  </a:lnTo>
+                  <a:lnTo>
+                    <a:pt x="5663023" y="3364914"/>
+                  </a:lnTo>
+                  <a:lnTo>
+                    <a:pt x="5585389" y="3356774"/>
+                  </a:lnTo>
+                  <a:lnTo>
+                    <a:pt x="5507755" y="3348077"/>
+                  </a:lnTo>
+                  <a:lnTo>
+                    <a:pt x="5430121" y="3338784"/>
+                  </a:lnTo>
+                  <a:lnTo>
+                    <a:pt x="5352487" y="3328855"/>
+                  </a:lnTo>
+                  <a:lnTo>
+                    <a:pt x="5274853" y="3318245"/>
+                  </a:lnTo>
+                  <a:lnTo>
+                    <a:pt x="5197219" y="3306909"/>
+                  </a:lnTo>
+                  <a:lnTo>
+                    <a:pt x="5119585" y="3294796"/>
+                  </a:lnTo>
+                  <a:lnTo>
+                    <a:pt x="5041951" y="3281854"/>
+                  </a:lnTo>
+                  <a:lnTo>
+                    <a:pt x="4964317" y="3268025"/>
+                  </a:lnTo>
+                  <a:lnTo>
+                    <a:pt x="4886683" y="3253249"/>
+                  </a:lnTo>
+                  <a:lnTo>
+                    <a:pt x="4809049" y="3237461"/>
+                  </a:lnTo>
+                  <a:lnTo>
+                    <a:pt x="4731415" y="3220591"/>
+                  </a:lnTo>
+                  <a:lnTo>
+                    <a:pt x="4653781" y="3202566"/>
+                  </a:lnTo>
+                  <a:lnTo>
+                    <a:pt x="4576147" y="3183306"/>
+                  </a:lnTo>
+                  <a:lnTo>
+                    <a:pt x="4498513" y="3162727"/>
+                  </a:lnTo>
+                  <a:lnTo>
+                    <a:pt x="4420879" y="3140738"/>
+                  </a:lnTo>
+                  <a:lnTo>
+                    <a:pt x="4343244" y="3117244"/>
+                  </a:lnTo>
+                  <a:lnTo>
+                    <a:pt x="4265610" y="3092139"/>
+                  </a:lnTo>
+                  <a:lnTo>
+                    <a:pt x="4187976" y="3065316"/>
+                  </a:lnTo>
+                  <a:lnTo>
+                    <a:pt x="4110342" y="3036655"/>
+                  </a:lnTo>
+                  <a:lnTo>
+                    <a:pt x="4032708" y="3006031"/>
+                  </a:lnTo>
+                  <a:lnTo>
+                    <a:pt x="3955074" y="2973309"/>
+                  </a:lnTo>
+                  <a:lnTo>
+                    <a:pt x="3877440" y="2938346"/>
+                  </a:lnTo>
+                  <a:lnTo>
+                    <a:pt x="3799806" y="2900988"/>
+                  </a:lnTo>
+                  <a:lnTo>
+                    <a:pt x="3722172" y="2861071"/>
+                  </a:lnTo>
+                  <a:lnTo>
+                    <a:pt x="3644538" y="2818421"/>
+                  </a:lnTo>
+                  <a:lnTo>
+                    <a:pt x="3566904" y="2772848"/>
+                  </a:lnTo>
+                  <a:lnTo>
+                    <a:pt x="3489270" y="2724154"/>
+                  </a:lnTo>
+                  <a:lnTo>
+                    <a:pt x="3411636" y="2672125"/>
+                  </a:lnTo>
+                  <a:lnTo>
+                    <a:pt x="3334002" y="2652887"/>
+                  </a:lnTo>
+                  <a:lnTo>
+                    <a:pt x="3256368" y="2650805"/>
+                  </a:lnTo>
+                  <a:lnTo>
+                    <a:pt x="3178734" y="2648718"/>
+                  </a:lnTo>
+                  <a:lnTo>
+                    <a:pt x="3101100" y="2646625"/>
+                  </a:lnTo>
+                  <a:lnTo>
+                    <a:pt x="3023466" y="2644527"/>
+                  </a:lnTo>
+                  <a:lnTo>
+                    <a:pt x="2945832" y="2642424"/>
+                  </a:lnTo>
+                  <a:lnTo>
+                    <a:pt x="2868198" y="2640316"/>
+                  </a:lnTo>
+                  <a:lnTo>
+                    <a:pt x="2790564" y="2638202"/>
+                  </a:lnTo>
+                  <a:lnTo>
+                    <a:pt x="2712930" y="2636083"/>
+                  </a:lnTo>
+                  <a:lnTo>
+                    <a:pt x="2635295" y="2633959"/>
+                  </a:lnTo>
+                  <a:lnTo>
+                    <a:pt x="2557661" y="2631829"/>
+                  </a:lnTo>
+                  <a:lnTo>
+                    <a:pt x="2480027" y="2629694"/>
+                  </a:lnTo>
+                  <a:lnTo>
+                    <a:pt x="2402393" y="2627554"/>
+                  </a:lnTo>
+                  <a:lnTo>
+                    <a:pt x="2324759" y="2625409"/>
+                  </a:lnTo>
+                  <a:lnTo>
+                    <a:pt x="2247125" y="2623258"/>
+                  </a:lnTo>
+                  <a:lnTo>
+                    <a:pt x="2169491" y="2621101"/>
+                  </a:lnTo>
+                  <a:lnTo>
+                    <a:pt x="2091857" y="2618939"/>
+                  </a:lnTo>
+                  <a:lnTo>
+                    <a:pt x="2014223" y="2616772"/>
+                  </a:lnTo>
+                  <a:lnTo>
+                    <a:pt x="1936589" y="2614600"/>
+                  </a:lnTo>
+                  <a:lnTo>
+                    <a:pt x="1858955" y="2612421"/>
+                  </a:lnTo>
+                  <a:lnTo>
+                    <a:pt x="1781321" y="2610238"/>
+                  </a:lnTo>
+                  <a:lnTo>
+                    <a:pt x="1703687" y="2608049"/>
+                  </a:lnTo>
+                  <a:lnTo>
+                    <a:pt x="1626053" y="2605854"/>
+                  </a:lnTo>
+                  <a:lnTo>
+                    <a:pt x="1548419" y="2603654"/>
+                  </a:lnTo>
+                  <a:lnTo>
+                    <a:pt x="1470785" y="2601449"/>
+                  </a:lnTo>
+                  <a:lnTo>
+                    <a:pt x="1393151" y="2599238"/>
+                  </a:lnTo>
+                  <a:lnTo>
+                    <a:pt x="1315517" y="2597021"/>
+                  </a:lnTo>
+                  <a:lnTo>
+                    <a:pt x="1237883" y="2594799"/>
+                  </a:lnTo>
+                  <a:lnTo>
+                    <a:pt x="1160249" y="2592571"/>
+                  </a:lnTo>
+                  <a:lnTo>
+                    <a:pt x="1082615" y="2590338"/>
+                  </a:lnTo>
+                  <a:lnTo>
+                    <a:pt x="1004981" y="2588099"/>
+                  </a:lnTo>
+                  <a:lnTo>
+                    <a:pt x="927346" y="2585855"/>
+                  </a:lnTo>
+                  <a:lnTo>
+                    <a:pt x="849712" y="2583605"/>
+                  </a:lnTo>
+                  <a:lnTo>
+                    <a:pt x="772078" y="2581349"/>
+                  </a:lnTo>
+                  <a:lnTo>
+                    <a:pt x="694444" y="2579087"/>
+                  </a:lnTo>
+                  <a:lnTo>
+                    <a:pt x="616810" y="2576820"/>
+                  </a:lnTo>
+                  <a:lnTo>
+                    <a:pt x="539176" y="2574548"/>
+                  </a:lnTo>
+                  <a:lnTo>
+                    <a:pt x="461542" y="2572269"/>
+                  </a:lnTo>
+                  <a:lnTo>
+                    <a:pt x="383908" y="2569985"/>
+                  </a:lnTo>
+                  <a:lnTo>
+                    <a:pt x="306274" y="2567695"/>
+                  </a:lnTo>
+                  <a:lnTo>
+                    <a:pt x="228640" y="2565400"/>
+                  </a:lnTo>
+                  <a:lnTo>
+                    <a:pt x="151006" y="2563098"/>
+                  </a:lnTo>
+                  <a:lnTo>
+                    <a:pt x="73372" y="2560791"/>
+                  </a:lnTo>
+                  <a:lnTo>
+                    <a:pt x="0" y="2558605"/>
                   </a:lnTo>
                   <a:close/>
                 </a:path>
@@ -3543,234 +3543,234 @@
           </p:nvSpPr>
           <p:spPr>
             <a:xfrm>
-              <a:off x="2522077" y="1896563"/>
-              <a:ext cx="5666413" cy="2887813"/>
+              <a:off x="2522077" y="2073503"/>
+              <a:ext cx="5666413" cy="2754281"/>
             </a:xfrm>
             <a:custGeom>
               <a:avLst/>
               <a:pathLst>
-                <a:path w="5666413" h="2887813">
+                <a:path w="5666413" h="2754281">
                   <a:moveTo>
                     <a:pt x="0" y="0"/>
                   </a:moveTo>
                   <a:lnTo>
-                    <a:pt x="76761" y="231690"/>
-                  </a:lnTo>
-                  <a:lnTo>
-                    <a:pt x="154396" y="450991"/>
-                  </a:lnTo>
-                  <a:lnTo>
-                    <a:pt x="232030" y="656234"/>
-                  </a:lnTo>
-                  <a:lnTo>
-                    <a:pt x="309664" y="848319"/>
-                  </a:lnTo>
-                  <a:lnTo>
-                    <a:pt x="387298" y="1028091"/>
-                  </a:lnTo>
-                  <a:lnTo>
-                    <a:pt x="464932" y="1196339"/>
-                  </a:lnTo>
-                  <a:lnTo>
-                    <a:pt x="542566" y="1353801"/>
-                  </a:lnTo>
-                  <a:lnTo>
-                    <a:pt x="620200" y="1501169"/>
-                  </a:lnTo>
-                  <a:lnTo>
-                    <a:pt x="697834" y="1639090"/>
-                  </a:lnTo>
-                  <a:lnTo>
-                    <a:pt x="775468" y="1768169"/>
-                  </a:lnTo>
-                  <a:lnTo>
-                    <a:pt x="853102" y="1888974"/>
-                  </a:lnTo>
-                  <a:lnTo>
-                    <a:pt x="930736" y="2002035"/>
-                  </a:lnTo>
-                  <a:lnTo>
-                    <a:pt x="1008370" y="2107847"/>
-                  </a:lnTo>
-                  <a:lnTo>
-                    <a:pt x="1086004" y="2206877"/>
-                  </a:lnTo>
-                  <a:lnTo>
-                    <a:pt x="1163638" y="2299558"/>
-                  </a:lnTo>
-                  <a:lnTo>
-                    <a:pt x="1241272" y="2386298"/>
-                  </a:lnTo>
-                  <a:lnTo>
-                    <a:pt x="1318906" y="2467477"/>
-                  </a:lnTo>
-                  <a:lnTo>
-                    <a:pt x="1396540" y="2543453"/>
-                  </a:lnTo>
-                  <a:lnTo>
-                    <a:pt x="1474174" y="2614558"/>
-                  </a:lnTo>
-                  <a:lnTo>
-                    <a:pt x="1551808" y="2681105"/>
-                  </a:lnTo>
-                  <a:lnTo>
-                    <a:pt x="1629442" y="2743385"/>
-                  </a:lnTo>
-                  <a:lnTo>
-                    <a:pt x="1707076" y="2783680"/>
-                  </a:lnTo>
-                  <a:lnTo>
-                    <a:pt x="1784710" y="2785853"/>
-                  </a:lnTo>
-                  <a:lnTo>
-                    <a:pt x="1862345" y="2788019"/>
-                  </a:lnTo>
-                  <a:lnTo>
-                    <a:pt x="1939979" y="2790181"/>
-                  </a:lnTo>
-                  <a:lnTo>
-                    <a:pt x="2017613" y="2792337"/>
-                  </a:lnTo>
-                  <a:lnTo>
-                    <a:pt x="2095247" y="2794487"/>
-                  </a:lnTo>
-                  <a:lnTo>
-                    <a:pt x="2172881" y="2796632"/>
-                  </a:lnTo>
-                  <a:lnTo>
-                    <a:pt x="2250515" y="2798772"/>
-                  </a:lnTo>
-                  <a:lnTo>
-                    <a:pt x="2328149" y="2800906"/>
-                  </a:lnTo>
-                  <a:lnTo>
-                    <a:pt x="2405783" y="2803036"/>
-                  </a:lnTo>
-                  <a:lnTo>
-                    <a:pt x="2483417" y="2805159"/>
-                  </a:lnTo>
-                  <a:lnTo>
-                    <a:pt x="2561051" y="2807278"/>
-                  </a:lnTo>
-                  <a:lnTo>
-                    <a:pt x="2638685" y="2809391"/>
-                  </a:lnTo>
-                  <a:lnTo>
-                    <a:pt x="2716319" y="2811499"/>
-                  </a:lnTo>
-                  <a:lnTo>
-                    <a:pt x="2793953" y="2813602"/>
-                  </a:lnTo>
-                  <a:lnTo>
-                    <a:pt x="2871587" y="2815699"/>
-                  </a:lnTo>
-                  <a:lnTo>
-                    <a:pt x="2949221" y="2817791"/>
-                  </a:lnTo>
-                  <a:lnTo>
-                    <a:pt x="3026855" y="2819878"/>
-                  </a:lnTo>
-                  <a:lnTo>
-                    <a:pt x="3104489" y="2821960"/>
-                  </a:lnTo>
-                  <a:lnTo>
-                    <a:pt x="3182123" y="2824036"/>
-                  </a:lnTo>
-                  <a:lnTo>
-                    <a:pt x="3259757" y="2826108"/>
-                  </a:lnTo>
-                  <a:lnTo>
-                    <a:pt x="3337391" y="2828174"/>
-                  </a:lnTo>
-                  <a:lnTo>
-                    <a:pt x="3415025" y="2830235"/>
-                  </a:lnTo>
-                  <a:lnTo>
-                    <a:pt x="3492659" y="2832290"/>
-                  </a:lnTo>
-                  <a:lnTo>
-                    <a:pt x="3570294" y="2834341"/>
-                  </a:lnTo>
-                  <a:lnTo>
-                    <a:pt x="3647928" y="2836387"/>
-                  </a:lnTo>
-                  <a:lnTo>
-                    <a:pt x="3725562" y="2838427"/>
-                  </a:lnTo>
-                  <a:lnTo>
-                    <a:pt x="3803196" y="2840462"/>
-                  </a:lnTo>
-                  <a:lnTo>
-                    <a:pt x="3880830" y="2842493"/>
-                  </a:lnTo>
-                  <a:lnTo>
-                    <a:pt x="3958464" y="2844518"/>
-                  </a:lnTo>
-                  <a:lnTo>
-                    <a:pt x="4036098" y="2846538"/>
-                  </a:lnTo>
-                  <a:lnTo>
-                    <a:pt x="4113732" y="2848553"/>
-                  </a:lnTo>
-                  <a:lnTo>
-                    <a:pt x="4191366" y="2850563"/>
-                  </a:lnTo>
-                  <a:lnTo>
-                    <a:pt x="4269000" y="2852568"/>
-                  </a:lnTo>
-                  <a:lnTo>
-                    <a:pt x="4346634" y="2854568"/>
-                  </a:lnTo>
-                  <a:lnTo>
-                    <a:pt x="4424268" y="2856563"/>
-                  </a:lnTo>
-                  <a:lnTo>
-                    <a:pt x="4501902" y="2858553"/>
-                  </a:lnTo>
-                  <a:lnTo>
-                    <a:pt x="4579536" y="2860538"/>
-                  </a:lnTo>
-                  <a:lnTo>
-                    <a:pt x="4657170" y="2862518"/>
-                  </a:lnTo>
-                  <a:lnTo>
-                    <a:pt x="4734804" y="2864493"/>
-                  </a:lnTo>
-                  <a:lnTo>
-                    <a:pt x="4812438" y="2866463"/>
-                  </a:lnTo>
-                  <a:lnTo>
-                    <a:pt x="4890072" y="2868428"/>
-                  </a:lnTo>
-                  <a:lnTo>
-                    <a:pt x="4967706" y="2870389"/>
-                  </a:lnTo>
-                  <a:lnTo>
-                    <a:pt x="5045340" y="2872344"/>
-                  </a:lnTo>
-                  <a:lnTo>
-                    <a:pt x="5122974" y="2874295"/>
-                  </a:lnTo>
-                  <a:lnTo>
-                    <a:pt x="5200608" y="2876240"/>
-                  </a:lnTo>
-                  <a:lnTo>
-                    <a:pt x="5278243" y="2878181"/>
-                  </a:lnTo>
-                  <a:lnTo>
-                    <a:pt x="5355877" y="2880117"/>
-                  </a:lnTo>
-                  <a:lnTo>
-                    <a:pt x="5433511" y="2882048"/>
-                  </a:lnTo>
-                  <a:lnTo>
-                    <a:pt x="5511145" y="2883975"/>
-                  </a:lnTo>
-                  <a:lnTo>
-                    <a:pt x="5588779" y="2885896"/>
-                  </a:lnTo>
-                  <a:lnTo>
-                    <a:pt x="5666413" y="2887813"/>
+                    <a:pt x="76761" y="220977"/>
+                  </a:lnTo>
+                  <a:lnTo>
+                    <a:pt x="154396" y="430137"/>
+                  </a:lnTo>
+                  <a:lnTo>
+                    <a:pt x="232030" y="625890"/>
+                  </a:lnTo>
+                  <a:lnTo>
+                    <a:pt x="309664" y="809093"/>
+                  </a:lnTo>
+                  <a:lnTo>
+                    <a:pt x="387298" y="980553"/>
+                  </a:lnTo>
+                  <a:lnTo>
+                    <a:pt x="464932" y="1141021"/>
+                  </a:lnTo>
+                  <a:lnTo>
+                    <a:pt x="542566" y="1291202"/>
+                  </a:lnTo>
+                  <a:lnTo>
+                    <a:pt x="620200" y="1431756"/>
+                  </a:lnTo>
+                  <a:lnTo>
+                    <a:pt x="697834" y="1563299"/>
+                  </a:lnTo>
+                  <a:lnTo>
+                    <a:pt x="775468" y="1686410"/>
+                  </a:lnTo>
+                  <a:lnTo>
+                    <a:pt x="853102" y="1801629"/>
+                  </a:lnTo>
+                  <a:lnTo>
+                    <a:pt x="930736" y="1909461"/>
+                  </a:lnTo>
+                  <a:lnTo>
+                    <a:pt x="1008370" y="2010381"/>
+                  </a:lnTo>
+                  <a:lnTo>
+                    <a:pt x="1086004" y="2104832"/>
+                  </a:lnTo>
+                  <a:lnTo>
+                    <a:pt x="1163638" y="2193227"/>
+                  </a:lnTo>
+                  <a:lnTo>
+                    <a:pt x="1241272" y="2275956"/>
+                  </a:lnTo>
+                  <a:lnTo>
+                    <a:pt x="1318906" y="2353382"/>
+                  </a:lnTo>
+                  <a:lnTo>
+                    <a:pt x="1396540" y="2425844"/>
+                  </a:lnTo>
+                  <a:lnTo>
+                    <a:pt x="1474174" y="2493662"/>
+                  </a:lnTo>
+                  <a:lnTo>
+                    <a:pt x="1551808" y="2557131"/>
+                  </a:lnTo>
+                  <a:lnTo>
+                    <a:pt x="1629442" y="2616532"/>
+                  </a:lnTo>
+                  <a:lnTo>
+                    <a:pt x="1707076" y="2654964"/>
+                  </a:lnTo>
+                  <a:lnTo>
+                    <a:pt x="1784710" y="2657036"/>
+                  </a:lnTo>
+                  <a:lnTo>
+                    <a:pt x="1862345" y="2659102"/>
+                  </a:lnTo>
+                  <a:lnTo>
+                    <a:pt x="1939979" y="2661164"/>
+                  </a:lnTo>
+                  <a:lnTo>
+                    <a:pt x="2017613" y="2663220"/>
+                  </a:lnTo>
+                  <a:lnTo>
+                    <a:pt x="2095247" y="2665271"/>
+                  </a:lnTo>
+                  <a:lnTo>
+                    <a:pt x="2172881" y="2667317"/>
+                  </a:lnTo>
+                  <a:lnTo>
+                    <a:pt x="2250515" y="2669358"/>
+                  </a:lnTo>
+                  <a:lnTo>
+                    <a:pt x="2328149" y="2671394"/>
+                  </a:lnTo>
+                  <a:lnTo>
+                    <a:pt x="2405783" y="2673424"/>
+                  </a:lnTo>
+                  <a:lnTo>
+                    <a:pt x="2483417" y="2675450"/>
+                  </a:lnTo>
+                  <a:lnTo>
+                    <a:pt x="2561051" y="2677470"/>
+                  </a:lnTo>
+                  <a:lnTo>
+                    <a:pt x="2638685" y="2679486"/>
+                  </a:lnTo>
+                  <a:lnTo>
+                    <a:pt x="2716319" y="2681496"/>
+                  </a:lnTo>
+                  <a:lnTo>
+                    <a:pt x="2793953" y="2683502"/>
+                  </a:lnTo>
+                  <a:lnTo>
+                    <a:pt x="2871587" y="2685502"/>
+                  </a:lnTo>
+                  <a:lnTo>
+                    <a:pt x="2949221" y="2687498"/>
+                  </a:lnTo>
+                  <a:lnTo>
+                    <a:pt x="3026855" y="2689488"/>
+                  </a:lnTo>
+                  <a:lnTo>
+                    <a:pt x="3104489" y="2691473"/>
+                  </a:lnTo>
+                  <a:lnTo>
+                    <a:pt x="3182123" y="2693454"/>
+                  </a:lnTo>
+                  <a:lnTo>
+                    <a:pt x="3259757" y="2695429"/>
+                  </a:lnTo>
+                  <a:lnTo>
+                    <a:pt x="3337391" y="2697400"/>
+                  </a:lnTo>
+                  <a:lnTo>
+                    <a:pt x="3415025" y="2699366"/>
+                  </a:lnTo>
+                  <a:lnTo>
+                    <a:pt x="3492659" y="2701326"/>
+                  </a:lnTo>
+                  <a:lnTo>
+                    <a:pt x="3570294" y="2703282"/>
+                  </a:lnTo>
+                  <a:lnTo>
+                    <a:pt x="3647928" y="2705233"/>
+                  </a:lnTo>
+                  <a:lnTo>
+                    <a:pt x="3725562" y="2707179"/>
+                  </a:lnTo>
+                  <a:lnTo>
+                    <a:pt x="3803196" y="2709120"/>
+                  </a:lnTo>
+                  <a:lnTo>
+                    <a:pt x="3880830" y="2711057"/>
+                  </a:lnTo>
+                  <a:lnTo>
+                    <a:pt x="3958464" y="2712988"/>
+                  </a:lnTo>
+                  <a:lnTo>
+                    <a:pt x="4036098" y="2714915"/>
+                  </a:lnTo>
+                  <a:lnTo>
+                    <a:pt x="4113732" y="2716837"/>
+                  </a:lnTo>
+                  <a:lnTo>
+                    <a:pt x="4191366" y="2718754"/>
+                  </a:lnTo>
+                  <a:lnTo>
+                    <a:pt x="4269000" y="2720666"/>
+                  </a:lnTo>
+                  <a:lnTo>
+                    <a:pt x="4346634" y="2722574"/>
+                  </a:lnTo>
+                  <a:lnTo>
+                    <a:pt x="4424268" y="2724476"/>
+                  </a:lnTo>
+                  <a:lnTo>
+                    <a:pt x="4501902" y="2726374"/>
+                  </a:lnTo>
+                  <a:lnTo>
+                    <a:pt x="4579536" y="2728268"/>
+                  </a:lnTo>
+                  <a:lnTo>
+                    <a:pt x="4657170" y="2730156"/>
+                  </a:lnTo>
+                  <a:lnTo>
+                    <a:pt x="4734804" y="2732040"/>
+                  </a:lnTo>
+                  <a:lnTo>
+                    <a:pt x="4812438" y="2733919"/>
+                  </a:lnTo>
+                  <a:lnTo>
+                    <a:pt x="4890072" y="2735793"/>
+                  </a:lnTo>
+                  <a:lnTo>
+                    <a:pt x="4967706" y="2737663"/>
+                  </a:lnTo>
+                  <a:lnTo>
+                    <a:pt x="5045340" y="2739528"/>
+                  </a:lnTo>
+                  <a:lnTo>
+                    <a:pt x="5122974" y="2741388"/>
+                  </a:lnTo>
+                  <a:lnTo>
+                    <a:pt x="5200608" y="2743244"/>
+                  </a:lnTo>
+                  <a:lnTo>
+                    <a:pt x="5278243" y="2745095"/>
+                  </a:lnTo>
+                  <a:lnTo>
+                    <a:pt x="5355877" y="2746942"/>
+                  </a:lnTo>
+                  <a:lnTo>
+                    <a:pt x="5433511" y="2748783"/>
+                  </a:lnTo>
+                  <a:lnTo>
+                    <a:pt x="5511145" y="2750621"/>
+                  </a:lnTo>
+                  <a:lnTo>
+                    <a:pt x="5588779" y="2752453"/>
+                  </a:lnTo>
+                  <a:lnTo>
+                    <a:pt x="5666413" y="2754281"/>
                   </a:lnTo>
                 </a:path>
               </a:pathLst>
@@ -3790,297 +3790,297 @@
           </p:nvSpPr>
           <p:spPr>
             <a:xfrm>
-              <a:off x="817517" y="4579213"/>
-              <a:ext cx="7370972" cy="940987"/>
+              <a:off x="817517" y="4632108"/>
+              <a:ext cx="7370972" cy="897476"/>
             </a:xfrm>
             <a:custGeom>
               <a:avLst/>
               <a:pathLst>
-                <a:path w="7370972" h="940987">
+                <a:path w="7370972" h="897476">
                   <a:moveTo>
-                    <a:pt x="7370972" y="940987"/>
+                    <a:pt x="7370972" y="897476"/>
                   </a:moveTo>
                   <a:lnTo>
-                    <a:pt x="7293338" y="939000"/>
-                  </a:lnTo>
-                  <a:lnTo>
-                    <a:pt x="7215704" y="936877"/>
-                  </a:lnTo>
-                  <a:lnTo>
-                    <a:pt x="7138070" y="934609"/>
-                  </a:lnTo>
-                  <a:lnTo>
-                    <a:pt x="7060436" y="932185"/>
-                  </a:lnTo>
-                  <a:lnTo>
-                    <a:pt x="6982802" y="929595"/>
-                  </a:lnTo>
-                  <a:lnTo>
-                    <a:pt x="6905168" y="926828"/>
-                  </a:lnTo>
-                  <a:lnTo>
-                    <a:pt x="6827534" y="923872"/>
-                  </a:lnTo>
-                  <a:lnTo>
-                    <a:pt x="6749900" y="920713"/>
-                  </a:lnTo>
-                  <a:lnTo>
-                    <a:pt x="6672266" y="917337"/>
-                  </a:lnTo>
-                  <a:lnTo>
-                    <a:pt x="6594632" y="913730"/>
-                  </a:lnTo>
-                  <a:lnTo>
-                    <a:pt x="6516998" y="909876"/>
-                  </a:lnTo>
-                  <a:lnTo>
-                    <a:pt x="6439364" y="905759"/>
-                  </a:lnTo>
-                  <a:lnTo>
-                    <a:pt x="6361730" y="901359"/>
-                  </a:lnTo>
-                  <a:lnTo>
-                    <a:pt x="6284096" y="896658"/>
-                  </a:lnTo>
-                  <a:lnTo>
-                    <a:pt x="6206462" y="891635"/>
-                  </a:lnTo>
-                  <a:lnTo>
-                    <a:pt x="6128827" y="886267"/>
-                  </a:lnTo>
-                  <a:lnTo>
-                    <a:pt x="6051193" y="880532"/>
-                  </a:lnTo>
-                  <a:lnTo>
-                    <a:pt x="5973559" y="874405"/>
-                  </a:lnTo>
-                  <a:lnTo>
-                    <a:pt x="5895925" y="867857"/>
-                  </a:lnTo>
-                  <a:lnTo>
-                    <a:pt x="5818291" y="860861"/>
-                  </a:lnTo>
-                  <a:lnTo>
-                    <a:pt x="5740657" y="853386"/>
-                  </a:lnTo>
-                  <a:lnTo>
-                    <a:pt x="5663023" y="845399"/>
-                  </a:lnTo>
-                  <a:lnTo>
-                    <a:pt x="5585389" y="836865"/>
-                  </a:lnTo>
-                  <a:lnTo>
-                    <a:pt x="5507755" y="827746"/>
-                  </a:lnTo>
-                  <a:lnTo>
-                    <a:pt x="5430121" y="818003"/>
-                  </a:lnTo>
-                  <a:lnTo>
-                    <a:pt x="5352487" y="807592"/>
-                  </a:lnTo>
-                  <a:lnTo>
-                    <a:pt x="5274853" y="796468"/>
-                  </a:lnTo>
-                  <a:lnTo>
-                    <a:pt x="5197219" y="784582"/>
-                  </a:lnTo>
-                  <a:lnTo>
-                    <a:pt x="5119585" y="771882"/>
-                  </a:lnTo>
-                  <a:lnTo>
-                    <a:pt x="5041951" y="758312"/>
-                  </a:lnTo>
-                  <a:lnTo>
-                    <a:pt x="4964317" y="743813"/>
-                  </a:lnTo>
-                  <a:lnTo>
-                    <a:pt x="4886683" y="728321"/>
-                  </a:lnTo>
-                  <a:lnTo>
-                    <a:pt x="4809049" y="711767"/>
-                  </a:lnTo>
-                  <a:lnTo>
-                    <a:pt x="4731415" y="694079"/>
-                  </a:lnTo>
-                  <a:lnTo>
-                    <a:pt x="4653781" y="675180"/>
-                  </a:lnTo>
-                  <a:lnTo>
-                    <a:pt x="4576147" y="654987"/>
-                  </a:lnTo>
-                  <a:lnTo>
-                    <a:pt x="4498513" y="633410"/>
-                  </a:lnTo>
-                  <a:lnTo>
-                    <a:pt x="4420879" y="610355"/>
-                  </a:lnTo>
-                  <a:lnTo>
-                    <a:pt x="4343244" y="585722"/>
-                  </a:lnTo>
-                  <a:lnTo>
-                    <a:pt x="4265610" y="559400"/>
-                  </a:lnTo>
-                  <a:lnTo>
-                    <a:pt x="4187976" y="531276"/>
-                  </a:lnTo>
-                  <a:lnTo>
-                    <a:pt x="4110342" y="501226"/>
-                  </a:lnTo>
-                  <a:lnTo>
-                    <a:pt x="4032708" y="469117"/>
-                  </a:lnTo>
-                  <a:lnTo>
-                    <a:pt x="3955074" y="434809"/>
-                  </a:lnTo>
-                  <a:lnTo>
-                    <a:pt x="3877440" y="398151"/>
-                  </a:lnTo>
-                  <a:lnTo>
-                    <a:pt x="3799806" y="358982"/>
-                  </a:lnTo>
-                  <a:lnTo>
-                    <a:pt x="3722172" y="317130"/>
-                  </a:lnTo>
-                  <a:lnTo>
-                    <a:pt x="3644538" y="272411"/>
-                  </a:lnTo>
-                  <a:lnTo>
-                    <a:pt x="3566904" y="224629"/>
-                  </a:lnTo>
-                  <a:lnTo>
-                    <a:pt x="3489270" y="173575"/>
-                  </a:lnTo>
-                  <a:lnTo>
-                    <a:pt x="3411636" y="119023"/>
-                  </a:lnTo>
-                  <a:lnTo>
-                    <a:pt x="3334002" y="98852"/>
-                  </a:lnTo>
-                  <a:lnTo>
-                    <a:pt x="3256368" y="96669"/>
-                  </a:lnTo>
-                  <a:lnTo>
-                    <a:pt x="3178734" y="94481"/>
-                  </a:lnTo>
-                  <a:lnTo>
-                    <a:pt x="3101100" y="92287"/>
-                  </a:lnTo>
-                  <a:lnTo>
-                    <a:pt x="3023466" y="90087"/>
-                  </a:lnTo>
-                  <a:lnTo>
-                    <a:pt x="2945832" y="87882"/>
-                  </a:lnTo>
-                  <a:lnTo>
-                    <a:pt x="2868198" y="85672"/>
-                  </a:lnTo>
-                  <a:lnTo>
-                    <a:pt x="2790564" y="83456"/>
-                  </a:lnTo>
-                  <a:lnTo>
-                    <a:pt x="2712930" y="81234"/>
-                  </a:lnTo>
-                  <a:lnTo>
-                    <a:pt x="2635295" y="79007"/>
-                  </a:lnTo>
-                  <a:lnTo>
-                    <a:pt x="2557661" y="76774"/>
-                  </a:lnTo>
-                  <a:lnTo>
-                    <a:pt x="2480027" y="74535"/>
-                  </a:lnTo>
-                  <a:lnTo>
-                    <a:pt x="2402393" y="72291"/>
-                  </a:lnTo>
-                  <a:lnTo>
-                    <a:pt x="2324759" y="70042"/>
-                  </a:lnTo>
-                  <a:lnTo>
-                    <a:pt x="2247125" y="67786"/>
-                  </a:lnTo>
-                  <a:lnTo>
-                    <a:pt x="2169491" y="65526"/>
-                  </a:lnTo>
-                  <a:lnTo>
-                    <a:pt x="2091857" y="63259"/>
-                  </a:lnTo>
-                  <a:lnTo>
-                    <a:pt x="2014223" y="60987"/>
-                  </a:lnTo>
-                  <a:lnTo>
-                    <a:pt x="1936589" y="58709"/>
-                  </a:lnTo>
-                  <a:lnTo>
-                    <a:pt x="1858955" y="56425"/>
-                  </a:lnTo>
-                  <a:lnTo>
-                    <a:pt x="1781321" y="54136"/>
-                  </a:lnTo>
-                  <a:lnTo>
-                    <a:pt x="1703687" y="51840"/>
-                  </a:lnTo>
-                  <a:lnTo>
-                    <a:pt x="1626053" y="49540"/>
-                  </a:lnTo>
-                  <a:lnTo>
-                    <a:pt x="1548419" y="47233"/>
-                  </a:lnTo>
-                  <a:lnTo>
-                    <a:pt x="1470785" y="44920"/>
-                  </a:lnTo>
-                  <a:lnTo>
-                    <a:pt x="1393151" y="42602"/>
-                  </a:lnTo>
-                  <a:lnTo>
-                    <a:pt x="1315517" y="40278"/>
-                  </a:lnTo>
-                  <a:lnTo>
-                    <a:pt x="1237883" y="37948"/>
-                  </a:lnTo>
-                  <a:lnTo>
-                    <a:pt x="1160249" y="35613"/>
-                  </a:lnTo>
-                  <a:lnTo>
-                    <a:pt x="1082615" y="33271"/>
-                  </a:lnTo>
-                  <a:lnTo>
-                    <a:pt x="1004981" y="30924"/>
-                  </a:lnTo>
-                  <a:lnTo>
-                    <a:pt x="927346" y="28570"/>
-                  </a:lnTo>
-                  <a:lnTo>
-                    <a:pt x="849712" y="26211"/>
-                  </a:lnTo>
-                  <a:lnTo>
-                    <a:pt x="772078" y="23846"/>
-                  </a:lnTo>
-                  <a:lnTo>
-                    <a:pt x="694444" y="21475"/>
-                  </a:lnTo>
-                  <a:lnTo>
-                    <a:pt x="616810" y="19098"/>
-                  </a:lnTo>
-                  <a:lnTo>
-                    <a:pt x="539176" y="16715"/>
-                  </a:lnTo>
-                  <a:lnTo>
-                    <a:pt x="461542" y="14326"/>
-                  </a:lnTo>
-                  <a:lnTo>
-                    <a:pt x="383908" y="11931"/>
-                  </a:lnTo>
-                  <a:lnTo>
-                    <a:pt x="306274" y="9530"/>
-                  </a:lnTo>
-                  <a:lnTo>
-                    <a:pt x="228640" y="7123"/>
-                  </a:lnTo>
-                  <a:lnTo>
-                    <a:pt x="151006" y="4710"/>
-                  </a:lnTo>
-                  <a:lnTo>
-                    <a:pt x="73372" y="2291"/>
+                    <a:pt x="7293338" y="895581"/>
+                  </a:lnTo>
+                  <a:lnTo>
+                    <a:pt x="7215704" y="893556"/>
+                  </a:lnTo>
+                  <a:lnTo>
+                    <a:pt x="7138070" y="891393"/>
+                  </a:lnTo>
+                  <a:lnTo>
+                    <a:pt x="7060436" y="889081"/>
+                  </a:lnTo>
+                  <a:lnTo>
+                    <a:pt x="6982802" y="886611"/>
+                  </a:lnTo>
+                  <a:lnTo>
+                    <a:pt x="6905168" y="883972"/>
+                  </a:lnTo>
+                  <a:lnTo>
+                    <a:pt x="6827534" y="881152"/>
+                  </a:lnTo>
+                  <a:lnTo>
+                    <a:pt x="6749900" y="878139"/>
+                  </a:lnTo>
+                  <a:lnTo>
+                    <a:pt x="6672266" y="874920"/>
+                  </a:lnTo>
+                  <a:lnTo>
+                    <a:pt x="6594632" y="871480"/>
+                  </a:lnTo>
+                  <a:lnTo>
+                    <a:pt x="6516998" y="867804"/>
+                  </a:lnTo>
+                  <a:lnTo>
+                    <a:pt x="6439364" y="863877"/>
+                  </a:lnTo>
+                  <a:lnTo>
+                    <a:pt x="6361730" y="859680"/>
+                  </a:lnTo>
+                  <a:lnTo>
+                    <a:pt x="6284096" y="855197"/>
+                  </a:lnTo>
+                  <a:lnTo>
+                    <a:pt x="6206462" y="850406"/>
+                  </a:lnTo>
+                  <a:lnTo>
+                    <a:pt x="6128827" y="845287"/>
+                  </a:lnTo>
+                  <a:lnTo>
+                    <a:pt x="6051193" y="839817"/>
+                  </a:lnTo>
+                  <a:lnTo>
+                    <a:pt x="5973559" y="833972"/>
+                  </a:lnTo>
+                  <a:lnTo>
+                    <a:pt x="5895925" y="827728"/>
+                  </a:lnTo>
+                  <a:lnTo>
+                    <a:pt x="5818291" y="821055"/>
+                  </a:lnTo>
+                  <a:lnTo>
+                    <a:pt x="5740657" y="813926"/>
+                  </a:lnTo>
+                  <a:lnTo>
+                    <a:pt x="5663023" y="806308"/>
+                  </a:lnTo>
+                  <a:lnTo>
+                    <a:pt x="5585389" y="798168"/>
+                  </a:lnTo>
+                  <a:lnTo>
+                    <a:pt x="5507755" y="789471"/>
+                  </a:lnTo>
+                  <a:lnTo>
+                    <a:pt x="5430121" y="780178"/>
+                  </a:lnTo>
+                  <a:lnTo>
+                    <a:pt x="5352487" y="770249"/>
+                  </a:lnTo>
+                  <a:lnTo>
+                    <a:pt x="5274853" y="759640"/>
+                  </a:lnTo>
+                  <a:lnTo>
+                    <a:pt x="5197219" y="748303"/>
+                  </a:lnTo>
+                  <a:lnTo>
+                    <a:pt x="5119585" y="736191"/>
+                  </a:lnTo>
+                  <a:lnTo>
+                    <a:pt x="5041951" y="723248"/>
+                  </a:lnTo>
+                  <a:lnTo>
+                    <a:pt x="4964317" y="709419"/>
+                  </a:lnTo>
+                  <a:lnTo>
+                    <a:pt x="4886683" y="694643"/>
+                  </a:lnTo>
+                  <a:lnTo>
+                    <a:pt x="4809049" y="678855"/>
+                  </a:lnTo>
+                  <a:lnTo>
+                    <a:pt x="4731415" y="661985"/>
+                  </a:lnTo>
+                  <a:lnTo>
+                    <a:pt x="4653781" y="643960"/>
+                  </a:lnTo>
+                  <a:lnTo>
+                    <a:pt x="4576147" y="624700"/>
+                  </a:lnTo>
+                  <a:lnTo>
+                    <a:pt x="4498513" y="604121"/>
+                  </a:lnTo>
+                  <a:lnTo>
+                    <a:pt x="4420879" y="582133"/>
+                  </a:lnTo>
+                  <a:lnTo>
+                    <a:pt x="4343244" y="558638"/>
+                  </a:lnTo>
+                  <a:lnTo>
+                    <a:pt x="4265610" y="533534"/>
+                  </a:lnTo>
+                  <a:lnTo>
+                    <a:pt x="4187976" y="506710"/>
+                  </a:lnTo>
+                  <a:lnTo>
+                    <a:pt x="4110342" y="478049"/>
+                  </a:lnTo>
+                  <a:lnTo>
+                    <a:pt x="4032708" y="447425"/>
+                  </a:lnTo>
+                  <a:lnTo>
+                    <a:pt x="3955074" y="414704"/>
+                  </a:lnTo>
+                  <a:lnTo>
+                    <a:pt x="3877440" y="379741"/>
+                  </a:lnTo>
+                  <a:lnTo>
+                    <a:pt x="3799806" y="342383"/>
+                  </a:lnTo>
+                  <a:lnTo>
+                    <a:pt x="3722172" y="302466"/>
+                  </a:lnTo>
+                  <a:lnTo>
+                    <a:pt x="3644538" y="259815"/>
+                  </a:lnTo>
+                  <a:lnTo>
+                    <a:pt x="3566904" y="214243"/>
+                  </a:lnTo>
+                  <a:lnTo>
+                    <a:pt x="3489270" y="165549"/>
+                  </a:lnTo>
+                  <a:lnTo>
+                    <a:pt x="3411636" y="113520"/>
+                  </a:lnTo>
+                  <a:lnTo>
+                    <a:pt x="3334002" y="94282"/>
+                  </a:lnTo>
+                  <a:lnTo>
+                    <a:pt x="3256368" y="92199"/>
+                  </a:lnTo>
+                  <a:lnTo>
+                    <a:pt x="3178734" y="90112"/>
+                  </a:lnTo>
+                  <a:lnTo>
+                    <a:pt x="3101100" y="88019"/>
+                  </a:lnTo>
+                  <a:lnTo>
+                    <a:pt x="3023466" y="85922"/>
+                  </a:lnTo>
+                  <a:lnTo>
+                    <a:pt x="2945832" y="83819"/>
+                  </a:lnTo>
+                  <a:lnTo>
+                    <a:pt x="2868198" y="81710"/>
+                  </a:lnTo>
+                  <a:lnTo>
+                    <a:pt x="2790564" y="79597"/>
+                  </a:lnTo>
+                  <a:lnTo>
+                    <a:pt x="2712930" y="77478"/>
+                  </a:lnTo>
+                  <a:lnTo>
+                    <a:pt x="2635295" y="75353"/>
+                  </a:lnTo>
+                  <a:lnTo>
+                    <a:pt x="2557661" y="73224"/>
+                  </a:lnTo>
+                  <a:lnTo>
+                    <a:pt x="2480027" y="71089"/>
+                  </a:lnTo>
+                  <a:lnTo>
+                    <a:pt x="2402393" y="68949"/>
+                  </a:lnTo>
+                  <a:lnTo>
+                    <a:pt x="2324759" y="66803"/>
+                  </a:lnTo>
+                  <a:lnTo>
+                    <a:pt x="2247125" y="64652"/>
+                  </a:lnTo>
+                  <a:lnTo>
+                    <a:pt x="2169491" y="62496"/>
+                  </a:lnTo>
+                  <a:lnTo>
+                    <a:pt x="2091857" y="60334"/>
+                  </a:lnTo>
+                  <a:lnTo>
+                    <a:pt x="2014223" y="58167"/>
+                  </a:lnTo>
+                  <a:lnTo>
+                    <a:pt x="1936589" y="55994"/>
+                  </a:lnTo>
+                  <a:lnTo>
+                    <a:pt x="1858955" y="53816"/>
+                  </a:lnTo>
+                  <a:lnTo>
+                    <a:pt x="1781321" y="51632"/>
+                  </a:lnTo>
+                  <a:lnTo>
+                    <a:pt x="1703687" y="49443"/>
+                  </a:lnTo>
+                  <a:lnTo>
+                    <a:pt x="1626053" y="47249"/>
+                  </a:lnTo>
+                  <a:lnTo>
+                    <a:pt x="1548419" y="45049"/>
+                  </a:lnTo>
+                  <a:lnTo>
+                    <a:pt x="1470785" y="42843"/>
+                  </a:lnTo>
+                  <a:lnTo>
+                    <a:pt x="1393151" y="40632"/>
+                  </a:lnTo>
+                  <a:lnTo>
+                    <a:pt x="1315517" y="38416"/>
+                  </a:lnTo>
+                  <a:lnTo>
+                    <a:pt x="1237883" y="36194"/>
+                  </a:lnTo>
+                  <a:lnTo>
+                    <a:pt x="1160249" y="33966"/>
+                  </a:lnTo>
+                  <a:lnTo>
+                    <a:pt x="1082615" y="31733"/>
+                  </a:lnTo>
+                  <a:lnTo>
+                    <a:pt x="1004981" y="29494"/>
+                  </a:lnTo>
+                  <a:lnTo>
+                    <a:pt x="927346" y="27249"/>
+                  </a:lnTo>
+                  <a:lnTo>
+                    <a:pt x="849712" y="24999"/>
+                  </a:lnTo>
+                  <a:lnTo>
+                    <a:pt x="772078" y="22743"/>
+                  </a:lnTo>
+                  <a:lnTo>
+                    <a:pt x="694444" y="20482"/>
+                  </a:lnTo>
+                  <a:lnTo>
+                    <a:pt x="616810" y="18215"/>
+                  </a:lnTo>
+                  <a:lnTo>
+                    <a:pt x="539176" y="15942"/>
+                  </a:lnTo>
+                  <a:lnTo>
+                    <a:pt x="461542" y="13664"/>
+                  </a:lnTo>
+                  <a:lnTo>
+                    <a:pt x="383908" y="11379"/>
+                  </a:lnTo>
+                  <a:lnTo>
+                    <a:pt x="306274" y="9090"/>
+                  </a:lnTo>
+                  <a:lnTo>
+                    <a:pt x="228640" y="6794"/>
+                  </a:lnTo>
+                  <a:lnTo>
+                    <a:pt x="151006" y="4493"/>
+                  </a:lnTo>
+                  <a:lnTo>
+                    <a:pt x="73372" y="2185"/>
                   </a:lnTo>
                   <a:lnTo>
                     <a:pt x="0" y="0"/>
@@ -4103,297 +4103,297 @@
           </p:nvSpPr>
           <p:spPr>
             <a:xfrm>
-              <a:off x="962946" y="1896563"/>
-              <a:ext cx="7225544" cy="3503698"/>
+              <a:off x="962946" y="2073503"/>
+              <a:ext cx="7225544" cy="3341688"/>
             </a:xfrm>
             <a:custGeom>
               <a:avLst/>
               <a:pathLst>
-                <a:path w="7225544" h="3503698">
+                <a:path w="7225544" h="3341688">
                   <a:moveTo>
                     <a:pt x="0" y="0"/>
                   </a:moveTo>
                   <a:lnTo>
-                    <a:pt x="5577" y="9155"/>
-                  </a:lnTo>
-                  <a:lnTo>
-                    <a:pt x="83212" y="132281"/>
-                  </a:lnTo>
-                  <a:lnTo>
-                    <a:pt x="160846" y="251246"/>
-                  </a:lnTo>
-                  <a:lnTo>
-                    <a:pt x="238480" y="366191"/>
-                  </a:lnTo>
-                  <a:lnTo>
-                    <a:pt x="316114" y="477251"/>
-                  </a:lnTo>
-                  <a:lnTo>
-                    <a:pt x="393748" y="584558"/>
-                  </a:lnTo>
-                  <a:lnTo>
-                    <a:pt x="471382" y="688239"/>
-                  </a:lnTo>
-                  <a:lnTo>
-                    <a:pt x="549016" y="788417"/>
-                  </a:lnTo>
-                  <a:lnTo>
-                    <a:pt x="626650" y="885209"/>
-                  </a:lnTo>
-                  <a:lnTo>
-                    <a:pt x="704284" y="978729"/>
-                  </a:lnTo>
-                  <a:lnTo>
-                    <a:pt x="781918" y="1069090"/>
-                  </a:lnTo>
-                  <a:lnTo>
-                    <a:pt x="859552" y="1156397"/>
-                  </a:lnTo>
-                  <a:lnTo>
-                    <a:pt x="937186" y="1240754"/>
-                  </a:lnTo>
-                  <a:lnTo>
-                    <a:pt x="1014820" y="1322260"/>
-                  </a:lnTo>
-                  <a:lnTo>
-                    <a:pt x="1092454" y="1401011"/>
-                  </a:lnTo>
-                  <a:lnTo>
-                    <a:pt x="1170088" y="1477101"/>
-                  </a:lnTo>
-                  <a:lnTo>
-                    <a:pt x="1247722" y="1550620"/>
-                  </a:lnTo>
-                  <a:lnTo>
-                    <a:pt x="1325356" y="1621655"/>
-                  </a:lnTo>
-                  <a:lnTo>
-                    <a:pt x="1402990" y="1690289"/>
-                  </a:lnTo>
-                  <a:lnTo>
-                    <a:pt x="1480624" y="1756603"/>
-                  </a:lnTo>
-                  <a:lnTo>
-                    <a:pt x="1558258" y="1820677"/>
-                  </a:lnTo>
-                  <a:lnTo>
-                    <a:pt x="1635892" y="1882585"/>
-                  </a:lnTo>
-                  <a:lnTo>
-                    <a:pt x="1713526" y="1942401"/>
-                  </a:lnTo>
-                  <a:lnTo>
-                    <a:pt x="1791161" y="2000196"/>
-                  </a:lnTo>
-                  <a:lnTo>
-                    <a:pt x="1868795" y="2056038"/>
-                  </a:lnTo>
-                  <a:lnTo>
-                    <a:pt x="1946429" y="2109993"/>
-                  </a:lnTo>
-                  <a:lnTo>
-                    <a:pt x="2024063" y="2162124"/>
-                  </a:lnTo>
-                  <a:lnTo>
-                    <a:pt x="2101697" y="2212494"/>
-                  </a:lnTo>
-                  <a:lnTo>
-                    <a:pt x="2179331" y="2261161"/>
-                  </a:lnTo>
-                  <a:lnTo>
-                    <a:pt x="2256965" y="2308184"/>
-                  </a:lnTo>
-                  <a:lnTo>
-                    <a:pt x="2334599" y="2353618"/>
-                  </a:lnTo>
-                  <a:lnTo>
-                    <a:pt x="2412233" y="2397517"/>
-                  </a:lnTo>
-                  <a:lnTo>
-                    <a:pt x="2489867" y="2439931"/>
-                  </a:lnTo>
-                  <a:lnTo>
-                    <a:pt x="2567501" y="2480913"/>
-                  </a:lnTo>
-                  <a:lnTo>
-                    <a:pt x="2645135" y="2520510"/>
-                  </a:lnTo>
-                  <a:lnTo>
-                    <a:pt x="2722769" y="2558768"/>
-                  </a:lnTo>
-                  <a:lnTo>
-                    <a:pt x="2800403" y="2595734"/>
-                  </a:lnTo>
-                  <a:lnTo>
-                    <a:pt x="2878037" y="2631451"/>
-                  </a:lnTo>
-                  <a:lnTo>
-                    <a:pt x="2955671" y="2665960"/>
-                  </a:lnTo>
-                  <a:lnTo>
-                    <a:pt x="3033305" y="2699304"/>
-                  </a:lnTo>
-                  <a:lnTo>
-                    <a:pt x="3110939" y="2731520"/>
-                  </a:lnTo>
-                  <a:lnTo>
-                    <a:pt x="3188573" y="2762648"/>
-                  </a:lnTo>
-                  <a:lnTo>
-                    <a:pt x="3266207" y="2792724"/>
-                  </a:lnTo>
-                  <a:lnTo>
-                    <a:pt x="3343841" y="2821784"/>
-                  </a:lnTo>
-                  <a:lnTo>
-                    <a:pt x="3421475" y="2849861"/>
-                  </a:lnTo>
-                  <a:lnTo>
-                    <a:pt x="3499109" y="2876990"/>
-                  </a:lnTo>
-                  <a:lnTo>
-                    <a:pt x="3576744" y="2903202"/>
-                  </a:lnTo>
-                  <a:lnTo>
-                    <a:pt x="3654378" y="2928528"/>
-                  </a:lnTo>
-                  <a:lnTo>
-                    <a:pt x="3732012" y="2952998"/>
-                  </a:lnTo>
-                  <a:lnTo>
-                    <a:pt x="3809646" y="2976642"/>
-                  </a:lnTo>
-                  <a:lnTo>
-                    <a:pt x="3887280" y="2999486"/>
-                  </a:lnTo>
-                  <a:lnTo>
-                    <a:pt x="3964914" y="3021558"/>
-                  </a:lnTo>
-                  <a:lnTo>
-                    <a:pt x="4042548" y="3042885"/>
-                  </a:lnTo>
-                  <a:lnTo>
-                    <a:pt x="4120182" y="3063491"/>
-                  </a:lnTo>
-                  <a:lnTo>
-                    <a:pt x="4197816" y="3083400"/>
-                  </a:lnTo>
-                  <a:lnTo>
-                    <a:pt x="4275450" y="3102637"/>
-                  </a:lnTo>
-                  <a:lnTo>
-                    <a:pt x="4353084" y="3121223"/>
-                  </a:lnTo>
-                  <a:lnTo>
-                    <a:pt x="4430718" y="3139182"/>
-                  </a:lnTo>
-                  <a:lnTo>
-                    <a:pt x="4508352" y="3156533"/>
-                  </a:lnTo>
-                  <a:lnTo>
-                    <a:pt x="4585986" y="3173299"/>
-                  </a:lnTo>
-                  <a:lnTo>
-                    <a:pt x="4663620" y="3189497"/>
-                  </a:lnTo>
-                  <a:lnTo>
-                    <a:pt x="4741254" y="3205149"/>
-                  </a:lnTo>
-                  <a:lnTo>
-                    <a:pt x="4818888" y="3220271"/>
-                  </a:lnTo>
-                  <a:lnTo>
-                    <a:pt x="4896522" y="3234882"/>
-                  </a:lnTo>
-                  <a:lnTo>
-                    <a:pt x="4974156" y="3249000"/>
-                  </a:lnTo>
-                  <a:lnTo>
-                    <a:pt x="5051790" y="3262640"/>
-                  </a:lnTo>
-                  <a:lnTo>
-                    <a:pt x="5129424" y="3275820"/>
-                  </a:lnTo>
-                  <a:lnTo>
-                    <a:pt x="5207058" y="3288554"/>
-                  </a:lnTo>
-                  <a:lnTo>
-                    <a:pt x="5284693" y="3300858"/>
-                  </a:lnTo>
-                  <a:lnTo>
-                    <a:pt x="5362327" y="3312746"/>
-                  </a:lnTo>
-                  <a:lnTo>
-                    <a:pt x="5439961" y="3324232"/>
-                  </a:lnTo>
-                  <a:lnTo>
-                    <a:pt x="5517595" y="3335330"/>
-                  </a:lnTo>
-                  <a:lnTo>
-                    <a:pt x="5595229" y="3346053"/>
-                  </a:lnTo>
-                  <a:lnTo>
-                    <a:pt x="5672863" y="3356414"/>
-                  </a:lnTo>
-                  <a:lnTo>
-                    <a:pt x="5750497" y="3366425"/>
-                  </a:lnTo>
-                  <a:lnTo>
-                    <a:pt x="5828131" y="3376097"/>
-                  </a:lnTo>
-                  <a:lnTo>
-                    <a:pt x="5905765" y="3385442"/>
-                  </a:lnTo>
-                  <a:lnTo>
-                    <a:pt x="5983399" y="3394472"/>
-                  </a:lnTo>
-                  <a:lnTo>
-                    <a:pt x="6061033" y="3403196"/>
-                  </a:lnTo>
-                  <a:lnTo>
-                    <a:pt x="6138667" y="3411626"/>
-                  </a:lnTo>
-                  <a:lnTo>
-                    <a:pt x="6216301" y="3419771"/>
-                  </a:lnTo>
-                  <a:lnTo>
-                    <a:pt x="6293935" y="3427640"/>
-                  </a:lnTo>
-                  <a:lnTo>
-                    <a:pt x="6371569" y="3435244"/>
-                  </a:lnTo>
-                  <a:lnTo>
-                    <a:pt x="6449203" y="3442591"/>
-                  </a:lnTo>
-                  <a:lnTo>
-                    <a:pt x="6526837" y="3449689"/>
-                  </a:lnTo>
-                  <a:lnTo>
-                    <a:pt x="6604471" y="3456548"/>
-                  </a:lnTo>
-                  <a:lnTo>
-                    <a:pt x="6682105" y="3463174"/>
-                  </a:lnTo>
-                  <a:lnTo>
-                    <a:pt x="6759739" y="3469577"/>
-                  </a:lnTo>
-                  <a:lnTo>
-                    <a:pt x="6837373" y="3475764"/>
-                  </a:lnTo>
-                  <a:lnTo>
-                    <a:pt x="6915007" y="3481741"/>
-                  </a:lnTo>
-                  <a:lnTo>
-                    <a:pt x="6992642" y="3487516"/>
-                  </a:lnTo>
-                  <a:lnTo>
-                    <a:pt x="7070276" y="3493096"/>
-                  </a:lnTo>
-                  <a:lnTo>
-                    <a:pt x="7147910" y="3498488"/>
-                  </a:lnTo>
-                  <a:lnTo>
-                    <a:pt x="7225544" y="3503698"/>
+                    <a:pt x="5577" y="8732"/>
+                  </a:lnTo>
+                  <a:lnTo>
+                    <a:pt x="83212" y="126165"/>
+                  </a:lnTo>
+                  <a:lnTo>
+                    <a:pt x="160846" y="239629"/>
+                  </a:lnTo>
+                  <a:lnTo>
+                    <a:pt x="238480" y="349258"/>
+                  </a:lnTo>
+                  <a:lnTo>
+                    <a:pt x="316114" y="455183"/>
+                  </a:lnTo>
+                  <a:lnTo>
+                    <a:pt x="393748" y="557529"/>
+                  </a:lnTo>
+                  <a:lnTo>
+                    <a:pt x="471382" y="656415"/>
+                  </a:lnTo>
+                  <a:lnTo>
+                    <a:pt x="549016" y="751960"/>
+                  </a:lnTo>
+                  <a:lnTo>
+                    <a:pt x="626650" y="844277"/>
+                  </a:lnTo>
+                  <a:lnTo>
+                    <a:pt x="704284" y="933473"/>
+                  </a:lnTo>
+                  <a:lnTo>
+                    <a:pt x="781918" y="1019656"/>
+                  </a:lnTo>
+                  <a:lnTo>
+                    <a:pt x="859552" y="1102926"/>
+                  </a:lnTo>
+                  <a:lnTo>
+                    <a:pt x="937186" y="1183382"/>
+                  </a:lnTo>
+                  <a:lnTo>
+                    <a:pt x="1014820" y="1261119"/>
+                  </a:lnTo>
+                  <a:lnTo>
+                    <a:pt x="1092454" y="1336229"/>
+                  </a:lnTo>
+                  <a:lnTo>
+                    <a:pt x="1170088" y="1408801"/>
+                  </a:lnTo>
+                  <a:lnTo>
+                    <a:pt x="1247722" y="1478920"/>
+                  </a:lnTo>
+                  <a:lnTo>
+                    <a:pt x="1325356" y="1546670"/>
+                  </a:lnTo>
+                  <a:lnTo>
+                    <a:pt x="1402990" y="1612130"/>
+                  </a:lnTo>
+                  <a:lnTo>
+                    <a:pt x="1480624" y="1675379"/>
+                  </a:lnTo>
+                  <a:lnTo>
+                    <a:pt x="1558258" y="1736489"/>
+                  </a:lnTo>
+                  <a:lnTo>
+                    <a:pt x="1635892" y="1795535"/>
+                  </a:lnTo>
+                  <a:lnTo>
+                    <a:pt x="1713526" y="1852586"/>
+                  </a:lnTo>
+                  <a:lnTo>
+                    <a:pt x="1791161" y="1907708"/>
+                  </a:lnTo>
+                  <a:lnTo>
+                    <a:pt x="1868795" y="1960968"/>
+                  </a:lnTo>
+                  <a:lnTo>
+                    <a:pt x="1946429" y="2012427"/>
+                  </a:lnTo>
+                  <a:lnTo>
+                    <a:pt x="2024063" y="2062148"/>
+                  </a:lnTo>
+                  <a:lnTo>
+                    <a:pt x="2101697" y="2110189"/>
+                  </a:lnTo>
+                  <a:lnTo>
+                    <a:pt x="2179331" y="2156606"/>
+                  </a:lnTo>
+                  <a:lnTo>
+                    <a:pt x="2256965" y="2201455"/>
+                  </a:lnTo>
+                  <a:lnTo>
+                    <a:pt x="2334599" y="2244788"/>
+                  </a:lnTo>
+                  <a:lnTo>
+                    <a:pt x="2412233" y="2286656"/>
+                  </a:lnTo>
+                  <a:lnTo>
+                    <a:pt x="2489867" y="2327110"/>
+                  </a:lnTo>
+                  <a:lnTo>
+                    <a:pt x="2567501" y="2366197"/>
+                  </a:lnTo>
+                  <a:lnTo>
+                    <a:pt x="2645135" y="2403962"/>
+                  </a:lnTo>
+                  <a:lnTo>
+                    <a:pt x="2722769" y="2440452"/>
+                  </a:lnTo>
+                  <a:lnTo>
+                    <a:pt x="2800403" y="2475708"/>
+                  </a:lnTo>
+                  <a:lnTo>
+                    <a:pt x="2878037" y="2509773"/>
+                  </a:lnTo>
+                  <a:lnTo>
+                    <a:pt x="2955671" y="2542687"/>
+                  </a:lnTo>
+                  <a:lnTo>
+                    <a:pt x="3033305" y="2574489"/>
+                  </a:lnTo>
+                  <a:lnTo>
+                    <a:pt x="3110939" y="2605216"/>
+                  </a:lnTo>
+                  <a:lnTo>
+                    <a:pt x="3188573" y="2634904"/>
+                  </a:lnTo>
+                  <a:lnTo>
+                    <a:pt x="3266207" y="2663589"/>
+                  </a:lnTo>
+                  <a:lnTo>
+                    <a:pt x="3343841" y="2691305"/>
+                  </a:lnTo>
+                  <a:lnTo>
+                    <a:pt x="3421475" y="2718085"/>
+                  </a:lnTo>
+                  <a:lnTo>
+                    <a:pt x="3499109" y="2743959"/>
+                  </a:lnTo>
+                  <a:lnTo>
+                    <a:pt x="3576744" y="2768959"/>
+                  </a:lnTo>
+                  <a:lnTo>
+                    <a:pt x="3654378" y="2793114"/>
+                  </a:lnTo>
+                  <a:lnTo>
+                    <a:pt x="3732012" y="2816453"/>
+                  </a:lnTo>
+                  <a:lnTo>
+                    <a:pt x="3809646" y="2839003"/>
+                  </a:lnTo>
+                  <a:lnTo>
+                    <a:pt x="3887280" y="2860791"/>
+                  </a:lnTo>
+                  <a:lnTo>
+                    <a:pt x="3964914" y="2881843"/>
+                  </a:lnTo>
+                  <a:lnTo>
+                    <a:pt x="4042548" y="2902183"/>
+                  </a:lnTo>
+                  <a:lnTo>
+                    <a:pt x="4120182" y="2921836"/>
+                  </a:lnTo>
+                  <a:lnTo>
+                    <a:pt x="4197816" y="2940825"/>
+                  </a:lnTo>
+                  <a:lnTo>
+                    <a:pt x="4275450" y="2959172"/>
+                  </a:lnTo>
+                  <a:lnTo>
+                    <a:pt x="4353084" y="2976899"/>
+                  </a:lnTo>
+                  <a:lnTo>
+                    <a:pt x="4430718" y="2994027"/>
+                  </a:lnTo>
+                  <a:lnTo>
+                    <a:pt x="4508352" y="3010577"/>
+                  </a:lnTo>
+                  <a:lnTo>
+                    <a:pt x="4585986" y="3026567"/>
+                  </a:lnTo>
+                  <a:lnTo>
+                    <a:pt x="4663620" y="3042016"/>
+                  </a:lnTo>
+                  <a:lnTo>
+                    <a:pt x="4741254" y="3056944"/>
+                  </a:lnTo>
+                  <a:lnTo>
+                    <a:pt x="4818888" y="3071367"/>
+                  </a:lnTo>
+                  <a:lnTo>
+                    <a:pt x="4896522" y="3085303"/>
+                  </a:lnTo>
+                  <a:lnTo>
+                    <a:pt x="4974156" y="3098767"/>
+                  </a:lnTo>
+                  <a:lnTo>
+                    <a:pt x="5051790" y="3111777"/>
+                  </a:lnTo>
+                  <a:lnTo>
+                    <a:pt x="5129424" y="3124347"/>
+                  </a:lnTo>
+                  <a:lnTo>
+                    <a:pt x="5207058" y="3136492"/>
+                  </a:lnTo>
+                  <a:lnTo>
+                    <a:pt x="5284693" y="3148227"/>
+                  </a:lnTo>
+                  <a:lnTo>
+                    <a:pt x="5362327" y="3159566"/>
+                  </a:lnTo>
+                  <a:lnTo>
+                    <a:pt x="5439961" y="3170521"/>
+                  </a:lnTo>
+                  <a:lnTo>
+                    <a:pt x="5517595" y="3181106"/>
+                  </a:lnTo>
+                  <a:lnTo>
+                    <a:pt x="5595229" y="3191333"/>
+                  </a:lnTo>
+                  <a:lnTo>
+                    <a:pt x="5672863" y="3201215"/>
+                  </a:lnTo>
+                  <a:lnTo>
+                    <a:pt x="5750497" y="3210762"/>
+                  </a:lnTo>
+                  <a:lnTo>
+                    <a:pt x="5828131" y="3219987"/>
+                  </a:lnTo>
+                  <a:lnTo>
+                    <a:pt x="5905765" y="3228901"/>
+                  </a:lnTo>
+                  <a:lnTo>
+                    <a:pt x="5983399" y="3237513"/>
+                  </a:lnTo>
+                  <a:lnTo>
+                    <a:pt x="6061033" y="3245834"/>
+                  </a:lnTo>
+                  <a:lnTo>
+                    <a:pt x="6138667" y="3253874"/>
+                  </a:lnTo>
+                  <a:lnTo>
+                    <a:pt x="6216301" y="3261642"/>
+                  </a:lnTo>
+                  <a:lnTo>
+                    <a:pt x="6293935" y="3269148"/>
+                  </a:lnTo>
+                  <a:lnTo>
+                    <a:pt x="6371569" y="3276400"/>
+                  </a:lnTo>
+                  <a:lnTo>
+                    <a:pt x="6449203" y="3283407"/>
+                  </a:lnTo>
+                  <a:lnTo>
+                    <a:pt x="6526837" y="3290177"/>
+                  </a:lnTo>
+                  <a:lnTo>
+                    <a:pt x="6604471" y="3296718"/>
+                  </a:lnTo>
+                  <a:lnTo>
+                    <a:pt x="6682105" y="3303038"/>
+                  </a:lnTo>
+                  <a:lnTo>
+                    <a:pt x="6759739" y="3309145"/>
+                  </a:lnTo>
+                  <a:lnTo>
+                    <a:pt x="6837373" y="3315046"/>
+                  </a:lnTo>
+                  <a:lnTo>
+                    <a:pt x="6915007" y="3320746"/>
+                  </a:lnTo>
+                  <a:lnTo>
+                    <a:pt x="6992642" y="3326255"/>
+                  </a:lnTo>
+                  <a:lnTo>
+                    <a:pt x="7070276" y="3331577"/>
+                  </a:lnTo>
+                  <a:lnTo>
+                    <a:pt x="7147910" y="3336719"/>
+                  </a:lnTo>
+                  <a:lnTo>
+                    <a:pt x="7225544" y="3341688"/>
                   </a:lnTo>
                 </a:path>
               </a:pathLst>
@@ -4422,7 +4422,7 @@
           </p:nvSpPr>
           <p:spPr>
             <a:xfrm>
-              <a:off x="817517" y="4679530"/>
+              <a:off x="817517" y="4727786"/>
               <a:ext cx="7799693" cy="0"/>
             </a:xfrm>
             <a:custGeom>
@@ -4465,15 +4465,15 @@
           </p:nvSpPr>
           <p:spPr>
             <a:xfrm>
-              <a:off x="4203673" y="1896563"/>
-              <a:ext cx="0" cy="3826579"/>
+              <a:off x="4203673" y="2073503"/>
+              <a:ext cx="0" cy="3649639"/>
             </a:xfrm>
             <a:custGeom>
               <a:avLst/>
               <a:pathLst>
-                <a:path w="0" h="3826579">
+                <a:path w="0" h="3649639">
                   <a:moveTo>
-                    <a:pt x="0" y="3826579"/>
+                    <a:pt x="0" y="3649639"/>
                   </a:moveTo>
                   <a:lnTo>
                     <a:pt x="0" y="0"/>
@@ -4508,7 +4508,7 @@
           </p:nvSpPr>
           <p:spPr>
             <a:xfrm>
-              <a:off x="692708" y="5509156"/>
+              <a:off x="692708" y="5517199"/>
               <a:ext cx="62179" cy="80101"/>
             </a:xfrm>
             <a:prstGeom prst="rect">
@@ -4554,7 +4554,7 @@
           </p:nvSpPr>
           <p:spPr>
             <a:xfrm>
-              <a:off x="692708" y="4639479"/>
+              <a:off x="692708" y="4687735"/>
               <a:ext cx="62179" cy="80101"/>
             </a:xfrm>
             <a:prstGeom prst="rect">
@@ -4600,7 +4600,7 @@
           </p:nvSpPr>
           <p:spPr>
             <a:xfrm>
-              <a:off x="692708" y="3769802"/>
+              <a:off x="692708" y="3858272"/>
               <a:ext cx="62179" cy="80101"/>
             </a:xfrm>
             <a:prstGeom prst="rect">
@@ -4646,7 +4646,7 @@
           </p:nvSpPr>
           <p:spPr>
             <a:xfrm>
-              <a:off x="692708" y="2900125"/>
+              <a:off x="692708" y="3028808"/>
               <a:ext cx="62179" cy="80101"/>
             </a:xfrm>
             <a:prstGeom prst="rect">
@@ -4692,7 +4692,7 @@
           </p:nvSpPr>
           <p:spPr>
             <a:xfrm>
-              <a:off x="692708" y="2030448"/>
+              <a:off x="692708" y="2199345"/>
               <a:ext cx="62179" cy="80101"/>
             </a:xfrm>
             <a:prstGeom prst="rect">
@@ -4968,7 +4968,7 @@
           </p:nvSpPr>
           <p:spPr>
             <a:xfrm rot="-5400000">
-              <a:off x="68446" y="3759743"/>
+              <a:off x="68446" y="3848213"/>
               <a:ext cx="1016904" cy="100218"/>
             </a:xfrm>
             <a:prstGeom prst="rect">
@@ -5009,6 +5009,52 @@
         <p:sp>
           <p:nvSpPr>
             <p:cNvPr id="38" name="tx38"/>
+            <p:cNvSpPr/>
+            <p:nvPr/>
+          </p:nvSpPr>
+          <p:spPr>
+            <a:xfrm>
+              <a:off x="817517" y="1896563"/>
+              <a:ext cx="4166463" cy="82021"/>
+            </a:xfrm>
+            <a:prstGeom prst="rect">
+              <a:avLst/>
+            </a:prstGeom>
+            <a:noFill/>
+          </p:spPr>
+          <p:txBody>
+            <a:bodyPr lIns="0" rIns="0" tIns="0" bIns="0" anchorCtr="1" anchor="ctr" wrap="none"/>
+            <a:lstStyle/>
+            <a:p>
+              <a:pPr algn="l" marL="0" marR="0" indent="0">
+                <a:lnSpc>
+                  <a:spcPts val="900"/>
+                </a:lnSpc>
+                <a:spcBef>
+                  <a:spcPts val="0"/>
+                </a:spcBef>
+                <a:spcAft>
+                  <a:spcPts val="0"/>
+                </a:spcAft>
+              </a:pPr>
+              <a:r>
+                <a:rPr sz="900">
+                  <a:solidFill>
+                    <a:srgbClr val="404040">
+                      <a:alpha val="100000"/>
+                    </a:srgbClr>
+                  </a:solidFill>
+                  <a:latin typeface="Helvetica"/>
+                  <a:cs typeface="Helvetica"/>
+                </a:rPr>
+                <a:t>subHR = 0.68 (95% CI 0.47-0.97), p = 0.035   (per 0.1-unit increase in eGFR ratio)</a:t>
+              </a:r>
+            </a:p>
+          </p:txBody>
+        </p:sp>
+        <p:sp>
+          <p:nvSpPr>
+            <p:cNvPr id="39" name="tx39"/>
             <p:cNvSpPr/>
             <p:nvPr/>
           </p:nvSpPr>

--- a/docs/plots/carbo/jx_carbo_linsubhr_ratio_hosp4.pptx
+++ b/docs/plots/carbo/jx_carbo_linsubhr_ratio_hosp4.pptx
@@ -2271,26 +2271,26 @@
           </p:nvSpPr>
           <p:spPr>
             <a:xfrm>
-              <a:off x="817517" y="5142518"/>
-              <a:ext cx="7799693" cy="0"/>
+              <a:off x="915645" y="5071743"/>
+              <a:ext cx="7682587" cy="0"/>
             </a:xfrm>
             <a:custGeom>
               <a:avLst/>
               <a:pathLst>
-                <a:path w="7799693" h="0">
+                <a:path w="7682587" h="0">
                   <a:moveTo>
                     <a:pt x="0" y="0"/>
                   </a:moveTo>
                   <a:lnTo>
-                    <a:pt x="7799693" y="0"/>
-                  </a:lnTo>
-                  <a:lnTo>
-                    <a:pt x="7799693" y="0"/>
+                    <a:pt x="7682587" y="0"/>
+                  </a:lnTo>
+                  <a:lnTo>
+                    <a:pt x="7682587" y="0"/>
                   </a:lnTo>
                 </a:path>
               </a:pathLst>
             </a:custGeom>
-            <a:ln w="6775" cap="flat">
+            <a:ln w="8623" cap="flat">
               <a:solidFill>
                 <a:srgbClr val="EBEBEB">
                   <a:alpha val="100000"/>
@@ -2314,26 +2314,26 @@
           </p:nvSpPr>
           <p:spPr>
             <a:xfrm>
-              <a:off x="817517" y="4313054"/>
-              <a:ext cx="7799693" cy="0"/>
+              <a:off x="915645" y="4298074"/>
+              <a:ext cx="7682587" cy="0"/>
             </a:xfrm>
             <a:custGeom>
               <a:avLst/>
               <a:pathLst>
-                <a:path w="7799693" h="0">
+                <a:path w="7682587" h="0">
                   <a:moveTo>
                     <a:pt x="0" y="0"/>
                   </a:moveTo>
                   <a:lnTo>
-                    <a:pt x="7799693" y="0"/>
-                  </a:lnTo>
-                  <a:lnTo>
-                    <a:pt x="7799693" y="0"/>
+                    <a:pt x="7682587" y="0"/>
+                  </a:lnTo>
+                  <a:lnTo>
+                    <a:pt x="7682587" y="0"/>
                   </a:lnTo>
                 </a:path>
               </a:pathLst>
             </a:custGeom>
-            <a:ln w="6775" cap="flat">
+            <a:ln w="8623" cap="flat">
               <a:solidFill>
                 <a:srgbClr val="EBEBEB">
                   <a:alpha val="100000"/>
@@ -2357,26 +2357,26 @@
           </p:nvSpPr>
           <p:spPr>
             <a:xfrm>
-              <a:off x="817517" y="3483591"/>
-              <a:ext cx="7799693" cy="0"/>
+              <a:off x="915645" y="3524405"/>
+              <a:ext cx="7682587" cy="0"/>
             </a:xfrm>
             <a:custGeom>
               <a:avLst/>
               <a:pathLst>
-                <a:path w="7799693" h="0">
+                <a:path w="7682587" h="0">
                   <a:moveTo>
                     <a:pt x="0" y="0"/>
                   </a:moveTo>
                   <a:lnTo>
-                    <a:pt x="7799693" y="0"/>
-                  </a:lnTo>
-                  <a:lnTo>
-                    <a:pt x="7799693" y="0"/>
+                    <a:pt x="7682587" y="0"/>
+                  </a:lnTo>
+                  <a:lnTo>
+                    <a:pt x="7682587" y="0"/>
                   </a:lnTo>
                 </a:path>
               </a:pathLst>
             </a:custGeom>
-            <a:ln w="6775" cap="flat">
+            <a:ln w="8623" cap="flat">
               <a:solidFill>
                 <a:srgbClr val="EBEBEB">
                   <a:alpha val="100000"/>
@@ -2400,26 +2400,26 @@
           </p:nvSpPr>
           <p:spPr>
             <a:xfrm>
-              <a:off x="817517" y="2654127"/>
-              <a:ext cx="7799693" cy="0"/>
+              <a:off x="915645" y="2750737"/>
+              <a:ext cx="7682587" cy="0"/>
             </a:xfrm>
             <a:custGeom>
               <a:avLst/>
               <a:pathLst>
-                <a:path w="7799693" h="0">
+                <a:path w="7682587" h="0">
                   <a:moveTo>
                     <a:pt x="0" y="0"/>
                   </a:moveTo>
                   <a:lnTo>
-                    <a:pt x="7799693" y="0"/>
-                  </a:lnTo>
-                  <a:lnTo>
-                    <a:pt x="7799693" y="0"/>
+                    <a:pt x="7682587" y="0"/>
+                  </a:lnTo>
+                  <a:lnTo>
+                    <a:pt x="7682587" y="0"/>
                   </a:lnTo>
                 </a:path>
               </a:pathLst>
             </a:custGeom>
-            <a:ln w="6775" cap="flat">
+            <a:ln w="8623" cap="flat">
               <a:solidFill>
                 <a:srgbClr val="EBEBEB">
                   <a:alpha val="100000"/>
@@ -2443,15 +2443,15 @@
           </p:nvSpPr>
           <p:spPr>
             <a:xfrm>
-              <a:off x="1615213" y="2073503"/>
-              <a:ext cx="0" cy="3649639"/>
+              <a:off x="1701364" y="2209169"/>
+              <a:ext cx="0" cy="3404141"/>
             </a:xfrm>
             <a:custGeom>
               <a:avLst/>
               <a:pathLst>
-                <a:path w="0" h="3649639">
+                <a:path w="0" h="3404141">
                   <a:moveTo>
-                    <a:pt x="0" y="3649639"/>
+                    <a:pt x="0" y="3404141"/>
                   </a:moveTo>
                   <a:lnTo>
                     <a:pt x="0" y="0"/>
@@ -2462,7 +2462,7 @@
                 </a:path>
               </a:pathLst>
             </a:custGeom>
-            <a:ln w="6775" cap="flat">
+            <a:ln w="8623" cap="flat">
               <a:solidFill>
                 <a:srgbClr val="EBEBEB">
                   <a:alpha val="100000"/>
@@ -2486,15 +2486,15 @@
           </p:nvSpPr>
           <p:spPr>
             <a:xfrm>
-              <a:off x="3387871" y="2073503"/>
-              <a:ext cx="0" cy="3649639"/>
+              <a:off x="3447406" y="2209169"/>
+              <a:ext cx="0" cy="3404141"/>
             </a:xfrm>
             <a:custGeom>
               <a:avLst/>
               <a:pathLst>
-                <a:path w="0" h="3649639">
+                <a:path w="0" h="3404141">
                   <a:moveTo>
-                    <a:pt x="0" y="3649639"/>
+                    <a:pt x="0" y="3404141"/>
                   </a:moveTo>
                   <a:lnTo>
                     <a:pt x="0" y="0"/>
@@ -2505,7 +2505,7 @@
                 </a:path>
               </a:pathLst>
             </a:custGeom>
-            <a:ln w="6775" cap="flat">
+            <a:ln w="8623" cap="flat">
               <a:solidFill>
                 <a:srgbClr val="EBEBEB">
                   <a:alpha val="100000"/>
@@ -2529,15 +2529,15 @@
           </p:nvSpPr>
           <p:spPr>
             <a:xfrm>
-              <a:off x="5160528" y="2073503"/>
-              <a:ext cx="0" cy="3649639"/>
+              <a:off x="5193449" y="2209169"/>
+              <a:ext cx="0" cy="3404141"/>
             </a:xfrm>
             <a:custGeom>
               <a:avLst/>
               <a:pathLst>
-                <a:path w="0" h="3649639">
+                <a:path w="0" h="3404141">
                   <a:moveTo>
-                    <a:pt x="0" y="3649639"/>
+                    <a:pt x="0" y="3404141"/>
                   </a:moveTo>
                   <a:lnTo>
                     <a:pt x="0" y="0"/>
@@ -2548,7 +2548,7 @@
                 </a:path>
               </a:pathLst>
             </a:custGeom>
-            <a:ln w="6775" cap="flat">
+            <a:ln w="8623" cap="flat">
               <a:solidFill>
                 <a:srgbClr val="EBEBEB">
                   <a:alpha val="100000"/>
@@ -2572,15 +2572,15 @@
           </p:nvSpPr>
           <p:spPr>
             <a:xfrm>
-              <a:off x="6933186" y="2073503"/>
-              <a:ext cx="0" cy="3649639"/>
+              <a:off x="6939491" y="2209169"/>
+              <a:ext cx="0" cy="3404141"/>
             </a:xfrm>
             <a:custGeom>
               <a:avLst/>
               <a:pathLst>
-                <a:path w="0" h="3649639">
+                <a:path w="0" h="3404141">
                   <a:moveTo>
-                    <a:pt x="0" y="3649639"/>
+                    <a:pt x="0" y="3404141"/>
                   </a:moveTo>
                   <a:lnTo>
                     <a:pt x="0" y="0"/>
@@ -2591,7 +2591,7 @@
                 </a:path>
               </a:pathLst>
             </a:custGeom>
-            <a:ln w="6775" cap="flat">
+            <a:ln w="8623" cap="flat">
               <a:solidFill>
                 <a:srgbClr val="EBEBEB">
                   <a:alpha val="100000"/>
@@ -2615,26 +2615,26 @@
           </p:nvSpPr>
           <p:spPr>
             <a:xfrm>
-              <a:off x="817517" y="5557249"/>
-              <a:ext cx="7799693" cy="0"/>
+              <a:off x="915645" y="5458577"/>
+              <a:ext cx="7682587" cy="0"/>
             </a:xfrm>
             <a:custGeom>
               <a:avLst/>
               <a:pathLst>
-                <a:path w="7799693" h="0">
+                <a:path w="7682587" h="0">
                   <a:moveTo>
                     <a:pt x="0" y="0"/>
                   </a:moveTo>
                   <a:lnTo>
-                    <a:pt x="7799693" y="0"/>
-                  </a:lnTo>
-                  <a:lnTo>
-                    <a:pt x="7799693" y="0"/>
+                    <a:pt x="7682587" y="0"/>
+                  </a:lnTo>
+                  <a:lnTo>
+                    <a:pt x="7682587" y="0"/>
                   </a:lnTo>
                 </a:path>
               </a:pathLst>
             </a:custGeom>
-            <a:ln w="13550" cap="flat">
+            <a:ln w="17246" cap="flat">
               <a:solidFill>
                 <a:srgbClr val="EBEBEB">
                   <a:alpha val="100000"/>
@@ -2658,26 +2658,26 @@
           </p:nvSpPr>
           <p:spPr>
             <a:xfrm>
-              <a:off x="817517" y="4727786"/>
-              <a:ext cx="7799693" cy="0"/>
+              <a:off x="915645" y="4684908"/>
+              <a:ext cx="7682587" cy="0"/>
             </a:xfrm>
             <a:custGeom>
               <a:avLst/>
               <a:pathLst>
-                <a:path w="7799693" h="0">
+                <a:path w="7682587" h="0">
                   <a:moveTo>
                     <a:pt x="0" y="0"/>
                   </a:moveTo>
                   <a:lnTo>
-                    <a:pt x="7799693" y="0"/>
-                  </a:lnTo>
-                  <a:lnTo>
-                    <a:pt x="7799693" y="0"/>
+                    <a:pt x="7682587" y="0"/>
+                  </a:lnTo>
+                  <a:lnTo>
+                    <a:pt x="7682587" y="0"/>
                   </a:lnTo>
                 </a:path>
               </a:pathLst>
             </a:custGeom>
-            <a:ln w="13550" cap="flat">
+            <a:ln w="17246" cap="flat">
               <a:solidFill>
                 <a:srgbClr val="EBEBEB">
                   <a:alpha val="100000"/>
@@ -2701,26 +2701,26 @@
           </p:nvSpPr>
           <p:spPr>
             <a:xfrm>
-              <a:off x="817517" y="3898322"/>
-              <a:ext cx="7799693" cy="0"/>
+              <a:off x="915645" y="3911240"/>
+              <a:ext cx="7682587" cy="0"/>
             </a:xfrm>
             <a:custGeom>
               <a:avLst/>
               <a:pathLst>
-                <a:path w="7799693" h="0">
+                <a:path w="7682587" h="0">
                   <a:moveTo>
                     <a:pt x="0" y="0"/>
                   </a:moveTo>
                   <a:lnTo>
-                    <a:pt x="7799693" y="0"/>
-                  </a:lnTo>
-                  <a:lnTo>
-                    <a:pt x="7799693" y="0"/>
+                    <a:pt x="7682587" y="0"/>
+                  </a:lnTo>
+                  <a:lnTo>
+                    <a:pt x="7682587" y="0"/>
                   </a:lnTo>
                 </a:path>
               </a:pathLst>
             </a:custGeom>
-            <a:ln w="13550" cap="flat">
+            <a:ln w="17246" cap="flat">
               <a:solidFill>
                 <a:srgbClr val="EBEBEB">
                   <a:alpha val="100000"/>
@@ -2744,26 +2744,26 @@
           </p:nvSpPr>
           <p:spPr>
             <a:xfrm>
-              <a:off x="817517" y="3068859"/>
-              <a:ext cx="7799693" cy="0"/>
+              <a:off x="915645" y="3137571"/>
+              <a:ext cx="7682587" cy="0"/>
             </a:xfrm>
             <a:custGeom>
               <a:avLst/>
               <a:pathLst>
-                <a:path w="7799693" h="0">
+                <a:path w="7682587" h="0">
                   <a:moveTo>
                     <a:pt x="0" y="0"/>
                   </a:moveTo>
                   <a:lnTo>
-                    <a:pt x="7799693" y="0"/>
-                  </a:lnTo>
-                  <a:lnTo>
-                    <a:pt x="7799693" y="0"/>
+                    <a:pt x="7682587" y="0"/>
+                  </a:lnTo>
+                  <a:lnTo>
+                    <a:pt x="7682587" y="0"/>
                   </a:lnTo>
                 </a:path>
               </a:pathLst>
             </a:custGeom>
-            <a:ln w="13550" cap="flat">
+            <a:ln w="17246" cap="flat">
               <a:solidFill>
                 <a:srgbClr val="EBEBEB">
                   <a:alpha val="100000"/>
@@ -2787,26 +2787,26 @@
           </p:nvSpPr>
           <p:spPr>
             <a:xfrm>
-              <a:off x="817517" y="2239395"/>
-              <a:ext cx="7799693" cy="0"/>
+              <a:off x="915645" y="2363903"/>
+              <a:ext cx="7682587" cy="0"/>
             </a:xfrm>
             <a:custGeom>
               <a:avLst/>
               <a:pathLst>
-                <a:path w="7799693" h="0">
+                <a:path w="7682587" h="0">
                   <a:moveTo>
                     <a:pt x="0" y="0"/>
                   </a:moveTo>
                   <a:lnTo>
-                    <a:pt x="7799693" y="0"/>
-                  </a:lnTo>
-                  <a:lnTo>
-                    <a:pt x="7799693" y="0"/>
+                    <a:pt x="7682587" y="0"/>
+                  </a:lnTo>
+                  <a:lnTo>
+                    <a:pt x="7682587" y="0"/>
                   </a:lnTo>
                 </a:path>
               </a:pathLst>
             </a:custGeom>
-            <a:ln w="13550" cap="flat">
+            <a:ln w="17246" cap="flat">
               <a:solidFill>
                 <a:srgbClr val="EBEBEB">
                   <a:alpha val="100000"/>
@@ -2830,15 +2830,15 @@
           </p:nvSpPr>
           <p:spPr>
             <a:xfrm>
-              <a:off x="2501542" y="2073503"/>
-              <a:ext cx="0" cy="3649639"/>
+              <a:off x="2574385" y="2209169"/>
+              <a:ext cx="0" cy="3404141"/>
             </a:xfrm>
             <a:custGeom>
               <a:avLst/>
               <a:pathLst>
-                <a:path w="0" h="3649639">
+                <a:path w="0" h="3404141">
                   <a:moveTo>
-                    <a:pt x="0" y="3649639"/>
+                    <a:pt x="0" y="3404141"/>
                   </a:moveTo>
                   <a:lnTo>
                     <a:pt x="0" y="0"/>
@@ -2849,7 +2849,7 @@
                 </a:path>
               </a:pathLst>
             </a:custGeom>
-            <a:ln w="13550" cap="flat">
+            <a:ln w="17246" cap="flat">
               <a:solidFill>
                 <a:srgbClr val="EBEBEB">
                   <a:alpha val="100000"/>
@@ -2873,15 +2873,15 @@
           </p:nvSpPr>
           <p:spPr>
             <a:xfrm>
-              <a:off x="4274200" y="2073503"/>
-              <a:ext cx="0" cy="3649639"/>
+              <a:off x="4320427" y="2209169"/>
+              <a:ext cx="0" cy="3404141"/>
             </a:xfrm>
             <a:custGeom>
               <a:avLst/>
               <a:pathLst>
-                <a:path w="0" h="3649639">
+                <a:path w="0" h="3404141">
                   <a:moveTo>
-                    <a:pt x="0" y="3649639"/>
+                    <a:pt x="0" y="3404141"/>
                   </a:moveTo>
                   <a:lnTo>
                     <a:pt x="0" y="0"/>
@@ -2892,7 +2892,7 @@
                 </a:path>
               </a:pathLst>
             </a:custGeom>
-            <a:ln w="13550" cap="flat">
+            <a:ln w="17246" cap="flat">
               <a:solidFill>
                 <a:srgbClr val="EBEBEB">
                   <a:alpha val="100000"/>
@@ -2916,15 +2916,15 @@
           </p:nvSpPr>
           <p:spPr>
             <a:xfrm>
-              <a:off x="6046857" y="2073503"/>
-              <a:ext cx="0" cy="3649639"/>
+              <a:off x="6066470" y="2209169"/>
+              <a:ext cx="0" cy="3404141"/>
             </a:xfrm>
             <a:custGeom>
               <a:avLst/>
               <a:pathLst>
-                <a:path w="0" h="3649639">
+                <a:path w="0" h="3404141">
                   <a:moveTo>
-                    <a:pt x="0" y="3649639"/>
+                    <a:pt x="0" y="3404141"/>
                   </a:moveTo>
                   <a:lnTo>
                     <a:pt x="0" y="0"/>
@@ -2935,7 +2935,7 @@
                 </a:path>
               </a:pathLst>
             </a:custGeom>
-            <a:ln w="13550" cap="flat">
+            <a:ln w="17246" cap="flat">
               <a:solidFill>
                 <a:srgbClr val="EBEBEB">
                   <a:alpha val="100000"/>
@@ -2959,15 +2959,15 @@
           </p:nvSpPr>
           <p:spPr>
             <a:xfrm>
-              <a:off x="7819515" y="2073503"/>
-              <a:ext cx="0" cy="3649639"/>
+              <a:off x="7812512" y="2209169"/>
+              <a:ext cx="0" cy="3404141"/>
             </a:xfrm>
             <a:custGeom>
               <a:avLst/>
               <a:pathLst>
-                <a:path w="0" h="3649639">
+                <a:path w="0" h="3404141">
                   <a:moveTo>
-                    <a:pt x="0" y="3649639"/>
+                    <a:pt x="0" y="3404141"/>
                   </a:moveTo>
                   <a:lnTo>
                     <a:pt x="0" y="0"/>
@@ -2978,7 +2978,7 @@
                 </a:path>
               </a:pathLst>
             </a:custGeom>
-            <a:ln w="13550" cap="flat">
+            <a:ln w="17246" cap="flat">
               <a:solidFill>
                 <a:srgbClr val="EBEBEB">
                   <a:alpha val="100000"/>
@@ -3002,522 +3002,522 @@
           </p:nvSpPr>
           <p:spPr>
             <a:xfrm>
-              <a:off x="817517" y="2073503"/>
-              <a:ext cx="7370972" cy="3456081"/>
+              <a:off x="915645" y="2209169"/>
+              <a:ext cx="7260303" cy="3223604"/>
             </a:xfrm>
             <a:custGeom>
               <a:avLst/>
               <a:pathLst>
-                <a:path w="7370972" h="3456081">
+                <a:path w="7260303" h="3223604">
                   <a:moveTo>
-                    <a:pt x="1704559" y="0"/>
+                    <a:pt x="1678966" y="0"/>
                   </a:moveTo>
                   <a:lnTo>
-                    <a:pt x="1781321" y="220977"/>
-                  </a:lnTo>
-                  <a:lnTo>
-                    <a:pt x="1858955" y="430137"/>
-                  </a:lnTo>
-                  <a:lnTo>
-                    <a:pt x="1936589" y="625890"/>
-                  </a:lnTo>
-                  <a:lnTo>
-                    <a:pt x="2014223" y="809093"/>
-                  </a:lnTo>
-                  <a:lnTo>
-                    <a:pt x="2091857" y="980553"/>
-                  </a:lnTo>
-                  <a:lnTo>
-                    <a:pt x="2169491" y="1141021"/>
-                  </a:lnTo>
-                  <a:lnTo>
-                    <a:pt x="2247125" y="1291202"/>
-                  </a:lnTo>
-                  <a:lnTo>
-                    <a:pt x="2324759" y="1431756"/>
-                  </a:lnTo>
-                  <a:lnTo>
-                    <a:pt x="2402393" y="1563299"/>
-                  </a:lnTo>
-                  <a:lnTo>
-                    <a:pt x="2480027" y="1686410"/>
-                  </a:lnTo>
-                  <a:lnTo>
-                    <a:pt x="2557661" y="1801629"/>
-                  </a:lnTo>
-                  <a:lnTo>
-                    <a:pt x="2635295" y="1909461"/>
-                  </a:lnTo>
-                  <a:lnTo>
-                    <a:pt x="2712930" y="2010381"/>
-                  </a:lnTo>
-                  <a:lnTo>
-                    <a:pt x="2790564" y="2104832"/>
-                  </a:lnTo>
-                  <a:lnTo>
-                    <a:pt x="2868198" y="2193227"/>
-                  </a:lnTo>
-                  <a:lnTo>
-                    <a:pt x="2945832" y="2275956"/>
-                  </a:lnTo>
-                  <a:lnTo>
-                    <a:pt x="3023466" y="2353382"/>
-                  </a:lnTo>
-                  <a:lnTo>
-                    <a:pt x="3101100" y="2425844"/>
-                  </a:lnTo>
-                  <a:lnTo>
-                    <a:pt x="3178734" y="2493662"/>
-                  </a:lnTo>
-                  <a:lnTo>
-                    <a:pt x="3256368" y="2557131"/>
-                  </a:lnTo>
-                  <a:lnTo>
-                    <a:pt x="3334002" y="2616532"/>
-                  </a:lnTo>
-                  <a:lnTo>
-                    <a:pt x="3411636" y="2654964"/>
-                  </a:lnTo>
-                  <a:lnTo>
-                    <a:pt x="3489270" y="2657036"/>
-                  </a:lnTo>
-                  <a:lnTo>
-                    <a:pt x="3566904" y="2659102"/>
-                  </a:lnTo>
-                  <a:lnTo>
-                    <a:pt x="3644538" y="2661164"/>
-                  </a:lnTo>
-                  <a:lnTo>
-                    <a:pt x="3722172" y="2663220"/>
-                  </a:lnTo>
-                  <a:lnTo>
-                    <a:pt x="3799806" y="2665271"/>
-                  </a:lnTo>
-                  <a:lnTo>
-                    <a:pt x="3877440" y="2667317"/>
-                  </a:lnTo>
-                  <a:lnTo>
-                    <a:pt x="3955074" y="2669358"/>
-                  </a:lnTo>
-                  <a:lnTo>
-                    <a:pt x="4032708" y="2671394"/>
-                  </a:lnTo>
-                  <a:lnTo>
-                    <a:pt x="4110342" y="2673424"/>
-                  </a:lnTo>
-                  <a:lnTo>
-                    <a:pt x="4187976" y="2675450"/>
-                  </a:lnTo>
-                  <a:lnTo>
-                    <a:pt x="4265610" y="2677470"/>
-                  </a:lnTo>
-                  <a:lnTo>
-                    <a:pt x="4343244" y="2679486"/>
-                  </a:lnTo>
-                  <a:lnTo>
-                    <a:pt x="4420879" y="2681496"/>
-                  </a:lnTo>
-                  <a:lnTo>
-                    <a:pt x="4498513" y="2683502"/>
-                  </a:lnTo>
-                  <a:lnTo>
-                    <a:pt x="4576147" y="2685502"/>
-                  </a:lnTo>
-                  <a:lnTo>
-                    <a:pt x="4653781" y="2687498"/>
-                  </a:lnTo>
-                  <a:lnTo>
-                    <a:pt x="4731415" y="2689488"/>
-                  </a:lnTo>
-                  <a:lnTo>
-                    <a:pt x="4809049" y="2691473"/>
-                  </a:lnTo>
-                  <a:lnTo>
-                    <a:pt x="4886683" y="2693454"/>
-                  </a:lnTo>
-                  <a:lnTo>
-                    <a:pt x="4964317" y="2695429"/>
-                  </a:lnTo>
-                  <a:lnTo>
-                    <a:pt x="5041951" y="2697400"/>
-                  </a:lnTo>
-                  <a:lnTo>
-                    <a:pt x="5119585" y="2699366"/>
-                  </a:lnTo>
-                  <a:lnTo>
-                    <a:pt x="5197219" y="2701326"/>
-                  </a:lnTo>
-                  <a:lnTo>
-                    <a:pt x="5274853" y="2703282"/>
-                  </a:lnTo>
-                  <a:lnTo>
-                    <a:pt x="5352487" y="2705233"/>
-                  </a:lnTo>
-                  <a:lnTo>
-                    <a:pt x="5430121" y="2707179"/>
-                  </a:lnTo>
-                  <a:lnTo>
-                    <a:pt x="5507755" y="2709120"/>
-                  </a:lnTo>
-                  <a:lnTo>
-                    <a:pt x="5585389" y="2711057"/>
-                  </a:lnTo>
-                  <a:lnTo>
-                    <a:pt x="5663023" y="2712988"/>
-                  </a:lnTo>
-                  <a:lnTo>
-                    <a:pt x="5740657" y="2714915"/>
-                  </a:lnTo>
-                  <a:lnTo>
-                    <a:pt x="5818291" y="2716837"/>
-                  </a:lnTo>
-                  <a:lnTo>
-                    <a:pt x="5895925" y="2718754"/>
-                  </a:lnTo>
-                  <a:lnTo>
-                    <a:pt x="5973559" y="2720666"/>
-                  </a:lnTo>
-                  <a:lnTo>
-                    <a:pt x="6051193" y="2722574"/>
-                  </a:lnTo>
-                  <a:lnTo>
-                    <a:pt x="6128827" y="2724476"/>
-                  </a:lnTo>
-                  <a:lnTo>
-                    <a:pt x="6206462" y="2726374"/>
-                  </a:lnTo>
-                  <a:lnTo>
-                    <a:pt x="6284096" y="2728268"/>
-                  </a:lnTo>
-                  <a:lnTo>
-                    <a:pt x="6361730" y="2730156"/>
-                  </a:lnTo>
-                  <a:lnTo>
-                    <a:pt x="6439364" y="2732040"/>
-                  </a:lnTo>
-                  <a:lnTo>
-                    <a:pt x="6516998" y="2733919"/>
-                  </a:lnTo>
-                  <a:lnTo>
-                    <a:pt x="6594632" y="2735793"/>
-                  </a:lnTo>
-                  <a:lnTo>
-                    <a:pt x="6672266" y="2737663"/>
-                  </a:lnTo>
-                  <a:lnTo>
-                    <a:pt x="6749900" y="2739528"/>
-                  </a:lnTo>
-                  <a:lnTo>
-                    <a:pt x="6827534" y="2741388"/>
-                  </a:lnTo>
-                  <a:lnTo>
-                    <a:pt x="6905168" y="2743244"/>
-                  </a:lnTo>
-                  <a:lnTo>
-                    <a:pt x="6982802" y="2745095"/>
-                  </a:lnTo>
-                  <a:lnTo>
-                    <a:pt x="7060436" y="2746942"/>
-                  </a:lnTo>
-                  <a:lnTo>
-                    <a:pt x="7138070" y="2748783"/>
-                  </a:lnTo>
-                  <a:lnTo>
-                    <a:pt x="7215704" y="2750621"/>
-                  </a:lnTo>
-                  <a:lnTo>
-                    <a:pt x="7293338" y="2752453"/>
-                  </a:lnTo>
-                  <a:lnTo>
-                    <a:pt x="7370972" y="2754281"/>
-                  </a:lnTo>
-                  <a:lnTo>
-                    <a:pt x="7370972" y="3456081"/>
-                  </a:lnTo>
-                  <a:lnTo>
-                    <a:pt x="7293338" y="3454186"/>
-                  </a:lnTo>
-                  <a:lnTo>
-                    <a:pt x="7215704" y="3452162"/>
-                  </a:lnTo>
-                  <a:lnTo>
-                    <a:pt x="7138070" y="3449998"/>
-                  </a:lnTo>
-                  <a:lnTo>
-                    <a:pt x="7060436" y="3447687"/>
-                  </a:lnTo>
-                  <a:lnTo>
-                    <a:pt x="6982802" y="3445217"/>
-                  </a:lnTo>
-                  <a:lnTo>
-                    <a:pt x="6905168" y="3442578"/>
-                  </a:lnTo>
-                  <a:lnTo>
-                    <a:pt x="6827534" y="3439758"/>
-                  </a:lnTo>
-                  <a:lnTo>
-                    <a:pt x="6749900" y="3436745"/>
-                  </a:lnTo>
-                  <a:lnTo>
-                    <a:pt x="6672266" y="3433525"/>
-                  </a:lnTo>
-                  <a:lnTo>
-                    <a:pt x="6594632" y="3430085"/>
-                  </a:lnTo>
-                  <a:lnTo>
-                    <a:pt x="6516998" y="3426410"/>
-                  </a:lnTo>
-                  <a:lnTo>
-                    <a:pt x="6439364" y="3422482"/>
-                  </a:lnTo>
-                  <a:lnTo>
-                    <a:pt x="6361730" y="3418286"/>
-                  </a:lnTo>
-                  <a:lnTo>
-                    <a:pt x="6284096" y="3413802"/>
-                  </a:lnTo>
-                  <a:lnTo>
-                    <a:pt x="6206462" y="3409011"/>
-                  </a:lnTo>
-                  <a:lnTo>
-                    <a:pt x="6128827" y="3403892"/>
-                  </a:lnTo>
-                  <a:lnTo>
-                    <a:pt x="6051193" y="3398422"/>
-                  </a:lnTo>
-                  <a:lnTo>
-                    <a:pt x="5973559" y="3392578"/>
-                  </a:lnTo>
-                  <a:lnTo>
-                    <a:pt x="5895925" y="3386333"/>
-                  </a:lnTo>
-                  <a:lnTo>
-                    <a:pt x="5818291" y="3379661"/>
-                  </a:lnTo>
-                  <a:lnTo>
-                    <a:pt x="5740657" y="3372531"/>
-                  </a:lnTo>
-                  <a:lnTo>
-                    <a:pt x="5663023" y="3364914"/>
-                  </a:lnTo>
-                  <a:lnTo>
-                    <a:pt x="5585389" y="3356774"/>
-                  </a:lnTo>
-                  <a:lnTo>
-                    <a:pt x="5507755" y="3348077"/>
-                  </a:lnTo>
-                  <a:lnTo>
-                    <a:pt x="5430121" y="3338784"/>
-                  </a:lnTo>
-                  <a:lnTo>
-                    <a:pt x="5352487" y="3328855"/>
-                  </a:lnTo>
-                  <a:lnTo>
-                    <a:pt x="5274853" y="3318245"/>
-                  </a:lnTo>
-                  <a:lnTo>
-                    <a:pt x="5197219" y="3306909"/>
-                  </a:lnTo>
-                  <a:lnTo>
-                    <a:pt x="5119585" y="3294796"/>
-                  </a:lnTo>
-                  <a:lnTo>
-                    <a:pt x="5041951" y="3281854"/>
-                  </a:lnTo>
-                  <a:lnTo>
-                    <a:pt x="4964317" y="3268025"/>
-                  </a:lnTo>
-                  <a:lnTo>
-                    <a:pt x="4886683" y="3253249"/>
-                  </a:lnTo>
-                  <a:lnTo>
-                    <a:pt x="4809049" y="3237461"/>
-                  </a:lnTo>
-                  <a:lnTo>
-                    <a:pt x="4731415" y="3220591"/>
-                  </a:lnTo>
-                  <a:lnTo>
-                    <a:pt x="4653781" y="3202566"/>
-                  </a:lnTo>
-                  <a:lnTo>
-                    <a:pt x="4576147" y="3183306"/>
-                  </a:lnTo>
-                  <a:lnTo>
-                    <a:pt x="4498513" y="3162727"/>
-                  </a:lnTo>
-                  <a:lnTo>
-                    <a:pt x="4420879" y="3140738"/>
-                  </a:lnTo>
-                  <a:lnTo>
-                    <a:pt x="4343244" y="3117244"/>
-                  </a:lnTo>
-                  <a:lnTo>
-                    <a:pt x="4265610" y="3092139"/>
-                  </a:lnTo>
-                  <a:lnTo>
-                    <a:pt x="4187976" y="3065316"/>
-                  </a:lnTo>
-                  <a:lnTo>
-                    <a:pt x="4110342" y="3036655"/>
-                  </a:lnTo>
-                  <a:lnTo>
-                    <a:pt x="4032708" y="3006031"/>
-                  </a:lnTo>
-                  <a:lnTo>
-                    <a:pt x="3955074" y="2973309"/>
-                  </a:lnTo>
-                  <a:lnTo>
-                    <a:pt x="3877440" y="2938346"/>
-                  </a:lnTo>
-                  <a:lnTo>
-                    <a:pt x="3799806" y="2900988"/>
-                  </a:lnTo>
-                  <a:lnTo>
-                    <a:pt x="3722172" y="2861071"/>
-                  </a:lnTo>
-                  <a:lnTo>
-                    <a:pt x="3644538" y="2818421"/>
-                  </a:lnTo>
-                  <a:lnTo>
-                    <a:pt x="3566904" y="2772848"/>
-                  </a:lnTo>
-                  <a:lnTo>
-                    <a:pt x="3489270" y="2724154"/>
-                  </a:lnTo>
-                  <a:lnTo>
-                    <a:pt x="3411636" y="2672125"/>
-                  </a:lnTo>
-                  <a:lnTo>
-                    <a:pt x="3334002" y="2652887"/>
-                  </a:lnTo>
-                  <a:lnTo>
-                    <a:pt x="3256368" y="2650805"/>
-                  </a:lnTo>
-                  <a:lnTo>
-                    <a:pt x="3178734" y="2648718"/>
-                  </a:lnTo>
-                  <a:lnTo>
-                    <a:pt x="3101100" y="2646625"/>
-                  </a:lnTo>
-                  <a:lnTo>
-                    <a:pt x="3023466" y="2644527"/>
-                  </a:lnTo>
-                  <a:lnTo>
-                    <a:pt x="2945832" y="2642424"/>
-                  </a:lnTo>
-                  <a:lnTo>
-                    <a:pt x="2868198" y="2640316"/>
-                  </a:lnTo>
-                  <a:lnTo>
-                    <a:pt x="2790564" y="2638202"/>
-                  </a:lnTo>
-                  <a:lnTo>
-                    <a:pt x="2712930" y="2636083"/>
-                  </a:lnTo>
-                  <a:lnTo>
-                    <a:pt x="2635295" y="2633959"/>
-                  </a:lnTo>
-                  <a:lnTo>
-                    <a:pt x="2557661" y="2631829"/>
-                  </a:lnTo>
-                  <a:lnTo>
-                    <a:pt x="2480027" y="2629694"/>
-                  </a:lnTo>
-                  <a:lnTo>
-                    <a:pt x="2402393" y="2627554"/>
-                  </a:lnTo>
-                  <a:lnTo>
-                    <a:pt x="2324759" y="2625409"/>
-                  </a:lnTo>
-                  <a:lnTo>
-                    <a:pt x="2247125" y="2623258"/>
-                  </a:lnTo>
-                  <a:lnTo>
-                    <a:pt x="2169491" y="2621101"/>
-                  </a:lnTo>
-                  <a:lnTo>
-                    <a:pt x="2091857" y="2618939"/>
-                  </a:lnTo>
-                  <a:lnTo>
-                    <a:pt x="2014223" y="2616772"/>
-                  </a:lnTo>
-                  <a:lnTo>
-                    <a:pt x="1936589" y="2614600"/>
-                  </a:lnTo>
-                  <a:lnTo>
-                    <a:pt x="1858955" y="2612421"/>
-                  </a:lnTo>
-                  <a:lnTo>
-                    <a:pt x="1781321" y="2610238"/>
-                  </a:lnTo>
-                  <a:lnTo>
-                    <a:pt x="1703687" y="2608049"/>
-                  </a:lnTo>
-                  <a:lnTo>
-                    <a:pt x="1626053" y="2605854"/>
-                  </a:lnTo>
-                  <a:lnTo>
-                    <a:pt x="1548419" y="2603654"/>
-                  </a:lnTo>
-                  <a:lnTo>
-                    <a:pt x="1470785" y="2601449"/>
-                  </a:lnTo>
-                  <a:lnTo>
-                    <a:pt x="1393151" y="2599238"/>
-                  </a:lnTo>
-                  <a:lnTo>
-                    <a:pt x="1315517" y="2597021"/>
-                  </a:lnTo>
-                  <a:lnTo>
-                    <a:pt x="1237883" y="2594799"/>
-                  </a:lnTo>
-                  <a:lnTo>
-                    <a:pt x="1160249" y="2592571"/>
-                  </a:lnTo>
-                  <a:lnTo>
-                    <a:pt x="1082615" y="2590338"/>
-                  </a:lnTo>
-                  <a:lnTo>
-                    <a:pt x="1004981" y="2588099"/>
-                  </a:lnTo>
-                  <a:lnTo>
-                    <a:pt x="927346" y="2585855"/>
-                  </a:lnTo>
-                  <a:lnTo>
-                    <a:pt x="849712" y="2583605"/>
-                  </a:lnTo>
-                  <a:lnTo>
-                    <a:pt x="772078" y="2581349"/>
-                  </a:lnTo>
-                  <a:lnTo>
-                    <a:pt x="694444" y="2579087"/>
-                  </a:lnTo>
-                  <a:lnTo>
-                    <a:pt x="616810" y="2576820"/>
-                  </a:lnTo>
-                  <a:lnTo>
-                    <a:pt x="539176" y="2574548"/>
-                  </a:lnTo>
-                  <a:lnTo>
-                    <a:pt x="461542" y="2572269"/>
-                  </a:lnTo>
-                  <a:lnTo>
-                    <a:pt x="383908" y="2569985"/>
-                  </a:lnTo>
-                  <a:lnTo>
-                    <a:pt x="306274" y="2567695"/>
-                  </a:lnTo>
-                  <a:lnTo>
-                    <a:pt x="228640" y="2565400"/>
-                  </a:lnTo>
-                  <a:lnTo>
-                    <a:pt x="151006" y="2563098"/>
-                  </a:lnTo>
-                  <a:lnTo>
-                    <a:pt x="73372" y="2560791"/>
-                  </a:lnTo>
-                  <a:lnTo>
-                    <a:pt x="0" y="2558605"/>
+                    <a:pt x="1754576" y="206112"/>
+                  </a:lnTo>
+                  <a:lnTo>
+                    <a:pt x="1831044" y="401204"/>
+                  </a:lnTo>
+                  <a:lnTo>
+                    <a:pt x="1907513" y="583788"/>
+                  </a:lnTo>
+                  <a:lnTo>
+                    <a:pt x="1983981" y="754669"/>
+                  </a:lnTo>
+                  <a:lnTo>
+                    <a:pt x="2060450" y="914595"/>
+                  </a:lnTo>
+                  <a:lnTo>
+                    <a:pt x="2136918" y="1064268"/>
+                  </a:lnTo>
+                  <a:lnTo>
+                    <a:pt x="2213386" y="1204347"/>
+                  </a:lnTo>
+                  <a:lnTo>
+                    <a:pt x="2289855" y="1335447"/>
+                  </a:lnTo>
+                  <a:lnTo>
+                    <a:pt x="2366323" y="1458142"/>
+                  </a:lnTo>
+                  <a:lnTo>
+                    <a:pt x="2442792" y="1572971"/>
+                  </a:lnTo>
+                  <a:lnTo>
+                    <a:pt x="2519260" y="1680440"/>
+                  </a:lnTo>
+                  <a:lnTo>
+                    <a:pt x="2595729" y="1781019"/>
+                  </a:lnTo>
+                  <a:lnTo>
+                    <a:pt x="2672197" y="1875150"/>
+                  </a:lnTo>
+                  <a:lnTo>
+                    <a:pt x="2748666" y="1963247"/>
+                  </a:lnTo>
+                  <a:lnTo>
+                    <a:pt x="2825134" y="2045697"/>
+                  </a:lnTo>
+                  <a:lnTo>
+                    <a:pt x="2901602" y="2122861"/>
+                  </a:lnTo>
+                  <a:lnTo>
+                    <a:pt x="2978071" y="2195079"/>
+                  </a:lnTo>
+                  <a:lnTo>
+                    <a:pt x="3054539" y="2262667"/>
+                  </a:lnTo>
+                  <a:lnTo>
+                    <a:pt x="3131008" y="2325922"/>
+                  </a:lnTo>
+                  <a:lnTo>
+                    <a:pt x="3207476" y="2385122"/>
+                  </a:lnTo>
+                  <a:lnTo>
+                    <a:pt x="3283945" y="2440528"/>
+                  </a:lnTo>
+                  <a:lnTo>
+                    <a:pt x="3360413" y="2476374"/>
+                  </a:lnTo>
+                  <a:lnTo>
+                    <a:pt x="3436881" y="2478307"/>
+                  </a:lnTo>
+                  <a:lnTo>
+                    <a:pt x="3513350" y="2480234"/>
+                  </a:lnTo>
+                  <a:lnTo>
+                    <a:pt x="3589818" y="2482157"/>
+                  </a:lnTo>
+                  <a:lnTo>
+                    <a:pt x="3666287" y="2484075"/>
+                  </a:lnTo>
+                  <a:lnTo>
+                    <a:pt x="3742755" y="2485988"/>
+                  </a:lnTo>
+                  <a:lnTo>
+                    <a:pt x="3819224" y="2487896"/>
+                  </a:lnTo>
+                  <a:lnTo>
+                    <a:pt x="3895692" y="2489800"/>
+                  </a:lnTo>
+                  <a:lnTo>
+                    <a:pt x="3972160" y="2491699"/>
+                  </a:lnTo>
+                  <a:lnTo>
+                    <a:pt x="4048629" y="2493593"/>
+                  </a:lnTo>
+                  <a:lnTo>
+                    <a:pt x="4125097" y="2495482"/>
+                  </a:lnTo>
+                  <a:lnTo>
+                    <a:pt x="4201566" y="2497367"/>
+                  </a:lnTo>
+                  <a:lnTo>
+                    <a:pt x="4278034" y="2499247"/>
+                  </a:lnTo>
+                  <a:lnTo>
+                    <a:pt x="4354503" y="2501122"/>
+                  </a:lnTo>
+                  <a:lnTo>
+                    <a:pt x="4430971" y="2502992"/>
+                  </a:lnTo>
+                  <a:lnTo>
+                    <a:pt x="4507439" y="2504858"/>
+                  </a:lnTo>
+                  <a:lnTo>
+                    <a:pt x="4583908" y="2506719"/>
+                  </a:lnTo>
+                  <a:lnTo>
+                    <a:pt x="4660376" y="2508576"/>
+                  </a:lnTo>
+                  <a:lnTo>
+                    <a:pt x="4736845" y="2510428"/>
+                  </a:lnTo>
+                  <a:lnTo>
+                    <a:pt x="4813313" y="2512275"/>
+                  </a:lnTo>
+                  <a:lnTo>
+                    <a:pt x="4889782" y="2514118"/>
+                  </a:lnTo>
+                  <a:lnTo>
+                    <a:pt x="4966250" y="2515956"/>
+                  </a:lnTo>
+                  <a:lnTo>
+                    <a:pt x="5042719" y="2517789"/>
+                  </a:lnTo>
+                  <a:lnTo>
+                    <a:pt x="5119187" y="2519618"/>
+                  </a:lnTo>
+                  <a:lnTo>
+                    <a:pt x="5195655" y="2521442"/>
+                  </a:lnTo>
+                  <a:lnTo>
+                    <a:pt x="5272124" y="2523262"/>
+                  </a:lnTo>
+                  <a:lnTo>
+                    <a:pt x="5348592" y="2525077"/>
+                  </a:lnTo>
+                  <a:lnTo>
+                    <a:pt x="5425061" y="2526888"/>
+                  </a:lnTo>
+                  <a:lnTo>
+                    <a:pt x="5501529" y="2528694"/>
+                  </a:lnTo>
+                  <a:lnTo>
+                    <a:pt x="5577998" y="2530496"/>
+                  </a:lnTo>
+                  <a:lnTo>
+                    <a:pt x="5654466" y="2532293"/>
+                  </a:lnTo>
+                  <a:lnTo>
+                    <a:pt x="5730934" y="2534085"/>
+                  </a:lnTo>
+                  <a:lnTo>
+                    <a:pt x="5807403" y="2535873"/>
+                  </a:lnTo>
+                  <a:lnTo>
+                    <a:pt x="5883871" y="2537657"/>
+                  </a:lnTo>
+                  <a:lnTo>
+                    <a:pt x="5960340" y="2539436"/>
+                  </a:lnTo>
+                  <a:lnTo>
+                    <a:pt x="6036808" y="2541211"/>
+                  </a:lnTo>
+                  <a:lnTo>
+                    <a:pt x="6113277" y="2542981"/>
+                  </a:lnTo>
+                  <a:lnTo>
+                    <a:pt x="6189745" y="2544747"/>
+                  </a:lnTo>
+                  <a:lnTo>
+                    <a:pt x="6266213" y="2546509"/>
+                  </a:lnTo>
+                  <a:lnTo>
+                    <a:pt x="6342682" y="2548266"/>
+                  </a:lnTo>
+                  <a:lnTo>
+                    <a:pt x="6419150" y="2550018"/>
+                  </a:lnTo>
+                  <a:lnTo>
+                    <a:pt x="6495619" y="2551767"/>
+                  </a:lnTo>
+                  <a:lnTo>
+                    <a:pt x="6572087" y="2553511"/>
+                  </a:lnTo>
+                  <a:lnTo>
+                    <a:pt x="6648556" y="2555250"/>
+                  </a:lnTo>
+                  <a:lnTo>
+                    <a:pt x="6725024" y="2556985"/>
+                  </a:lnTo>
+                  <a:lnTo>
+                    <a:pt x="6801492" y="2558716"/>
+                  </a:lnTo>
+                  <a:lnTo>
+                    <a:pt x="6877961" y="2560443"/>
+                  </a:lnTo>
+                  <a:lnTo>
+                    <a:pt x="6954429" y="2562165"/>
+                  </a:lnTo>
+                  <a:lnTo>
+                    <a:pt x="7030898" y="2563883"/>
+                  </a:lnTo>
+                  <a:lnTo>
+                    <a:pt x="7107366" y="2565596"/>
+                  </a:lnTo>
+                  <a:lnTo>
+                    <a:pt x="7183835" y="2567306"/>
+                  </a:lnTo>
+                  <a:lnTo>
+                    <a:pt x="7260303" y="2569011"/>
+                  </a:lnTo>
+                  <a:lnTo>
+                    <a:pt x="7260303" y="3223604"/>
+                  </a:lnTo>
+                  <a:lnTo>
+                    <a:pt x="7183835" y="3221836"/>
+                  </a:lnTo>
+                  <a:lnTo>
+                    <a:pt x="7107366" y="3219947"/>
+                  </a:lnTo>
+                  <a:lnTo>
+                    <a:pt x="7030898" y="3217930"/>
+                  </a:lnTo>
+                  <a:lnTo>
+                    <a:pt x="6954429" y="3215773"/>
+                  </a:lnTo>
+                  <a:lnTo>
+                    <a:pt x="6877961" y="3213470"/>
+                  </a:lnTo>
+                  <a:lnTo>
+                    <a:pt x="6801492" y="3211008"/>
+                  </a:lnTo>
+                  <a:lnTo>
+                    <a:pt x="6725024" y="3208378"/>
+                  </a:lnTo>
+                  <a:lnTo>
+                    <a:pt x="6648556" y="3205567"/>
+                  </a:lnTo>
+                  <a:lnTo>
+                    <a:pt x="6572087" y="3202565"/>
+                  </a:lnTo>
+                  <a:lnTo>
+                    <a:pt x="6495619" y="3199356"/>
+                  </a:lnTo>
+                  <a:lnTo>
+                    <a:pt x="6419150" y="3195928"/>
+                  </a:lnTo>
+                  <a:lnTo>
+                    <a:pt x="6342682" y="3192264"/>
+                  </a:lnTo>
+                  <a:lnTo>
+                    <a:pt x="6266213" y="3188350"/>
+                  </a:lnTo>
+                  <a:lnTo>
+                    <a:pt x="6189745" y="3184168"/>
+                  </a:lnTo>
+                  <a:lnTo>
+                    <a:pt x="6113277" y="3179699"/>
+                  </a:lnTo>
+                  <a:lnTo>
+                    <a:pt x="6036808" y="3174925"/>
+                  </a:lnTo>
+                  <a:lnTo>
+                    <a:pt x="5960340" y="3169823"/>
+                  </a:lnTo>
+                  <a:lnTo>
+                    <a:pt x="5883871" y="3164372"/>
+                  </a:lnTo>
+                  <a:lnTo>
+                    <a:pt x="5807403" y="3158547"/>
+                  </a:lnTo>
+                  <a:lnTo>
+                    <a:pt x="5730934" y="3152323"/>
+                  </a:lnTo>
+                  <a:lnTo>
+                    <a:pt x="5654466" y="3145674"/>
+                  </a:lnTo>
+                  <a:lnTo>
+                    <a:pt x="5577998" y="3138568"/>
+                  </a:lnTo>
+                  <a:lnTo>
+                    <a:pt x="5501529" y="3130976"/>
+                  </a:lnTo>
+                  <a:lnTo>
+                    <a:pt x="5425061" y="3122864"/>
+                  </a:lnTo>
+                  <a:lnTo>
+                    <a:pt x="5348592" y="3114196"/>
+                  </a:lnTo>
+                  <a:lnTo>
+                    <a:pt x="5272124" y="3104935"/>
+                  </a:lnTo>
+                  <a:lnTo>
+                    <a:pt x="5195655" y="3095039"/>
+                  </a:lnTo>
+                  <a:lnTo>
+                    <a:pt x="5119187" y="3084465"/>
+                  </a:lnTo>
+                  <a:lnTo>
+                    <a:pt x="5042719" y="3073167"/>
+                  </a:lnTo>
+                  <a:lnTo>
+                    <a:pt x="4966250" y="3061096"/>
+                  </a:lnTo>
+                  <a:lnTo>
+                    <a:pt x="4889782" y="3048197"/>
+                  </a:lnTo>
+                  <a:lnTo>
+                    <a:pt x="4813313" y="3034415"/>
+                  </a:lnTo>
+                  <a:lnTo>
+                    <a:pt x="4736845" y="3019688"/>
+                  </a:lnTo>
+                  <a:lnTo>
+                    <a:pt x="4660376" y="3003954"/>
+                  </a:lnTo>
+                  <a:lnTo>
+                    <a:pt x="4583908" y="2987141"/>
+                  </a:lnTo>
+                  <a:lnTo>
+                    <a:pt x="4507439" y="2969177"/>
+                  </a:lnTo>
+                  <a:lnTo>
+                    <a:pt x="4430971" y="2949982"/>
+                  </a:lnTo>
+                  <a:lnTo>
+                    <a:pt x="4354503" y="2929472"/>
+                  </a:lnTo>
+                  <a:lnTo>
+                    <a:pt x="4278034" y="2907558"/>
+                  </a:lnTo>
+                  <a:lnTo>
+                    <a:pt x="4201566" y="2884143"/>
+                  </a:lnTo>
+                  <a:lnTo>
+                    <a:pt x="4125097" y="2859123"/>
+                  </a:lnTo>
+                  <a:lnTo>
+                    <a:pt x="4048629" y="2832390"/>
+                  </a:lnTo>
+                  <a:lnTo>
+                    <a:pt x="3972160" y="2803826"/>
+                  </a:lnTo>
+                  <a:lnTo>
+                    <a:pt x="3895692" y="2773306"/>
+                  </a:lnTo>
+                  <a:lnTo>
+                    <a:pt x="3819224" y="2740694"/>
+                  </a:lnTo>
+                  <a:lnTo>
+                    <a:pt x="3742755" y="2705849"/>
+                  </a:lnTo>
+                  <a:lnTo>
+                    <a:pt x="3666287" y="2668618"/>
+                  </a:lnTo>
+                  <a:lnTo>
+                    <a:pt x="3589818" y="2628836"/>
+                  </a:lnTo>
+                  <a:lnTo>
+                    <a:pt x="3513350" y="2586329"/>
+                  </a:lnTo>
+                  <a:lnTo>
+                    <a:pt x="3436881" y="2540910"/>
+                  </a:lnTo>
+                  <a:lnTo>
+                    <a:pt x="3360413" y="2492381"/>
+                  </a:lnTo>
+                  <a:lnTo>
+                    <a:pt x="3283945" y="2474437"/>
+                  </a:lnTo>
+                  <a:lnTo>
+                    <a:pt x="3207476" y="2472495"/>
+                  </a:lnTo>
+                  <a:lnTo>
+                    <a:pt x="3131008" y="2470548"/>
+                  </a:lnTo>
+                  <a:lnTo>
+                    <a:pt x="3054539" y="2468596"/>
+                  </a:lnTo>
+                  <a:lnTo>
+                    <a:pt x="2978071" y="2466639"/>
+                  </a:lnTo>
+                  <a:lnTo>
+                    <a:pt x="2901602" y="2464678"/>
+                  </a:lnTo>
+                  <a:lnTo>
+                    <a:pt x="2825134" y="2462711"/>
+                  </a:lnTo>
+                  <a:lnTo>
+                    <a:pt x="2748666" y="2460740"/>
+                  </a:lnTo>
+                  <a:lnTo>
+                    <a:pt x="2672197" y="2458763"/>
+                  </a:lnTo>
+                  <a:lnTo>
+                    <a:pt x="2595729" y="2456782"/>
+                  </a:lnTo>
+                  <a:lnTo>
+                    <a:pt x="2519260" y="2454796"/>
+                  </a:lnTo>
+                  <a:lnTo>
+                    <a:pt x="2442792" y="2452805"/>
+                  </a:lnTo>
+                  <a:lnTo>
+                    <a:pt x="2366323" y="2450808"/>
+                  </a:lnTo>
+                  <a:lnTo>
+                    <a:pt x="2289855" y="2448807"/>
+                  </a:lnTo>
+                  <a:lnTo>
+                    <a:pt x="2213386" y="2446801"/>
+                  </a:lnTo>
+                  <a:lnTo>
+                    <a:pt x="2136918" y="2444789"/>
+                  </a:lnTo>
+                  <a:lnTo>
+                    <a:pt x="2060450" y="2442773"/>
+                  </a:lnTo>
+                  <a:lnTo>
+                    <a:pt x="1983981" y="2440751"/>
+                  </a:lnTo>
+                  <a:lnTo>
+                    <a:pt x="1907513" y="2438725"/>
+                  </a:lnTo>
+                  <a:lnTo>
+                    <a:pt x="1831044" y="2436693"/>
+                  </a:lnTo>
+                  <a:lnTo>
+                    <a:pt x="1754576" y="2434657"/>
+                  </a:lnTo>
+                  <a:lnTo>
+                    <a:pt x="1678107" y="2432615"/>
+                  </a:lnTo>
+                  <a:lnTo>
+                    <a:pt x="1601639" y="2430568"/>
+                  </a:lnTo>
+                  <a:lnTo>
+                    <a:pt x="1525171" y="2428516"/>
+                  </a:lnTo>
+                  <a:lnTo>
+                    <a:pt x="1448702" y="2426459"/>
+                  </a:lnTo>
+                  <a:lnTo>
+                    <a:pt x="1372234" y="2424397"/>
+                  </a:lnTo>
+                  <a:lnTo>
+                    <a:pt x="1295765" y="2422329"/>
+                  </a:lnTo>
+                  <a:lnTo>
+                    <a:pt x="1219297" y="2420257"/>
+                  </a:lnTo>
+                  <a:lnTo>
+                    <a:pt x="1142828" y="2418179"/>
+                  </a:lnTo>
+                  <a:lnTo>
+                    <a:pt x="1066360" y="2416096"/>
+                  </a:lnTo>
+                  <a:lnTo>
+                    <a:pt x="989892" y="2414007"/>
+                  </a:lnTo>
+                  <a:lnTo>
+                    <a:pt x="913423" y="2411914"/>
+                  </a:lnTo>
+                  <a:lnTo>
+                    <a:pt x="836955" y="2409815"/>
+                  </a:lnTo>
+                  <a:lnTo>
+                    <a:pt x="760486" y="2407711"/>
+                  </a:lnTo>
+                  <a:lnTo>
+                    <a:pt x="684018" y="2405602"/>
+                  </a:lnTo>
+                  <a:lnTo>
+                    <a:pt x="607549" y="2403487"/>
+                  </a:lnTo>
+                  <a:lnTo>
+                    <a:pt x="531081" y="2401367"/>
+                  </a:lnTo>
+                  <a:lnTo>
+                    <a:pt x="454613" y="2399242"/>
+                  </a:lnTo>
+                  <a:lnTo>
+                    <a:pt x="378144" y="2397112"/>
+                  </a:lnTo>
+                  <a:lnTo>
+                    <a:pt x="301676" y="2394976"/>
+                  </a:lnTo>
+                  <a:lnTo>
+                    <a:pt x="225207" y="2392835"/>
+                  </a:lnTo>
+                  <a:lnTo>
+                    <a:pt x="148739" y="2390688"/>
+                  </a:lnTo>
+                  <a:lnTo>
+                    <a:pt x="72270" y="2388536"/>
+                  </a:lnTo>
+                  <a:lnTo>
+                    <a:pt x="0" y="2386497"/>
                   </a:lnTo>
                   <a:close/>
                 </a:path>
@@ -3543,234 +3543,234 @@
           </p:nvSpPr>
           <p:spPr>
             <a:xfrm>
-              <a:off x="2522077" y="2073503"/>
-              <a:ext cx="5666413" cy="2754281"/>
+              <a:off x="2594611" y="2209169"/>
+              <a:ext cx="5581336" cy="2569011"/>
             </a:xfrm>
             <a:custGeom>
               <a:avLst/>
               <a:pathLst>
-                <a:path w="5666413" h="2754281">
+                <a:path w="5581336" h="2569011">
                   <a:moveTo>
                     <a:pt x="0" y="0"/>
                   </a:moveTo>
                   <a:lnTo>
-                    <a:pt x="76761" y="220977"/>
-                  </a:lnTo>
-                  <a:lnTo>
-                    <a:pt x="154396" y="430137"/>
-                  </a:lnTo>
-                  <a:lnTo>
-                    <a:pt x="232030" y="625890"/>
-                  </a:lnTo>
-                  <a:lnTo>
-                    <a:pt x="309664" y="809093"/>
-                  </a:lnTo>
-                  <a:lnTo>
-                    <a:pt x="387298" y="980553"/>
-                  </a:lnTo>
-                  <a:lnTo>
-                    <a:pt x="464932" y="1141021"/>
-                  </a:lnTo>
-                  <a:lnTo>
-                    <a:pt x="542566" y="1291202"/>
-                  </a:lnTo>
-                  <a:lnTo>
-                    <a:pt x="620200" y="1431756"/>
-                  </a:lnTo>
-                  <a:lnTo>
-                    <a:pt x="697834" y="1563299"/>
-                  </a:lnTo>
-                  <a:lnTo>
-                    <a:pt x="775468" y="1686410"/>
-                  </a:lnTo>
-                  <a:lnTo>
-                    <a:pt x="853102" y="1801629"/>
-                  </a:lnTo>
-                  <a:lnTo>
-                    <a:pt x="930736" y="1909461"/>
-                  </a:lnTo>
-                  <a:lnTo>
-                    <a:pt x="1008370" y="2010381"/>
-                  </a:lnTo>
-                  <a:lnTo>
-                    <a:pt x="1086004" y="2104832"/>
-                  </a:lnTo>
-                  <a:lnTo>
-                    <a:pt x="1163638" y="2193227"/>
-                  </a:lnTo>
-                  <a:lnTo>
-                    <a:pt x="1241272" y="2275956"/>
-                  </a:lnTo>
-                  <a:lnTo>
-                    <a:pt x="1318906" y="2353382"/>
-                  </a:lnTo>
-                  <a:lnTo>
-                    <a:pt x="1396540" y="2425844"/>
-                  </a:lnTo>
-                  <a:lnTo>
-                    <a:pt x="1474174" y="2493662"/>
-                  </a:lnTo>
-                  <a:lnTo>
-                    <a:pt x="1551808" y="2557131"/>
-                  </a:lnTo>
-                  <a:lnTo>
-                    <a:pt x="1629442" y="2616532"/>
-                  </a:lnTo>
-                  <a:lnTo>
-                    <a:pt x="1707076" y="2654964"/>
-                  </a:lnTo>
-                  <a:lnTo>
-                    <a:pt x="1784710" y="2657036"/>
-                  </a:lnTo>
-                  <a:lnTo>
-                    <a:pt x="1862345" y="2659102"/>
-                  </a:lnTo>
-                  <a:lnTo>
-                    <a:pt x="1939979" y="2661164"/>
-                  </a:lnTo>
-                  <a:lnTo>
-                    <a:pt x="2017613" y="2663220"/>
-                  </a:lnTo>
-                  <a:lnTo>
-                    <a:pt x="2095247" y="2665271"/>
-                  </a:lnTo>
-                  <a:lnTo>
-                    <a:pt x="2172881" y="2667317"/>
-                  </a:lnTo>
-                  <a:lnTo>
-                    <a:pt x="2250515" y="2669358"/>
-                  </a:lnTo>
-                  <a:lnTo>
-                    <a:pt x="2328149" y="2671394"/>
-                  </a:lnTo>
-                  <a:lnTo>
-                    <a:pt x="2405783" y="2673424"/>
-                  </a:lnTo>
-                  <a:lnTo>
-                    <a:pt x="2483417" y="2675450"/>
-                  </a:lnTo>
-                  <a:lnTo>
-                    <a:pt x="2561051" y="2677470"/>
-                  </a:lnTo>
-                  <a:lnTo>
-                    <a:pt x="2638685" y="2679486"/>
-                  </a:lnTo>
-                  <a:lnTo>
-                    <a:pt x="2716319" y="2681496"/>
-                  </a:lnTo>
-                  <a:lnTo>
-                    <a:pt x="2793953" y="2683502"/>
-                  </a:lnTo>
-                  <a:lnTo>
-                    <a:pt x="2871587" y="2685502"/>
-                  </a:lnTo>
-                  <a:lnTo>
-                    <a:pt x="2949221" y="2687498"/>
-                  </a:lnTo>
-                  <a:lnTo>
-                    <a:pt x="3026855" y="2689488"/>
-                  </a:lnTo>
-                  <a:lnTo>
-                    <a:pt x="3104489" y="2691473"/>
-                  </a:lnTo>
-                  <a:lnTo>
-                    <a:pt x="3182123" y="2693454"/>
-                  </a:lnTo>
-                  <a:lnTo>
-                    <a:pt x="3259757" y="2695429"/>
-                  </a:lnTo>
-                  <a:lnTo>
-                    <a:pt x="3337391" y="2697400"/>
-                  </a:lnTo>
-                  <a:lnTo>
-                    <a:pt x="3415025" y="2699366"/>
-                  </a:lnTo>
-                  <a:lnTo>
-                    <a:pt x="3492659" y="2701326"/>
-                  </a:lnTo>
-                  <a:lnTo>
-                    <a:pt x="3570294" y="2703282"/>
-                  </a:lnTo>
-                  <a:lnTo>
-                    <a:pt x="3647928" y="2705233"/>
-                  </a:lnTo>
-                  <a:lnTo>
-                    <a:pt x="3725562" y="2707179"/>
-                  </a:lnTo>
-                  <a:lnTo>
-                    <a:pt x="3803196" y="2709120"/>
-                  </a:lnTo>
-                  <a:lnTo>
-                    <a:pt x="3880830" y="2711057"/>
-                  </a:lnTo>
-                  <a:lnTo>
-                    <a:pt x="3958464" y="2712988"/>
-                  </a:lnTo>
-                  <a:lnTo>
-                    <a:pt x="4036098" y="2714915"/>
-                  </a:lnTo>
-                  <a:lnTo>
-                    <a:pt x="4113732" y="2716837"/>
-                  </a:lnTo>
-                  <a:lnTo>
-                    <a:pt x="4191366" y="2718754"/>
-                  </a:lnTo>
-                  <a:lnTo>
-                    <a:pt x="4269000" y="2720666"/>
-                  </a:lnTo>
-                  <a:lnTo>
-                    <a:pt x="4346634" y="2722574"/>
-                  </a:lnTo>
-                  <a:lnTo>
-                    <a:pt x="4424268" y="2724476"/>
-                  </a:lnTo>
-                  <a:lnTo>
-                    <a:pt x="4501902" y="2726374"/>
-                  </a:lnTo>
-                  <a:lnTo>
-                    <a:pt x="4579536" y="2728268"/>
-                  </a:lnTo>
-                  <a:lnTo>
-                    <a:pt x="4657170" y="2730156"/>
-                  </a:lnTo>
-                  <a:lnTo>
-                    <a:pt x="4734804" y="2732040"/>
-                  </a:lnTo>
-                  <a:lnTo>
-                    <a:pt x="4812438" y="2733919"/>
-                  </a:lnTo>
-                  <a:lnTo>
-                    <a:pt x="4890072" y="2735793"/>
-                  </a:lnTo>
-                  <a:lnTo>
-                    <a:pt x="4967706" y="2737663"/>
-                  </a:lnTo>
-                  <a:lnTo>
-                    <a:pt x="5045340" y="2739528"/>
-                  </a:lnTo>
-                  <a:lnTo>
-                    <a:pt x="5122974" y="2741388"/>
-                  </a:lnTo>
-                  <a:lnTo>
-                    <a:pt x="5200608" y="2743244"/>
-                  </a:lnTo>
-                  <a:lnTo>
-                    <a:pt x="5278243" y="2745095"/>
-                  </a:lnTo>
-                  <a:lnTo>
-                    <a:pt x="5355877" y="2746942"/>
-                  </a:lnTo>
-                  <a:lnTo>
-                    <a:pt x="5433511" y="2748783"/>
-                  </a:lnTo>
-                  <a:lnTo>
-                    <a:pt x="5511145" y="2750621"/>
-                  </a:lnTo>
-                  <a:lnTo>
-                    <a:pt x="5588779" y="2752453"/>
-                  </a:lnTo>
-                  <a:lnTo>
-                    <a:pt x="5666413" y="2754281"/>
+                    <a:pt x="75609" y="206112"/>
+                  </a:lnTo>
+                  <a:lnTo>
+                    <a:pt x="152077" y="401204"/>
+                  </a:lnTo>
+                  <a:lnTo>
+                    <a:pt x="228546" y="583788"/>
+                  </a:lnTo>
+                  <a:lnTo>
+                    <a:pt x="305014" y="754669"/>
+                  </a:lnTo>
+                  <a:lnTo>
+                    <a:pt x="381483" y="914595"/>
+                  </a:lnTo>
+                  <a:lnTo>
+                    <a:pt x="457951" y="1064268"/>
+                  </a:lnTo>
+                  <a:lnTo>
+                    <a:pt x="534420" y="1204347"/>
+                  </a:lnTo>
+                  <a:lnTo>
+                    <a:pt x="610888" y="1335447"/>
+                  </a:lnTo>
+                  <a:lnTo>
+                    <a:pt x="687356" y="1458142"/>
+                  </a:lnTo>
+                  <a:lnTo>
+                    <a:pt x="763825" y="1572971"/>
+                  </a:lnTo>
+                  <a:lnTo>
+                    <a:pt x="840293" y="1680440"/>
+                  </a:lnTo>
+                  <a:lnTo>
+                    <a:pt x="916762" y="1781019"/>
+                  </a:lnTo>
+                  <a:lnTo>
+                    <a:pt x="993230" y="1875150"/>
+                  </a:lnTo>
+                  <a:lnTo>
+                    <a:pt x="1069699" y="1963247"/>
+                  </a:lnTo>
+                  <a:lnTo>
+                    <a:pt x="1146167" y="2045697"/>
+                  </a:lnTo>
+                  <a:lnTo>
+                    <a:pt x="1222635" y="2122861"/>
+                  </a:lnTo>
+                  <a:lnTo>
+                    <a:pt x="1299104" y="2195079"/>
+                  </a:lnTo>
+                  <a:lnTo>
+                    <a:pt x="1375572" y="2262667"/>
+                  </a:lnTo>
+                  <a:lnTo>
+                    <a:pt x="1452041" y="2325922"/>
+                  </a:lnTo>
+                  <a:lnTo>
+                    <a:pt x="1528509" y="2385122"/>
+                  </a:lnTo>
+                  <a:lnTo>
+                    <a:pt x="1604978" y="2440528"/>
+                  </a:lnTo>
+                  <a:lnTo>
+                    <a:pt x="1681446" y="2476374"/>
+                  </a:lnTo>
+                  <a:lnTo>
+                    <a:pt x="1757915" y="2478307"/>
+                  </a:lnTo>
+                  <a:lnTo>
+                    <a:pt x="1834383" y="2480234"/>
+                  </a:lnTo>
+                  <a:lnTo>
+                    <a:pt x="1910851" y="2482157"/>
+                  </a:lnTo>
+                  <a:lnTo>
+                    <a:pt x="1987320" y="2484075"/>
+                  </a:lnTo>
+                  <a:lnTo>
+                    <a:pt x="2063788" y="2485988"/>
+                  </a:lnTo>
+                  <a:lnTo>
+                    <a:pt x="2140257" y="2487896"/>
+                  </a:lnTo>
+                  <a:lnTo>
+                    <a:pt x="2216725" y="2489800"/>
+                  </a:lnTo>
+                  <a:lnTo>
+                    <a:pt x="2293194" y="2491699"/>
+                  </a:lnTo>
+                  <a:lnTo>
+                    <a:pt x="2369662" y="2493593"/>
+                  </a:lnTo>
+                  <a:lnTo>
+                    <a:pt x="2446130" y="2495482"/>
+                  </a:lnTo>
+                  <a:lnTo>
+                    <a:pt x="2522599" y="2497367"/>
+                  </a:lnTo>
+                  <a:lnTo>
+                    <a:pt x="2599067" y="2499247"/>
+                  </a:lnTo>
+                  <a:lnTo>
+                    <a:pt x="2675536" y="2501122"/>
+                  </a:lnTo>
+                  <a:lnTo>
+                    <a:pt x="2752004" y="2502992"/>
+                  </a:lnTo>
+                  <a:lnTo>
+                    <a:pt x="2828473" y="2504858"/>
+                  </a:lnTo>
+                  <a:lnTo>
+                    <a:pt x="2904941" y="2506719"/>
+                  </a:lnTo>
+                  <a:lnTo>
+                    <a:pt x="2981409" y="2508576"/>
+                  </a:lnTo>
+                  <a:lnTo>
+                    <a:pt x="3057878" y="2510428"/>
+                  </a:lnTo>
+                  <a:lnTo>
+                    <a:pt x="3134346" y="2512275"/>
+                  </a:lnTo>
+                  <a:lnTo>
+                    <a:pt x="3210815" y="2514118"/>
+                  </a:lnTo>
+                  <a:lnTo>
+                    <a:pt x="3287283" y="2515956"/>
+                  </a:lnTo>
+                  <a:lnTo>
+                    <a:pt x="3363752" y="2517789"/>
+                  </a:lnTo>
+                  <a:lnTo>
+                    <a:pt x="3440220" y="2519618"/>
+                  </a:lnTo>
+                  <a:lnTo>
+                    <a:pt x="3516688" y="2521442"/>
+                  </a:lnTo>
+                  <a:lnTo>
+                    <a:pt x="3593157" y="2523262"/>
+                  </a:lnTo>
+                  <a:lnTo>
+                    <a:pt x="3669625" y="2525077"/>
+                  </a:lnTo>
+                  <a:lnTo>
+                    <a:pt x="3746094" y="2526888"/>
+                  </a:lnTo>
+                  <a:lnTo>
+                    <a:pt x="3822562" y="2528694"/>
+                  </a:lnTo>
+                  <a:lnTo>
+                    <a:pt x="3899031" y="2530496"/>
+                  </a:lnTo>
+                  <a:lnTo>
+                    <a:pt x="3975499" y="2532293"/>
+                  </a:lnTo>
+                  <a:lnTo>
+                    <a:pt x="4051967" y="2534085"/>
+                  </a:lnTo>
+                  <a:lnTo>
+                    <a:pt x="4128436" y="2535873"/>
+                  </a:lnTo>
+                  <a:lnTo>
+                    <a:pt x="4204904" y="2537657"/>
+                  </a:lnTo>
+                  <a:lnTo>
+                    <a:pt x="4281373" y="2539436"/>
+                  </a:lnTo>
+                  <a:lnTo>
+                    <a:pt x="4357841" y="2541211"/>
+                  </a:lnTo>
+                  <a:lnTo>
+                    <a:pt x="4434310" y="2542981"/>
+                  </a:lnTo>
+                  <a:lnTo>
+                    <a:pt x="4510778" y="2544747"/>
+                  </a:lnTo>
+                  <a:lnTo>
+                    <a:pt x="4587247" y="2546509"/>
+                  </a:lnTo>
+                  <a:lnTo>
+                    <a:pt x="4663715" y="2548266"/>
+                  </a:lnTo>
+                  <a:lnTo>
+                    <a:pt x="4740183" y="2550018"/>
+                  </a:lnTo>
+                  <a:lnTo>
+                    <a:pt x="4816652" y="2551767"/>
+                  </a:lnTo>
+                  <a:lnTo>
+                    <a:pt x="4893120" y="2553511"/>
+                  </a:lnTo>
+                  <a:lnTo>
+                    <a:pt x="4969589" y="2555250"/>
+                  </a:lnTo>
+                  <a:lnTo>
+                    <a:pt x="5046057" y="2556985"/>
+                  </a:lnTo>
+                  <a:lnTo>
+                    <a:pt x="5122526" y="2558716"/>
+                  </a:lnTo>
+                  <a:lnTo>
+                    <a:pt x="5198994" y="2560443"/>
+                  </a:lnTo>
+                  <a:lnTo>
+                    <a:pt x="5275462" y="2562165"/>
+                  </a:lnTo>
+                  <a:lnTo>
+                    <a:pt x="5351931" y="2563883"/>
+                  </a:lnTo>
+                  <a:lnTo>
+                    <a:pt x="5428399" y="2565596"/>
+                  </a:lnTo>
+                  <a:lnTo>
+                    <a:pt x="5504868" y="2567306"/>
+                  </a:lnTo>
+                  <a:lnTo>
+                    <a:pt x="5581336" y="2569011"/>
                   </a:lnTo>
                 </a:path>
               </a:pathLst>
@@ -3790,297 +3790,297 @@
           </p:nvSpPr>
           <p:spPr>
             <a:xfrm>
-              <a:off x="817517" y="4632108"/>
-              <a:ext cx="7370972" cy="897476"/>
+              <a:off x="915645" y="4595666"/>
+              <a:ext cx="7260303" cy="837106"/>
             </a:xfrm>
             <a:custGeom>
               <a:avLst/>
               <a:pathLst>
-                <a:path w="7370972" h="897476">
+                <a:path w="7260303" h="837106">
                   <a:moveTo>
-                    <a:pt x="7370972" y="897476"/>
+                    <a:pt x="7260303" y="837106"/>
                   </a:moveTo>
                   <a:lnTo>
-                    <a:pt x="7293338" y="895581"/>
-                  </a:lnTo>
-                  <a:lnTo>
-                    <a:pt x="7215704" y="893556"/>
-                  </a:lnTo>
-                  <a:lnTo>
-                    <a:pt x="7138070" y="891393"/>
-                  </a:lnTo>
-                  <a:lnTo>
-                    <a:pt x="7060436" y="889081"/>
-                  </a:lnTo>
-                  <a:lnTo>
-                    <a:pt x="6982802" y="886611"/>
-                  </a:lnTo>
-                  <a:lnTo>
-                    <a:pt x="6905168" y="883972"/>
-                  </a:lnTo>
-                  <a:lnTo>
-                    <a:pt x="6827534" y="881152"/>
-                  </a:lnTo>
-                  <a:lnTo>
-                    <a:pt x="6749900" y="878139"/>
-                  </a:lnTo>
-                  <a:lnTo>
-                    <a:pt x="6672266" y="874920"/>
-                  </a:lnTo>
-                  <a:lnTo>
-                    <a:pt x="6594632" y="871480"/>
-                  </a:lnTo>
-                  <a:lnTo>
-                    <a:pt x="6516998" y="867804"/>
-                  </a:lnTo>
-                  <a:lnTo>
-                    <a:pt x="6439364" y="863877"/>
-                  </a:lnTo>
-                  <a:lnTo>
-                    <a:pt x="6361730" y="859680"/>
-                  </a:lnTo>
-                  <a:lnTo>
-                    <a:pt x="6284096" y="855197"/>
-                  </a:lnTo>
-                  <a:lnTo>
-                    <a:pt x="6206462" y="850406"/>
-                  </a:lnTo>
-                  <a:lnTo>
-                    <a:pt x="6128827" y="845287"/>
-                  </a:lnTo>
-                  <a:lnTo>
-                    <a:pt x="6051193" y="839817"/>
-                  </a:lnTo>
-                  <a:lnTo>
-                    <a:pt x="5973559" y="833972"/>
-                  </a:lnTo>
-                  <a:lnTo>
-                    <a:pt x="5895925" y="827728"/>
-                  </a:lnTo>
-                  <a:lnTo>
-                    <a:pt x="5818291" y="821055"/>
-                  </a:lnTo>
-                  <a:lnTo>
-                    <a:pt x="5740657" y="813926"/>
-                  </a:lnTo>
-                  <a:lnTo>
-                    <a:pt x="5663023" y="806308"/>
-                  </a:lnTo>
-                  <a:lnTo>
-                    <a:pt x="5585389" y="798168"/>
-                  </a:lnTo>
-                  <a:lnTo>
-                    <a:pt x="5507755" y="789471"/>
-                  </a:lnTo>
-                  <a:lnTo>
-                    <a:pt x="5430121" y="780178"/>
-                  </a:lnTo>
-                  <a:lnTo>
-                    <a:pt x="5352487" y="770249"/>
-                  </a:lnTo>
-                  <a:lnTo>
-                    <a:pt x="5274853" y="759640"/>
-                  </a:lnTo>
-                  <a:lnTo>
-                    <a:pt x="5197219" y="748303"/>
-                  </a:lnTo>
-                  <a:lnTo>
-                    <a:pt x="5119585" y="736191"/>
-                  </a:lnTo>
-                  <a:lnTo>
-                    <a:pt x="5041951" y="723248"/>
-                  </a:lnTo>
-                  <a:lnTo>
-                    <a:pt x="4964317" y="709419"/>
-                  </a:lnTo>
-                  <a:lnTo>
-                    <a:pt x="4886683" y="694643"/>
-                  </a:lnTo>
-                  <a:lnTo>
-                    <a:pt x="4809049" y="678855"/>
-                  </a:lnTo>
-                  <a:lnTo>
-                    <a:pt x="4731415" y="661985"/>
-                  </a:lnTo>
-                  <a:lnTo>
-                    <a:pt x="4653781" y="643960"/>
-                  </a:lnTo>
-                  <a:lnTo>
-                    <a:pt x="4576147" y="624700"/>
-                  </a:lnTo>
-                  <a:lnTo>
-                    <a:pt x="4498513" y="604121"/>
-                  </a:lnTo>
-                  <a:lnTo>
-                    <a:pt x="4420879" y="582133"/>
-                  </a:lnTo>
-                  <a:lnTo>
-                    <a:pt x="4343244" y="558638"/>
-                  </a:lnTo>
-                  <a:lnTo>
-                    <a:pt x="4265610" y="533534"/>
-                  </a:lnTo>
-                  <a:lnTo>
-                    <a:pt x="4187976" y="506710"/>
-                  </a:lnTo>
-                  <a:lnTo>
-                    <a:pt x="4110342" y="478049"/>
-                  </a:lnTo>
-                  <a:lnTo>
-                    <a:pt x="4032708" y="447425"/>
-                  </a:lnTo>
-                  <a:lnTo>
-                    <a:pt x="3955074" y="414704"/>
-                  </a:lnTo>
-                  <a:lnTo>
-                    <a:pt x="3877440" y="379741"/>
-                  </a:lnTo>
-                  <a:lnTo>
-                    <a:pt x="3799806" y="342383"/>
-                  </a:lnTo>
-                  <a:lnTo>
-                    <a:pt x="3722172" y="302466"/>
-                  </a:lnTo>
-                  <a:lnTo>
-                    <a:pt x="3644538" y="259815"/>
-                  </a:lnTo>
-                  <a:lnTo>
-                    <a:pt x="3566904" y="214243"/>
-                  </a:lnTo>
-                  <a:lnTo>
-                    <a:pt x="3489270" y="165549"/>
-                  </a:lnTo>
-                  <a:lnTo>
-                    <a:pt x="3411636" y="113520"/>
-                  </a:lnTo>
-                  <a:lnTo>
-                    <a:pt x="3334002" y="94282"/>
-                  </a:lnTo>
-                  <a:lnTo>
-                    <a:pt x="3256368" y="92199"/>
-                  </a:lnTo>
-                  <a:lnTo>
-                    <a:pt x="3178734" y="90112"/>
-                  </a:lnTo>
-                  <a:lnTo>
-                    <a:pt x="3101100" y="88019"/>
-                  </a:lnTo>
-                  <a:lnTo>
-                    <a:pt x="3023466" y="85922"/>
-                  </a:lnTo>
-                  <a:lnTo>
-                    <a:pt x="2945832" y="83819"/>
-                  </a:lnTo>
-                  <a:lnTo>
-                    <a:pt x="2868198" y="81710"/>
-                  </a:lnTo>
-                  <a:lnTo>
-                    <a:pt x="2790564" y="79597"/>
-                  </a:lnTo>
-                  <a:lnTo>
-                    <a:pt x="2712930" y="77478"/>
-                  </a:lnTo>
-                  <a:lnTo>
-                    <a:pt x="2635295" y="75353"/>
-                  </a:lnTo>
-                  <a:lnTo>
-                    <a:pt x="2557661" y="73224"/>
-                  </a:lnTo>
-                  <a:lnTo>
-                    <a:pt x="2480027" y="71089"/>
-                  </a:lnTo>
-                  <a:lnTo>
-                    <a:pt x="2402393" y="68949"/>
-                  </a:lnTo>
-                  <a:lnTo>
-                    <a:pt x="2324759" y="66803"/>
-                  </a:lnTo>
-                  <a:lnTo>
-                    <a:pt x="2247125" y="64652"/>
-                  </a:lnTo>
-                  <a:lnTo>
-                    <a:pt x="2169491" y="62496"/>
-                  </a:lnTo>
-                  <a:lnTo>
-                    <a:pt x="2091857" y="60334"/>
-                  </a:lnTo>
-                  <a:lnTo>
-                    <a:pt x="2014223" y="58167"/>
-                  </a:lnTo>
-                  <a:lnTo>
-                    <a:pt x="1936589" y="55994"/>
-                  </a:lnTo>
-                  <a:lnTo>
-                    <a:pt x="1858955" y="53816"/>
-                  </a:lnTo>
-                  <a:lnTo>
-                    <a:pt x="1781321" y="51632"/>
-                  </a:lnTo>
-                  <a:lnTo>
-                    <a:pt x="1703687" y="49443"/>
-                  </a:lnTo>
-                  <a:lnTo>
-                    <a:pt x="1626053" y="47249"/>
-                  </a:lnTo>
-                  <a:lnTo>
-                    <a:pt x="1548419" y="45049"/>
-                  </a:lnTo>
-                  <a:lnTo>
-                    <a:pt x="1470785" y="42843"/>
-                  </a:lnTo>
-                  <a:lnTo>
-                    <a:pt x="1393151" y="40632"/>
-                  </a:lnTo>
-                  <a:lnTo>
-                    <a:pt x="1315517" y="38416"/>
-                  </a:lnTo>
-                  <a:lnTo>
-                    <a:pt x="1237883" y="36194"/>
-                  </a:lnTo>
-                  <a:lnTo>
-                    <a:pt x="1160249" y="33966"/>
-                  </a:lnTo>
-                  <a:lnTo>
-                    <a:pt x="1082615" y="31733"/>
-                  </a:lnTo>
-                  <a:lnTo>
-                    <a:pt x="1004981" y="29494"/>
-                  </a:lnTo>
-                  <a:lnTo>
-                    <a:pt x="927346" y="27249"/>
-                  </a:lnTo>
-                  <a:lnTo>
-                    <a:pt x="849712" y="24999"/>
-                  </a:lnTo>
-                  <a:lnTo>
-                    <a:pt x="772078" y="22743"/>
-                  </a:lnTo>
-                  <a:lnTo>
-                    <a:pt x="694444" y="20482"/>
-                  </a:lnTo>
-                  <a:lnTo>
-                    <a:pt x="616810" y="18215"/>
-                  </a:lnTo>
-                  <a:lnTo>
-                    <a:pt x="539176" y="15942"/>
-                  </a:lnTo>
-                  <a:lnTo>
-                    <a:pt x="461542" y="13664"/>
-                  </a:lnTo>
-                  <a:lnTo>
-                    <a:pt x="383908" y="11379"/>
-                  </a:lnTo>
-                  <a:lnTo>
-                    <a:pt x="306274" y="9090"/>
-                  </a:lnTo>
-                  <a:lnTo>
-                    <a:pt x="228640" y="6794"/>
-                  </a:lnTo>
-                  <a:lnTo>
-                    <a:pt x="151006" y="4493"/>
-                  </a:lnTo>
-                  <a:lnTo>
-                    <a:pt x="73372" y="2185"/>
+                    <a:pt x="7183835" y="835338"/>
+                  </a:lnTo>
+                  <a:lnTo>
+                    <a:pt x="7107366" y="833450"/>
+                  </a:lnTo>
+                  <a:lnTo>
+                    <a:pt x="7030898" y="831432"/>
+                  </a:lnTo>
+                  <a:lnTo>
+                    <a:pt x="6954429" y="829276"/>
+                  </a:lnTo>
+                  <a:lnTo>
+                    <a:pt x="6877961" y="826972"/>
+                  </a:lnTo>
+                  <a:lnTo>
+                    <a:pt x="6801492" y="824510"/>
+                  </a:lnTo>
+                  <a:lnTo>
+                    <a:pt x="6725024" y="821880"/>
+                  </a:lnTo>
+                  <a:lnTo>
+                    <a:pt x="6648556" y="819070"/>
+                  </a:lnTo>
+                  <a:lnTo>
+                    <a:pt x="6572087" y="816067"/>
+                  </a:lnTo>
+                  <a:lnTo>
+                    <a:pt x="6495619" y="812858"/>
+                  </a:lnTo>
+                  <a:lnTo>
+                    <a:pt x="6419150" y="809430"/>
+                  </a:lnTo>
+                  <a:lnTo>
+                    <a:pt x="6342682" y="805767"/>
+                  </a:lnTo>
+                  <a:lnTo>
+                    <a:pt x="6266213" y="801853"/>
+                  </a:lnTo>
+                  <a:lnTo>
+                    <a:pt x="6189745" y="797671"/>
+                  </a:lnTo>
+                  <a:lnTo>
+                    <a:pt x="6113277" y="793202"/>
+                  </a:lnTo>
+                  <a:lnTo>
+                    <a:pt x="6036808" y="788427"/>
+                  </a:lnTo>
+                  <a:lnTo>
+                    <a:pt x="5960340" y="783325"/>
+                  </a:lnTo>
+                  <a:lnTo>
+                    <a:pt x="5883871" y="777874"/>
+                  </a:lnTo>
+                  <a:lnTo>
+                    <a:pt x="5807403" y="772050"/>
+                  </a:lnTo>
+                  <a:lnTo>
+                    <a:pt x="5730934" y="765826"/>
+                  </a:lnTo>
+                  <a:lnTo>
+                    <a:pt x="5654466" y="759176"/>
+                  </a:lnTo>
+                  <a:lnTo>
+                    <a:pt x="5577998" y="752071"/>
+                  </a:lnTo>
+                  <a:lnTo>
+                    <a:pt x="5501529" y="744479"/>
+                  </a:lnTo>
+                  <a:lnTo>
+                    <a:pt x="5425061" y="736366"/>
+                  </a:lnTo>
+                  <a:lnTo>
+                    <a:pt x="5348592" y="727699"/>
+                  </a:lnTo>
+                  <a:lnTo>
+                    <a:pt x="5272124" y="718437"/>
+                  </a:lnTo>
+                  <a:lnTo>
+                    <a:pt x="5195655" y="708541"/>
+                  </a:lnTo>
+                  <a:lnTo>
+                    <a:pt x="5119187" y="697968"/>
+                  </a:lnTo>
+                  <a:lnTo>
+                    <a:pt x="5042719" y="686670"/>
+                  </a:lnTo>
+                  <a:lnTo>
+                    <a:pt x="4966250" y="674598"/>
+                  </a:lnTo>
+                  <a:lnTo>
+                    <a:pt x="4889782" y="661699"/>
+                  </a:lnTo>
+                  <a:lnTo>
+                    <a:pt x="4813313" y="647917"/>
+                  </a:lnTo>
+                  <a:lnTo>
+                    <a:pt x="4736845" y="633191"/>
+                  </a:lnTo>
+                  <a:lnTo>
+                    <a:pt x="4660376" y="617456"/>
+                  </a:lnTo>
+                  <a:lnTo>
+                    <a:pt x="4583908" y="600643"/>
+                  </a:lnTo>
+                  <a:lnTo>
+                    <a:pt x="4507439" y="582679"/>
+                  </a:lnTo>
+                  <a:lnTo>
+                    <a:pt x="4430971" y="563484"/>
+                  </a:lnTo>
+                  <a:lnTo>
+                    <a:pt x="4354503" y="542975"/>
+                  </a:lnTo>
+                  <a:lnTo>
+                    <a:pt x="4278034" y="521060"/>
+                  </a:lnTo>
+                  <a:lnTo>
+                    <a:pt x="4201566" y="497645"/>
+                  </a:lnTo>
+                  <a:lnTo>
+                    <a:pt x="4125097" y="472626"/>
+                  </a:lnTo>
+                  <a:lnTo>
+                    <a:pt x="4048629" y="445893"/>
+                  </a:lnTo>
+                  <a:lnTo>
+                    <a:pt x="3972160" y="417329"/>
+                  </a:lnTo>
+                  <a:lnTo>
+                    <a:pt x="3895692" y="386808"/>
+                  </a:lnTo>
+                  <a:lnTo>
+                    <a:pt x="3819224" y="354197"/>
+                  </a:lnTo>
+                  <a:lnTo>
+                    <a:pt x="3742755" y="319352"/>
+                  </a:lnTo>
+                  <a:lnTo>
+                    <a:pt x="3666287" y="282120"/>
+                  </a:lnTo>
+                  <a:lnTo>
+                    <a:pt x="3589818" y="242338"/>
+                  </a:lnTo>
+                  <a:lnTo>
+                    <a:pt x="3513350" y="199831"/>
+                  </a:lnTo>
+                  <a:lnTo>
+                    <a:pt x="3436881" y="154413"/>
+                  </a:lnTo>
+                  <a:lnTo>
+                    <a:pt x="3360413" y="105884"/>
+                  </a:lnTo>
+                  <a:lnTo>
+                    <a:pt x="3283945" y="87939"/>
+                  </a:lnTo>
+                  <a:lnTo>
+                    <a:pt x="3207476" y="85997"/>
+                  </a:lnTo>
+                  <a:lnTo>
+                    <a:pt x="3131008" y="84050"/>
+                  </a:lnTo>
+                  <a:lnTo>
+                    <a:pt x="3054539" y="82099"/>
+                  </a:lnTo>
+                  <a:lnTo>
+                    <a:pt x="2978071" y="80142"/>
+                  </a:lnTo>
+                  <a:lnTo>
+                    <a:pt x="2901602" y="78180"/>
+                  </a:lnTo>
+                  <a:lnTo>
+                    <a:pt x="2825134" y="76214"/>
+                  </a:lnTo>
+                  <a:lnTo>
+                    <a:pt x="2748666" y="74242"/>
+                  </a:lnTo>
+                  <a:lnTo>
+                    <a:pt x="2672197" y="72266"/>
+                  </a:lnTo>
+                  <a:lnTo>
+                    <a:pt x="2595729" y="70285"/>
+                  </a:lnTo>
+                  <a:lnTo>
+                    <a:pt x="2519260" y="68298"/>
+                  </a:lnTo>
+                  <a:lnTo>
+                    <a:pt x="2442792" y="66307"/>
+                  </a:lnTo>
+                  <a:lnTo>
+                    <a:pt x="2366323" y="64311"/>
+                  </a:lnTo>
+                  <a:lnTo>
+                    <a:pt x="2289855" y="62309"/>
+                  </a:lnTo>
+                  <a:lnTo>
+                    <a:pt x="2213386" y="60303"/>
+                  </a:lnTo>
+                  <a:lnTo>
+                    <a:pt x="2136918" y="58292"/>
+                  </a:lnTo>
+                  <a:lnTo>
+                    <a:pt x="2060450" y="56275"/>
+                  </a:lnTo>
+                  <a:lnTo>
+                    <a:pt x="1983981" y="54254"/>
+                  </a:lnTo>
+                  <a:lnTo>
+                    <a:pt x="1907513" y="52227"/>
+                  </a:lnTo>
+                  <a:lnTo>
+                    <a:pt x="1831044" y="50196"/>
+                  </a:lnTo>
+                  <a:lnTo>
+                    <a:pt x="1754576" y="48159"/>
+                  </a:lnTo>
+                  <a:lnTo>
+                    <a:pt x="1678107" y="46117"/>
+                  </a:lnTo>
+                  <a:lnTo>
+                    <a:pt x="1601639" y="44071"/>
+                  </a:lnTo>
+                  <a:lnTo>
+                    <a:pt x="1525171" y="42019"/>
+                  </a:lnTo>
+                  <a:lnTo>
+                    <a:pt x="1448702" y="39961"/>
+                  </a:lnTo>
+                  <a:lnTo>
+                    <a:pt x="1372234" y="37899"/>
+                  </a:lnTo>
+                  <a:lnTo>
+                    <a:pt x="1295765" y="35832"/>
+                  </a:lnTo>
+                  <a:lnTo>
+                    <a:pt x="1219297" y="33759"/>
+                  </a:lnTo>
+                  <a:lnTo>
+                    <a:pt x="1142828" y="31681"/>
+                  </a:lnTo>
+                  <a:lnTo>
+                    <a:pt x="1066360" y="29598"/>
+                  </a:lnTo>
+                  <a:lnTo>
+                    <a:pt x="989892" y="27510"/>
+                  </a:lnTo>
+                  <a:lnTo>
+                    <a:pt x="913423" y="25416"/>
+                  </a:lnTo>
+                  <a:lnTo>
+                    <a:pt x="836955" y="23317"/>
+                  </a:lnTo>
+                  <a:lnTo>
+                    <a:pt x="760486" y="21213"/>
+                  </a:lnTo>
+                  <a:lnTo>
+                    <a:pt x="684018" y="19104"/>
+                  </a:lnTo>
+                  <a:lnTo>
+                    <a:pt x="607549" y="16990"/>
+                  </a:lnTo>
+                  <a:lnTo>
+                    <a:pt x="531081" y="14870"/>
+                  </a:lnTo>
+                  <a:lnTo>
+                    <a:pt x="454613" y="12745"/>
+                  </a:lnTo>
+                  <a:lnTo>
+                    <a:pt x="378144" y="10614"/>
+                  </a:lnTo>
+                  <a:lnTo>
+                    <a:pt x="301676" y="8478"/>
+                  </a:lnTo>
+                  <a:lnTo>
+                    <a:pt x="225207" y="6337"/>
+                  </a:lnTo>
+                  <a:lnTo>
+                    <a:pt x="148739" y="4190"/>
+                  </a:lnTo>
+                  <a:lnTo>
+                    <a:pt x="72270" y="2038"/>
                   </a:lnTo>
                   <a:lnTo>
                     <a:pt x="0" y="0"/>
@@ -4103,297 +4103,297 @@
           </p:nvSpPr>
           <p:spPr>
             <a:xfrm>
-              <a:off x="962946" y="2073503"/>
-              <a:ext cx="7225544" cy="3341688"/>
+              <a:off x="1058890" y="2209169"/>
+              <a:ext cx="7117058" cy="3116905"/>
             </a:xfrm>
             <a:custGeom>
               <a:avLst/>
               <a:pathLst>
-                <a:path w="7225544" h="3341688">
+                <a:path w="7117058" h="3116905">
                   <a:moveTo>
                     <a:pt x="0" y="0"/>
                   </a:moveTo>
                   <a:lnTo>
-                    <a:pt x="5577" y="8732"/>
-                  </a:lnTo>
-                  <a:lnTo>
-                    <a:pt x="83212" y="126165"/>
-                  </a:lnTo>
-                  <a:lnTo>
-                    <a:pt x="160846" y="239629"/>
-                  </a:lnTo>
-                  <a:lnTo>
-                    <a:pt x="238480" y="349258"/>
-                  </a:lnTo>
-                  <a:lnTo>
-                    <a:pt x="316114" y="455183"/>
-                  </a:lnTo>
-                  <a:lnTo>
-                    <a:pt x="393748" y="557529"/>
-                  </a:lnTo>
-                  <a:lnTo>
-                    <a:pt x="471382" y="656415"/>
-                  </a:lnTo>
-                  <a:lnTo>
-                    <a:pt x="549016" y="751960"/>
-                  </a:lnTo>
-                  <a:lnTo>
-                    <a:pt x="626650" y="844277"/>
-                  </a:lnTo>
-                  <a:lnTo>
-                    <a:pt x="704284" y="933473"/>
-                  </a:lnTo>
-                  <a:lnTo>
-                    <a:pt x="781918" y="1019656"/>
-                  </a:lnTo>
-                  <a:lnTo>
-                    <a:pt x="859552" y="1102926"/>
-                  </a:lnTo>
-                  <a:lnTo>
-                    <a:pt x="937186" y="1183382"/>
-                  </a:lnTo>
-                  <a:lnTo>
-                    <a:pt x="1014820" y="1261119"/>
-                  </a:lnTo>
-                  <a:lnTo>
-                    <a:pt x="1092454" y="1336229"/>
-                  </a:lnTo>
-                  <a:lnTo>
-                    <a:pt x="1170088" y="1408801"/>
-                  </a:lnTo>
-                  <a:lnTo>
-                    <a:pt x="1247722" y="1478920"/>
-                  </a:lnTo>
-                  <a:lnTo>
-                    <a:pt x="1325356" y="1546670"/>
-                  </a:lnTo>
-                  <a:lnTo>
-                    <a:pt x="1402990" y="1612130"/>
-                  </a:lnTo>
-                  <a:lnTo>
-                    <a:pt x="1480624" y="1675379"/>
-                  </a:lnTo>
-                  <a:lnTo>
-                    <a:pt x="1558258" y="1736489"/>
-                  </a:lnTo>
-                  <a:lnTo>
-                    <a:pt x="1635892" y="1795535"/>
-                  </a:lnTo>
-                  <a:lnTo>
-                    <a:pt x="1713526" y="1852586"/>
-                  </a:lnTo>
-                  <a:lnTo>
-                    <a:pt x="1791161" y="1907708"/>
-                  </a:lnTo>
-                  <a:lnTo>
-                    <a:pt x="1868795" y="1960968"/>
-                  </a:lnTo>
-                  <a:lnTo>
-                    <a:pt x="1946429" y="2012427"/>
-                  </a:lnTo>
-                  <a:lnTo>
-                    <a:pt x="2024063" y="2062148"/>
-                  </a:lnTo>
-                  <a:lnTo>
-                    <a:pt x="2101697" y="2110189"/>
-                  </a:lnTo>
-                  <a:lnTo>
-                    <a:pt x="2179331" y="2156606"/>
-                  </a:lnTo>
-                  <a:lnTo>
-                    <a:pt x="2256965" y="2201455"/>
-                  </a:lnTo>
-                  <a:lnTo>
-                    <a:pt x="2334599" y="2244788"/>
-                  </a:lnTo>
-                  <a:lnTo>
-                    <a:pt x="2412233" y="2286656"/>
-                  </a:lnTo>
-                  <a:lnTo>
-                    <a:pt x="2489867" y="2327110"/>
-                  </a:lnTo>
-                  <a:lnTo>
-                    <a:pt x="2567501" y="2366197"/>
-                  </a:lnTo>
-                  <a:lnTo>
-                    <a:pt x="2645135" y="2403962"/>
-                  </a:lnTo>
-                  <a:lnTo>
-                    <a:pt x="2722769" y="2440452"/>
-                  </a:lnTo>
-                  <a:lnTo>
-                    <a:pt x="2800403" y="2475708"/>
-                  </a:lnTo>
-                  <a:lnTo>
-                    <a:pt x="2878037" y="2509773"/>
-                  </a:lnTo>
-                  <a:lnTo>
-                    <a:pt x="2955671" y="2542687"/>
-                  </a:lnTo>
-                  <a:lnTo>
-                    <a:pt x="3033305" y="2574489"/>
-                  </a:lnTo>
-                  <a:lnTo>
-                    <a:pt x="3110939" y="2605216"/>
-                  </a:lnTo>
-                  <a:lnTo>
-                    <a:pt x="3188573" y="2634904"/>
-                  </a:lnTo>
-                  <a:lnTo>
-                    <a:pt x="3266207" y="2663589"/>
-                  </a:lnTo>
-                  <a:lnTo>
-                    <a:pt x="3343841" y="2691305"/>
-                  </a:lnTo>
-                  <a:lnTo>
-                    <a:pt x="3421475" y="2718085"/>
-                  </a:lnTo>
-                  <a:lnTo>
-                    <a:pt x="3499109" y="2743959"/>
-                  </a:lnTo>
-                  <a:lnTo>
-                    <a:pt x="3576744" y="2768959"/>
-                  </a:lnTo>
-                  <a:lnTo>
-                    <a:pt x="3654378" y="2793114"/>
-                  </a:lnTo>
-                  <a:lnTo>
-                    <a:pt x="3732012" y="2816453"/>
-                  </a:lnTo>
-                  <a:lnTo>
-                    <a:pt x="3809646" y="2839003"/>
-                  </a:lnTo>
-                  <a:lnTo>
-                    <a:pt x="3887280" y="2860791"/>
-                  </a:lnTo>
-                  <a:lnTo>
-                    <a:pt x="3964914" y="2881843"/>
-                  </a:lnTo>
-                  <a:lnTo>
-                    <a:pt x="4042548" y="2902183"/>
-                  </a:lnTo>
-                  <a:lnTo>
-                    <a:pt x="4120182" y="2921836"/>
-                  </a:lnTo>
-                  <a:lnTo>
-                    <a:pt x="4197816" y="2940825"/>
-                  </a:lnTo>
-                  <a:lnTo>
-                    <a:pt x="4275450" y="2959172"/>
-                  </a:lnTo>
-                  <a:lnTo>
-                    <a:pt x="4353084" y="2976899"/>
-                  </a:lnTo>
-                  <a:lnTo>
-                    <a:pt x="4430718" y="2994027"/>
-                  </a:lnTo>
-                  <a:lnTo>
-                    <a:pt x="4508352" y="3010577"/>
-                  </a:lnTo>
-                  <a:lnTo>
-                    <a:pt x="4585986" y="3026567"/>
-                  </a:lnTo>
-                  <a:lnTo>
-                    <a:pt x="4663620" y="3042016"/>
-                  </a:lnTo>
-                  <a:lnTo>
-                    <a:pt x="4741254" y="3056944"/>
-                  </a:lnTo>
-                  <a:lnTo>
-                    <a:pt x="4818888" y="3071367"/>
-                  </a:lnTo>
-                  <a:lnTo>
-                    <a:pt x="4896522" y="3085303"/>
-                  </a:lnTo>
-                  <a:lnTo>
-                    <a:pt x="4974156" y="3098767"/>
-                  </a:lnTo>
-                  <a:lnTo>
-                    <a:pt x="5051790" y="3111777"/>
-                  </a:lnTo>
-                  <a:lnTo>
-                    <a:pt x="5129424" y="3124347"/>
-                  </a:lnTo>
-                  <a:lnTo>
-                    <a:pt x="5207058" y="3136492"/>
-                  </a:lnTo>
-                  <a:lnTo>
-                    <a:pt x="5284693" y="3148227"/>
-                  </a:lnTo>
-                  <a:lnTo>
-                    <a:pt x="5362327" y="3159566"/>
-                  </a:lnTo>
-                  <a:lnTo>
-                    <a:pt x="5439961" y="3170521"/>
-                  </a:lnTo>
-                  <a:lnTo>
-                    <a:pt x="5517595" y="3181106"/>
-                  </a:lnTo>
-                  <a:lnTo>
-                    <a:pt x="5595229" y="3191333"/>
-                  </a:lnTo>
-                  <a:lnTo>
-                    <a:pt x="5672863" y="3201215"/>
-                  </a:lnTo>
-                  <a:lnTo>
-                    <a:pt x="5750497" y="3210762"/>
-                  </a:lnTo>
-                  <a:lnTo>
-                    <a:pt x="5828131" y="3219987"/>
-                  </a:lnTo>
-                  <a:lnTo>
-                    <a:pt x="5905765" y="3228901"/>
-                  </a:lnTo>
-                  <a:lnTo>
-                    <a:pt x="5983399" y="3237513"/>
-                  </a:lnTo>
-                  <a:lnTo>
-                    <a:pt x="6061033" y="3245834"/>
-                  </a:lnTo>
-                  <a:lnTo>
-                    <a:pt x="6138667" y="3253874"/>
-                  </a:lnTo>
-                  <a:lnTo>
-                    <a:pt x="6216301" y="3261642"/>
-                  </a:lnTo>
-                  <a:lnTo>
-                    <a:pt x="6293935" y="3269148"/>
-                  </a:lnTo>
-                  <a:lnTo>
-                    <a:pt x="6371569" y="3276400"/>
-                  </a:lnTo>
-                  <a:lnTo>
-                    <a:pt x="6449203" y="3283407"/>
-                  </a:lnTo>
-                  <a:lnTo>
-                    <a:pt x="6526837" y="3290177"/>
-                  </a:lnTo>
-                  <a:lnTo>
-                    <a:pt x="6604471" y="3296718"/>
-                  </a:lnTo>
-                  <a:lnTo>
-                    <a:pt x="6682105" y="3303038"/>
-                  </a:lnTo>
-                  <a:lnTo>
-                    <a:pt x="6759739" y="3309145"/>
-                  </a:lnTo>
-                  <a:lnTo>
-                    <a:pt x="6837373" y="3315046"/>
-                  </a:lnTo>
-                  <a:lnTo>
-                    <a:pt x="6915007" y="3320746"/>
-                  </a:lnTo>
-                  <a:lnTo>
-                    <a:pt x="6992642" y="3326255"/>
-                  </a:lnTo>
-                  <a:lnTo>
-                    <a:pt x="7070276" y="3331577"/>
-                  </a:lnTo>
-                  <a:lnTo>
-                    <a:pt x="7147910" y="3336719"/>
-                  </a:lnTo>
-                  <a:lnTo>
-                    <a:pt x="7225544" y="3341688"/>
+                    <a:pt x="5494" y="8145"/>
+                  </a:lnTo>
+                  <a:lnTo>
+                    <a:pt x="81962" y="117678"/>
+                  </a:lnTo>
+                  <a:lnTo>
+                    <a:pt x="158431" y="223510"/>
+                  </a:lnTo>
+                  <a:lnTo>
+                    <a:pt x="234899" y="325765"/>
+                  </a:lnTo>
+                  <a:lnTo>
+                    <a:pt x="311367" y="424565"/>
+                  </a:lnTo>
+                  <a:lnTo>
+                    <a:pt x="387836" y="520026"/>
+                  </a:lnTo>
+                  <a:lnTo>
+                    <a:pt x="464304" y="612261"/>
+                  </a:lnTo>
+                  <a:lnTo>
+                    <a:pt x="540773" y="701379"/>
+                  </a:lnTo>
+                  <a:lnTo>
+                    <a:pt x="617241" y="787485"/>
+                  </a:lnTo>
+                  <a:lnTo>
+                    <a:pt x="693710" y="870682"/>
+                  </a:lnTo>
+                  <a:lnTo>
+                    <a:pt x="770178" y="951067"/>
+                  </a:lnTo>
+                  <a:lnTo>
+                    <a:pt x="846646" y="1028736"/>
+                  </a:lnTo>
+                  <a:lnTo>
+                    <a:pt x="923115" y="1103780"/>
+                  </a:lnTo>
+                  <a:lnTo>
+                    <a:pt x="999583" y="1176288"/>
+                  </a:lnTo>
+                  <a:lnTo>
+                    <a:pt x="1076052" y="1246346"/>
+                  </a:lnTo>
+                  <a:lnTo>
+                    <a:pt x="1152520" y="1314036"/>
+                  </a:lnTo>
+                  <a:lnTo>
+                    <a:pt x="1228989" y="1379439"/>
+                  </a:lnTo>
+                  <a:lnTo>
+                    <a:pt x="1305457" y="1442631"/>
+                  </a:lnTo>
+                  <a:lnTo>
+                    <a:pt x="1381926" y="1503688"/>
+                  </a:lnTo>
+                  <a:lnTo>
+                    <a:pt x="1458394" y="1562682"/>
+                  </a:lnTo>
+                  <a:lnTo>
+                    <a:pt x="1534862" y="1619682"/>
+                  </a:lnTo>
+                  <a:lnTo>
+                    <a:pt x="1611331" y="1674756"/>
+                  </a:lnTo>
+                  <a:lnTo>
+                    <a:pt x="1687799" y="1727969"/>
+                  </a:lnTo>
+                  <a:lnTo>
+                    <a:pt x="1764268" y="1779383"/>
+                  </a:lnTo>
+                  <a:lnTo>
+                    <a:pt x="1840736" y="1829061"/>
+                  </a:lnTo>
+                  <a:lnTo>
+                    <a:pt x="1917205" y="1877059"/>
+                  </a:lnTo>
+                  <a:lnTo>
+                    <a:pt x="1993673" y="1923435"/>
+                  </a:lnTo>
+                  <a:lnTo>
+                    <a:pt x="2070141" y="1968244"/>
+                  </a:lnTo>
+                  <a:lnTo>
+                    <a:pt x="2146610" y="2011539"/>
+                  </a:lnTo>
+                  <a:lnTo>
+                    <a:pt x="2223078" y="2053371"/>
+                  </a:lnTo>
+                  <a:lnTo>
+                    <a:pt x="2299547" y="2093789"/>
+                  </a:lnTo>
+                  <a:lnTo>
+                    <a:pt x="2376015" y="2132841"/>
+                  </a:lnTo>
+                  <a:lnTo>
+                    <a:pt x="2452484" y="2170574"/>
+                  </a:lnTo>
+                  <a:lnTo>
+                    <a:pt x="2528952" y="2207031"/>
+                  </a:lnTo>
+                  <a:lnTo>
+                    <a:pt x="2605420" y="2242257"/>
+                  </a:lnTo>
+                  <a:lnTo>
+                    <a:pt x="2681889" y="2276292"/>
+                  </a:lnTo>
+                  <a:lnTo>
+                    <a:pt x="2758357" y="2309177"/>
+                  </a:lnTo>
+                  <a:lnTo>
+                    <a:pt x="2834826" y="2340950"/>
+                  </a:lnTo>
+                  <a:lnTo>
+                    <a:pt x="2911294" y="2371650"/>
+                  </a:lnTo>
+                  <a:lnTo>
+                    <a:pt x="2987763" y="2401312"/>
+                  </a:lnTo>
+                  <a:lnTo>
+                    <a:pt x="3064231" y="2429972"/>
+                  </a:lnTo>
+                  <a:lnTo>
+                    <a:pt x="3140699" y="2457664"/>
+                  </a:lnTo>
+                  <a:lnTo>
+                    <a:pt x="3217168" y="2484420"/>
+                  </a:lnTo>
+                  <a:lnTo>
+                    <a:pt x="3293636" y="2510271"/>
+                  </a:lnTo>
+                  <a:lnTo>
+                    <a:pt x="3370105" y="2535249"/>
+                  </a:lnTo>
+                  <a:lnTo>
+                    <a:pt x="3446573" y="2559383"/>
+                  </a:lnTo>
+                  <a:lnTo>
+                    <a:pt x="3523042" y="2582701"/>
+                  </a:lnTo>
+                  <a:lnTo>
+                    <a:pt x="3599510" y="2605231"/>
+                  </a:lnTo>
+                  <a:lnTo>
+                    <a:pt x="3675979" y="2627000"/>
+                  </a:lnTo>
+                  <a:lnTo>
+                    <a:pt x="3752447" y="2648034"/>
+                  </a:lnTo>
+                  <a:lnTo>
+                    <a:pt x="3828915" y="2668356"/>
+                  </a:lnTo>
+                  <a:lnTo>
+                    <a:pt x="3905384" y="2687992"/>
+                  </a:lnTo>
+                  <a:lnTo>
+                    <a:pt x="3981852" y="2706964"/>
+                  </a:lnTo>
+                  <a:lnTo>
+                    <a:pt x="4058321" y="2725295"/>
+                  </a:lnTo>
+                  <a:lnTo>
+                    <a:pt x="4134789" y="2743006"/>
+                  </a:lnTo>
+                  <a:lnTo>
+                    <a:pt x="4211258" y="2760119"/>
+                  </a:lnTo>
+                  <a:lnTo>
+                    <a:pt x="4287726" y="2776654"/>
+                  </a:lnTo>
+                  <a:lnTo>
+                    <a:pt x="4364194" y="2792630"/>
+                  </a:lnTo>
+                  <a:lnTo>
+                    <a:pt x="4440663" y="2808066"/>
+                  </a:lnTo>
+                  <a:lnTo>
+                    <a:pt x="4517131" y="2822980"/>
+                  </a:lnTo>
+                  <a:lnTo>
+                    <a:pt x="4593600" y="2837391"/>
+                  </a:lnTo>
+                  <a:lnTo>
+                    <a:pt x="4670068" y="2851314"/>
+                  </a:lnTo>
+                  <a:lnTo>
+                    <a:pt x="4746537" y="2864767"/>
+                  </a:lnTo>
+                  <a:lnTo>
+                    <a:pt x="4823005" y="2877766"/>
+                  </a:lnTo>
+                  <a:lnTo>
+                    <a:pt x="4899473" y="2890325"/>
+                  </a:lnTo>
+                  <a:lnTo>
+                    <a:pt x="4975942" y="2902459"/>
+                  </a:lnTo>
+                  <a:lnTo>
+                    <a:pt x="5052410" y="2914184"/>
+                  </a:lnTo>
+                  <a:lnTo>
+                    <a:pt x="5128879" y="2925512"/>
+                  </a:lnTo>
+                  <a:lnTo>
+                    <a:pt x="5205347" y="2936458"/>
+                  </a:lnTo>
+                  <a:lnTo>
+                    <a:pt x="5281816" y="2947033"/>
+                  </a:lnTo>
+                  <a:lnTo>
+                    <a:pt x="5358284" y="2957252"/>
+                  </a:lnTo>
+                  <a:lnTo>
+                    <a:pt x="5434752" y="2967124"/>
+                  </a:lnTo>
+                  <a:lnTo>
+                    <a:pt x="5511221" y="2976664"/>
+                  </a:lnTo>
+                  <a:lnTo>
+                    <a:pt x="5587689" y="2985881"/>
+                  </a:lnTo>
+                  <a:lnTo>
+                    <a:pt x="5664158" y="2994786"/>
+                  </a:lnTo>
+                  <a:lnTo>
+                    <a:pt x="5740626" y="3003391"/>
+                  </a:lnTo>
+                  <a:lnTo>
+                    <a:pt x="5817095" y="3011704"/>
+                  </a:lnTo>
+                  <a:lnTo>
+                    <a:pt x="5893563" y="3019737"/>
+                  </a:lnTo>
+                  <a:lnTo>
+                    <a:pt x="5970032" y="3027499"/>
+                  </a:lnTo>
+                  <a:lnTo>
+                    <a:pt x="6046500" y="3034998"/>
+                  </a:lnTo>
+                  <a:lnTo>
+                    <a:pt x="6122968" y="3042243"/>
+                  </a:lnTo>
+                  <a:lnTo>
+                    <a:pt x="6199437" y="3049244"/>
+                  </a:lnTo>
+                  <a:lnTo>
+                    <a:pt x="6275905" y="3056008"/>
+                  </a:lnTo>
+                  <a:lnTo>
+                    <a:pt x="6352374" y="3062544"/>
+                  </a:lnTo>
+                  <a:lnTo>
+                    <a:pt x="6428842" y="3068859"/>
+                  </a:lnTo>
+                  <a:lnTo>
+                    <a:pt x="6505311" y="3074960"/>
+                  </a:lnTo>
+                  <a:lnTo>
+                    <a:pt x="6581779" y="3080855"/>
+                  </a:lnTo>
+                  <a:lnTo>
+                    <a:pt x="6658247" y="3086551"/>
+                  </a:lnTo>
+                  <a:lnTo>
+                    <a:pt x="6734716" y="3092055"/>
+                  </a:lnTo>
+                  <a:lnTo>
+                    <a:pt x="6811184" y="3097372"/>
+                  </a:lnTo>
+                  <a:lnTo>
+                    <a:pt x="6887653" y="3102510"/>
+                  </a:lnTo>
+                  <a:lnTo>
+                    <a:pt x="6964121" y="3107474"/>
+                  </a:lnTo>
+                  <a:lnTo>
+                    <a:pt x="7040590" y="3112270"/>
+                  </a:lnTo>
+                  <a:lnTo>
+                    <a:pt x="7117058" y="3116905"/>
                   </a:lnTo>
                 </a:path>
               </a:pathLst>
@@ -4422,21 +4422,21 @@
           </p:nvSpPr>
           <p:spPr>
             <a:xfrm>
-              <a:off x="817517" y="4727786"/>
-              <a:ext cx="7799693" cy="0"/>
+              <a:off x="915645" y="4684908"/>
+              <a:ext cx="7682587" cy="0"/>
             </a:xfrm>
             <a:custGeom>
               <a:avLst/>
               <a:pathLst>
-                <a:path w="7799693" h="0">
+                <a:path w="7682587" h="0">
                   <a:moveTo>
                     <a:pt x="0" y="0"/>
                   </a:moveTo>
                   <a:lnTo>
-                    <a:pt x="7799693" y="0"/>
-                  </a:lnTo>
-                  <a:lnTo>
-                    <a:pt x="7799693" y="0"/>
+                    <a:pt x="7682587" y="0"/>
+                  </a:lnTo>
+                  <a:lnTo>
+                    <a:pt x="7682587" y="0"/>
                   </a:lnTo>
                 </a:path>
               </a:pathLst>
@@ -4465,15 +4465,15 @@
           </p:nvSpPr>
           <p:spPr>
             <a:xfrm>
-              <a:off x="4203673" y="2073503"/>
-              <a:ext cx="0" cy="3649639"/>
+              <a:off x="4250960" y="2209169"/>
+              <a:ext cx="0" cy="3404141"/>
             </a:xfrm>
             <a:custGeom>
               <a:avLst/>
               <a:pathLst>
-                <a:path w="0" h="3649639">
+                <a:path w="0" h="3404141">
                   <a:moveTo>
-                    <a:pt x="0" y="3649639"/>
+                    <a:pt x="0" y="3404141"/>
                   </a:moveTo>
                   <a:lnTo>
                     <a:pt x="0" y="0"/>
@@ -4508,8 +4508,8 @@
           </p:nvSpPr>
           <p:spPr>
             <a:xfrm>
-              <a:off x="692708" y="5517199"/>
-              <a:ext cx="62179" cy="80101"/>
+              <a:off x="756929" y="5407599"/>
+              <a:ext cx="79004" cy="101955"/>
             </a:xfrm>
             <a:prstGeom prst="rect">
               <a:avLst/>
@@ -4522,7 +4522,7 @@
             <a:p>
               <a:pPr algn="l" marL="0" marR="0" indent="0">
                 <a:lnSpc>
-                  <a:spcPts val="880"/>
+                  <a:spcPts val="1120"/>
                 </a:lnSpc>
                 <a:spcBef>
                   <a:spcPts val="0"/>
@@ -4532,7 +4532,7 @@
                 </a:spcAft>
               </a:pPr>
               <a:r>
-                <a:rPr sz="880">
+                <a:rPr sz="1120">
                   <a:solidFill>
                     <a:srgbClr val="4D4D4D">
                       <a:alpha val="100000"/>
@@ -4554,8 +4554,8 @@
           </p:nvSpPr>
           <p:spPr>
             <a:xfrm>
-              <a:off x="692708" y="4687735"/>
-              <a:ext cx="62179" cy="80101"/>
+              <a:off x="756929" y="4633931"/>
+              <a:ext cx="79004" cy="101955"/>
             </a:xfrm>
             <a:prstGeom prst="rect">
               <a:avLst/>
@@ -4568,7 +4568,7 @@
             <a:p>
               <a:pPr algn="l" marL="0" marR="0" indent="0">
                 <a:lnSpc>
-                  <a:spcPts val="880"/>
+                  <a:spcPts val="1120"/>
                 </a:lnSpc>
                 <a:spcBef>
                   <a:spcPts val="0"/>
@@ -4578,7 +4578,7 @@
                 </a:spcAft>
               </a:pPr>
               <a:r>
-                <a:rPr sz="880">
+                <a:rPr sz="1120">
                   <a:solidFill>
                     <a:srgbClr val="4D4D4D">
                       <a:alpha val="100000"/>
@@ -4600,8 +4600,8 @@
           </p:nvSpPr>
           <p:spPr>
             <a:xfrm>
-              <a:off x="692708" y="3858272"/>
-              <a:ext cx="62179" cy="80101"/>
+              <a:off x="756929" y="3860262"/>
+              <a:ext cx="79004" cy="101955"/>
             </a:xfrm>
             <a:prstGeom prst="rect">
               <a:avLst/>
@@ -4614,7 +4614,7 @@
             <a:p>
               <a:pPr algn="l" marL="0" marR="0" indent="0">
                 <a:lnSpc>
-                  <a:spcPts val="880"/>
+                  <a:spcPts val="1120"/>
                 </a:lnSpc>
                 <a:spcBef>
                   <a:spcPts val="0"/>
@@ -4624,7 +4624,7 @@
                 </a:spcAft>
               </a:pPr>
               <a:r>
-                <a:rPr sz="880">
+                <a:rPr sz="1120">
                   <a:solidFill>
                     <a:srgbClr val="4D4D4D">
                       <a:alpha val="100000"/>
@@ -4646,8 +4646,8 @@
           </p:nvSpPr>
           <p:spPr>
             <a:xfrm>
-              <a:off x="692708" y="3028808"/>
-              <a:ext cx="62179" cy="80101"/>
+              <a:off x="756929" y="3086593"/>
+              <a:ext cx="79004" cy="101955"/>
             </a:xfrm>
             <a:prstGeom prst="rect">
               <a:avLst/>
@@ -4660,7 +4660,7 @@
             <a:p>
               <a:pPr algn="l" marL="0" marR="0" indent="0">
                 <a:lnSpc>
-                  <a:spcPts val="880"/>
+                  <a:spcPts val="1120"/>
                 </a:lnSpc>
                 <a:spcBef>
                   <a:spcPts val="0"/>
@@ -4670,7 +4670,7 @@
                 </a:spcAft>
               </a:pPr>
               <a:r>
-                <a:rPr sz="880">
+                <a:rPr sz="1120">
                   <a:solidFill>
                     <a:srgbClr val="4D4D4D">
                       <a:alpha val="100000"/>
@@ -4692,8 +4692,8 @@
           </p:nvSpPr>
           <p:spPr>
             <a:xfrm>
-              <a:off x="692708" y="2199345"/>
-              <a:ext cx="62179" cy="80101"/>
+              <a:off x="756929" y="2312925"/>
+              <a:ext cx="79004" cy="101955"/>
             </a:xfrm>
             <a:prstGeom prst="rect">
               <a:avLst/>
@@ -4706,7 +4706,7 @@
             <a:p>
               <a:pPr algn="l" marL="0" marR="0" indent="0">
                 <a:lnSpc>
-                  <a:spcPts val="880"/>
+                  <a:spcPts val="1120"/>
                 </a:lnSpc>
                 <a:spcBef>
                   <a:spcPts val="0"/>
@@ -4716,7 +4716,7 @@
                 </a:spcAft>
               </a:pPr>
               <a:r>
-                <a:rPr sz="880">
+                <a:rPr sz="1120">
                   <a:solidFill>
                     <a:srgbClr val="4D4D4D">
                       <a:alpha val="100000"/>
@@ -4738,8 +4738,8 @@
           </p:nvSpPr>
           <p:spPr>
             <a:xfrm>
-              <a:off x="2423864" y="5785772"/>
-              <a:ext cx="155356" cy="80101"/>
+              <a:off x="2475630" y="5693022"/>
+              <a:ext cx="197510" cy="101955"/>
             </a:xfrm>
             <a:prstGeom prst="rect">
               <a:avLst/>
@@ -4752,7 +4752,7 @@
             <a:p>
               <a:pPr algn="l" marL="0" marR="0" indent="0">
                 <a:lnSpc>
-                  <a:spcPts val="880"/>
+                  <a:spcPts val="1120"/>
                 </a:lnSpc>
                 <a:spcBef>
                   <a:spcPts val="0"/>
@@ -4762,7 +4762,7 @@
                 </a:spcAft>
               </a:pPr>
               <a:r>
-                <a:rPr sz="880">
+                <a:rPr sz="1120">
                   <a:solidFill>
                     <a:srgbClr val="4D4D4D">
                       <a:alpha val="100000"/>
@@ -4784,8 +4784,8 @@
           </p:nvSpPr>
           <p:spPr>
             <a:xfrm>
-              <a:off x="4196521" y="5785772"/>
-              <a:ext cx="155356" cy="80101"/>
+              <a:off x="4221672" y="5693022"/>
+              <a:ext cx="197510" cy="101955"/>
             </a:xfrm>
             <a:prstGeom prst="rect">
               <a:avLst/>
@@ -4798,7 +4798,7 @@
             <a:p>
               <a:pPr algn="l" marL="0" marR="0" indent="0">
                 <a:lnSpc>
-                  <a:spcPts val="880"/>
+                  <a:spcPts val="1120"/>
                 </a:lnSpc>
                 <a:spcBef>
                   <a:spcPts val="0"/>
@@ -4808,7 +4808,7 @@
                 </a:spcAft>
               </a:pPr>
               <a:r>
-                <a:rPr sz="880">
+                <a:rPr sz="1120">
                   <a:solidFill>
                     <a:srgbClr val="4D4D4D">
                       <a:alpha val="100000"/>
@@ -4830,8 +4830,8 @@
           </p:nvSpPr>
           <p:spPr>
             <a:xfrm>
-              <a:off x="5969179" y="5785772"/>
-              <a:ext cx="155356" cy="80101"/>
+              <a:off x="5967715" y="5693022"/>
+              <a:ext cx="197510" cy="101955"/>
             </a:xfrm>
             <a:prstGeom prst="rect">
               <a:avLst/>
@@ -4844,7 +4844,7 @@
             <a:p>
               <a:pPr algn="l" marL="0" marR="0" indent="0">
                 <a:lnSpc>
-                  <a:spcPts val="880"/>
+                  <a:spcPts val="1120"/>
                 </a:lnSpc>
                 <a:spcBef>
                   <a:spcPts val="0"/>
@@ -4854,7 +4854,7 @@
                 </a:spcAft>
               </a:pPr>
               <a:r>
-                <a:rPr sz="880">
+                <a:rPr sz="1120">
                   <a:solidFill>
                     <a:srgbClr val="4D4D4D">
                       <a:alpha val="100000"/>
@@ -4876,8 +4876,8 @@
           </p:nvSpPr>
           <p:spPr>
             <a:xfrm>
-              <a:off x="7741836" y="5785772"/>
-              <a:ext cx="155356" cy="80101"/>
+              <a:off x="7713757" y="5693022"/>
+              <a:ext cx="197510" cy="101955"/>
             </a:xfrm>
             <a:prstGeom prst="rect">
               <a:avLst/>
@@ -4890,7 +4890,7 @@
             <a:p>
               <a:pPr algn="l" marL="0" marR="0" indent="0">
                 <a:lnSpc>
-                  <a:spcPts val="880"/>
+                  <a:spcPts val="1120"/>
                 </a:lnSpc>
                 <a:spcBef>
                   <a:spcPts val="0"/>
@@ -4900,7 +4900,7 @@
                 </a:spcAft>
               </a:pPr>
               <a:r>
-                <a:rPr sz="880">
+                <a:rPr sz="1120">
                   <a:solidFill>
                     <a:srgbClr val="4D4D4D">
                       <a:alpha val="100000"/>
@@ -4922,8 +4922,8 @@
           </p:nvSpPr>
           <p:spPr>
             <a:xfrm>
-              <a:off x="3879271" y="5925448"/>
-              <a:ext cx="1676186" cy="100218"/>
+              <a:off x="3690153" y="5870717"/>
+              <a:ext cx="2133569" cy="127558"/>
             </a:xfrm>
             <a:prstGeom prst="rect">
               <a:avLst/>
@@ -4936,7 +4936,7 @@
             <a:p>
               <a:pPr algn="l" marL="0" marR="0" indent="0">
                 <a:lnSpc>
-                  <a:spcPts val="1100"/>
+                  <a:spcPts val="1400"/>
                 </a:lnSpc>
                 <a:spcBef>
                   <a:spcPts val="0"/>
@@ -4946,7 +4946,7 @@
                 </a:spcAft>
               </a:pPr>
               <a:r>
-                <a:rPr sz="1100">
+                <a:rPr sz="1400">
                   <a:solidFill>
                     <a:srgbClr val="000000">
                       <a:alpha val="100000"/>
@@ -4968,8 +4968,8 @@
           </p:nvSpPr>
           <p:spPr>
             <a:xfrm rot="-5400000">
-              <a:off x="68446" y="3848213"/>
-              <a:ext cx="1016904" cy="100218"/>
+              <a:off x="-37527" y="3847460"/>
+              <a:ext cx="1294150" cy="127558"/>
             </a:xfrm>
             <a:prstGeom prst="rect">
               <a:avLst/>
@@ -4982,7 +4982,7 @@
             <a:p>
               <a:pPr algn="l" marL="0" marR="0" indent="0">
                 <a:lnSpc>
-                  <a:spcPts val="1100"/>
+                  <a:spcPts val="1400"/>
                 </a:lnSpc>
                 <a:spcBef>
                   <a:spcPts val="0"/>
@@ -4992,7 +4992,7 @@
                 </a:spcAft>
               </a:pPr>
               <a:r>
-                <a:rPr sz="1100">
+                <a:rPr sz="1400">
                   <a:solidFill>
                     <a:srgbClr val="000000">
                       <a:alpha val="100000"/>
@@ -5014,8 +5014,8 @@
           </p:nvSpPr>
           <p:spPr>
             <a:xfrm>
-              <a:off x="817517" y="1896563"/>
-              <a:ext cx="4166463" cy="82021"/>
+              <a:off x="915645" y="1977589"/>
+              <a:ext cx="5556900" cy="109362"/>
             </a:xfrm>
             <a:prstGeom prst="rect">
               <a:avLst/>
@@ -5028,7 +5028,7 @@
             <a:p>
               <a:pPr algn="l" marL="0" marR="0" indent="0">
                 <a:lnSpc>
-                  <a:spcPts val="900"/>
+                  <a:spcPts val="1200"/>
                 </a:lnSpc>
                 <a:spcBef>
                   <a:spcPts val="0"/>
@@ -5038,7 +5038,7 @@
                 </a:spcAft>
               </a:pPr>
               <a:r>
-                <a:rPr sz="900">
+                <a:rPr sz="1200">
                   <a:solidFill>
                     <a:srgbClr val="404040">
                       <a:alpha val="100000"/>
@@ -5060,8 +5060,8 @@
           </p:nvSpPr>
           <p:spPr>
             <a:xfrm>
-              <a:off x="817517" y="1669789"/>
-              <a:ext cx="2858414" cy="120152"/>
+              <a:off x="915645" y="1688767"/>
+              <a:ext cx="3638854" cy="153070"/>
             </a:xfrm>
             <a:prstGeom prst="rect">
               <a:avLst/>
@@ -5074,7 +5074,7 @@
             <a:p>
               <a:pPr algn="l" marL="0" marR="0" indent="0">
                 <a:lnSpc>
-                  <a:spcPts val="1320"/>
+                  <a:spcPts val="1680"/>
                 </a:lnSpc>
                 <a:spcBef>
                   <a:spcPts val="0"/>
@@ -5084,7 +5084,7 @@
                 </a:spcAft>
               </a:pPr>
               <a:r>
-                <a:rPr sz="1320">
+                <a:rPr sz="1680">
                   <a:solidFill>
                     <a:srgbClr val="000000">
                       <a:alpha val="100000"/>
